--- a/specifications/specman-layouts.pptx
+++ b/specifications/specman-layouts.pptx
@@ -251,7 +251,7 @@
           <a:p>
             <a:fld id="{68297BE5-535F-4A47-ACDC-4AEBF6241C77}" type="datetimeFigureOut">
               <a:rPr lang="de-DE" smtClean="0"/>
-              <a:t>25.11.2020</a:t>
+              <a:t>01.10.2026</a:t>
             </a:fld>
             <a:endParaRPr lang="de-DE"/>
           </a:p>
@@ -624,7 +624,7 @@
           <p:cNvPr id="2" name="Titel 1">
             <a:extLst>
               <a:ext uri="{FF2B5EF4-FFF2-40B4-BE49-F238E27FC236}">
-                <a16:creationId xmlns:a16="http://schemas.microsoft.com/office/drawing/2014/main" xmlns="" id="{892C4471-AF22-4801-9B32-1F2C2F95C04F}"/>
+                <a16:creationId xmlns:a16="http://schemas.microsoft.com/office/drawing/2014/main" id="{892C4471-AF22-4801-9B32-1F2C2F95C04F}"/>
               </a:ext>
             </a:extLst>
           </p:cNvPr>
@@ -661,7 +661,7 @@
           <p:cNvPr id="3" name="Untertitel 2">
             <a:extLst>
               <a:ext uri="{FF2B5EF4-FFF2-40B4-BE49-F238E27FC236}">
-                <a16:creationId xmlns:a16="http://schemas.microsoft.com/office/drawing/2014/main" xmlns="" id="{0571F5FF-2D16-4123-BC85-038D10BD8D87}"/>
+                <a16:creationId xmlns:a16="http://schemas.microsoft.com/office/drawing/2014/main" id="{0571F5FF-2D16-4123-BC85-038D10BD8D87}"/>
               </a:ext>
             </a:extLst>
           </p:cNvPr>
@@ -731,7 +731,7 @@
           <p:cNvPr id="4" name="Datumsplatzhalter 3">
             <a:extLst>
               <a:ext uri="{FF2B5EF4-FFF2-40B4-BE49-F238E27FC236}">
-                <a16:creationId xmlns:a16="http://schemas.microsoft.com/office/drawing/2014/main" xmlns="" id="{588453CD-A2DC-454F-86D5-FC96F92CBDD1}"/>
+                <a16:creationId xmlns:a16="http://schemas.microsoft.com/office/drawing/2014/main" id="{588453CD-A2DC-454F-86D5-FC96F92CBDD1}"/>
               </a:ext>
             </a:extLst>
           </p:cNvPr>
@@ -749,7 +749,7 @@
           <a:p>
             <a:fld id="{9D2EA739-B840-41DB-9666-B44BD9009BC9}" type="datetimeFigureOut">
               <a:rPr lang="de-DE" smtClean="0"/>
-              <a:t>25.11.2020</a:t>
+              <a:t>01.10.2026</a:t>
             </a:fld>
             <a:endParaRPr lang="de-DE"/>
           </a:p>
@@ -760,7 +760,7 @@
           <p:cNvPr id="5" name="Fußzeilenplatzhalter 4">
             <a:extLst>
               <a:ext uri="{FF2B5EF4-FFF2-40B4-BE49-F238E27FC236}">
-                <a16:creationId xmlns:a16="http://schemas.microsoft.com/office/drawing/2014/main" xmlns="" id="{FB172634-081C-4F9A-9778-E9D48159BCE9}"/>
+                <a16:creationId xmlns:a16="http://schemas.microsoft.com/office/drawing/2014/main" id="{FB172634-081C-4F9A-9778-E9D48159BCE9}"/>
               </a:ext>
             </a:extLst>
           </p:cNvPr>
@@ -785,7 +785,7 @@
           <p:cNvPr id="6" name="Foliennummernplatzhalter 5">
             <a:extLst>
               <a:ext uri="{FF2B5EF4-FFF2-40B4-BE49-F238E27FC236}">
-                <a16:creationId xmlns:a16="http://schemas.microsoft.com/office/drawing/2014/main" xmlns="" id="{B636E0BA-622B-47D6-B149-6B324D1071DF}"/>
+                <a16:creationId xmlns:a16="http://schemas.microsoft.com/office/drawing/2014/main" id="{B636E0BA-622B-47D6-B149-6B324D1071DF}"/>
               </a:ext>
             </a:extLst>
           </p:cNvPr>
@@ -844,7 +844,7 @@
           <p:cNvPr id="2" name="Titel 1">
             <a:extLst>
               <a:ext uri="{FF2B5EF4-FFF2-40B4-BE49-F238E27FC236}">
-                <a16:creationId xmlns:a16="http://schemas.microsoft.com/office/drawing/2014/main" xmlns="" id="{08FA0A50-5FB4-41A9-AEF4-00AB8E0E7B1A}"/>
+                <a16:creationId xmlns:a16="http://schemas.microsoft.com/office/drawing/2014/main" id="{08FA0A50-5FB4-41A9-AEF4-00AB8E0E7B1A}"/>
               </a:ext>
             </a:extLst>
           </p:cNvPr>
@@ -872,7 +872,7 @@
           <p:cNvPr id="3" name="Vertikaler Textplatzhalter 2">
             <a:extLst>
               <a:ext uri="{FF2B5EF4-FFF2-40B4-BE49-F238E27FC236}">
-                <a16:creationId xmlns:a16="http://schemas.microsoft.com/office/drawing/2014/main" xmlns="" id="{6360A378-D645-43F3-B604-EAD67927329E}"/>
+                <a16:creationId xmlns:a16="http://schemas.microsoft.com/office/drawing/2014/main" id="{6360A378-D645-43F3-B604-EAD67927329E}"/>
               </a:ext>
             </a:extLst>
           </p:cNvPr>
@@ -929,7 +929,7 @@
           <p:cNvPr id="4" name="Datumsplatzhalter 3">
             <a:extLst>
               <a:ext uri="{FF2B5EF4-FFF2-40B4-BE49-F238E27FC236}">
-                <a16:creationId xmlns:a16="http://schemas.microsoft.com/office/drawing/2014/main" xmlns="" id="{84480368-54B9-4111-8E13-E39D902EF6C1}"/>
+                <a16:creationId xmlns:a16="http://schemas.microsoft.com/office/drawing/2014/main" id="{84480368-54B9-4111-8E13-E39D902EF6C1}"/>
               </a:ext>
             </a:extLst>
           </p:cNvPr>
@@ -947,7 +947,7 @@
           <a:p>
             <a:fld id="{9D2EA739-B840-41DB-9666-B44BD9009BC9}" type="datetimeFigureOut">
               <a:rPr lang="de-DE" smtClean="0"/>
-              <a:t>25.11.2020</a:t>
+              <a:t>01.10.2026</a:t>
             </a:fld>
             <a:endParaRPr lang="de-DE"/>
           </a:p>
@@ -958,7 +958,7 @@
           <p:cNvPr id="5" name="Fußzeilenplatzhalter 4">
             <a:extLst>
               <a:ext uri="{FF2B5EF4-FFF2-40B4-BE49-F238E27FC236}">
-                <a16:creationId xmlns:a16="http://schemas.microsoft.com/office/drawing/2014/main" xmlns="" id="{81935A86-05AF-4F67-BFD6-2E10DCE1D86F}"/>
+                <a16:creationId xmlns:a16="http://schemas.microsoft.com/office/drawing/2014/main" id="{81935A86-05AF-4F67-BFD6-2E10DCE1D86F}"/>
               </a:ext>
             </a:extLst>
           </p:cNvPr>
@@ -983,7 +983,7 @@
           <p:cNvPr id="6" name="Foliennummernplatzhalter 5">
             <a:extLst>
               <a:ext uri="{FF2B5EF4-FFF2-40B4-BE49-F238E27FC236}">
-                <a16:creationId xmlns:a16="http://schemas.microsoft.com/office/drawing/2014/main" xmlns="" id="{B33DF355-E83A-4DA1-B7CA-8071CD06F892}"/>
+                <a16:creationId xmlns:a16="http://schemas.microsoft.com/office/drawing/2014/main" id="{B33DF355-E83A-4DA1-B7CA-8071CD06F892}"/>
               </a:ext>
             </a:extLst>
           </p:cNvPr>
@@ -1042,7 +1042,7 @@
           <p:cNvPr id="2" name="Vertikaler Titel 1">
             <a:extLst>
               <a:ext uri="{FF2B5EF4-FFF2-40B4-BE49-F238E27FC236}">
-                <a16:creationId xmlns:a16="http://schemas.microsoft.com/office/drawing/2014/main" xmlns="" id="{2CA07748-8163-4D8D-A612-2180F2A9D41D}"/>
+                <a16:creationId xmlns:a16="http://schemas.microsoft.com/office/drawing/2014/main" id="{2CA07748-8163-4D8D-A612-2180F2A9D41D}"/>
               </a:ext>
             </a:extLst>
           </p:cNvPr>
@@ -1075,7 +1075,7 @@
           <p:cNvPr id="3" name="Vertikaler Textplatzhalter 2">
             <a:extLst>
               <a:ext uri="{FF2B5EF4-FFF2-40B4-BE49-F238E27FC236}">
-                <a16:creationId xmlns:a16="http://schemas.microsoft.com/office/drawing/2014/main" xmlns="" id="{533F5A58-0D77-4048-A2F7-BB7166964A5E}"/>
+                <a16:creationId xmlns:a16="http://schemas.microsoft.com/office/drawing/2014/main" id="{533F5A58-0D77-4048-A2F7-BB7166964A5E}"/>
               </a:ext>
             </a:extLst>
           </p:cNvPr>
@@ -1137,7 +1137,7 @@
           <p:cNvPr id="4" name="Datumsplatzhalter 3">
             <a:extLst>
               <a:ext uri="{FF2B5EF4-FFF2-40B4-BE49-F238E27FC236}">
-                <a16:creationId xmlns:a16="http://schemas.microsoft.com/office/drawing/2014/main" xmlns="" id="{1883AFB6-8D56-4FDC-8285-D7C05C863EB4}"/>
+                <a16:creationId xmlns:a16="http://schemas.microsoft.com/office/drawing/2014/main" id="{1883AFB6-8D56-4FDC-8285-D7C05C863EB4}"/>
               </a:ext>
             </a:extLst>
           </p:cNvPr>
@@ -1155,7 +1155,7 @@
           <a:p>
             <a:fld id="{9D2EA739-B840-41DB-9666-B44BD9009BC9}" type="datetimeFigureOut">
               <a:rPr lang="de-DE" smtClean="0"/>
-              <a:t>25.11.2020</a:t>
+              <a:t>01.10.2026</a:t>
             </a:fld>
             <a:endParaRPr lang="de-DE"/>
           </a:p>
@@ -1166,7 +1166,7 @@
           <p:cNvPr id="5" name="Fußzeilenplatzhalter 4">
             <a:extLst>
               <a:ext uri="{FF2B5EF4-FFF2-40B4-BE49-F238E27FC236}">
-                <a16:creationId xmlns:a16="http://schemas.microsoft.com/office/drawing/2014/main" xmlns="" id="{5EAAD323-4DCB-4F5F-B799-1736B5D76EC9}"/>
+                <a16:creationId xmlns:a16="http://schemas.microsoft.com/office/drawing/2014/main" id="{5EAAD323-4DCB-4F5F-B799-1736B5D76EC9}"/>
               </a:ext>
             </a:extLst>
           </p:cNvPr>
@@ -1191,7 +1191,7 @@
           <p:cNvPr id="6" name="Foliennummernplatzhalter 5">
             <a:extLst>
               <a:ext uri="{FF2B5EF4-FFF2-40B4-BE49-F238E27FC236}">
-                <a16:creationId xmlns:a16="http://schemas.microsoft.com/office/drawing/2014/main" xmlns="" id="{1866EB22-9FB0-4DD8-A7BC-46B323AAB484}"/>
+                <a16:creationId xmlns:a16="http://schemas.microsoft.com/office/drawing/2014/main" id="{1866EB22-9FB0-4DD8-A7BC-46B323AAB484}"/>
               </a:ext>
             </a:extLst>
           </p:cNvPr>
@@ -1250,7 +1250,7 @@
           <p:cNvPr id="2" name="Titel 1">
             <a:extLst>
               <a:ext uri="{FF2B5EF4-FFF2-40B4-BE49-F238E27FC236}">
-                <a16:creationId xmlns:a16="http://schemas.microsoft.com/office/drawing/2014/main" xmlns="" id="{9A4684C6-263F-4A98-8799-05A6AC6316A6}"/>
+                <a16:creationId xmlns:a16="http://schemas.microsoft.com/office/drawing/2014/main" id="{9A4684C6-263F-4A98-8799-05A6AC6316A6}"/>
               </a:ext>
             </a:extLst>
           </p:cNvPr>
@@ -1278,7 +1278,7 @@
           <p:cNvPr id="3" name="Inhaltsplatzhalter 2">
             <a:extLst>
               <a:ext uri="{FF2B5EF4-FFF2-40B4-BE49-F238E27FC236}">
-                <a16:creationId xmlns:a16="http://schemas.microsoft.com/office/drawing/2014/main" xmlns="" id="{E7873F0D-3C85-4DC0-9F1C-0B2EA8C5304A}"/>
+                <a16:creationId xmlns:a16="http://schemas.microsoft.com/office/drawing/2014/main" id="{E7873F0D-3C85-4DC0-9F1C-0B2EA8C5304A}"/>
               </a:ext>
             </a:extLst>
           </p:cNvPr>
@@ -1335,7 +1335,7 @@
           <p:cNvPr id="4" name="Datumsplatzhalter 3">
             <a:extLst>
               <a:ext uri="{FF2B5EF4-FFF2-40B4-BE49-F238E27FC236}">
-                <a16:creationId xmlns:a16="http://schemas.microsoft.com/office/drawing/2014/main" xmlns="" id="{E0652819-7FDD-498D-A895-AF38FB2F3FB1}"/>
+                <a16:creationId xmlns:a16="http://schemas.microsoft.com/office/drawing/2014/main" id="{E0652819-7FDD-498D-A895-AF38FB2F3FB1}"/>
               </a:ext>
             </a:extLst>
           </p:cNvPr>
@@ -1353,7 +1353,7 @@
           <a:p>
             <a:fld id="{9D2EA739-B840-41DB-9666-B44BD9009BC9}" type="datetimeFigureOut">
               <a:rPr lang="de-DE" smtClean="0"/>
-              <a:t>25.11.2020</a:t>
+              <a:t>01.10.2026</a:t>
             </a:fld>
             <a:endParaRPr lang="de-DE"/>
           </a:p>
@@ -1364,7 +1364,7 @@
           <p:cNvPr id="5" name="Fußzeilenplatzhalter 4">
             <a:extLst>
               <a:ext uri="{FF2B5EF4-FFF2-40B4-BE49-F238E27FC236}">
-                <a16:creationId xmlns:a16="http://schemas.microsoft.com/office/drawing/2014/main" xmlns="" id="{E53E0644-A4EF-40C6-8FEF-F141F928CC2D}"/>
+                <a16:creationId xmlns:a16="http://schemas.microsoft.com/office/drawing/2014/main" id="{E53E0644-A4EF-40C6-8FEF-F141F928CC2D}"/>
               </a:ext>
             </a:extLst>
           </p:cNvPr>
@@ -1389,7 +1389,7 @@
           <p:cNvPr id="6" name="Foliennummernplatzhalter 5">
             <a:extLst>
               <a:ext uri="{FF2B5EF4-FFF2-40B4-BE49-F238E27FC236}">
-                <a16:creationId xmlns:a16="http://schemas.microsoft.com/office/drawing/2014/main" xmlns="" id="{326D1CFC-9F22-4647-A8A0-0AB98C9D58A4}"/>
+                <a16:creationId xmlns:a16="http://schemas.microsoft.com/office/drawing/2014/main" id="{326D1CFC-9F22-4647-A8A0-0AB98C9D58A4}"/>
               </a:ext>
             </a:extLst>
           </p:cNvPr>
@@ -1448,7 +1448,7 @@
           <p:cNvPr id="2" name="Titel 1">
             <a:extLst>
               <a:ext uri="{FF2B5EF4-FFF2-40B4-BE49-F238E27FC236}">
-                <a16:creationId xmlns:a16="http://schemas.microsoft.com/office/drawing/2014/main" xmlns="" id="{49E3CA8F-30B8-47C9-B175-02E424ACD4C9}"/>
+                <a16:creationId xmlns:a16="http://schemas.microsoft.com/office/drawing/2014/main" id="{49E3CA8F-30B8-47C9-B175-02E424ACD4C9}"/>
               </a:ext>
             </a:extLst>
           </p:cNvPr>
@@ -1485,7 +1485,7 @@
           <p:cNvPr id="3" name="Textplatzhalter 2">
             <a:extLst>
               <a:ext uri="{FF2B5EF4-FFF2-40B4-BE49-F238E27FC236}">
-                <a16:creationId xmlns:a16="http://schemas.microsoft.com/office/drawing/2014/main" xmlns="" id="{45051635-1B75-4150-A6A8-4A211733E0E3}"/>
+                <a16:creationId xmlns:a16="http://schemas.microsoft.com/office/drawing/2014/main" id="{45051635-1B75-4150-A6A8-4A211733E0E3}"/>
               </a:ext>
             </a:extLst>
           </p:cNvPr>
@@ -1610,7 +1610,7 @@
           <p:cNvPr id="4" name="Datumsplatzhalter 3">
             <a:extLst>
               <a:ext uri="{FF2B5EF4-FFF2-40B4-BE49-F238E27FC236}">
-                <a16:creationId xmlns:a16="http://schemas.microsoft.com/office/drawing/2014/main" xmlns="" id="{2DD7ACA9-99EF-40D0-8893-9C65ADC3812E}"/>
+                <a16:creationId xmlns:a16="http://schemas.microsoft.com/office/drawing/2014/main" id="{2DD7ACA9-99EF-40D0-8893-9C65ADC3812E}"/>
               </a:ext>
             </a:extLst>
           </p:cNvPr>
@@ -1628,7 +1628,7 @@
           <a:p>
             <a:fld id="{9D2EA739-B840-41DB-9666-B44BD9009BC9}" type="datetimeFigureOut">
               <a:rPr lang="de-DE" smtClean="0"/>
-              <a:t>25.11.2020</a:t>
+              <a:t>01.10.2026</a:t>
             </a:fld>
             <a:endParaRPr lang="de-DE"/>
           </a:p>
@@ -1639,7 +1639,7 @@
           <p:cNvPr id="5" name="Fußzeilenplatzhalter 4">
             <a:extLst>
               <a:ext uri="{FF2B5EF4-FFF2-40B4-BE49-F238E27FC236}">
-                <a16:creationId xmlns:a16="http://schemas.microsoft.com/office/drawing/2014/main" xmlns="" id="{384A02A7-4175-4D94-89AC-681549C89E67}"/>
+                <a16:creationId xmlns:a16="http://schemas.microsoft.com/office/drawing/2014/main" id="{384A02A7-4175-4D94-89AC-681549C89E67}"/>
               </a:ext>
             </a:extLst>
           </p:cNvPr>
@@ -1664,7 +1664,7 @@
           <p:cNvPr id="6" name="Foliennummernplatzhalter 5">
             <a:extLst>
               <a:ext uri="{FF2B5EF4-FFF2-40B4-BE49-F238E27FC236}">
-                <a16:creationId xmlns:a16="http://schemas.microsoft.com/office/drawing/2014/main" xmlns="" id="{59B14C87-94D5-4BC2-A283-C4177C1B9AE0}"/>
+                <a16:creationId xmlns:a16="http://schemas.microsoft.com/office/drawing/2014/main" id="{59B14C87-94D5-4BC2-A283-C4177C1B9AE0}"/>
               </a:ext>
             </a:extLst>
           </p:cNvPr>
@@ -1723,7 +1723,7 @@
           <p:cNvPr id="2" name="Titel 1">
             <a:extLst>
               <a:ext uri="{FF2B5EF4-FFF2-40B4-BE49-F238E27FC236}">
-                <a16:creationId xmlns:a16="http://schemas.microsoft.com/office/drawing/2014/main" xmlns="" id="{1683A423-AA55-4305-B98F-572E0CFA609B}"/>
+                <a16:creationId xmlns:a16="http://schemas.microsoft.com/office/drawing/2014/main" id="{1683A423-AA55-4305-B98F-572E0CFA609B}"/>
               </a:ext>
             </a:extLst>
           </p:cNvPr>
@@ -1751,7 +1751,7 @@
           <p:cNvPr id="3" name="Inhaltsplatzhalter 2">
             <a:extLst>
               <a:ext uri="{FF2B5EF4-FFF2-40B4-BE49-F238E27FC236}">
-                <a16:creationId xmlns:a16="http://schemas.microsoft.com/office/drawing/2014/main" xmlns="" id="{3789C9FA-5FAF-451C-93B2-C4C583C208B2}"/>
+                <a16:creationId xmlns:a16="http://schemas.microsoft.com/office/drawing/2014/main" id="{3789C9FA-5FAF-451C-93B2-C4C583C208B2}"/>
               </a:ext>
             </a:extLst>
           </p:cNvPr>
@@ -1813,7 +1813,7 @@
           <p:cNvPr id="4" name="Inhaltsplatzhalter 3">
             <a:extLst>
               <a:ext uri="{FF2B5EF4-FFF2-40B4-BE49-F238E27FC236}">
-                <a16:creationId xmlns:a16="http://schemas.microsoft.com/office/drawing/2014/main" xmlns="" id="{ED97BD7E-FC6F-4277-83C6-F98D336F7577}"/>
+                <a16:creationId xmlns:a16="http://schemas.microsoft.com/office/drawing/2014/main" id="{ED97BD7E-FC6F-4277-83C6-F98D336F7577}"/>
               </a:ext>
             </a:extLst>
           </p:cNvPr>
@@ -1875,7 +1875,7 @@
           <p:cNvPr id="5" name="Datumsplatzhalter 4">
             <a:extLst>
               <a:ext uri="{FF2B5EF4-FFF2-40B4-BE49-F238E27FC236}">
-                <a16:creationId xmlns:a16="http://schemas.microsoft.com/office/drawing/2014/main" xmlns="" id="{23A74315-BC78-4CF2-8557-2586CF0901D7}"/>
+                <a16:creationId xmlns:a16="http://schemas.microsoft.com/office/drawing/2014/main" id="{23A74315-BC78-4CF2-8557-2586CF0901D7}"/>
               </a:ext>
             </a:extLst>
           </p:cNvPr>
@@ -1893,7 +1893,7 @@
           <a:p>
             <a:fld id="{9D2EA739-B840-41DB-9666-B44BD9009BC9}" type="datetimeFigureOut">
               <a:rPr lang="de-DE" smtClean="0"/>
-              <a:t>25.11.2020</a:t>
+              <a:t>01.10.2026</a:t>
             </a:fld>
             <a:endParaRPr lang="de-DE"/>
           </a:p>
@@ -1904,7 +1904,7 @@
           <p:cNvPr id="6" name="Fußzeilenplatzhalter 5">
             <a:extLst>
               <a:ext uri="{FF2B5EF4-FFF2-40B4-BE49-F238E27FC236}">
-                <a16:creationId xmlns:a16="http://schemas.microsoft.com/office/drawing/2014/main" xmlns="" id="{CA38D99A-44C3-450F-9226-F1FDFEF2D520}"/>
+                <a16:creationId xmlns:a16="http://schemas.microsoft.com/office/drawing/2014/main" id="{CA38D99A-44C3-450F-9226-F1FDFEF2D520}"/>
               </a:ext>
             </a:extLst>
           </p:cNvPr>
@@ -1929,7 +1929,7 @@
           <p:cNvPr id="7" name="Foliennummernplatzhalter 6">
             <a:extLst>
               <a:ext uri="{FF2B5EF4-FFF2-40B4-BE49-F238E27FC236}">
-                <a16:creationId xmlns:a16="http://schemas.microsoft.com/office/drawing/2014/main" xmlns="" id="{FEEF1F84-984C-4AD8-BC45-F06857E8E15C}"/>
+                <a16:creationId xmlns:a16="http://schemas.microsoft.com/office/drawing/2014/main" id="{FEEF1F84-984C-4AD8-BC45-F06857E8E15C}"/>
               </a:ext>
             </a:extLst>
           </p:cNvPr>
@@ -1988,7 +1988,7 @@
           <p:cNvPr id="2" name="Titel 1">
             <a:extLst>
               <a:ext uri="{FF2B5EF4-FFF2-40B4-BE49-F238E27FC236}">
-                <a16:creationId xmlns:a16="http://schemas.microsoft.com/office/drawing/2014/main" xmlns="" id="{2FF61ED6-C5E2-4714-8DD0-633DC8AC96D5}"/>
+                <a16:creationId xmlns:a16="http://schemas.microsoft.com/office/drawing/2014/main" id="{2FF61ED6-C5E2-4714-8DD0-633DC8AC96D5}"/>
               </a:ext>
             </a:extLst>
           </p:cNvPr>
@@ -2021,7 +2021,7 @@
           <p:cNvPr id="3" name="Textplatzhalter 2">
             <a:extLst>
               <a:ext uri="{FF2B5EF4-FFF2-40B4-BE49-F238E27FC236}">
-                <a16:creationId xmlns:a16="http://schemas.microsoft.com/office/drawing/2014/main" xmlns="" id="{4BAD7123-09FE-4D6A-B837-9F5BB01D8679}"/>
+                <a16:creationId xmlns:a16="http://schemas.microsoft.com/office/drawing/2014/main" id="{4BAD7123-09FE-4D6A-B837-9F5BB01D8679}"/>
               </a:ext>
             </a:extLst>
           </p:cNvPr>
@@ -2092,7 +2092,7 @@
           <p:cNvPr id="4" name="Inhaltsplatzhalter 3">
             <a:extLst>
               <a:ext uri="{FF2B5EF4-FFF2-40B4-BE49-F238E27FC236}">
-                <a16:creationId xmlns:a16="http://schemas.microsoft.com/office/drawing/2014/main" xmlns="" id="{DEE132E7-8052-4ADB-AFF4-A5BCCC00BB32}"/>
+                <a16:creationId xmlns:a16="http://schemas.microsoft.com/office/drawing/2014/main" id="{DEE132E7-8052-4ADB-AFF4-A5BCCC00BB32}"/>
               </a:ext>
             </a:extLst>
           </p:cNvPr>
@@ -2154,7 +2154,7 @@
           <p:cNvPr id="5" name="Textplatzhalter 4">
             <a:extLst>
               <a:ext uri="{FF2B5EF4-FFF2-40B4-BE49-F238E27FC236}">
-                <a16:creationId xmlns:a16="http://schemas.microsoft.com/office/drawing/2014/main" xmlns="" id="{928D14F0-98B3-499D-831D-C9173FF67EB8}"/>
+                <a16:creationId xmlns:a16="http://schemas.microsoft.com/office/drawing/2014/main" id="{928D14F0-98B3-499D-831D-C9173FF67EB8}"/>
               </a:ext>
             </a:extLst>
           </p:cNvPr>
@@ -2225,7 +2225,7 @@
           <p:cNvPr id="6" name="Inhaltsplatzhalter 5">
             <a:extLst>
               <a:ext uri="{FF2B5EF4-FFF2-40B4-BE49-F238E27FC236}">
-                <a16:creationId xmlns:a16="http://schemas.microsoft.com/office/drawing/2014/main" xmlns="" id="{A0AB0029-8480-4D02-B728-6C22BBE8F132}"/>
+                <a16:creationId xmlns:a16="http://schemas.microsoft.com/office/drawing/2014/main" id="{A0AB0029-8480-4D02-B728-6C22BBE8F132}"/>
               </a:ext>
             </a:extLst>
           </p:cNvPr>
@@ -2287,7 +2287,7 @@
           <p:cNvPr id="7" name="Datumsplatzhalter 6">
             <a:extLst>
               <a:ext uri="{FF2B5EF4-FFF2-40B4-BE49-F238E27FC236}">
-                <a16:creationId xmlns:a16="http://schemas.microsoft.com/office/drawing/2014/main" xmlns="" id="{BD39D256-D75B-46DC-BA97-3BB1F387C4B7}"/>
+                <a16:creationId xmlns:a16="http://schemas.microsoft.com/office/drawing/2014/main" id="{BD39D256-D75B-46DC-BA97-3BB1F387C4B7}"/>
               </a:ext>
             </a:extLst>
           </p:cNvPr>
@@ -2305,7 +2305,7 @@
           <a:p>
             <a:fld id="{9D2EA739-B840-41DB-9666-B44BD9009BC9}" type="datetimeFigureOut">
               <a:rPr lang="de-DE" smtClean="0"/>
-              <a:t>25.11.2020</a:t>
+              <a:t>01.10.2026</a:t>
             </a:fld>
             <a:endParaRPr lang="de-DE"/>
           </a:p>
@@ -2316,7 +2316,7 @@
           <p:cNvPr id="8" name="Fußzeilenplatzhalter 7">
             <a:extLst>
               <a:ext uri="{FF2B5EF4-FFF2-40B4-BE49-F238E27FC236}">
-                <a16:creationId xmlns:a16="http://schemas.microsoft.com/office/drawing/2014/main" xmlns="" id="{1C3A03C2-871F-43EF-95F7-3CA5FB7BFC84}"/>
+                <a16:creationId xmlns:a16="http://schemas.microsoft.com/office/drawing/2014/main" id="{1C3A03C2-871F-43EF-95F7-3CA5FB7BFC84}"/>
               </a:ext>
             </a:extLst>
           </p:cNvPr>
@@ -2341,7 +2341,7 @@
           <p:cNvPr id="9" name="Foliennummernplatzhalter 8">
             <a:extLst>
               <a:ext uri="{FF2B5EF4-FFF2-40B4-BE49-F238E27FC236}">
-                <a16:creationId xmlns:a16="http://schemas.microsoft.com/office/drawing/2014/main" xmlns="" id="{04D6ACF8-D732-4084-8C5E-6CAF2AA5DD90}"/>
+                <a16:creationId xmlns:a16="http://schemas.microsoft.com/office/drawing/2014/main" id="{04D6ACF8-D732-4084-8C5E-6CAF2AA5DD90}"/>
               </a:ext>
             </a:extLst>
           </p:cNvPr>
@@ -2400,7 +2400,7 @@
           <p:cNvPr id="2" name="Titel 1">
             <a:extLst>
               <a:ext uri="{FF2B5EF4-FFF2-40B4-BE49-F238E27FC236}">
-                <a16:creationId xmlns:a16="http://schemas.microsoft.com/office/drawing/2014/main" xmlns="" id="{F08F0666-3EA4-448A-B2B6-E7ECC86DF776}"/>
+                <a16:creationId xmlns:a16="http://schemas.microsoft.com/office/drawing/2014/main" id="{F08F0666-3EA4-448A-B2B6-E7ECC86DF776}"/>
               </a:ext>
             </a:extLst>
           </p:cNvPr>
@@ -2428,7 +2428,7 @@
           <p:cNvPr id="3" name="Datumsplatzhalter 2">
             <a:extLst>
               <a:ext uri="{FF2B5EF4-FFF2-40B4-BE49-F238E27FC236}">
-                <a16:creationId xmlns:a16="http://schemas.microsoft.com/office/drawing/2014/main" xmlns="" id="{032B9C75-4683-492F-AA64-2CA3A220E246}"/>
+                <a16:creationId xmlns:a16="http://schemas.microsoft.com/office/drawing/2014/main" id="{032B9C75-4683-492F-AA64-2CA3A220E246}"/>
               </a:ext>
             </a:extLst>
           </p:cNvPr>
@@ -2446,7 +2446,7 @@
           <a:p>
             <a:fld id="{9D2EA739-B840-41DB-9666-B44BD9009BC9}" type="datetimeFigureOut">
               <a:rPr lang="de-DE" smtClean="0"/>
-              <a:t>25.11.2020</a:t>
+              <a:t>01.10.2026</a:t>
             </a:fld>
             <a:endParaRPr lang="de-DE"/>
           </a:p>
@@ -2457,7 +2457,7 @@
           <p:cNvPr id="4" name="Fußzeilenplatzhalter 3">
             <a:extLst>
               <a:ext uri="{FF2B5EF4-FFF2-40B4-BE49-F238E27FC236}">
-                <a16:creationId xmlns:a16="http://schemas.microsoft.com/office/drawing/2014/main" xmlns="" id="{BEA069DD-BFE5-4B90-9838-792C02443F68}"/>
+                <a16:creationId xmlns:a16="http://schemas.microsoft.com/office/drawing/2014/main" id="{BEA069DD-BFE5-4B90-9838-792C02443F68}"/>
               </a:ext>
             </a:extLst>
           </p:cNvPr>
@@ -2482,7 +2482,7 @@
           <p:cNvPr id="5" name="Foliennummernplatzhalter 4">
             <a:extLst>
               <a:ext uri="{FF2B5EF4-FFF2-40B4-BE49-F238E27FC236}">
-                <a16:creationId xmlns:a16="http://schemas.microsoft.com/office/drawing/2014/main" xmlns="" id="{B08B9D6C-776A-4B81-A438-62CDC5141FEC}"/>
+                <a16:creationId xmlns:a16="http://schemas.microsoft.com/office/drawing/2014/main" id="{B08B9D6C-776A-4B81-A438-62CDC5141FEC}"/>
               </a:ext>
             </a:extLst>
           </p:cNvPr>
@@ -2541,7 +2541,7 @@
           <p:cNvPr id="2" name="Datumsplatzhalter 1">
             <a:extLst>
               <a:ext uri="{FF2B5EF4-FFF2-40B4-BE49-F238E27FC236}">
-                <a16:creationId xmlns:a16="http://schemas.microsoft.com/office/drawing/2014/main" xmlns="" id="{78E1A1A4-3100-4FCD-9A8E-98B93CD56DE6}"/>
+                <a16:creationId xmlns:a16="http://schemas.microsoft.com/office/drawing/2014/main" id="{78E1A1A4-3100-4FCD-9A8E-98B93CD56DE6}"/>
               </a:ext>
             </a:extLst>
           </p:cNvPr>
@@ -2559,7 +2559,7 @@
           <a:p>
             <a:fld id="{9D2EA739-B840-41DB-9666-B44BD9009BC9}" type="datetimeFigureOut">
               <a:rPr lang="de-DE" smtClean="0"/>
-              <a:t>25.11.2020</a:t>
+              <a:t>01.10.2026</a:t>
             </a:fld>
             <a:endParaRPr lang="de-DE"/>
           </a:p>
@@ -2570,7 +2570,7 @@
           <p:cNvPr id="3" name="Fußzeilenplatzhalter 2">
             <a:extLst>
               <a:ext uri="{FF2B5EF4-FFF2-40B4-BE49-F238E27FC236}">
-                <a16:creationId xmlns:a16="http://schemas.microsoft.com/office/drawing/2014/main" xmlns="" id="{694ADBBB-9E69-4E4D-8D1D-BD293E78C2A4}"/>
+                <a16:creationId xmlns:a16="http://schemas.microsoft.com/office/drawing/2014/main" id="{694ADBBB-9E69-4E4D-8D1D-BD293E78C2A4}"/>
               </a:ext>
             </a:extLst>
           </p:cNvPr>
@@ -2595,7 +2595,7 @@
           <p:cNvPr id="4" name="Foliennummernplatzhalter 3">
             <a:extLst>
               <a:ext uri="{FF2B5EF4-FFF2-40B4-BE49-F238E27FC236}">
-                <a16:creationId xmlns:a16="http://schemas.microsoft.com/office/drawing/2014/main" xmlns="" id="{3711E3F8-F949-4391-A2BB-4B84B263A50C}"/>
+                <a16:creationId xmlns:a16="http://schemas.microsoft.com/office/drawing/2014/main" id="{3711E3F8-F949-4391-A2BB-4B84B263A50C}"/>
               </a:ext>
             </a:extLst>
           </p:cNvPr>
@@ -2654,7 +2654,7 @@
           <p:cNvPr id="2" name="Titel 1">
             <a:extLst>
               <a:ext uri="{FF2B5EF4-FFF2-40B4-BE49-F238E27FC236}">
-                <a16:creationId xmlns:a16="http://schemas.microsoft.com/office/drawing/2014/main" xmlns="" id="{C7F8BA7E-086A-4A36-B13B-337FD69E8B95}"/>
+                <a16:creationId xmlns:a16="http://schemas.microsoft.com/office/drawing/2014/main" id="{C7F8BA7E-086A-4A36-B13B-337FD69E8B95}"/>
               </a:ext>
             </a:extLst>
           </p:cNvPr>
@@ -2691,7 +2691,7 @@
           <p:cNvPr id="3" name="Inhaltsplatzhalter 2">
             <a:extLst>
               <a:ext uri="{FF2B5EF4-FFF2-40B4-BE49-F238E27FC236}">
-                <a16:creationId xmlns:a16="http://schemas.microsoft.com/office/drawing/2014/main" xmlns="" id="{30B09874-1593-48E6-9DE8-C423C762E5D6}"/>
+                <a16:creationId xmlns:a16="http://schemas.microsoft.com/office/drawing/2014/main" id="{30B09874-1593-48E6-9DE8-C423C762E5D6}"/>
               </a:ext>
             </a:extLst>
           </p:cNvPr>
@@ -2781,7 +2781,7 @@
           <p:cNvPr id="4" name="Textplatzhalter 3">
             <a:extLst>
               <a:ext uri="{FF2B5EF4-FFF2-40B4-BE49-F238E27FC236}">
-                <a16:creationId xmlns:a16="http://schemas.microsoft.com/office/drawing/2014/main" xmlns="" id="{7E40BA83-5A0D-4C37-A121-666C8C603FE2}"/>
+                <a16:creationId xmlns:a16="http://schemas.microsoft.com/office/drawing/2014/main" id="{7E40BA83-5A0D-4C37-A121-666C8C603FE2}"/>
               </a:ext>
             </a:extLst>
           </p:cNvPr>
@@ -2852,7 +2852,7 @@
           <p:cNvPr id="5" name="Datumsplatzhalter 4">
             <a:extLst>
               <a:ext uri="{FF2B5EF4-FFF2-40B4-BE49-F238E27FC236}">
-                <a16:creationId xmlns:a16="http://schemas.microsoft.com/office/drawing/2014/main" xmlns="" id="{CDF69882-EAA7-4607-AACE-9EA6844BF6EB}"/>
+                <a16:creationId xmlns:a16="http://schemas.microsoft.com/office/drawing/2014/main" id="{CDF69882-EAA7-4607-AACE-9EA6844BF6EB}"/>
               </a:ext>
             </a:extLst>
           </p:cNvPr>
@@ -2870,7 +2870,7 @@
           <a:p>
             <a:fld id="{9D2EA739-B840-41DB-9666-B44BD9009BC9}" type="datetimeFigureOut">
               <a:rPr lang="de-DE" smtClean="0"/>
-              <a:t>25.11.2020</a:t>
+              <a:t>01.10.2026</a:t>
             </a:fld>
             <a:endParaRPr lang="de-DE"/>
           </a:p>
@@ -2881,7 +2881,7 @@
           <p:cNvPr id="6" name="Fußzeilenplatzhalter 5">
             <a:extLst>
               <a:ext uri="{FF2B5EF4-FFF2-40B4-BE49-F238E27FC236}">
-                <a16:creationId xmlns:a16="http://schemas.microsoft.com/office/drawing/2014/main" xmlns="" id="{B1036D9F-DA8C-4CB7-860E-4BB490A47A47}"/>
+                <a16:creationId xmlns:a16="http://schemas.microsoft.com/office/drawing/2014/main" id="{B1036D9F-DA8C-4CB7-860E-4BB490A47A47}"/>
               </a:ext>
             </a:extLst>
           </p:cNvPr>
@@ -2906,7 +2906,7 @@
           <p:cNvPr id="7" name="Foliennummernplatzhalter 6">
             <a:extLst>
               <a:ext uri="{FF2B5EF4-FFF2-40B4-BE49-F238E27FC236}">
-                <a16:creationId xmlns:a16="http://schemas.microsoft.com/office/drawing/2014/main" xmlns="" id="{18A2F68E-C3D9-4BCC-A4AE-E6C3067C34D8}"/>
+                <a16:creationId xmlns:a16="http://schemas.microsoft.com/office/drawing/2014/main" id="{18A2F68E-C3D9-4BCC-A4AE-E6C3067C34D8}"/>
               </a:ext>
             </a:extLst>
           </p:cNvPr>
@@ -2965,7 +2965,7 @@
           <p:cNvPr id="2" name="Titel 1">
             <a:extLst>
               <a:ext uri="{FF2B5EF4-FFF2-40B4-BE49-F238E27FC236}">
-                <a16:creationId xmlns:a16="http://schemas.microsoft.com/office/drawing/2014/main" xmlns="" id="{021CF583-CB0E-49CB-85AE-DDB138237E10}"/>
+                <a16:creationId xmlns:a16="http://schemas.microsoft.com/office/drawing/2014/main" id="{021CF583-CB0E-49CB-85AE-DDB138237E10}"/>
               </a:ext>
             </a:extLst>
           </p:cNvPr>
@@ -3002,7 +3002,7 @@
           <p:cNvPr id="3" name="Bildplatzhalter 2">
             <a:extLst>
               <a:ext uri="{FF2B5EF4-FFF2-40B4-BE49-F238E27FC236}">
-                <a16:creationId xmlns:a16="http://schemas.microsoft.com/office/drawing/2014/main" xmlns="" id="{D3765D39-F7C0-4D17-9409-D4EAA88223C3}"/>
+                <a16:creationId xmlns:a16="http://schemas.microsoft.com/office/drawing/2014/main" id="{D3765D39-F7C0-4D17-9409-D4EAA88223C3}"/>
               </a:ext>
             </a:extLst>
           </p:cNvPr>
@@ -3069,7 +3069,7 @@
           <p:cNvPr id="4" name="Textplatzhalter 3">
             <a:extLst>
               <a:ext uri="{FF2B5EF4-FFF2-40B4-BE49-F238E27FC236}">
-                <a16:creationId xmlns:a16="http://schemas.microsoft.com/office/drawing/2014/main" xmlns="" id="{0B7CFA85-EFA5-4051-BFC7-5229994C3259}"/>
+                <a16:creationId xmlns:a16="http://schemas.microsoft.com/office/drawing/2014/main" id="{0B7CFA85-EFA5-4051-BFC7-5229994C3259}"/>
               </a:ext>
             </a:extLst>
           </p:cNvPr>
@@ -3140,7 +3140,7 @@
           <p:cNvPr id="5" name="Datumsplatzhalter 4">
             <a:extLst>
               <a:ext uri="{FF2B5EF4-FFF2-40B4-BE49-F238E27FC236}">
-                <a16:creationId xmlns:a16="http://schemas.microsoft.com/office/drawing/2014/main" xmlns="" id="{A02A5E17-7FD8-4788-AB10-989767530475}"/>
+                <a16:creationId xmlns:a16="http://schemas.microsoft.com/office/drawing/2014/main" id="{A02A5E17-7FD8-4788-AB10-989767530475}"/>
               </a:ext>
             </a:extLst>
           </p:cNvPr>
@@ -3158,7 +3158,7 @@
           <a:p>
             <a:fld id="{9D2EA739-B840-41DB-9666-B44BD9009BC9}" type="datetimeFigureOut">
               <a:rPr lang="de-DE" smtClean="0"/>
-              <a:t>25.11.2020</a:t>
+              <a:t>01.10.2026</a:t>
             </a:fld>
             <a:endParaRPr lang="de-DE"/>
           </a:p>
@@ -3169,7 +3169,7 @@
           <p:cNvPr id="6" name="Fußzeilenplatzhalter 5">
             <a:extLst>
               <a:ext uri="{FF2B5EF4-FFF2-40B4-BE49-F238E27FC236}">
-                <a16:creationId xmlns:a16="http://schemas.microsoft.com/office/drawing/2014/main" xmlns="" id="{40DE45BF-95A2-473A-A042-9B28E241ED2F}"/>
+                <a16:creationId xmlns:a16="http://schemas.microsoft.com/office/drawing/2014/main" id="{40DE45BF-95A2-473A-A042-9B28E241ED2F}"/>
               </a:ext>
             </a:extLst>
           </p:cNvPr>
@@ -3194,7 +3194,7 @@
           <p:cNvPr id="7" name="Foliennummernplatzhalter 6">
             <a:extLst>
               <a:ext uri="{FF2B5EF4-FFF2-40B4-BE49-F238E27FC236}">
-                <a16:creationId xmlns:a16="http://schemas.microsoft.com/office/drawing/2014/main" xmlns="" id="{5484704D-0A26-4E8C-B04C-3BCD76A3DCFE}"/>
+                <a16:creationId xmlns:a16="http://schemas.microsoft.com/office/drawing/2014/main" id="{5484704D-0A26-4E8C-B04C-3BCD76A3DCFE}"/>
               </a:ext>
             </a:extLst>
           </p:cNvPr>
@@ -3258,7 +3258,7 @@
           <p:cNvPr id="2" name="Titelplatzhalter 1">
             <a:extLst>
               <a:ext uri="{FF2B5EF4-FFF2-40B4-BE49-F238E27FC236}">
-                <a16:creationId xmlns:a16="http://schemas.microsoft.com/office/drawing/2014/main" xmlns="" id="{9D56F7D4-25A2-400A-A800-1BBBBCC9C909}"/>
+                <a16:creationId xmlns:a16="http://schemas.microsoft.com/office/drawing/2014/main" id="{9D56F7D4-25A2-400A-A800-1BBBBCC9C909}"/>
               </a:ext>
             </a:extLst>
           </p:cNvPr>
@@ -3296,7 +3296,7 @@
           <p:cNvPr id="3" name="Textplatzhalter 2">
             <a:extLst>
               <a:ext uri="{FF2B5EF4-FFF2-40B4-BE49-F238E27FC236}">
-                <a16:creationId xmlns:a16="http://schemas.microsoft.com/office/drawing/2014/main" xmlns="" id="{FEC58394-B743-4977-8F6C-8EA6821E2DA6}"/>
+                <a16:creationId xmlns:a16="http://schemas.microsoft.com/office/drawing/2014/main" id="{FEC58394-B743-4977-8F6C-8EA6821E2DA6}"/>
               </a:ext>
             </a:extLst>
           </p:cNvPr>
@@ -3363,7 +3363,7 @@
           <p:cNvPr id="4" name="Datumsplatzhalter 3">
             <a:extLst>
               <a:ext uri="{FF2B5EF4-FFF2-40B4-BE49-F238E27FC236}">
-                <a16:creationId xmlns:a16="http://schemas.microsoft.com/office/drawing/2014/main" xmlns="" id="{D7B56AEC-433A-4D88-9C21-7D8906759460}"/>
+                <a16:creationId xmlns:a16="http://schemas.microsoft.com/office/drawing/2014/main" id="{D7B56AEC-433A-4D88-9C21-7D8906759460}"/>
               </a:ext>
             </a:extLst>
           </p:cNvPr>
@@ -3399,7 +3399,7 @@
           <a:p>
             <a:fld id="{9D2EA739-B840-41DB-9666-B44BD9009BC9}" type="datetimeFigureOut">
               <a:rPr lang="de-DE" smtClean="0"/>
-              <a:t>25.11.2020</a:t>
+              <a:t>01.10.2026</a:t>
             </a:fld>
             <a:endParaRPr lang="de-DE"/>
           </a:p>
@@ -3410,7 +3410,7 @@
           <p:cNvPr id="5" name="Fußzeilenplatzhalter 4">
             <a:extLst>
               <a:ext uri="{FF2B5EF4-FFF2-40B4-BE49-F238E27FC236}">
-                <a16:creationId xmlns:a16="http://schemas.microsoft.com/office/drawing/2014/main" xmlns="" id="{37D21044-10F4-4BB4-BA29-CC0432833145}"/>
+                <a16:creationId xmlns:a16="http://schemas.microsoft.com/office/drawing/2014/main" id="{37D21044-10F4-4BB4-BA29-CC0432833145}"/>
               </a:ext>
             </a:extLst>
           </p:cNvPr>
@@ -3453,7 +3453,7 @@
           <p:cNvPr id="6" name="Foliennummernplatzhalter 5">
             <a:extLst>
               <a:ext uri="{FF2B5EF4-FFF2-40B4-BE49-F238E27FC236}">
-                <a16:creationId xmlns:a16="http://schemas.microsoft.com/office/drawing/2014/main" xmlns="" id="{DD32C5E6-AA19-4B3E-93D1-E6065C2AB8B0}"/>
+                <a16:creationId xmlns:a16="http://schemas.microsoft.com/office/drawing/2014/main" id="{DD32C5E6-AA19-4B3E-93D1-E6065C2AB8B0}"/>
               </a:ext>
             </a:extLst>
           </p:cNvPr>
@@ -3844,35 +3844,35 @@
                 <a:gridCol w="753036">
                   <a:extLst>
                     <a:ext uri="{9D8B030D-6E8A-4147-A177-3AD203B41FA5}">
-                      <a16:colId xmlns:a16="http://schemas.microsoft.com/office/drawing/2014/main" xmlns="" val="20000"/>
+                      <a16:colId xmlns:a16="http://schemas.microsoft.com/office/drawing/2014/main" val="20000"/>
                     </a:ext>
                   </a:extLst>
                 </a:gridCol>
                 <a:gridCol w="3059953">
                   <a:extLst>
                     <a:ext uri="{9D8B030D-6E8A-4147-A177-3AD203B41FA5}">
-                      <a16:colId xmlns:a16="http://schemas.microsoft.com/office/drawing/2014/main" xmlns="" val="20001"/>
+                      <a16:colId xmlns:a16="http://schemas.microsoft.com/office/drawing/2014/main" val="20001"/>
                     </a:ext>
                   </a:extLst>
                 </a:gridCol>
                 <a:gridCol w="1045882">
                   <a:extLst>
                     <a:ext uri="{9D8B030D-6E8A-4147-A177-3AD203B41FA5}">
-                      <a16:colId xmlns:a16="http://schemas.microsoft.com/office/drawing/2014/main" xmlns="" val="20002"/>
+                      <a16:colId xmlns:a16="http://schemas.microsoft.com/office/drawing/2014/main" val="20002"/>
                     </a:ext>
                   </a:extLst>
                 </a:gridCol>
                 <a:gridCol w="1021977">
                   <a:extLst>
                     <a:ext uri="{9D8B030D-6E8A-4147-A177-3AD203B41FA5}">
-                      <a16:colId xmlns:a16="http://schemas.microsoft.com/office/drawing/2014/main" xmlns="" val="20003"/>
+                      <a16:colId xmlns:a16="http://schemas.microsoft.com/office/drawing/2014/main" val="20003"/>
                     </a:ext>
                   </a:extLst>
                 </a:gridCol>
                 <a:gridCol w="1237127">
                   <a:extLst>
                     <a:ext uri="{9D8B030D-6E8A-4147-A177-3AD203B41FA5}">
-                      <a16:colId xmlns:a16="http://schemas.microsoft.com/office/drawing/2014/main" xmlns="" val="20004"/>
+                      <a16:colId xmlns:a16="http://schemas.microsoft.com/office/drawing/2014/main" val="20004"/>
                     </a:ext>
                   </a:extLst>
                 </a:gridCol>
@@ -4029,7 +4029,7 @@
                 </a:tc>
                 <a:extLst>
                   <a:ext uri="{0D108BD9-81ED-4DB2-BD59-A6C34878D82A}">
-                    <a16:rowId xmlns:a16="http://schemas.microsoft.com/office/drawing/2014/main" xmlns="" val="10000"/>
+                    <a16:rowId xmlns:a16="http://schemas.microsoft.com/office/drawing/2014/main" val="10000"/>
                   </a:ext>
                 </a:extLst>
               </a:tr>
@@ -4190,7 +4190,7 @@
                 </a:tc>
                 <a:extLst>
                   <a:ext uri="{0D108BD9-81ED-4DB2-BD59-A6C34878D82A}">
-                    <a16:rowId xmlns:a16="http://schemas.microsoft.com/office/drawing/2014/main" xmlns="" val="10001"/>
+                    <a16:rowId xmlns:a16="http://schemas.microsoft.com/office/drawing/2014/main" val="10001"/>
                   </a:ext>
                 </a:extLst>
               </a:tr>
@@ -4351,7 +4351,7 @@
                 </a:tc>
                 <a:extLst>
                   <a:ext uri="{0D108BD9-81ED-4DB2-BD59-A6C34878D82A}">
-                    <a16:rowId xmlns:a16="http://schemas.microsoft.com/office/drawing/2014/main" xmlns="" val="10002"/>
+                    <a16:rowId xmlns:a16="http://schemas.microsoft.com/office/drawing/2014/main" val="10002"/>
                   </a:ext>
                 </a:extLst>
               </a:tr>
@@ -4488,7 +4488,7 @@
                 </a:tc>
                 <a:extLst>
                   <a:ext uri="{0D108BD9-81ED-4DB2-BD59-A6C34878D82A}">
-                    <a16:rowId xmlns:a16="http://schemas.microsoft.com/office/drawing/2014/main" xmlns="" val="10003"/>
+                    <a16:rowId xmlns:a16="http://schemas.microsoft.com/office/drawing/2014/main" val="10003"/>
                   </a:ext>
                 </a:extLst>
               </a:tr>
@@ -4664,7 +4664,7 @@
                 </a:tc>
                 <a:extLst>
                   <a:ext uri="{0D108BD9-81ED-4DB2-BD59-A6C34878D82A}">
-                    <a16:rowId xmlns:a16="http://schemas.microsoft.com/office/drawing/2014/main" xmlns="" val="10004"/>
+                    <a16:rowId xmlns:a16="http://schemas.microsoft.com/office/drawing/2014/main" val="10004"/>
                   </a:ext>
                 </a:extLst>
               </a:tr>
@@ -4815,7 +4815,7 @@
                 </a:tc>
                 <a:extLst>
                   <a:ext uri="{0D108BD9-81ED-4DB2-BD59-A6C34878D82A}">
-                    <a16:rowId xmlns:a16="http://schemas.microsoft.com/office/drawing/2014/main" xmlns="" val="1911296055"/>
+                    <a16:rowId xmlns:a16="http://schemas.microsoft.com/office/drawing/2014/main" val="1911296055"/>
                   </a:ext>
                 </a:extLst>
               </a:tr>
@@ -4957,7 +4957,7 @@
                 </a:tc>
                 <a:extLst>
                   <a:ext uri="{0D108BD9-81ED-4DB2-BD59-A6C34878D82A}">
-                    <a16:rowId xmlns:a16="http://schemas.microsoft.com/office/drawing/2014/main" xmlns="" val="1586435385"/>
+                    <a16:rowId xmlns:a16="http://schemas.microsoft.com/office/drawing/2014/main" val="1586435385"/>
                   </a:ext>
                 </a:extLst>
               </a:tr>
@@ -5134,7 +5134,7 @@
                 </a:tc>
                 <a:extLst>
                   <a:ext uri="{0D108BD9-81ED-4DB2-BD59-A6C34878D82A}">
-                    <a16:rowId xmlns:a16="http://schemas.microsoft.com/office/drawing/2014/main" xmlns="" val="3042673840"/>
+                    <a16:rowId xmlns:a16="http://schemas.microsoft.com/office/drawing/2014/main" val="3042673840"/>
                   </a:ext>
                 </a:extLst>
               </a:tr>
@@ -5261,7 +5261,7 @@
                 </a:tc>
                 <a:extLst>
                   <a:ext uri="{0D108BD9-81ED-4DB2-BD59-A6C34878D82A}">
-                    <a16:rowId xmlns:a16="http://schemas.microsoft.com/office/drawing/2014/main" xmlns="" val="3760023436"/>
+                    <a16:rowId xmlns:a16="http://schemas.microsoft.com/office/drawing/2014/main" val="3760023436"/>
                   </a:ext>
                 </a:extLst>
               </a:tr>
@@ -5388,7 +5388,7 @@
                 </a:tc>
                 <a:extLst>
                   <a:ext uri="{0D108BD9-81ED-4DB2-BD59-A6C34878D82A}">
-                    <a16:rowId xmlns:a16="http://schemas.microsoft.com/office/drawing/2014/main" xmlns="" val="3155358905"/>
+                    <a16:rowId xmlns:a16="http://schemas.microsoft.com/office/drawing/2014/main" val="3155358905"/>
                   </a:ext>
                 </a:extLst>
               </a:tr>
@@ -5405,7 +5405,7 @@
                         <a:buNone/>
                       </a:pPr>
                       <a:r>
-                        <a:rPr lang="de-DE" sz="1200" dirty="0" smtClean="0">
+                        <a:rPr lang="de-DE" sz="1200" dirty="0">
                           <a:effectLst/>
                           <a:latin typeface="Arial"/>
                           <a:ea typeface="Times New Roman" panose="02020603050405020304" pitchFamily="18" charset="0"/>
@@ -5413,12 +5413,6 @@
                         </a:rPr>
                         <a:t>0.10</a:t>
                       </a:r>
-                      <a:endParaRPr lang="de-DE" sz="1200" dirty="0">
-                        <a:effectLst/>
-                        <a:latin typeface="Arial"/>
-                        <a:ea typeface="Times New Roman" panose="02020603050405020304" pitchFamily="18" charset="0"/>
-                        <a:cs typeface="Times New Roman"/>
-                      </a:endParaRPr>
                     </a:p>
                   </a:txBody>
                   <a:tcPr marL="68580" marR="68580" marT="0" marB="0"/>
@@ -5435,7 +5429,7 @@
                         <a:buNone/>
                       </a:pPr>
                       <a:r>
-                        <a:rPr lang="de-DE" sz="1200" baseline="0" dirty="0" smtClean="0">
+                        <a:rPr lang="de-DE" sz="1200" baseline="0" dirty="0">
                           <a:effectLst/>
                           <a:latin typeface="Arial"/>
                           <a:ea typeface="Times New Roman" panose="02020603050405020304" pitchFamily="18" charset="0"/>
@@ -5444,7 +5438,7 @@
                         <a:t>Detailergänzung für </a:t>
                       </a:r>
                       <a:r>
-                        <a:rPr lang="de-DE" sz="1200" baseline="0" dirty="0" err="1" smtClean="0">
+                        <a:rPr lang="de-DE" sz="1200" baseline="0" dirty="0" err="1">
                           <a:effectLst/>
                           <a:latin typeface="Arial"/>
                           <a:ea typeface="Times New Roman" panose="02020603050405020304" pitchFamily="18" charset="0"/>
@@ -5453,7 +5447,7 @@
                         <a:t>If</a:t>
                       </a:r>
                       <a:r>
-                        <a:rPr lang="de-DE" sz="1200" baseline="0" dirty="0" smtClean="0">
+                        <a:rPr lang="de-DE" sz="1200" baseline="0" dirty="0">
                           <a:effectLst/>
                           <a:latin typeface="Arial"/>
                           <a:ea typeface="Times New Roman" panose="02020603050405020304" pitchFamily="18" charset="0"/>
@@ -5461,12 +5455,6 @@
                         </a:rPr>
                         <a:t>-Else-Layout</a:t>
                       </a:r>
-                      <a:endParaRPr lang="de-DE" sz="1200" baseline="0" dirty="0">
-                        <a:effectLst/>
-                        <a:latin typeface="Arial"/>
-                        <a:ea typeface="Times New Roman" panose="02020603050405020304" pitchFamily="18" charset="0"/>
-                        <a:cs typeface="Times New Roman"/>
-                      </a:endParaRPr>
                     </a:p>
                   </a:txBody>
                   <a:tcPr marL="68580" marR="68580" marT="0" marB="0"/>
@@ -5483,7 +5471,7 @@
                         <a:buNone/>
                       </a:pPr>
                       <a:r>
-                        <a:rPr lang="de-DE" sz="1200" dirty="0" smtClean="0">
+                        <a:rPr lang="de-DE" sz="1200" dirty="0">
                           <a:effectLst/>
                           <a:latin typeface="Arial"/>
                           <a:ea typeface="Times New Roman" panose="02020603050405020304" pitchFamily="18" charset="0"/>
@@ -5492,7 +5480,7 @@
                         <a:t>J.</a:t>
                       </a:r>
                       <a:r>
-                        <a:rPr lang="de-DE" sz="1200" baseline="0" dirty="0" smtClean="0">
+                        <a:rPr lang="de-DE" sz="1200" baseline="0" dirty="0">
                           <a:effectLst/>
                           <a:latin typeface="Arial"/>
                           <a:ea typeface="Times New Roman" panose="02020603050405020304" pitchFamily="18" charset="0"/>
@@ -5501,7 +5489,7 @@
                         <a:t> </a:t>
                       </a:r>
                       <a:r>
-                        <a:rPr lang="de-DE" sz="1200" baseline="0" dirty="0" err="1" smtClean="0">
+                        <a:rPr lang="de-DE" sz="1200" baseline="0" dirty="0" err="1">
                           <a:effectLst/>
                           <a:latin typeface="Arial"/>
                           <a:ea typeface="Times New Roman" panose="02020603050405020304" pitchFamily="18" charset="0"/>
@@ -5531,7 +5519,7 @@
                         <a:buNone/>
                       </a:pPr>
                       <a:r>
-                        <a:rPr lang="de-DE" sz="1200" dirty="0" smtClean="0">
+                        <a:rPr lang="de-DE" sz="1200" dirty="0">
                           <a:effectLst/>
                           <a:latin typeface="Arial"/>
                           <a:ea typeface="Times New Roman" panose="02020603050405020304" pitchFamily="18" charset="0"/>
@@ -5539,12 +5527,6 @@
                         </a:rPr>
                         <a:t>25.11.2020</a:t>
                       </a:r>
-                      <a:endParaRPr lang="de-DE" sz="1200" dirty="0">
-                        <a:effectLst/>
-                        <a:latin typeface="Arial"/>
-                        <a:ea typeface="Times New Roman" panose="02020603050405020304" pitchFamily="18" charset="0"/>
-                        <a:cs typeface="Times New Roman"/>
-                      </a:endParaRPr>
                     </a:p>
                   </a:txBody>
                   <a:tcPr marL="68580" marR="68580" marT="0" marB="0"/>
@@ -5561,7 +5543,7 @@
                         <a:buNone/>
                       </a:pPr>
                       <a:r>
-                        <a:rPr lang="de-DE" sz="1200" baseline="0" dirty="0" smtClean="0">
+                        <a:rPr lang="de-DE" sz="1200" baseline="0" dirty="0">
                           <a:effectLst/>
                           <a:latin typeface="Arial"/>
                           <a:ea typeface="Times New Roman" panose="02020603050405020304" pitchFamily="18" charset="0"/>
@@ -5569,16 +5551,15 @@
                         </a:rPr>
                         <a:t>Review Niemann / Dück</a:t>
                       </a:r>
-                      <a:endParaRPr lang="de-DE" sz="1200" baseline="0" dirty="0">
-                        <a:effectLst/>
-                        <a:latin typeface="Arial"/>
-                        <a:ea typeface="Times New Roman" panose="02020603050405020304" pitchFamily="18" charset="0"/>
-                        <a:cs typeface="Times New Roman"/>
-                      </a:endParaRPr>
                     </a:p>
                   </a:txBody>
                   <a:tcPr marL="68580" marR="68580" marT="0" marB="0"/>
                 </a:tc>
+                <a:extLst>
+                  <a:ext uri="{0D108BD9-81ED-4DB2-BD59-A6C34878D82A}">
+                    <a16:rowId xmlns:a16="http://schemas.microsoft.com/office/drawing/2014/main" val="10010"/>
+                  </a:ext>
+                </a:extLst>
               </a:tr>
             </a:tbl>
           </a:graphicData>
@@ -5648,7 +5629,7 @@
           <p:cNvPr id="2" name="Rechteck 1">
             <a:extLst>
               <a:ext uri="{FF2B5EF4-FFF2-40B4-BE49-F238E27FC236}">
-                <a16:creationId xmlns:a16="http://schemas.microsoft.com/office/drawing/2014/main" xmlns="" id="{C0DB1083-F1D8-40EE-9D33-AAFD6B7330DA}"/>
+                <a16:creationId xmlns:a16="http://schemas.microsoft.com/office/drawing/2014/main" id="{C0DB1083-F1D8-40EE-9D33-AAFD6B7330DA}"/>
               </a:ext>
             </a:extLst>
           </p:cNvPr>
@@ -5760,7 +5741,7 @@
           <p:cNvPr id="112" name="Abgerundetes Rechteck 70">
             <a:extLst>
               <a:ext uri="{FF2B5EF4-FFF2-40B4-BE49-F238E27FC236}">
-                <a16:creationId xmlns:a16="http://schemas.microsoft.com/office/drawing/2014/main" xmlns="" id="{FA1963D0-80CB-4FFF-B49D-800FEB43607C}"/>
+                <a16:creationId xmlns:a16="http://schemas.microsoft.com/office/drawing/2014/main" id="{FA1963D0-80CB-4FFF-B49D-800FEB43607C}"/>
               </a:ext>
             </a:extLst>
           </p:cNvPr>
@@ -5816,7 +5797,7 @@
           <p:cNvPr id="114" name="Auf der gleichen Seite des Rechtecks liegende Ecken abrunden 72">
             <a:extLst>
               <a:ext uri="{FF2B5EF4-FFF2-40B4-BE49-F238E27FC236}">
-                <a16:creationId xmlns:a16="http://schemas.microsoft.com/office/drawing/2014/main" xmlns="" id="{1D8BEE29-FAE8-406C-8635-AA84BB2F64C6}"/>
+                <a16:creationId xmlns:a16="http://schemas.microsoft.com/office/drawing/2014/main" id="{1D8BEE29-FAE8-406C-8635-AA84BB2F64C6}"/>
               </a:ext>
             </a:extLst>
           </p:cNvPr>
@@ -5879,7 +5860,7 @@
           <p:cNvPr id="116" name="Rechteck 115">
             <a:extLst>
               <a:ext uri="{FF2B5EF4-FFF2-40B4-BE49-F238E27FC236}">
-                <a16:creationId xmlns:a16="http://schemas.microsoft.com/office/drawing/2014/main" xmlns="" id="{3FE3603A-C08F-46E3-84DF-CFCE8351AB19}"/>
+                <a16:creationId xmlns:a16="http://schemas.microsoft.com/office/drawing/2014/main" id="{3FE3603A-C08F-46E3-84DF-CFCE8351AB19}"/>
               </a:ext>
             </a:extLst>
           </p:cNvPr>
@@ -5943,7 +5924,7 @@
           <p:cNvPr id="118" name="Textfeld 117">
             <a:extLst>
               <a:ext uri="{FF2B5EF4-FFF2-40B4-BE49-F238E27FC236}">
-                <a16:creationId xmlns:a16="http://schemas.microsoft.com/office/drawing/2014/main" xmlns="" id="{FF3EB85E-F2C4-4B28-8D04-6AF6608616FA}"/>
+                <a16:creationId xmlns:a16="http://schemas.microsoft.com/office/drawing/2014/main" id="{FF3EB85E-F2C4-4B28-8D04-6AF6608616FA}"/>
               </a:ext>
             </a:extLst>
           </p:cNvPr>
@@ -5978,7 +5959,7 @@
           <p:cNvPr id="149" name="Abgerundetes Rechteck 70">
             <a:extLst>
               <a:ext uri="{FF2B5EF4-FFF2-40B4-BE49-F238E27FC236}">
-                <a16:creationId xmlns:a16="http://schemas.microsoft.com/office/drawing/2014/main" xmlns="" id="{EA69C895-4F6F-41F3-AF27-B47CC27810B0}"/>
+                <a16:creationId xmlns:a16="http://schemas.microsoft.com/office/drawing/2014/main" id="{EA69C895-4F6F-41F3-AF27-B47CC27810B0}"/>
               </a:ext>
             </a:extLst>
           </p:cNvPr>
@@ -6034,7 +6015,7 @@
           <p:cNvPr id="150" name="Textfeld 149">
             <a:extLst>
               <a:ext uri="{FF2B5EF4-FFF2-40B4-BE49-F238E27FC236}">
-                <a16:creationId xmlns:a16="http://schemas.microsoft.com/office/drawing/2014/main" xmlns="" id="{35E3BB20-ACCF-49D7-B8AD-8A30D7F58526}"/>
+                <a16:creationId xmlns:a16="http://schemas.microsoft.com/office/drawing/2014/main" id="{35E3BB20-ACCF-49D7-B8AD-8A30D7F58526}"/>
               </a:ext>
             </a:extLst>
           </p:cNvPr>
@@ -6069,7 +6050,7 @@
           <p:cNvPr id="151" name="Auf der gleichen Seite des Rechtecks liegende Ecken abrunden 72">
             <a:extLst>
               <a:ext uri="{FF2B5EF4-FFF2-40B4-BE49-F238E27FC236}">
-                <a16:creationId xmlns:a16="http://schemas.microsoft.com/office/drawing/2014/main" xmlns="" id="{27119B61-5058-4A72-B4AC-D0061F1D4008}"/>
+                <a16:creationId xmlns:a16="http://schemas.microsoft.com/office/drawing/2014/main" id="{27119B61-5058-4A72-B4AC-D0061F1D4008}"/>
               </a:ext>
             </a:extLst>
           </p:cNvPr>
@@ -6132,7 +6113,7 @@
           <p:cNvPr id="152" name="Rechteck 151">
             <a:extLst>
               <a:ext uri="{FF2B5EF4-FFF2-40B4-BE49-F238E27FC236}">
-                <a16:creationId xmlns:a16="http://schemas.microsoft.com/office/drawing/2014/main" xmlns="" id="{2D5E61A0-4DF7-437C-9477-A9BF2B786AB4}"/>
+                <a16:creationId xmlns:a16="http://schemas.microsoft.com/office/drawing/2014/main" id="{2D5E61A0-4DF7-437C-9477-A9BF2B786AB4}"/>
               </a:ext>
             </a:extLst>
           </p:cNvPr>
@@ -6196,7 +6177,7 @@
           <p:cNvPr id="4" name="Textfeld 3">
             <a:extLst>
               <a:ext uri="{FF2B5EF4-FFF2-40B4-BE49-F238E27FC236}">
-                <a16:creationId xmlns:a16="http://schemas.microsoft.com/office/drawing/2014/main" xmlns="" id="{99209DB7-0909-491E-B208-CC75007E4A66}"/>
+                <a16:creationId xmlns:a16="http://schemas.microsoft.com/office/drawing/2014/main" id="{99209DB7-0909-491E-B208-CC75007E4A66}"/>
               </a:ext>
             </a:extLst>
           </p:cNvPr>
@@ -6244,7 +6225,7 @@
           <p:cNvPr id="226" name="Abgerundetes Rechteck 70">
             <a:extLst>
               <a:ext uri="{FF2B5EF4-FFF2-40B4-BE49-F238E27FC236}">
-                <a16:creationId xmlns:a16="http://schemas.microsoft.com/office/drawing/2014/main" xmlns="" id="{AAB995E3-A4C3-4E67-9886-1DE65BCA9483}"/>
+                <a16:creationId xmlns:a16="http://schemas.microsoft.com/office/drawing/2014/main" id="{AAB995E3-A4C3-4E67-9886-1DE65BCA9483}"/>
               </a:ext>
             </a:extLst>
           </p:cNvPr>
@@ -6300,7 +6281,7 @@
           <p:cNvPr id="227" name="Textfeld 226">
             <a:extLst>
               <a:ext uri="{FF2B5EF4-FFF2-40B4-BE49-F238E27FC236}">
-                <a16:creationId xmlns:a16="http://schemas.microsoft.com/office/drawing/2014/main" xmlns="" id="{8A3A43AD-0F65-4D60-845C-301EA600F4DE}"/>
+                <a16:creationId xmlns:a16="http://schemas.microsoft.com/office/drawing/2014/main" id="{8A3A43AD-0F65-4D60-845C-301EA600F4DE}"/>
               </a:ext>
             </a:extLst>
           </p:cNvPr>
@@ -6335,7 +6316,7 @@
           <p:cNvPr id="228" name="Auf der gleichen Seite des Rechtecks liegende Ecken abrunden 72">
             <a:extLst>
               <a:ext uri="{FF2B5EF4-FFF2-40B4-BE49-F238E27FC236}">
-                <a16:creationId xmlns:a16="http://schemas.microsoft.com/office/drawing/2014/main" xmlns="" id="{E553E06B-1DE0-429A-9746-2B51A9AA4F64}"/>
+                <a16:creationId xmlns:a16="http://schemas.microsoft.com/office/drawing/2014/main" id="{E553E06B-1DE0-429A-9746-2B51A9AA4F64}"/>
               </a:ext>
             </a:extLst>
           </p:cNvPr>
@@ -6398,7 +6379,7 @@
           <p:cNvPr id="231" name="Rechteck 230">
             <a:extLst>
               <a:ext uri="{FF2B5EF4-FFF2-40B4-BE49-F238E27FC236}">
-                <a16:creationId xmlns:a16="http://schemas.microsoft.com/office/drawing/2014/main" xmlns="" id="{3D762FFB-7E03-425A-BDF8-FEB53CFBC253}"/>
+                <a16:creationId xmlns:a16="http://schemas.microsoft.com/office/drawing/2014/main" id="{3D762FFB-7E03-425A-BDF8-FEB53CFBC253}"/>
               </a:ext>
             </a:extLst>
           </p:cNvPr>
@@ -6462,7 +6443,7 @@
           <p:cNvPr id="233" name="Rechteck: abgerundete Ecken 232">
             <a:extLst>
               <a:ext uri="{FF2B5EF4-FFF2-40B4-BE49-F238E27FC236}">
-                <a16:creationId xmlns:a16="http://schemas.microsoft.com/office/drawing/2014/main" xmlns="" id="{F2D6A71A-12B9-42AD-A335-470121B3A046}"/>
+                <a16:creationId xmlns:a16="http://schemas.microsoft.com/office/drawing/2014/main" id="{F2D6A71A-12B9-42AD-A335-470121B3A046}"/>
               </a:ext>
             </a:extLst>
           </p:cNvPr>
@@ -6518,7 +6499,7 @@
           <p:cNvPr id="242" name="Rechteck 241">
             <a:extLst>
               <a:ext uri="{FF2B5EF4-FFF2-40B4-BE49-F238E27FC236}">
-                <a16:creationId xmlns:a16="http://schemas.microsoft.com/office/drawing/2014/main" xmlns="" id="{F8045C91-DB5A-43F1-89C0-0C94E89E976D}"/>
+                <a16:creationId xmlns:a16="http://schemas.microsoft.com/office/drawing/2014/main" id="{F8045C91-DB5A-43F1-89C0-0C94E89E976D}"/>
               </a:ext>
             </a:extLst>
           </p:cNvPr>
@@ -6572,7 +6553,7 @@
           <p:cNvPr id="9" name="Rechteck: abgerundete Ecken 8">
             <a:extLst>
               <a:ext uri="{FF2B5EF4-FFF2-40B4-BE49-F238E27FC236}">
-                <a16:creationId xmlns:a16="http://schemas.microsoft.com/office/drawing/2014/main" xmlns="" id="{868A02A4-5ADC-4C48-93B7-12740C5ACFD3}"/>
+                <a16:creationId xmlns:a16="http://schemas.microsoft.com/office/drawing/2014/main" id="{868A02A4-5ADC-4C48-93B7-12740C5ACFD3}"/>
               </a:ext>
             </a:extLst>
           </p:cNvPr>
@@ -6628,7 +6609,7 @@
           <p:cNvPr id="11" name="Auf der gleichen Seite des Rechtecks liegende Ecken abrunden 72">
             <a:extLst>
               <a:ext uri="{FF2B5EF4-FFF2-40B4-BE49-F238E27FC236}">
-                <a16:creationId xmlns:a16="http://schemas.microsoft.com/office/drawing/2014/main" xmlns="" id="{E9CCC245-3B82-4F0F-BD93-D32E41056E55}"/>
+                <a16:creationId xmlns:a16="http://schemas.microsoft.com/office/drawing/2014/main" id="{E9CCC245-3B82-4F0F-BD93-D32E41056E55}"/>
               </a:ext>
             </a:extLst>
           </p:cNvPr>
@@ -6691,7 +6672,7 @@
           <p:cNvPr id="12" name="Rechteck 11">
             <a:extLst>
               <a:ext uri="{FF2B5EF4-FFF2-40B4-BE49-F238E27FC236}">
-                <a16:creationId xmlns:a16="http://schemas.microsoft.com/office/drawing/2014/main" xmlns="" id="{E2899F6F-8C32-40B7-AF3D-D519A4D58232}"/>
+                <a16:creationId xmlns:a16="http://schemas.microsoft.com/office/drawing/2014/main" id="{E2899F6F-8C32-40B7-AF3D-D519A4D58232}"/>
               </a:ext>
             </a:extLst>
           </p:cNvPr>
@@ -6755,7 +6736,7 @@
           <p:cNvPr id="10" name="Rechteck: eine Ecke abgerundet 9">
             <a:extLst>
               <a:ext uri="{FF2B5EF4-FFF2-40B4-BE49-F238E27FC236}">
-                <a16:creationId xmlns:a16="http://schemas.microsoft.com/office/drawing/2014/main" xmlns="" id="{71FA77E4-E133-4E38-B6B1-9F28A4ACA077}"/>
+                <a16:creationId xmlns:a16="http://schemas.microsoft.com/office/drawing/2014/main" id="{71FA77E4-E133-4E38-B6B1-9F28A4ACA077}"/>
               </a:ext>
             </a:extLst>
           </p:cNvPr>
@@ -6811,7 +6792,7 @@
           <p:cNvPr id="243" name="Rechteck 242">
             <a:extLst>
               <a:ext uri="{FF2B5EF4-FFF2-40B4-BE49-F238E27FC236}">
-                <a16:creationId xmlns:a16="http://schemas.microsoft.com/office/drawing/2014/main" xmlns="" id="{92BC34D1-B16F-41D3-9391-97DBA129EDC3}"/>
+                <a16:creationId xmlns:a16="http://schemas.microsoft.com/office/drawing/2014/main" id="{92BC34D1-B16F-41D3-9391-97DBA129EDC3}"/>
               </a:ext>
             </a:extLst>
           </p:cNvPr>
@@ -6865,7 +6846,7 @@
           <p:cNvPr id="224" name="Textfeld 223">
             <a:extLst>
               <a:ext uri="{FF2B5EF4-FFF2-40B4-BE49-F238E27FC236}">
-                <a16:creationId xmlns:a16="http://schemas.microsoft.com/office/drawing/2014/main" xmlns="" id="{D80CA728-B867-4E27-849F-CA15AC92311E}"/>
+                <a16:creationId xmlns:a16="http://schemas.microsoft.com/office/drawing/2014/main" id="{D80CA728-B867-4E27-849F-CA15AC92311E}"/>
               </a:ext>
             </a:extLst>
           </p:cNvPr>
@@ -6900,7 +6881,7 @@
           <p:cNvPr id="28" name="Textfeld 27">
             <a:extLst>
               <a:ext uri="{FF2B5EF4-FFF2-40B4-BE49-F238E27FC236}">
-                <a16:creationId xmlns:a16="http://schemas.microsoft.com/office/drawing/2014/main" xmlns="" id="{5565DBDC-81F2-4D2C-881B-019FBD709F09}"/>
+                <a16:creationId xmlns:a16="http://schemas.microsoft.com/office/drawing/2014/main" id="{5565DBDC-81F2-4D2C-881B-019FBD709F09}"/>
               </a:ext>
             </a:extLst>
           </p:cNvPr>
@@ -6939,7 +6920,7 @@
           <p:cNvPr id="244" name="Textfeld 243">
             <a:extLst>
               <a:ext uri="{FF2B5EF4-FFF2-40B4-BE49-F238E27FC236}">
-                <a16:creationId xmlns:a16="http://schemas.microsoft.com/office/drawing/2014/main" xmlns="" id="{3A930182-ED74-4677-8F9C-66A2D7430877}"/>
+                <a16:creationId xmlns:a16="http://schemas.microsoft.com/office/drawing/2014/main" id="{3A930182-ED74-4677-8F9C-66A2D7430877}"/>
               </a:ext>
             </a:extLst>
           </p:cNvPr>
@@ -6974,7 +6955,7 @@
           <p:cNvPr id="225" name="Rechteck 224">
             <a:extLst>
               <a:ext uri="{FF2B5EF4-FFF2-40B4-BE49-F238E27FC236}">
-                <a16:creationId xmlns:a16="http://schemas.microsoft.com/office/drawing/2014/main" xmlns="" id="{20298915-2B61-484D-880F-CE05FD96D9A4}"/>
+                <a16:creationId xmlns:a16="http://schemas.microsoft.com/office/drawing/2014/main" id="{20298915-2B61-484D-880F-CE05FD96D9A4}"/>
               </a:ext>
             </a:extLst>
           </p:cNvPr>
@@ -7037,7 +7018,7 @@
           <p:cNvPr id="245" name="Rechteck 244">
             <a:extLst>
               <a:ext uri="{FF2B5EF4-FFF2-40B4-BE49-F238E27FC236}">
-                <a16:creationId xmlns:a16="http://schemas.microsoft.com/office/drawing/2014/main" xmlns="" id="{6774B4C4-6FDA-40BA-AF7F-05DD7AE55C16}"/>
+                <a16:creationId xmlns:a16="http://schemas.microsoft.com/office/drawing/2014/main" id="{6774B4C4-6FDA-40BA-AF7F-05DD7AE55C16}"/>
               </a:ext>
             </a:extLst>
           </p:cNvPr>
@@ -7100,7 +7081,7 @@
           <p:cNvPr id="247" name="Rechteck 246">
             <a:extLst>
               <a:ext uri="{FF2B5EF4-FFF2-40B4-BE49-F238E27FC236}">
-                <a16:creationId xmlns:a16="http://schemas.microsoft.com/office/drawing/2014/main" xmlns="" id="{79363072-50CA-4F4C-A141-BF3A5C4B9852}"/>
+                <a16:creationId xmlns:a16="http://schemas.microsoft.com/office/drawing/2014/main" id="{79363072-50CA-4F4C-A141-BF3A5C4B9852}"/>
               </a:ext>
             </a:extLst>
           </p:cNvPr>
@@ -7163,7 +7144,7 @@
           <p:cNvPr id="248" name="Auf der gleichen Seite des Rechtecks liegende Ecken abrunden 72">
             <a:extLst>
               <a:ext uri="{FF2B5EF4-FFF2-40B4-BE49-F238E27FC236}">
-                <a16:creationId xmlns:a16="http://schemas.microsoft.com/office/drawing/2014/main" xmlns="" id="{676D49C6-E923-4599-8EE5-A635D5757A48}"/>
+                <a16:creationId xmlns:a16="http://schemas.microsoft.com/office/drawing/2014/main" id="{676D49C6-E923-4599-8EE5-A635D5757A48}"/>
               </a:ext>
             </a:extLst>
           </p:cNvPr>
@@ -7226,7 +7207,7 @@
           <p:cNvPr id="249" name="Rechteck 248">
             <a:extLst>
               <a:ext uri="{FF2B5EF4-FFF2-40B4-BE49-F238E27FC236}">
-                <a16:creationId xmlns:a16="http://schemas.microsoft.com/office/drawing/2014/main" xmlns="" id="{462A1702-9D07-44C0-9A50-9E4D6229D0D9}"/>
+                <a16:creationId xmlns:a16="http://schemas.microsoft.com/office/drawing/2014/main" id="{462A1702-9D07-44C0-9A50-9E4D6229D0D9}"/>
               </a:ext>
             </a:extLst>
           </p:cNvPr>
@@ -7290,7 +7271,7 @@
           <p:cNvPr id="250" name="Textfeld 249">
             <a:extLst>
               <a:ext uri="{FF2B5EF4-FFF2-40B4-BE49-F238E27FC236}">
-                <a16:creationId xmlns:a16="http://schemas.microsoft.com/office/drawing/2014/main" xmlns="" id="{CEBE3762-3D92-4BD4-B917-A6A75EEEFAF7}"/>
+                <a16:creationId xmlns:a16="http://schemas.microsoft.com/office/drawing/2014/main" id="{CEBE3762-3D92-4BD4-B917-A6A75EEEFAF7}"/>
               </a:ext>
             </a:extLst>
           </p:cNvPr>
@@ -7337,7 +7318,7 @@
           <p:cNvPr id="251" name="Textfeld 250">
             <a:extLst>
               <a:ext uri="{FF2B5EF4-FFF2-40B4-BE49-F238E27FC236}">
-                <a16:creationId xmlns:a16="http://schemas.microsoft.com/office/drawing/2014/main" xmlns="" id="{3FD433B4-4165-44B2-8F5E-2D445F7DFA19}"/>
+                <a16:creationId xmlns:a16="http://schemas.microsoft.com/office/drawing/2014/main" id="{3FD433B4-4165-44B2-8F5E-2D445F7DFA19}"/>
               </a:ext>
             </a:extLst>
           </p:cNvPr>
@@ -7372,7 +7353,7 @@
           <p:cNvPr id="252" name="Rechteck 251">
             <a:extLst>
               <a:ext uri="{FF2B5EF4-FFF2-40B4-BE49-F238E27FC236}">
-                <a16:creationId xmlns:a16="http://schemas.microsoft.com/office/drawing/2014/main" xmlns="" id="{D2762BD0-3D5D-4202-85AD-C73BE1B666C7}"/>
+                <a16:creationId xmlns:a16="http://schemas.microsoft.com/office/drawing/2014/main" id="{D2762BD0-3D5D-4202-85AD-C73BE1B666C7}"/>
               </a:ext>
             </a:extLst>
           </p:cNvPr>
@@ -7426,7 +7407,7 @@
           <p:cNvPr id="253" name="Abgerundetes Rechteck 70">
             <a:extLst>
               <a:ext uri="{FF2B5EF4-FFF2-40B4-BE49-F238E27FC236}">
-                <a16:creationId xmlns:a16="http://schemas.microsoft.com/office/drawing/2014/main" xmlns="" id="{0E312252-E31D-41EC-89C2-2014D5C0AF0A}"/>
+                <a16:creationId xmlns:a16="http://schemas.microsoft.com/office/drawing/2014/main" id="{0E312252-E31D-41EC-89C2-2014D5C0AF0A}"/>
               </a:ext>
             </a:extLst>
           </p:cNvPr>
@@ -7482,7 +7463,7 @@
           <p:cNvPr id="254" name="Auf der gleichen Seite des Rechtecks liegende Ecken abrunden 72">
             <a:extLst>
               <a:ext uri="{FF2B5EF4-FFF2-40B4-BE49-F238E27FC236}">
-                <a16:creationId xmlns:a16="http://schemas.microsoft.com/office/drawing/2014/main" xmlns="" id="{FE6FEFA1-38E3-4039-97C9-19EB354FB0C4}"/>
+                <a16:creationId xmlns:a16="http://schemas.microsoft.com/office/drawing/2014/main" id="{FE6FEFA1-38E3-4039-97C9-19EB354FB0C4}"/>
               </a:ext>
             </a:extLst>
           </p:cNvPr>
@@ -7545,7 +7526,7 @@
           <p:cNvPr id="255" name="Rechteck 254">
             <a:extLst>
               <a:ext uri="{FF2B5EF4-FFF2-40B4-BE49-F238E27FC236}">
-                <a16:creationId xmlns:a16="http://schemas.microsoft.com/office/drawing/2014/main" xmlns="" id="{F2ECEFBF-3B18-459F-A35D-F4E24D38D603}"/>
+                <a16:creationId xmlns:a16="http://schemas.microsoft.com/office/drawing/2014/main" id="{F2ECEFBF-3B18-459F-A35D-F4E24D38D603}"/>
               </a:ext>
             </a:extLst>
           </p:cNvPr>
@@ -7609,7 +7590,7 @@
           <p:cNvPr id="64" name="Textfeld 63">
             <a:extLst>
               <a:ext uri="{FF2B5EF4-FFF2-40B4-BE49-F238E27FC236}">
-                <a16:creationId xmlns:a16="http://schemas.microsoft.com/office/drawing/2014/main" xmlns="" id="{36823F52-2BE9-48F1-AC9E-90E762A8A84B}"/>
+                <a16:creationId xmlns:a16="http://schemas.microsoft.com/office/drawing/2014/main" id="{36823F52-2BE9-48F1-AC9E-90E762A8A84B}"/>
               </a:ext>
             </a:extLst>
           </p:cNvPr>
@@ -7644,7 +7625,7 @@
           <p:cNvPr id="65" name="Abgerundetes Rechteck 70">
             <a:extLst>
               <a:ext uri="{FF2B5EF4-FFF2-40B4-BE49-F238E27FC236}">
-                <a16:creationId xmlns:a16="http://schemas.microsoft.com/office/drawing/2014/main" xmlns="" id="{37ED14BE-FE90-40CA-967A-E864429755D6}"/>
+                <a16:creationId xmlns:a16="http://schemas.microsoft.com/office/drawing/2014/main" id="{37ED14BE-FE90-40CA-967A-E864429755D6}"/>
               </a:ext>
             </a:extLst>
           </p:cNvPr>
@@ -7700,7 +7681,7 @@
           <p:cNvPr id="66" name="Textfeld 65">
             <a:extLst>
               <a:ext uri="{FF2B5EF4-FFF2-40B4-BE49-F238E27FC236}">
-                <a16:creationId xmlns:a16="http://schemas.microsoft.com/office/drawing/2014/main" xmlns="" id="{54BDC033-C4B5-4D21-8C43-64D8CCD5FB41}"/>
+                <a16:creationId xmlns:a16="http://schemas.microsoft.com/office/drawing/2014/main" id="{54BDC033-C4B5-4D21-8C43-64D8CCD5FB41}"/>
               </a:ext>
             </a:extLst>
           </p:cNvPr>
@@ -7735,7 +7716,7 @@
           <p:cNvPr id="67" name="Auf der gleichen Seite des Rechtecks liegende Ecken abrunden 72">
             <a:extLst>
               <a:ext uri="{FF2B5EF4-FFF2-40B4-BE49-F238E27FC236}">
-                <a16:creationId xmlns:a16="http://schemas.microsoft.com/office/drawing/2014/main" xmlns="" id="{483D4B05-DFD7-4DC0-BF57-AF66024EB73E}"/>
+                <a16:creationId xmlns:a16="http://schemas.microsoft.com/office/drawing/2014/main" id="{483D4B05-DFD7-4DC0-BF57-AF66024EB73E}"/>
               </a:ext>
             </a:extLst>
           </p:cNvPr>
@@ -7798,7 +7779,7 @@
           <p:cNvPr id="69" name="Rechteck 68">
             <a:extLst>
               <a:ext uri="{FF2B5EF4-FFF2-40B4-BE49-F238E27FC236}">
-                <a16:creationId xmlns:a16="http://schemas.microsoft.com/office/drawing/2014/main" xmlns="" id="{A0CA6C61-D15B-4AE5-B251-C1AE25891BB0}"/>
+                <a16:creationId xmlns:a16="http://schemas.microsoft.com/office/drawing/2014/main" id="{A0CA6C61-D15B-4AE5-B251-C1AE25891BB0}"/>
               </a:ext>
             </a:extLst>
           </p:cNvPr>
@@ -7862,7 +7843,7 @@
           <p:cNvPr id="70" name="Abgerundetes Rechteck 70">
             <a:extLst>
               <a:ext uri="{FF2B5EF4-FFF2-40B4-BE49-F238E27FC236}">
-                <a16:creationId xmlns:a16="http://schemas.microsoft.com/office/drawing/2014/main" xmlns="" id="{53835561-7BFB-47DD-9E89-BF6D79D1B4E8}"/>
+                <a16:creationId xmlns:a16="http://schemas.microsoft.com/office/drawing/2014/main" id="{53835561-7BFB-47DD-9E89-BF6D79D1B4E8}"/>
               </a:ext>
             </a:extLst>
           </p:cNvPr>
@@ -7918,7 +7899,7 @@
           <p:cNvPr id="72" name="Textfeld 71">
             <a:extLst>
               <a:ext uri="{FF2B5EF4-FFF2-40B4-BE49-F238E27FC236}">
-                <a16:creationId xmlns:a16="http://schemas.microsoft.com/office/drawing/2014/main" xmlns="" id="{D2CF6A09-E772-40DD-B591-980B61DAC836}"/>
+                <a16:creationId xmlns:a16="http://schemas.microsoft.com/office/drawing/2014/main" id="{D2CF6A09-E772-40DD-B591-980B61DAC836}"/>
               </a:ext>
             </a:extLst>
           </p:cNvPr>
@@ -7958,7 +7939,7 @@
           <p:cNvPr id="74" name="Auf der gleichen Seite des Rechtecks liegende Ecken abrunden 72">
             <a:extLst>
               <a:ext uri="{FF2B5EF4-FFF2-40B4-BE49-F238E27FC236}">
-                <a16:creationId xmlns:a16="http://schemas.microsoft.com/office/drawing/2014/main" xmlns="" id="{31ADDE7E-BB05-41D4-8AD3-F76B84FD7728}"/>
+                <a16:creationId xmlns:a16="http://schemas.microsoft.com/office/drawing/2014/main" id="{31ADDE7E-BB05-41D4-8AD3-F76B84FD7728}"/>
               </a:ext>
             </a:extLst>
           </p:cNvPr>
@@ -8021,7 +8002,7 @@
           <p:cNvPr id="75" name="Rechteck 74">
             <a:extLst>
               <a:ext uri="{FF2B5EF4-FFF2-40B4-BE49-F238E27FC236}">
-                <a16:creationId xmlns:a16="http://schemas.microsoft.com/office/drawing/2014/main" xmlns="" id="{5DC14712-1CE8-475D-9FF1-95ED5A614069}"/>
+                <a16:creationId xmlns:a16="http://schemas.microsoft.com/office/drawing/2014/main" id="{5DC14712-1CE8-475D-9FF1-95ED5A614069}"/>
               </a:ext>
             </a:extLst>
           </p:cNvPr>
@@ -8085,7 +8066,7 @@
           <p:cNvPr id="182" name="Gerader Verbinder 181">
             <a:extLst>
               <a:ext uri="{FF2B5EF4-FFF2-40B4-BE49-F238E27FC236}">
-                <a16:creationId xmlns:a16="http://schemas.microsoft.com/office/drawing/2014/main" xmlns="" id="{43008F13-8E54-4E5B-8DCC-2A69B40ED0F1}"/>
+                <a16:creationId xmlns:a16="http://schemas.microsoft.com/office/drawing/2014/main" id="{43008F13-8E54-4E5B-8DCC-2A69B40ED0F1}"/>
               </a:ext>
             </a:extLst>
           </p:cNvPr>
@@ -8129,7 +8110,7 @@
           <p:cNvPr id="185" name="Gerader Verbinder 184">
             <a:extLst>
               <a:ext uri="{FF2B5EF4-FFF2-40B4-BE49-F238E27FC236}">
-                <a16:creationId xmlns:a16="http://schemas.microsoft.com/office/drawing/2014/main" xmlns="" id="{FDDF7DF1-AC1D-4830-8176-AC38E5B58858}"/>
+                <a16:creationId xmlns:a16="http://schemas.microsoft.com/office/drawing/2014/main" id="{FDDF7DF1-AC1D-4830-8176-AC38E5B58858}"/>
               </a:ext>
             </a:extLst>
           </p:cNvPr>
@@ -8173,7 +8154,7 @@
           <p:cNvPr id="190" name="Abgerundetes Rechteck 70">
             <a:extLst>
               <a:ext uri="{FF2B5EF4-FFF2-40B4-BE49-F238E27FC236}">
-                <a16:creationId xmlns:a16="http://schemas.microsoft.com/office/drawing/2014/main" xmlns="" id="{95D8B55C-0BE3-4979-A99C-264DB6C57BC7}"/>
+                <a16:creationId xmlns:a16="http://schemas.microsoft.com/office/drawing/2014/main" id="{95D8B55C-0BE3-4979-A99C-264DB6C57BC7}"/>
               </a:ext>
             </a:extLst>
           </p:cNvPr>
@@ -8229,7 +8210,7 @@
           <p:cNvPr id="256" name="Textfeld 255">
             <a:extLst>
               <a:ext uri="{FF2B5EF4-FFF2-40B4-BE49-F238E27FC236}">
-                <a16:creationId xmlns:a16="http://schemas.microsoft.com/office/drawing/2014/main" xmlns="" id="{59E2A1A7-5159-4D23-8A02-90967EC81148}"/>
+                <a16:creationId xmlns:a16="http://schemas.microsoft.com/office/drawing/2014/main" id="{59E2A1A7-5159-4D23-8A02-90967EC81148}"/>
               </a:ext>
             </a:extLst>
           </p:cNvPr>
@@ -8264,7 +8245,7 @@
           <p:cNvPr id="257" name="Auf der gleichen Seite des Rechtecks liegende Ecken abrunden 72">
             <a:extLst>
               <a:ext uri="{FF2B5EF4-FFF2-40B4-BE49-F238E27FC236}">
-                <a16:creationId xmlns:a16="http://schemas.microsoft.com/office/drawing/2014/main" xmlns="" id="{3DA45971-723E-4FC3-9EA1-DDAB78E5EEA9}"/>
+                <a16:creationId xmlns:a16="http://schemas.microsoft.com/office/drawing/2014/main" id="{3DA45971-723E-4FC3-9EA1-DDAB78E5EEA9}"/>
               </a:ext>
             </a:extLst>
           </p:cNvPr>
@@ -8327,7 +8308,7 @@
           <p:cNvPr id="258" name="Rechteck 257">
             <a:extLst>
               <a:ext uri="{FF2B5EF4-FFF2-40B4-BE49-F238E27FC236}">
-                <a16:creationId xmlns:a16="http://schemas.microsoft.com/office/drawing/2014/main" xmlns="" id="{D93BAD91-4005-4329-9CEB-DFB04C6D4E1E}"/>
+                <a16:creationId xmlns:a16="http://schemas.microsoft.com/office/drawing/2014/main" id="{D93BAD91-4005-4329-9CEB-DFB04C6D4E1E}"/>
               </a:ext>
             </a:extLst>
           </p:cNvPr>
@@ -8391,7 +8372,7 @@
           <p:cNvPr id="259" name="Rechteck: abgerundete Ecken 258">
             <a:extLst>
               <a:ext uri="{FF2B5EF4-FFF2-40B4-BE49-F238E27FC236}">
-                <a16:creationId xmlns:a16="http://schemas.microsoft.com/office/drawing/2014/main" xmlns="" id="{E406CBF8-B127-4D29-9CAF-11881FF6AD21}"/>
+                <a16:creationId xmlns:a16="http://schemas.microsoft.com/office/drawing/2014/main" id="{E406CBF8-B127-4D29-9CAF-11881FF6AD21}"/>
               </a:ext>
             </a:extLst>
           </p:cNvPr>
@@ -8447,7 +8428,7 @@
           <p:cNvPr id="261" name="Textfeld 260">
             <a:extLst>
               <a:ext uri="{FF2B5EF4-FFF2-40B4-BE49-F238E27FC236}">
-                <a16:creationId xmlns:a16="http://schemas.microsoft.com/office/drawing/2014/main" xmlns="" id="{BC03E192-C081-43A8-ABA0-8C975699E966}"/>
+                <a16:creationId xmlns:a16="http://schemas.microsoft.com/office/drawing/2014/main" id="{BC03E192-C081-43A8-ABA0-8C975699E966}"/>
               </a:ext>
             </a:extLst>
           </p:cNvPr>
@@ -8482,7 +8463,7 @@
           <p:cNvPr id="262" name="Auf der gleichen Seite des Rechtecks liegende Ecken abrunden 72">
             <a:extLst>
               <a:ext uri="{FF2B5EF4-FFF2-40B4-BE49-F238E27FC236}">
-                <a16:creationId xmlns:a16="http://schemas.microsoft.com/office/drawing/2014/main" xmlns="" id="{4D57BEA3-8A15-4860-B8D6-57B41A60BA7A}"/>
+                <a16:creationId xmlns:a16="http://schemas.microsoft.com/office/drawing/2014/main" id="{4D57BEA3-8A15-4860-B8D6-57B41A60BA7A}"/>
               </a:ext>
             </a:extLst>
           </p:cNvPr>
@@ -8545,7 +8526,7 @@
           <p:cNvPr id="263" name="Rechteck 262">
             <a:extLst>
               <a:ext uri="{FF2B5EF4-FFF2-40B4-BE49-F238E27FC236}">
-                <a16:creationId xmlns:a16="http://schemas.microsoft.com/office/drawing/2014/main" xmlns="" id="{6A3619AF-F9F7-42D5-A915-8AD491DECFD8}"/>
+                <a16:creationId xmlns:a16="http://schemas.microsoft.com/office/drawing/2014/main" id="{6A3619AF-F9F7-42D5-A915-8AD491DECFD8}"/>
               </a:ext>
             </a:extLst>
           </p:cNvPr>
@@ -8609,7 +8590,7 @@
           <p:cNvPr id="264" name="Rechteck 263">
             <a:extLst>
               <a:ext uri="{FF2B5EF4-FFF2-40B4-BE49-F238E27FC236}">
-                <a16:creationId xmlns:a16="http://schemas.microsoft.com/office/drawing/2014/main" xmlns="" id="{DBF855CC-41E5-4761-862A-A404CD175FE4}"/>
+                <a16:creationId xmlns:a16="http://schemas.microsoft.com/office/drawing/2014/main" id="{DBF855CC-41E5-4761-862A-A404CD175FE4}"/>
               </a:ext>
             </a:extLst>
           </p:cNvPr>
@@ -8663,7 +8644,7 @@
           <p:cNvPr id="266" name="Rechteck 265">
             <a:extLst>
               <a:ext uri="{FF2B5EF4-FFF2-40B4-BE49-F238E27FC236}">
-                <a16:creationId xmlns:a16="http://schemas.microsoft.com/office/drawing/2014/main" xmlns="" id="{98B9842E-BA29-473A-95F3-910A339D92F8}"/>
+                <a16:creationId xmlns:a16="http://schemas.microsoft.com/office/drawing/2014/main" id="{98B9842E-BA29-473A-95F3-910A339D92F8}"/>
               </a:ext>
             </a:extLst>
           </p:cNvPr>
@@ -8717,7 +8698,7 @@
           <p:cNvPr id="268" name="Gerader Verbinder 267">
             <a:extLst>
               <a:ext uri="{FF2B5EF4-FFF2-40B4-BE49-F238E27FC236}">
-                <a16:creationId xmlns:a16="http://schemas.microsoft.com/office/drawing/2014/main" xmlns="" id="{E6AB6030-638E-4B8D-92B9-4E5C8AC08B12}"/>
+                <a16:creationId xmlns:a16="http://schemas.microsoft.com/office/drawing/2014/main" id="{E6AB6030-638E-4B8D-92B9-4E5C8AC08B12}"/>
               </a:ext>
             </a:extLst>
           </p:cNvPr>
@@ -8760,7 +8741,7 @@
           <p:cNvPr id="271" name="Textfeld 270">
             <a:extLst>
               <a:ext uri="{FF2B5EF4-FFF2-40B4-BE49-F238E27FC236}">
-                <a16:creationId xmlns:a16="http://schemas.microsoft.com/office/drawing/2014/main" xmlns="" id="{2BCBEBA7-732E-4E63-8CAC-007568F0A531}"/>
+                <a16:creationId xmlns:a16="http://schemas.microsoft.com/office/drawing/2014/main" id="{2BCBEBA7-732E-4E63-8CAC-007568F0A531}"/>
               </a:ext>
             </a:extLst>
           </p:cNvPr>
@@ -8795,7 +8776,7 @@
           <p:cNvPr id="219" name="Gerader Verbinder 218">
             <a:extLst>
               <a:ext uri="{FF2B5EF4-FFF2-40B4-BE49-F238E27FC236}">
-                <a16:creationId xmlns:a16="http://schemas.microsoft.com/office/drawing/2014/main" xmlns="" id="{926836E7-4FB0-4536-BA67-7AEF485996F6}"/>
+                <a16:creationId xmlns:a16="http://schemas.microsoft.com/office/drawing/2014/main" id="{926836E7-4FB0-4536-BA67-7AEF485996F6}"/>
               </a:ext>
             </a:extLst>
           </p:cNvPr>
@@ -8838,7 +8819,7 @@
           <p:cNvPr id="220" name="Gerader Verbinder 219">
             <a:extLst>
               <a:ext uri="{FF2B5EF4-FFF2-40B4-BE49-F238E27FC236}">
-                <a16:creationId xmlns:a16="http://schemas.microsoft.com/office/drawing/2014/main" xmlns="" id="{4911C2D2-B374-4B57-A563-3A447BD1707A}"/>
+                <a16:creationId xmlns:a16="http://schemas.microsoft.com/office/drawing/2014/main" id="{4911C2D2-B374-4B57-A563-3A447BD1707A}"/>
               </a:ext>
             </a:extLst>
           </p:cNvPr>
@@ -8881,7 +8862,7 @@
           <p:cNvPr id="273" name="Rechteck: eine Ecke abgerundet 272">
             <a:extLst>
               <a:ext uri="{FF2B5EF4-FFF2-40B4-BE49-F238E27FC236}">
-                <a16:creationId xmlns:a16="http://schemas.microsoft.com/office/drawing/2014/main" xmlns="" id="{2C20AACF-0D15-4E28-BE97-7D1D93AD70A9}"/>
+                <a16:creationId xmlns:a16="http://schemas.microsoft.com/office/drawing/2014/main" id="{2C20AACF-0D15-4E28-BE97-7D1D93AD70A9}"/>
               </a:ext>
             </a:extLst>
           </p:cNvPr>
@@ -8937,7 +8918,7 @@
           <p:cNvPr id="275" name="Textfeld 274">
             <a:extLst>
               <a:ext uri="{FF2B5EF4-FFF2-40B4-BE49-F238E27FC236}">
-                <a16:creationId xmlns:a16="http://schemas.microsoft.com/office/drawing/2014/main" xmlns="" id="{70F0882A-1002-4357-A93B-879113D7FFB0}"/>
+                <a16:creationId xmlns:a16="http://schemas.microsoft.com/office/drawing/2014/main" id="{70F0882A-1002-4357-A93B-879113D7FFB0}"/>
               </a:ext>
             </a:extLst>
           </p:cNvPr>
@@ -8972,7 +8953,7 @@
           <p:cNvPr id="277" name="Textfeld 276">
             <a:extLst>
               <a:ext uri="{FF2B5EF4-FFF2-40B4-BE49-F238E27FC236}">
-                <a16:creationId xmlns:a16="http://schemas.microsoft.com/office/drawing/2014/main" xmlns="" id="{705E6C8A-0882-4CE3-9D5D-4FFF55E418AC}"/>
+                <a16:creationId xmlns:a16="http://schemas.microsoft.com/office/drawing/2014/main" id="{705E6C8A-0882-4CE3-9D5D-4FFF55E418AC}"/>
               </a:ext>
             </a:extLst>
           </p:cNvPr>
@@ -9037,7 +9018,7 @@
           <p:cNvPr id="2" name="Rechteck 1">
             <a:extLst>
               <a:ext uri="{FF2B5EF4-FFF2-40B4-BE49-F238E27FC236}">
-                <a16:creationId xmlns:a16="http://schemas.microsoft.com/office/drawing/2014/main" xmlns="" id="{C0DB1083-F1D8-40EE-9D33-AAFD6B7330DA}"/>
+                <a16:creationId xmlns:a16="http://schemas.microsoft.com/office/drawing/2014/main" id="{C0DB1083-F1D8-40EE-9D33-AAFD6B7330DA}"/>
               </a:ext>
             </a:extLst>
           </p:cNvPr>
@@ -9125,7 +9106,7 @@
           <p:cNvPr id="112" name="Abgerundetes Rechteck 70">
             <a:extLst>
               <a:ext uri="{FF2B5EF4-FFF2-40B4-BE49-F238E27FC236}">
-                <a16:creationId xmlns:a16="http://schemas.microsoft.com/office/drawing/2014/main" xmlns="" id="{FA1963D0-80CB-4FFF-B49D-800FEB43607C}"/>
+                <a16:creationId xmlns:a16="http://schemas.microsoft.com/office/drawing/2014/main" id="{FA1963D0-80CB-4FFF-B49D-800FEB43607C}"/>
               </a:ext>
             </a:extLst>
           </p:cNvPr>
@@ -9181,7 +9162,7 @@
           <p:cNvPr id="114" name="Auf der gleichen Seite des Rechtecks liegende Ecken abrunden 72">
             <a:extLst>
               <a:ext uri="{FF2B5EF4-FFF2-40B4-BE49-F238E27FC236}">
-                <a16:creationId xmlns:a16="http://schemas.microsoft.com/office/drawing/2014/main" xmlns="" id="{1D8BEE29-FAE8-406C-8635-AA84BB2F64C6}"/>
+                <a16:creationId xmlns:a16="http://schemas.microsoft.com/office/drawing/2014/main" id="{1D8BEE29-FAE8-406C-8635-AA84BB2F64C6}"/>
               </a:ext>
             </a:extLst>
           </p:cNvPr>
@@ -9244,7 +9225,7 @@
           <p:cNvPr id="116" name="Rechteck 115">
             <a:extLst>
               <a:ext uri="{FF2B5EF4-FFF2-40B4-BE49-F238E27FC236}">
-                <a16:creationId xmlns:a16="http://schemas.microsoft.com/office/drawing/2014/main" xmlns="" id="{3FE3603A-C08F-46E3-84DF-CFCE8351AB19}"/>
+                <a16:creationId xmlns:a16="http://schemas.microsoft.com/office/drawing/2014/main" id="{3FE3603A-C08F-46E3-84DF-CFCE8351AB19}"/>
               </a:ext>
             </a:extLst>
           </p:cNvPr>
@@ -9308,7 +9289,7 @@
           <p:cNvPr id="118" name="Textfeld 117">
             <a:extLst>
               <a:ext uri="{FF2B5EF4-FFF2-40B4-BE49-F238E27FC236}">
-                <a16:creationId xmlns:a16="http://schemas.microsoft.com/office/drawing/2014/main" xmlns="" id="{FF3EB85E-F2C4-4B28-8D04-6AF6608616FA}"/>
+                <a16:creationId xmlns:a16="http://schemas.microsoft.com/office/drawing/2014/main" id="{FF3EB85E-F2C4-4B28-8D04-6AF6608616FA}"/>
               </a:ext>
             </a:extLst>
           </p:cNvPr>
@@ -9343,7 +9324,7 @@
           <p:cNvPr id="149" name="Abgerundetes Rechteck 70">
             <a:extLst>
               <a:ext uri="{FF2B5EF4-FFF2-40B4-BE49-F238E27FC236}">
-                <a16:creationId xmlns:a16="http://schemas.microsoft.com/office/drawing/2014/main" xmlns="" id="{EA69C895-4F6F-41F3-AF27-B47CC27810B0}"/>
+                <a16:creationId xmlns:a16="http://schemas.microsoft.com/office/drawing/2014/main" id="{EA69C895-4F6F-41F3-AF27-B47CC27810B0}"/>
               </a:ext>
             </a:extLst>
           </p:cNvPr>
@@ -9399,7 +9380,7 @@
           <p:cNvPr id="150" name="Textfeld 149">
             <a:extLst>
               <a:ext uri="{FF2B5EF4-FFF2-40B4-BE49-F238E27FC236}">
-                <a16:creationId xmlns:a16="http://schemas.microsoft.com/office/drawing/2014/main" xmlns="" id="{35E3BB20-ACCF-49D7-B8AD-8A30D7F58526}"/>
+                <a16:creationId xmlns:a16="http://schemas.microsoft.com/office/drawing/2014/main" id="{35E3BB20-ACCF-49D7-B8AD-8A30D7F58526}"/>
               </a:ext>
             </a:extLst>
           </p:cNvPr>
@@ -9434,7 +9415,7 @@
           <p:cNvPr id="151" name="Auf der gleichen Seite des Rechtecks liegende Ecken abrunden 72">
             <a:extLst>
               <a:ext uri="{FF2B5EF4-FFF2-40B4-BE49-F238E27FC236}">
-                <a16:creationId xmlns:a16="http://schemas.microsoft.com/office/drawing/2014/main" xmlns="" id="{27119B61-5058-4A72-B4AC-D0061F1D4008}"/>
+                <a16:creationId xmlns:a16="http://schemas.microsoft.com/office/drawing/2014/main" id="{27119B61-5058-4A72-B4AC-D0061F1D4008}"/>
               </a:ext>
             </a:extLst>
           </p:cNvPr>
@@ -9497,7 +9478,7 @@
           <p:cNvPr id="152" name="Rechteck 151">
             <a:extLst>
               <a:ext uri="{FF2B5EF4-FFF2-40B4-BE49-F238E27FC236}">
-                <a16:creationId xmlns:a16="http://schemas.microsoft.com/office/drawing/2014/main" xmlns="" id="{2D5E61A0-4DF7-437C-9477-A9BF2B786AB4}"/>
+                <a16:creationId xmlns:a16="http://schemas.microsoft.com/office/drawing/2014/main" id="{2D5E61A0-4DF7-437C-9477-A9BF2B786AB4}"/>
               </a:ext>
             </a:extLst>
           </p:cNvPr>
@@ -9561,7 +9542,7 @@
           <p:cNvPr id="3" name="Auf der gleichen Seite des Rechtecks liegende Ecken abrunden 49">
             <a:extLst>
               <a:ext uri="{FF2B5EF4-FFF2-40B4-BE49-F238E27FC236}">
-                <a16:creationId xmlns:a16="http://schemas.microsoft.com/office/drawing/2014/main" xmlns="" id="{08BEC083-F665-4F69-A52D-CD46A3C484FA}"/>
+                <a16:creationId xmlns:a16="http://schemas.microsoft.com/office/drawing/2014/main" id="{08BEC083-F665-4F69-A52D-CD46A3C484FA}"/>
               </a:ext>
             </a:extLst>
           </p:cNvPr>
@@ -9618,7 +9599,7 @@
           <p:cNvPr id="5" name="Abgerundetes Rechteck 41">
             <a:extLst>
               <a:ext uri="{FF2B5EF4-FFF2-40B4-BE49-F238E27FC236}">
-                <a16:creationId xmlns:a16="http://schemas.microsoft.com/office/drawing/2014/main" xmlns="" id="{2EF03FF1-D1C7-452F-94A4-DE79D68A3E36}"/>
+                <a16:creationId xmlns:a16="http://schemas.microsoft.com/office/drawing/2014/main" id="{2EF03FF1-D1C7-452F-94A4-DE79D68A3E36}"/>
               </a:ext>
             </a:extLst>
           </p:cNvPr>
@@ -9674,7 +9655,7 @@
           <p:cNvPr id="6" name="Abgerundetes Rechteck 41">
             <a:extLst>
               <a:ext uri="{FF2B5EF4-FFF2-40B4-BE49-F238E27FC236}">
-                <a16:creationId xmlns:a16="http://schemas.microsoft.com/office/drawing/2014/main" xmlns="" id="{8C143624-80EE-4A73-9808-E275B51ED0EE}"/>
+                <a16:creationId xmlns:a16="http://schemas.microsoft.com/office/drawing/2014/main" id="{8C143624-80EE-4A73-9808-E275B51ED0EE}"/>
               </a:ext>
             </a:extLst>
           </p:cNvPr>
@@ -9730,7 +9711,7 @@
           <p:cNvPr id="13" name="Textfeld 12">
             <a:extLst>
               <a:ext uri="{FF2B5EF4-FFF2-40B4-BE49-F238E27FC236}">
-                <a16:creationId xmlns:a16="http://schemas.microsoft.com/office/drawing/2014/main" xmlns="" id="{FE5F0CF4-8215-48E3-BF4D-FFFE7597FCEA}"/>
+                <a16:creationId xmlns:a16="http://schemas.microsoft.com/office/drawing/2014/main" id="{FE5F0CF4-8215-48E3-BF4D-FFFE7597FCEA}"/>
               </a:ext>
             </a:extLst>
           </p:cNvPr>
@@ -9766,7 +9747,7 @@
           <p:cNvPr id="22" name="Auf der gleichen Seite des Rechtecks liegende Ecken abrunden 72">
             <a:extLst>
               <a:ext uri="{FF2B5EF4-FFF2-40B4-BE49-F238E27FC236}">
-                <a16:creationId xmlns:a16="http://schemas.microsoft.com/office/drawing/2014/main" xmlns="" id="{EBFD11E2-1171-4AAA-B435-26AB56D10393}"/>
+                <a16:creationId xmlns:a16="http://schemas.microsoft.com/office/drawing/2014/main" id="{EBFD11E2-1171-4AAA-B435-26AB56D10393}"/>
               </a:ext>
             </a:extLst>
           </p:cNvPr>
@@ -9829,7 +9810,7 @@
           <p:cNvPr id="23" name="Rechteck 22">
             <a:extLst>
               <a:ext uri="{FF2B5EF4-FFF2-40B4-BE49-F238E27FC236}">
-                <a16:creationId xmlns:a16="http://schemas.microsoft.com/office/drawing/2014/main" xmlns="" id="{C2898D1A-4487-4E97-B840-334E5E7361CB}"/>
+                <a16:creationId xmlns:a16="http://schemas.microsoft.com/office/drawing/2014/main" id="{C2898D1A-4487-4E97-B840-334E5E7361CB}"/>
               </a:ext>
             </a:extLst>
           </p:cNvPr>
@@ -9893,7 +9874,7 @@
           <p:cNvPr id="24" name="Textfeld 23">
             <a:extLst>
               <a:ext uri="{FF2B5EF4-FFF2-40B4-BE49-F238E27FC236}">
-                <a16:creationId xmlns:a16="http://schemas.microsoft.com/office/drawing/2014/main" xmlns="" id="{9D6BAB18-6822-4BC6-A593-0742A8B76557}"/>
+                <a16:creationId xmlns:a16="http://schemas.microsoft.com/office/drawing/2014/main" id="{9D6BAB18-6822-4BC6-A593-0742A8B76557}"/>
               </a:ext>
             </a:extLst>
           </p:cNvPr>
@@ -9928,7 +9909,7 @@
           <p:cNvPr id="25" name="Textfeld 24">
             <a:extLst>
               <a:ext uri="{FF2B5EF4-FFF2-40B4-BE49-F238E27FC236}">
-                <a16:creationId xmlns:a16="http://schemas.microsoft.com/office/drawing/2014/main" xmlns="" id="{86E53C57-D2CC-41D5-ABFF-A7777869A94B}"/>
+                <a16:creationId xmlns:a16="http://schemas.microsoft.com/office/drawing/2014/main" id="{86E53C57-D2CC-41D5-ABFF-A7777869A94B}"/>
               </a:ext>
             </a:extLst>
           </p:cNvPr>
@@ -9963,7 +9944,7 @@
           <p:cNvPr id="26" name="Textfeld 25">
             <a:extLst>
               <a:ext uri="{FF2B5EF4-FFF2-40B4-BE49-F238E27FC236}">
-                <a16:creationId xmlns:a16="http://schemas.microsoft.com/office/drawing/2014/main" xmlns="" id="{014D2F38-1F52-472B-99AD-FDD632DA4862}"/>
+                <a16:creationId xmlns:a16="http://schemas.microsoft.com/office/drawing/2014/main" id="{014D2F38-1F52-472B-99AD-FDD632DA4862}"/>
               </a:ext>
             </a:extLst>
           </p:cNvPr>
@@ -9998,7 +9979,7 @@
           <p:cNvPr id="27" name="Textfeld 26">
             <a:extLst>
               <a:ext uri="{FF2B5EF4-FFF2-40B4-BE49-F238E27FC236}">
-                <a16:creationId xmlns:a16="http://schemas.microsoft.com/office/drawing/2014/main" xmlns="" id="{35F9995B-E58C-4978-AFD6-295BB48A2DEA}"/>
+                <a16:creationId xmlns:a16="http://schemas.microsoft.com/office/drawing/2014/main" id="{35F9995B-E58C-4978-AFD6-295BB48A2DEA}"/>
               </a:ext>
             </a:extLst>
           </p:cNvPr>
@@ -10033,7 +10014,7 @@
           <p:cNvPr id="29" name="Textfeld 28">
             <a:extLst>
               <a:ext uri="{FF2B5EF4-FFF2-40B4-BE49-F238E27FC236}">
-                <a16:creationId xmlns:a16="http://schemas.microsoft.com/office/drawing/2014/main" xmlns="" id="{BE0E30A7-A9B7-46C9-8BDD-594D67C4D672}"/>
+                <a16:creationId xmlns:a16="http://schemas.microsoft.com/office/drawing/2014/main" id="{BE0E30A7-A9B7-46C9-8BDD-594D67C4D672}"/>
               </a:ext>
             </a:extLst>
           </p:cNvPr>
@@ -10068,7 +10049,7 @@
           <p:cNvPr id="30" name="Textfeld 29">
             <a:extLst>
               <a:ext uri="{FF2B5EF4-FFF2-40B4-BE49-F238E27FC236}">
-                <a16:creationId xmlns:a16="http://schemas.microsoft.com/office/drawing/2014/main" xmlns="" id="{55444D95-9289-4D24-86E7-BF67EF52F407}"/>
+                <a16:creationId xmlns:a16="http://schemas.microsoft.com/office/drawing/2014/main" id="{55444D95-9289-4D24-86E7-BF67EF52F407}"/>
               </a:ext>
             </a:extLst>
           </p:cNvPr>
@@ -10103,7 +10084,7 @@
           <p:cNvPr id="230" name="Auf der gleichen Seite des Rechtecks liegende Ecken abrunden 60">
             <a:extLst>
               <a:ext uri="{FF2B5EF4-FFF2-40B4-BE49-F238E27FC236}">
-                <a16:creationId xmlns:a16="http://schemas.microsoft.com/office/drawing/2014/main" xmlns="" id="{596BA89E-E9D6-427B-8E9C-FE0E1D9A00EF}"/>
+                <a16:creationId xmlns:a16="http://schemas.microsoft.com/office/drawing/2014/main" id="{596BA89E-E9D6-427B-8E9C-FE0E1D9A00EF}"/>
               </a:ext>
             </a:extLst>
           </p:cNvPr>
@@ -10160,7 +10141,7 @@
           <p:cNvPr id="19" name="Textfeld 18">
             <a:extLst>
               <a:ext uri="{FF2B5EF4-FFF2-40B4-BE49-F238E27FC236}">
-                <a16:creationId xmlns:a16="http://schemas.microsoft.com/office/drawing/2014/main" xmlns="" id="{AD584707-943B-435A-BCAF-5CE37442C940}"/>
+                <a16:creationId xmlns:a16="http://schemas.microsoft.com/office/drawing/2014/main" id="{AD584707-943B-435A-BCAF-5CE37442C940}"/>
               </a:ext>
             </a:extLst>
           </p:cNvPr>
@@ -10195,7 +10176,7 @@
           <p:cNvPr id="20" name="Textfeld 19">
             <a:extLst>
               <a:ext uri="{FF2B5EF4-FFF2-40B4-BE49-F238E27FC236}">
-                <a16:creationId xmlns:a16="http://schemas.microsoft.com/office/drawing/2014/main" xmlns="" id="{6099B4C1-5968-4FBC-8740-5D78865072E9}"/>
+                <a16:creationId xmlns:a16="http://schemas.microsoft.com/office/drawing/2014/main" id="{6099B4C1-5968-4FBC-8740-5D78865072E9}"/>
               </a:ext>
             </a:extLst>
           </p:cNvPr>
@@ -10230,7 +10211,7 @@
           <p:cNvPr id="21" name="Textfeld 20">
             <a:extLst>
               <a:ext uri="{FF2B5EF4-FFF2-40B4-BE49-F238E27FC236}">
-                <a16:creationId xmlns:a16="http://schemas.microsoft.com/office/drawing/2014/main" xmlns="" id="{6E6ACAAB-4655-493E-B8D1-E8A36D984F95}"/>
+                <a16:creationId xmlns:a16="http://schemas.microsoft.com/office/drawing/2014/main" id="{6E6ACAAB-4655-493E-B8D1-E8A36D984F95}"/>
               </a:ext>
             </a:extLst>
           </p:cNvPr>
@@ -10265,7 +10246,7 @@
           <p:cNvPr id="79" name="Gerader Verbinder 78">
             <a:extLst>
               <a:ext uri="{FF2B5EF4-FFF2-40B4-BE49-F238E27FC236}">
-                <a16:creationId xmlns:a16="http://schemas.microsoft.com/office/drawing/2014/main" xmlns="" id="{EF5F3C71-CB99-4937-A461-6C5D45512C7F}"/>
+                <a16:creationId xmlns:a16="http://schemas.microsoft.com/office/drawing/2014/main" id="{EF5F3C71-CB99-4937-A461-6C5D45512C7F}"/>
               </a:ext>
             </a:extLst>
           </p:cNvPr>
@@ -10308,7 +10289,7 @@
           <p:cNvPr id="78" name="Gerader Verbinder 77">
             <a:extLst>
               <a:ext uri="{FF2B5EF4-FFF2-40B4-BE49-F238E27FC236}">
-                <a16:creationId xmlns:a16="http://schemas.microsoft.com/office/drawing/2014/main" xmlns="" id="{50314709-C71D-4802-9A64-9B6A739D8D53}"/>
+                <a16:creationId xmlns:a16="http://schemas.microsoft.com/office/drawing/2014/main" id="{50314709-C71D-4802-9A64-9B6A739D8D53}"/>
               </a:ext>
             </a:extLst>
           </p:cNvPr>
@@ -10351,7 +10332,7 @@
           <p:cNvPr id="8" name="Raute 7">
             <a:extLst>
               <a:ext uri="{FF2B5EF4-FFF2-40B4-BE49-F238E27FC236}">
-                <a16:creationId xmlns:a16="http://schemas.microsoft.com/office/drawing/2014/main" xmlns="" id="{CC61A28D-FF01-4225-BD8C-404A7273CD1F}"/>
+                <a16:creationId xmlns:a16="http://schemas.microsoft.com/office/drawing/2014/main" id="{CC61A28D-FF01-4225-BD8C-404A7273CD1F}"/>
               </a:ext>
             </a:extLst>
           </p:cNvPr>
@@ -10405,7 +10386,7 @@
           <p:cNvPr id="232" name="Rechteck 231">
             <a:extLst>
               <a:ext uri="{FF2B5EF4-FFF2-40B4-BE49-F238E27FC236}">
-                <a16:creationId xmlns:a16="http://schemas.microsoft.com/office/drawing/2014/main" xmlns="" id="{A747E597-7F05-4B7F-B28D-2E0EFA50299A}"/>
+                <a16:creationId xmlns:a16="http://schemas.microsoft.com/office/drawing/2014/main" id="{A747E597-7F05-4B7F-B28D-2E0EFA50299A}"/>
               </a:ext>
             </a:extLst>
           </p:cNvPr>
@@ -10468,7 +10449,7 @@
           <p:cNvPr id="239" name="Rechteck 238">
             <a:extLst>
               <a:ext uri="{FF2B5EF4-FFF2-40B4-BE49-F238E27FC236}">
-                <a16:creationId xmlns:a16="http://schemas.microsoft.com/office/drawing/2014/main" xmlns="" id="{0A885F55-CD07-4900-8676-37C7BD615CBA}"/>
+                <a16:creationId xmlns:a16="http://schemas.microsoft.com/office/drawing/2014/main" id="{0A885F55-CD07-4900-8676-37C7BD615CBA}"/>
               </a:ext>
             </a:extLst>
           </p:cNvPr>
@@ -10531,7 +10512,7 @@
           <p:cNvPr id="240" name="Rechteck 239">
             <a:extLst>
               <a:ext uri="{FF2B5EF4-FFF2-40B4-BE49-F238E27FC236}">
-                <a16:creationId xmlns:a16="http://schemas.microsoft.com/office/drawing/2014/main" xmlns="" id="{4532BA4E-C08D-46C2-BAB2-7E91F64FAACA}"/>
+                <a16:creationId xmlns:a16="http://schemas.microsoft.com/office/drawing/2014/main" id="{4532BA4E-C08D-46C2-BAB2-7E91F64FAACA}"/>
               </a:ext>
             </a:extLst>
           </p:cNvPr>
@@ -10594,7 +10575,7 @@
           <p:cNvPr id="241" name="Rechteck 240">
             <a:extLst>
               <a:ext uri="{FF2B5EF4-FFF2-40B4-BE49-F238E27FC236}">
-                <a16:creationId xmlns:a16="http://schemas.microsoft.com/office/drawing/2014/main" xmlns="" id="{7E3B1A44-620F-4FD6-BCE8-F08B09EC0AF8}"/>
+                <a16:creationId xmlns:a16="http://schemas.microsoft.com/office/drawing/2014/main" id="{7E3B1A44-620F-4FD6-BCE8-F08B09EC0AF8}"/>
               </a:ext>
             </a:extLst>
           </p:cNvPr>
@@ -10657,7 +10638,7 @@
           <p:cNvPr id="246" name="Rechteck 245">
             <a:extLst>
               <a:ext uri="{FF2B5EF4-FFF2-40B4-BE49-F238E27FC236}">
-                <a16:creationId xmlns:a16="http://schemas.microsoft.com/office/drawing/2014/main" xmlns="" id="{BD775571-9FA5-4D2D-9DB6-B7139BC1673B}"/>
+                <a16:creationId xmlns:a16="http://schemas.microsoft.com/office/drawing/2014/main" id="{BD775571-9FA5-4D2D-9DB6-B7139BC1673B}"/>
               </a:ext>
             </a:extLst>
           </p:cNvPr>
@@ -10720,7 +10701,7 @@
           <p:cNvPr id="260" name="Rechteck 259">
             <a:extLst>
               <a:ext uri="{FF2B5EF4-FFF2-40B4-BE49-F238E27FC236}">
-                <a16:creationId xmlns:a16="http://schemas.microsoft.com/office/drawing/2014/main" xmlns="" id="{1A624FBD-2AE1-4093-9D30-EC61E161EA2D}"/>
+                <a16:creationId xmlns:a16="http://schemas.microsoft.com/office/drawing/2014/main" id="{1A624FBD-2AE1-4093-9D30-EC61E161EA2D}"/>
               </a:ext>
             </a:extLst>
           </p:cNvPr>
@@ -10855,7 +10836,7 @@
           <p:cNvPr id="2" name="Rechteck 1">
             <a:extLst>
               <a:ext uri="{FF2B5EF4-FFF2-40B4-BE49-F238E27FC236}">
-                <a16:creationId xmlns:a16="http://schemas.microsoft.com/office/drawing/2014/main" xmlns="" id="{789D4BB0-1841-441A-997B-7C401B8BCCDF}"/>
+                <a16:creationId xmlns:a16="http://schemas.microsoft.com/office/drawing/2014/main" id="{789D4BB0-1841-441A-997B-7C401B8BCCDF}"/>
               </a:ext>
             </a:extLst>
           </p:cNvPr>
@@ -10909,7 +10890,7 @@
           <p:cNvPr id="4" name="Rechteck 3">
             <a:extLst>
               <a:ext uri="{FF2B5EF4-FFF2-40B4-BE49-F238E27FC236}">
-                <a16:creationId xmlns:a16="http://schemas.microsoft.com/office/drawing/2014/main" xmlns="" id="{5A9DEE85-B450-4F58-B1E4-288CFAD40E8F}"/>
+                <a16:creationId xmlns:a16="http://schemas.microsoft.com/office/drawing/2014/main" id="{5A9DEE85-B450-4F58-B1E4-288CFAD40E8F}"/>
               </a:ext>
             </a:extLst>
           </p:cNvPr>
@@ -10963,7 +10944,7 @@
           <p:cNvPr id="5" name="Textfeld 4">
             <a:extLst>
               <a:ext uri="{FF2B5EF4-FFF2-40B4-BE49-F238E27FC236}">
-                <a16:creationId xmlns:a16="http://schemas.microsoft.com/office/drawing/2014/main" xmlns="" id="{188D7BE6-4ADB-4E45-8116-007446A5DA25}"/>
+                <a16:creationId xmlns:a16="http://schemas.microsoft.com/office/drawing/2014/main" id="{188D7BE6-4ADB-4E45-8116-007446A5DA25}"/>
               </a:ext>
             </a:extLst>
           </p:cNvPr>
@@ -10998,7 +10979,7 @@
           <p:cNvPr id="6" name="Rechteck 5">
             <a:extLst>
               <a:ext uri="{FF2B5EF4-FFF2-40B4-BE49-F238E27FC236}">
-                <a16:creationId xmlns:a16="http://schemas.microsoft.com/office/drawing/2014/main" xmlns="" id="{1FE21EBA-28AA-42B3-8C09-9B931B5BEB70}"/>
+                <a16:creationId xmlns:a16="http://schemas.microsoft.com/office/drawing/2014/main" id="{1FE21EBA-28AA-42B3-8C09-9B931B5BEB70}"/>
               </a:ext>
             </a:extLst>
           </p:cNvPr>
@@ -11052,7 +11033,7 @@
           <p:cNvPr id="7" name="Rechteck 6">
             <a:extLst>
               <a:ext uri="{FF2B5EF4-FFF2-40B4-BE49-F238E27FC236}">
-                <a16:creationId xmlns:a16="http://schemas.microsoft.com/office/drawing/2014/main" xmlns="" id="{198504FF-B49F-40CF-8B78-4EABC12894EB}"/>
+                <a16:creationId xmlns:a16="http://schemas.microsoft.com/office/drawing/2014/main" id="{198504FF-B49F-40CF-8B78-4EABC12894EB}"/>
               </a:ext>
             </a:extLst>
           </p:cNvPr>
@@ -11108,7 +11089,7 @@
           <p:cNvPr id="8" name="Textfeld 7">
             <a:extLst>
               <a:ext uri="{FF2B5EF4-FFF2-40B4-BE49-F238E27FC236}">
-                <a16:creationId xmlns:a16="http://schemas.microsoft.com/office/drawing/2014/main" xmlns="" id="{BBBD69C0-C370-432B-964D-A3EB28505C6A}"/>
+                <a16:creationId xmlns:a16="http://schemas.microsoft.com/office/drawing/2014/main" id="{BBBD69C0-C370-432B-964D-A3EB28505C6A}"/>
               </a:ext>
             </a:extLst>
           </p:cNvPr>
@@ -11143,7 +11124,7 @@
           <p:cNvPr id="9" name="Rechteck 8">
             <a:extLst>
               <a:ext uri="{FF2B5EF4-FFF2-40B4-BE49-F238E27FC236}">
-                <a16:creationId xmlns:a16="http://schemas.microsoft.com/office/drawing/2014/main" xmlns="" id="{3E6AF859-3F91-4FCF-8E24-466E5D3CD574}"/>
+                <a16:creationId xmlns:a16="http://schemas.microsoft.com/office/drawing/2014/main" id="{3E6AF859-3F91-4FCF-8E24-466E5D3CD574}"/>
               </a:ext>
             </a:extLst>
           </p:cNvPr>
@@ -11197,7 +11178,7 @@
           <p:cNvPr id="10" name="Rechteck 9">
             <a:extLst>
               <a:ext uri="{FF2B5EF4-FFF2-40B4-BE49-F238E27FC236}">
-                <a16:creationId xmlns:a16="http://schemas.microsoft.com/office/drawing/2014/main" xmlns="" id="{DA0CC132-0DE3-496A-9F29-83905C77123F}"/>
+                <a16:creationId xmlns:a16="http://schemas.microsoft.com/office/drawing/2014/main" id="{DA0CC132-0DE3-496A-9F29-83905C77123F}"/>
               </a:ext>
             </a:extLst>
           </p:cNvPr>
@@ -11251,7 +11232,7 @@
           <p:cNvPr id="11" name="Textfeld 10">
             <a:extLst>
               <a:ext uri="{FF2B5EF4-FFF2-40B4-BE49-F238E27FC236}">
-                <a16:creationId xmlns:a16="http://schemas.microsoft.com/office/drawing/2014/main" xmlns="" id="{691D1973-7F94-4C7D-AC73-27E85F3F47F8}"/>
+                <a16:creationId xmlns:a16="http://schemas.microsoft.com/office/drawing/2014/main" id="{691D1973-7F94-4C7D-AC73-27E85F3F47F8}"/>
               </a:ext>
             </a:extLst>
           </p:cNvPr>
@@ -11286,7 +11267,7 @@
           <p:cNvPr id="12" name="Textfeld 11">
             <a:extLst>
               <a:ext uri="{FF2B5EF4-FFF2-40B4-BE49-F238E27FC236}">
-                <a16:creationId xmlns:a16="http://schemas.microsoft.com/office/drawing/2014/main" xmlns="" id="{B8757B61-0E5E-431F-8FDB-8348883B620C}"/>
+                <a16:creationId xmlns:a16="http://schemas.microsoft.com/office/drawing/2014/main" id="{B8757B61-0E5E-431F-8FDB-8348883B620C}"/>
               </a:ext>
             </a:extLst>
           </p:cNvPr>
@@ -11321,7 +11302,7 @@
           <p:cNvPr id="13" name="Rechteck 12">
             <a:extLst>
               <a:ext uri="{FF2B5EF4-FFF2-40B4-BE49-F238E27FC236}">
-                <a16:creationId xmlns:a16="http://schemas.microsoft.com/office/drawing/2014/main" xmlns="" id="{F756D5EC-7855-4DB5-A464-FAC4F172B0FE}"/>
+                <a16:creationId xmlns:a16="http://schemas.microsoft.com/office/drawing/2014/main" id="{F756D5EC-7855-4DB5-A464-FAC4F172B0FE}"/>
               </a:ext>
             </a:extLst>
           </p:cNvPr>
@@ -11375,7 +11356,7 @@
           <p:cNvPr id="14" name="Textfeld 13">
             <a:extLst>
               <a:ext uri="{FF2B5EF4-FFF2-40B4-BE49-F238E27FC236}">
-                <a16:creationId xmlns:a16="http://schemas.microsoft.com/office/drawing/2014/main" xmlns="" id="{C015364A-4ED7-42F3-874B-FF07FAC29725}"/>
+                <a16:creationId xmlns:a16="http://schemas.microsoft.com/office/drawing/2014/main" id="{C015364A-4ED7-42F3-874B-FF07FAC29725}"/>
               </a:ext>
             </a:extLst>
           </p:cNvPr>
@@ -11410,7 +11391,7 @@
           <p:cNvPr id="15" name="Rechteck 14">
             <a:extLst>
               <a:ext uri="{FF2B5EF4-FFF2-40B4-BE49-F238E27FC236}">
-                <a16:creationId xmlns:a16="http://schemas.microsoft.com/office/drawing/2014/main" xmlns="" id="{E5B309CE-54CD-4934-BBC9-3C801902A483}"/>
+                <a16:creationId xmlns:a16="http://schemas.microsoft.com/office/drawing/2014/main" id="{E5B309CE-54CD-4934-BBC9-3C801902A483}"/>
               </a:ext>
             </a:extLst>
           </p:cNvPr>
@@ -11464,7 +11445,7 @@
           <p:cNvPr id="16" name="Rechteck 15">
             <a:extLst>
               <a:ext uri="{FF2B5EF4-FFF2-40B4-BE49-F238E27FC236}">
-                <a16:creationId xmlns:a16="http://schemas.microsoft.com/office/drawing/2014/main" xmlns="" id="{17823885-430E-46DC-8654-49DC2DC0CCFA}"/>
+                <a16:creationId xmlns:a16="http://schemas.microsoft.com/office/drawing/2014/main" id="{17823885-430E-46DC-8654-49DC2DC0CCFA}"/>
               </a:ext>
             </a:extLst>
           </p:cNvPr>
@@ -11518,7 +11499,7 @@
           <p:cNvPr id="17" name="Rechteck 16">
             <a:extLst>
               <a:ext uri="{FF2B5EF4-FFF2-40B4-BE49-F238E27FC236}">
-                <a16:creationId xmlns:a16="http://schemas.microsoft.com/office/drawing/2014/main" xmlns="" id="{1F6094E2-313D-4537-9519-68E676526E2D}"/>
+                <a16:creationId xmlns:a16="http://schemas.microsoft.com/office/drawing/2014/main" id="{1F6094E2-313D-4537-9519-68E676526E2D}"/>
               </a:ext>
             </a:extLst>
           </p:cNvPr>
@@ -11572,7 +11553,7 @@
           <p:cNvPr id="18" name="Rechteck 17">
             <a:extLst>
               <a:ext uri="{FF2B5EF4-FFF2-40B4-BE49-F238E27FC236}">
-                <a16:creationId xmlns:a16="http://schemas.microsoft.com/office/drawing/2014/main" xmlns="" id="{1E0899CE-35D9-4373-A27B-63BD792A0C7E}"/>
+                <a16:creationId xmlns:a16="http://schemas.microsoft.com/office/drawing/2014/main" id="{1E0899CE-35D9-4373-A27B-63BD792A0C7E}"/>
               </a:ext>
             </a:extLst>
           </p:cNvPr>
@@ -11628,7 +11609,7 @@
           <p:cNvPr id="19" name="Textfeld 18">
             <a:extLst>
               <a:ext uri="{FF2B5EF4-FFF2-40B4-BE49-F238E27FC236}">
-                <a16:creationId xmlns:a16="http://schemas.microsoft.com/office/drawing/2014/main" xmlns="" id="{835A0D86-C064-49F1-B106-3C5712FD1981}"/>
+                <a16:creationId xmlns:a16="http://schemas.microsoft.com/office/drawing/2014/main" id="{835A0D86-C064-49F1-B106-3C5712FD1981}"/>
               </a:ext>
             </a:extLst>
           </p:cNvPr>
@@ -11663,7 +11644,7 @@
           <p:cNvPr id="20" name="Textfeld 19">
             <a:extLst>
               <a:ext uri="{FF2B5EF4-FFF2-40B4-BE49-F238E27FC236}">
-                <a16:creationId xmlns:a16="http://schemas.microsoft.com/office/drawing/2014/main" xmlns="" id="{ACB1B8CE-4BC7-4CC9-B4D4-343365846CAC}"/>
+                <a16:creationId xmlns:a16="http://schemas.microsoft.com/office/drawing/2014/main" id="{ACB1B8CE-4BC7-4CC9-B4D4-343365846CAC}"/>
               </a:ext>
             </a:extLst>
           </p:cNvPr>
@@ -11698,7 +11679,7 @@
           <p:cNvPr id="21" name="Textfeld 20">
             <a:extLst>
               <a:ext uri="{FF2B5EF4-FFF2-40B4-BE49-F238E27FC236}">
-                <a16:creationId xmlns:a16="http://schemas.microsoft.com/office/drawing/2014/main" xmlns="" id="{CC9F90D0-FF8F-4098-92A7-FD1F9C2BB88C}"/>
+                <a16:creationId xmlns:a16="http://schemas.microsoft.com/office/drawing/2014/main" id="{CC9F90D0-FF8F-4098-92A7-FD1F9C2BB88C}"/>
               </a:ext>
             </a:extLst>
           </p:cNvPr>
@@ -11733,7 +11714,7 @@
           <p:cNvPr id="22" name="Rechteck 21">
             <a:extLst>
               <a:ext uri="{FF2B5EF4-FFF2-40B4-BE49-F238E27FC236}">
-                <a16:creationId xmlns:a16="http://schemas.microsoft.com/office/drawing/2014/main" xmlns="" id="{5413F820-0C89-45AD-B854-9EDA7E2EEA07}"/>
+                <a16:creationId xmlns:a16="http://schemas.microsoft.com/office/drawing/2014/main" id="{5413F820-0C89-45AD-B854-9EDA7E2EEA07}"/>
               </a:ext>
             </a:extLst>
           </p:cNvPr>
@@ -11787,7 +11768,7 @@
           <p:cNvPr id="23" name="Textfeld 22">
             <a:extLst>
               <a:ext uri="{FF2B5EF4-FFF2-40B4-BE49-F238E27FC236}">
-                <a16:creationId xmlns:a16="http://schemas.microsoft.com/office/drawing/2014/main" xmlns="" id="{894E6227-6F36-4A9A-84C8-49D2FDA48B84}"/>
+                <a16:creationId xmlns:a16="http://schemas.microsoft.com/office/drawing/2014/main" id="{894E6227-6F36-4A9A-84C8-49D2FDA48B84}"/>
               </a:ext>
             </a:extLst>
           </p:cNvPr>
@@ -11822,7 +11803,7 @@
           <p:cNvPr id="24" name="Rechteck 23">
             <a:extLst>
               <a:ext uri="{FF2B5EF4-FFF2-40B4-BE49-F238E27FC236}">
-                <a16:creationId xmlns:a16="http://schemas.microsoft.com/office/drawing/2014/main" xmlns="" id="{A2B6F4AC-FF10-4C37-ACAB-050A459996B6}"/>
+                <a16:creationId xmlns:a16="http://schemas.microsoft.com/office/drawing/2014/main" id="{A2B6F4AC-FF10-4C37-ACAB-050A459996B6}"/>
               </a:ext>
             </a:extLst>
           </p:cNvPr>
@@ -11885,7 +11866,7 @@
           <p:cNvPr id="25" name="Rechteck 24">
             <a:extLst>
               <a:ext uri="{FF2B5EF4-FFF2-40B4-BE49-F238E27FC236}">
-                <a16:creationId xmlns:a16="http://schemas.microsoft.com/office/drawing/2014/main" xmlns="" id="{E493A8AB-29BB-40D4-86CE-982993B67A9A}"/>
+                <a16:creationId xmlns:a16="http://schemas.microsoft.com/office/drawing/2014/main" id="{E493A8AB-29BB-40D4-86CE-982993B67A9A}"/>
               </a:ext>
             </a:extLst>
           </p:cNvPr>
@@ -11948,7 +11929,7 @@
           <p:cNvPr id="26" name="Rechteck 25">
             <a:extLst>
               <a:ext uri="{FF2B5EF4-FFF2-40B4-BE49-F238E27FC236}">
-                <a16:creationId xmlns:a16="http://schemas.microsoft.com/office/drawing/2014/main" xmlns="" id="{8F98E980-7A81-43E7-B86F-B34750A903CE}"/>
+                <a16:creationId xmlns:a16="http://schemas.microsoft.com/office/drawing/2014/main" id="{8F98E980-7A81-43E7-B86F-B34750A903CE}"/>
               </a:ext>
             </a:extLst>
           </p:cNvPr>
@@ -12011,7 +11992,7 @@
           <p:cNvPr id="27" name="Rechteck 26">
             <a:extLst>
               <a:ext uri="{FF2B5EF4-FFF2-40B4-BE49-F238E27FC236}">
-                <a16:creationId xmlns:a16="http://schemas.microsoft.com/office/drawing/2014/main" xmlns="" id="{9237488E-D8CA-4901-893F-F5CBC81D9E05}"/>
+                <a16:creationId xmlns:a16="http://schemas.microsoft.com/office/drawing/2014/main" id="{9237488E-D8CA-4901-893F-F5CBC81D9E05}"/>
               </a:ext>
             </a:extLst>
           </p:cNvPr>
@@ -12074,7 +12055,7 @@
           <p:cNvPr id="28" name="Rechteck 27">
             <a:extLst>
               <a:ext uri="{FF2B5EF4-FFF2-40B4-BE49-F238E27FC236}">
-                <a16:creationId xmlns:a16="http://schemas.microsoft.com/office/drawing/2014/main" xmlns="" id="{560609F4-344A-4471-BF9F-1635C4CD6F19}"/>
+                <a16:creationId xmlns:a16="http://schemas.microsoft.com/office/drawing/2014/main" id="{560609F4-344A-4471-BF9F-1635C4CD6F19}"/>
               </a:ext>
             </a:extLst>
           </p:cNvPr>
@@ -12137,7 +12118,7 @@
           <p:cNvPr id="29" name="Rechteck 28">
             <a:extLst>
               <a:ext uri="{FF2B5EF4-FFF2-40B4-BE49-F238E27FC236}">
-                <a16:creationId xmlns:a16="http://schemas.microsoft.com/office/drawing/2014/main" xmlns="" id="{F4E8C2A9-FFE2-48F0-8134-035A63CFC6C2}"/>
+                <a16:creationId xmlns:a16="http://schemas.microsoft.com/office/drawing/2014/main" id="{F4E8C2A9-FFE2-48F0-8134-035A63CFC6C2}"/>
               </a:ext>
             </a:extLst>
           </p:cNvPr>
@@ -12200,7 +12181,7 @@
           <p:cNvPr id="30" name="Rechteck 29">
             <a:extLst>
               <a:ext uri="{FF2B5EF4-FFF2-40B4-BE49-F238E27FC236}">
-                <a16:creationId xmlns:a16="http://schemas.microsoft.com/office/drawing/2014/main" xmlns="" id="{B4FD7538-B21F-4B09-B0DE-C3F2E854EEE9}"/>
+                <a16:creationId xmlns:a16="http://schemas.microsoft.com/office/drawing/2014/main" id="{B4FD7538-B21F-4B09-B0DE-C3F2E854EEE9}"/>
               </a:ext>
             </a:extLst>
           </p:cNvPr>
@@ -12263,7 +12244,7 @@
           <p:cNvPr id="31" name="Rechteck 30">
             <a:extLst>
               <a:ext uri="{FF2B5EF4-FFF2-40B4-BE49-F238E27FC236}">
-                <a16:creationId xmlns:a16="http://schemas.microsoft.com/office/drawing/2014/main" xmlns="" id="{E42C97CA-F519-4D22-BEC6-9B43C0C2DFE4}"/>
+                <a16:creationId xmlns:a16="http://schemas.microsoft.com/office/drawing/2014/main" id="{E42C97CA-F519-4D22-BEC6-9B43C0C2DFE4}"/>
               </a:ext>
             </a:extLst>
           </p:cNvPr>
@@ -12326,7 +12307,7 @@
           <p:cNvPr id="32" name="Rechteck 31">
             <a:extLst>
               <a:ext uri="{FF2B5EF4-FFF2-40B4-BE49-F238E27FC236}">
-                <a16:creationId xmlns:a16="http://schemas.microsoft.com/office/drawing/2014/main" xmlns="" id="{DF02B700-D27E-45AF-916E-BFC806BF15EA}"/>
+                <a16:creationId xmlns:a16="http://schemas.microsoft.com/office/drawing/2014/main" id="{DF02B700-D27E-45AF-916E-BFC806BF15EA}"/>
               </a:ext>
             </a:extLst>
           </p:cNvPr>
@@ -12389,7 +12370,7 @@
           <p:cNvPr id="72" name="Rechteck 71">
             <a:extLst>
               <a:ext uri="{FF2B5EF4-FFF2-40B4-BE49-F238E27FC236}">
-                <a16:creationId xmlns:a16="http://schemas.microsoft.com/office/drawing/2014/main" xmlns="" id="{F229E9A3-27E8-45BD-A52B-A958D1BF1A1C}"/>
+                <a16:creationId xmlns:a16="http://schemas.microsoft.com/office/drawing/2014/main" id="{F229E9A3-27E8-45BD-A52B-A958D1BF1A1C}"/>
               </a:ext>
             </a:extLst>
           </p:cNvPr>
@@ -12443,7 +12424,7 @@
           <p:cNvPr id="76" name="Rechteck 75">
             <a:extLst>
               <a:ext uri="{FF2B5EF4-FFF2-40B4-BE49-F238E27FC236}">
-                <a16:creationId xmlns:a16="http://schemas.microsoft.com/office/drawing/2014/main" xmlns="" id="{AC7EDC85-52F0-493E-882A-06F550AC93CF}"/>
+                <a16:creationId xmlns:a16="http://schemas.microsoft.com/office/drawing/2014/main" id="{AC7EDC85-52F0-493E-882A-06F550AC93CF}"/>
               </a:ext>
             </a:extLst>
           </p:cNvPr>
@@ -12497,7 +12478,7 @@
           <p:cNvPr id="79" name="Textfeld 78">
             <a:extLst>
               <a:ext uri="{FF2B5EF4-FFF2-40B4-BE49-F238E27FC236}">
-                <a16:creationId xmlns:a16="http://schemas.microsoft.com/office/drawing/2014/main" xmlns="" id="{C9DC4167-05C2-44C0-A24D-5BF679254525}"/>
+                <a16:creationId xmlns:a16="http://schemas.microsoft.com/office/drawing/2014/main" id="{C9DC4167-05C2-44C0-A24D-5BF679254525}"/>
               </a:ext>
             </a:extLst>
           </p:cNvPr>
@@ -12532,7 +12513,7 @@
           <p:cNvPr id="80" name="Rechteck 79">
             <a:extLst>
               <a:ext uri="{FF2B5EF4-FFF2-40B4-BE49-F238E27FC236}">
-                <a16:creationId xmlns:a16="http://schemas.microsoft.com/office/drawing/2014/main" xmlns="" id="{8FAC447F-A8C3-45F8-97D4-EBB80C8789AD}"/>
+                <a16:creationId xmlns:a16="http://schemas.microsoft.com/office/drawing/2014/main" id="{8FAC447F-A8C3-45F8-97D4-EBB80C8789AD}"/>
               </a:ext>
             </a:extLst>
           </p:cNvPr>
@@ -12586,7 +12567,7 @@
           <p:cNvPr id="81" name="Rechteck 80">
             <a:extLst>
               <a:ext uri="{FF2B5EF4-FFF2-40B4-BE49-F238E27FC236}">
-                <a16:creationId xmlns:a16="http://schemas.microsoft.com/office/drawing/2014/main" xmlns="" id="{05ADE567-D384-4AAF-8486-3804579108B8}"/>
+                <a16:creationId xmlns:a16="http://schemas.microsoft.com/office/drawing/2014/main" id="{05ADE567-D384-4AAF-8486-3804579108B8}"/>
               </a:ext>
             </a:extLst>
           </p:cNvPr>
@@ -12642,7 +12623,7 @@
           <p:cNvPr id="82" name="Textfeld 81">
             <a:extLst>
               <a:ext uri="{FF2B5EF4-FFF2-40B4-BE49-F238E27FC236}">
-                <a16:creationId xmlns:a16="http://schemas.microsoft.com/office/drawing/2014/main" xmlns="" id="{BF473B50-81AD-41E5-A911-A2A564C61A6C}"/>
+                <a16:creationId xmlns:a16="http://schemas.microsoft.com/office/drawing/2014/main" id="{BF473B50-81AD-41E5-A911-A2A564C61A6C}"/>
               </a:ext>
             </a:extLst>
           </p:cNvPr>
@@ -12677,7 +12658,7 @@
           <p:cNvPr id="83" name="Rechteck 82">
             <a:extLst>
               <a:ext uri="{FF2B5EF4-FFF2-40B4-BE49-F238E27FC236}">
-                <a16:creationId xmlns:a16="http://schemas.microsoft.com/office/drawing/2014/main" xmlns="" id="{C4D13D0A-50E9-4B93-9D74-64D01E217EBF}"/>
+                <a16:creationId xmlns:a16="http://schemas.microsoft.com/office/drawing/2014/main" id="{C4D13D0A-50E9-4B93-9D74-64D01E217EBF}"/>
               </a:ext>
             </a:extLst>
           </p:cNvPr>
@@ -12731,7 +12712,7 @@
           <p:cNvPr id="84" name="Rechteck 83">
             <a:extLst>
               <a:ext uri="{FF2B5EF4-FFF2-40B4-BE49-F238E27FC236}">
-                <a16:creationId xmlns:a16="http://schemas.microsoft.com/office/drawing/2014/main" xmlns="" id="{B583611B-FBA3-41BE-A350-F8A0F8AAE955}"/>
+                <a16:creationId xmlns:a16="http://schemas.microsoft.com/office/drawing/2014/main" id="{B583611B-FBA3-41BE-A350-F8A0F8AAE955}"/>
               </a:ext>
             </a:extLst>
           </p:cNvPr>
@@ -12785,7 +12766,7 @@
           <p:cNvPr id="85" name="Textfeld 84">
             <a:extLst>
               <a:ext uri="{FF2B5EF4-FFF2-40B4-BE49-F238E27FC236}">
-                <a16:creationId xmlns:a16="http://schemas.microsoft.com/office/drawing/2014/main" xmlns="" id="{BB3AC957-3C9B-4B59-8B3B-98F47A75B38F}"/>
+                <a16:creationId xmlns:a16="http://schemas.microsoft.com/office/drawing/2014/main" id="{BB3AC957-3C9B-4B59-8B3B-98F47A75B38F}"/>
               </a:ext>
             </a:extLst>
           </p:cNvPr>
@@ -12820,7 +12801,7 @@
           <p:cNvPr id="86" name="Textfeld 85">
             <a:extLst>
               <a:ext uri="{FF2B5EF4-FFF2-40B4-BE49-F238E27FC236}">
-                <a16:creationId xmlns:a16="http://schemas.microsoft.com/office/drawing/2014/main" xmlns="" id="{399AA93D-6E31-44C4-92E6-C94C9F607361}"/>
+                <a16:creationId xmlns:a16="http://schemas.microsoft.com/office/drawing/2014/main" id="{399AA93D-6E31-44C4-92E6-C94C9F607361}"/>
               </a:ext>
             </a:extLst>
           </p:cNvPr>
@@ -12855,7 +12836,7 @@
           <p:cNvPr id="87" name="Rechteck 86">
             <a:extLst>
               <a:ext uri="{FF2B5EF4-FFF2-40B4-BE49-F238E27FC236}">
-                <a16:creationId xmlns:a16="http://schemas.microsoft.com/office/drawing/2014/main" xmlns="" id="{25FD5124-D0A5-4548-AA89-BBDFA15E0936}"/>
+                <a16:creationId xmlns:a16="http://schemas.microsoft.com/office/drawing/2014/main" id="{25FD5124-D0A5-4548-AA89-BBDFA15E0936}"/>
               </a:ext>
             </a:extLst>
           </p:cNvPr>
@@ -12909,7 +12890,7 @@
           <p:cNvPr id="88" name="Textfeld 87">
             <a:extLst>
               <a:ext uri="{FF2B5EF4-FFF2-40B4-BE49-F238E27FC236}">
-                <a16:creationId xmlns:a16="http://schemas.microsoft.com/office/drawing/2014/main" xmlns="" id="{F479D49B-3183-4815-A57F-277C4FA8F7BE}"/>
+                <a16:creationId xmlns:a16="http://schemas.microsoft.com/office/drawing/2014/main" id="{F479D49B-3183-4815-A57F-277C4FA8F7BE}"/>
               </a:ext>
             </a:extLst>
           </p:cNvPr>
@@ -12944,7 +12925,7 @@
           <p:cNvPr id="89" name="Rechteck 88">
             <a:extLst>
               <a:ext uri="{FF2B5EF4-FFF2-40B4-BE49-F238E27FC236}">
-                <a16:creationId xmlns:a16="http://schemas.microsoft.com/office/drawing/2014/main" xmlns="" id="{22DB34FC-704D-483D-9103-FD7A5E0A978B}"/>
+                <a16:creationId xmlns:a16="http://schemas.microsoft.com/office/drawing/2014/main" id="{22DB34FC-704D-483D-9103-FD7A5E0A978B}"/>
               </a:ext>
             </a:extLst>
           </p:cNvPr>
@@ -12998,7 +12979,7 @@
           <p:cNvPr id="90" name="Rechteck 89">
             <a:extLst>
               <a:ext uri="{FF2B5EF4-FFF2-40B4-BE49-F238E27FC236}">
-                <a16:creationId xmlns:a16="http://schemas.microsoft.com/office/drawing/2014/main" xmlns="" id="{90171F83-7E06-4680-A1DE-7DE2C544F71B}"/>
+                <a16:creationId xmlns:a16="http://schemas.microsoft.com/office/drawing/2014/main" id="{90171F83-7E06-4680-A1DE-7DE2C544F71B}"/>
               </a:ext>
             </a:extLst>
           </p:cNvPr>
@@ -13052,7 +13033,7 @@
           <p:cNvPr id="91" name="Rechteck 90">
             <a:extLst>
               <a:ext uri="{FF2B5EF4-FFF2-40B4-BE49-F238E27FC236}">
-                <a16:creationId xmlns:a16="http://schemas.microsoft.com/office/drawing/2014/main" xmlns="" id="{B6EA5B14-5FDD-48B8-9F52-95565E3A9E5A}"/>
+                <a16:creationId xmlns:a16="http://schemas.microsoft.com/office/drawing/2014/main" id="{B6EA5B14-5FDD-48B8-9F52-95565E3A9E5A}"/>
               </a:ext>
             </a:extLst>
           </p:cNvPr>
@@ -13106,7 +13087,7 @@
           <p:cNvPr id="92" name="Rechteck 91">
             <a:extLst>
               <a:ext uri="{FF2B5EF4-FFF2-40B4-BE49-F238E27FC236}">
-                <a16:creationId xmlns:a16="http://schemas.microsoft.com/office/drawing/2014/main" xmlns="" id="{5232674D-0975-4BF1-9C89-FD06E863B4E1}"/>
+                <a16:creationId xmlns:a16="http://schemas.microsoft.com/office/drawing/2014/main" id="{5232674D-0975-4BF1-9C89-FD06E863B4E1}"/>
               </a:ext>
             </a:extLst>
           </p:cNvPr>
@@ -13162,7 +13143,7 @@
           <p:cNvPr id="93" name="Textfeld 92">
             <a:extLst>
               <a:ext uri="{FF2B5EF4-FFF2-40B4-BE49-F238E27FC236}">
-                <a16:creationId xmlns:a16="http://schemas.microsoft.com/office/drawing/2014/main" xmlns="" id="{D902C242-8E20-4033-864F-0C6CC450C370}"/>
+                <a16:creationId xmlns:a16="http://schemas.microsoft.com/office/drawing/2014/main" id="{D902C242-8E20-4033-864F-0C6CC450C370}"/>
               </a:ext>
             </a:extLst>
           </p:cNvPr>
@@ -13197,7 +13178,7 @@
           <p:cNvPr id="94" name="Textfeld 93">
             <a:extLst>
               <a:ext uri="{FF2B5EF4-FFF2-40B4-BE49-F238E27FC236}">
-                <a16:creationId xmlns:a16="http://schemas.microsoft.com/office/drawing/2014/main" xmlns="" id="{03610CD1-6966-4BC0-B25E-64D3042868C1}"/>
+                <a16:creationId xmlns:a16="http://schemas.microsoft.com/office/drawing/2014/main" id="{03610CD1-6966-4BC0-B25E-64D3042868C1}"/>
               </a:ext>
             </a:extLst>
           </p:cNvPr>
@@ -13232,7 +13213,7 @@
           <p:cNvPr id="95" name="Textfeld 94">
             <a:extLst>
               <a:ext uri="{FF2B5EF4-FFF2-40B4-BE49-F238E27FC236}">
-                <a16:creationId xmlns:a16="http://schemas.microsoft.com/office/drawing/2014/main" xmlns="" id="{5A89971D-22BF-427E-B814-7BEBEDE6117F}"/>
+                <a16:creationId xmlns:a16="http://schemas.microsoft.com/office/drawing/2014/main" id="{5A89971D-22BF-427E-B814-7BEBEDE6117F}"/>
               </a:ext>
             </a:extLst>
           </p:cNvPr>
@@ -13267,7 +13248,7 @@
           <p:cNvPr id="96" name="Rechteck 95">
             <a:extLst>
               <a:ext uri="{FF2B5EF4-FFF2-40B4-BE49-F238E27FC236}">
-                <a16:creationId xmlns:a16="http://schemas.microsoft.com/office/drawing/2014/main" xmlns="" id="{4F22658E-A4FE-4804-870A-C75E525BCE51}"/>
+                <a16:creationId xmlns:a16="http://schemas.microsoft.com/office/drawing/2014/main" id="{4F22658E-A4FE-4804-870A-C75E525BCE51}"/>
               </a:ext>
             </a:extLst>
           </p:cNvPr>
@@ -13321,7 +13302,7 @@
           <p:cNvPr id="97" name="Textfeld 96">
             <a:extLst>
               <a:ext uri="{FF2B5EF4-FFF2-40B4-BE49-F238E27FC236}">
-                <a16:creationId xmlns:a16="http://schemas.microsoft.com/office/drawing/2014/main" xmlns="" id="{E6A74C5D-2DBF-4241-A43B-6BD93CFBEEEF}"/>
+                <a16:creationId xmlns:a16="http://schemas.microsoft.com/office/drawing/2014/main" id="{E6A74C5D-2DBF-4241-A43B-6BD93CFBEEEF}"/>
               </a:ext>
             </a:extLst>
           </p:cNvPr>
@@ -13356,7 +13337,7 @@
           <p:cNvPr id="98" name="Rechteck 97">
             <a:extLst>
               <a:ext uri="{FF2B5EF4-FFF2-40B4-BE49-F238E27FC236}">
-                <a16:creationId xmlns:a16="http://schemas.microsoft.com/office/drawing/2014/main" xmlns="" id="{91A7DD5D-A0AC-4197-8DB9-34D8C79B6E5F}"/>
+                <a16:creationId xmlns:a16="http://schemas.microsoft.com/office/drawing/2014/main" id="{91A7DD5D-A0AC-4197-8DB9-34D8C79B6E5F}"/>
               </a:ext>
             </a:extLst>
           </p:cNvPr>
@@ -13419,7 +13400,7 @@
           <p:cNvPr id="99" name="Rechteck 98">
             <a:extLst>
               <a:ext uri="{FF2B5EF4-FFF2-40B4-BE49-F238E27FC236}">
-                <a16:creationId xmlns:a16="http://schemas.microsoft.com/office/drawing/2014/main" xmlns="" id="{84A4A496-08CB-4917-9A74-5B2B55422565}"/>
+                <a16:creationId xmlns:a16="http://schemas.microsoft.com/office/drawing/2014/main" id="{84A4A496-08CB-4917-9A74-5B2B55422565}"/>
               </a:ext>
             </a:extLst>
           </p:cNvPr>
@@ -13482,7 +13463,7 @@
           <p:cNvPr id="100" name="Rechteck 99">
             <a:extLst>
               <a:ext uri="{FF2B5EF4-FFF2-40B4-BE49-F238E27FC236}">
-                <a16:creationId xmlns:a16="http://schemas.microsoft.com/office/drawing/2014/main" xmlns="" id="{A42173F8-990E-4E07-8B86-B1335D634BF3}"/>
+                <a16:creationId xmlns:a16="http://schemas.microsoft.com/office/drawing/2014/main" id="{A42173F8-990E-4E07-8B86-B1335D634BF3}"/>
               </a:ext>
             </a:extLst>
           </p:cNvPr>
@@ -13545,7 +13526,7 @@
           <p:cNvPr id="101" name="Rechteck 100">
             <a:extLst>
               <a:ext uri="{FF2B5EF4-FFF2-40B4-BE49-F238E27FC236}">
-                <a16:creationId xmlns:a16="http://schemas.microsoft.com/office/drawing/2014/main" xmlns="" id="{F1DD52CB-367B-4B19-B7C9-EF1E75A2575B}"/>
+                <a16:creationId xmlns:a16="http://schemas.microsoft.com/office/drawing/2014/main" id="{F1DD52CB-367B-4B19-B7C9-EF1E75A2575B}"/>
               </a:ext>
             </a:extLst>
           </p:cNvPr>
@@ -13608,7 +13589,7 @@
           <p:cNvPr id="102" name="Rechteck 101">
             <a:extLst>
               <a:ext uri="{FF2B5EF4-FFF2-40B4-BE49-F238E27FC236}">
-                <a16:creationId xmlns:a16="http://schemas.microsoft.com/office/drawing/2014/main" xmlns="" id="{5E06508B-2CA8-4495-817F-C7E21F6EF0C6}"/>
+                <a16:creationId xmlns:a16="http://schemas.microsoft.com/office/drawing/2014/main" id="{5E06508B-2CA8-4495-817F-C7E21F6EF0C6}"/>
               </a:ext>
             </a:extLst>
           </p:cNvPr>
@@ -13671,7 +13652,7 @@
           <p:cNvPr id="103" name="Rechteck 102">
             <a:extLst>
               <a:ext uri="{FF2B5EF4-FFF2-40B4-BE49-F238E27FC236}">
-                <a16:creationId xmlns:a16="http://schemas.microsoft.com/office/drawing/2014/main" xmlns="" id="{BFD2903C-1773-4A98-B841-C5148B21E554}"/>
+                <a16:creationId xmlns:a16="http://schemas.microsoft.com/office/drawing/2014/main" id="{BFD2903C-1773-4A98-B841-C5148B21E554}"/>
               </a:ext>
             </a:extLst>
           </p:cNvPr>
@@ -13734,7 +13715,7 @@
           <p:cNvPr id="104" name="Rechteck 103">
             <a:extLst>
               <a:ext uri="{FF2B5EF4-FFF2-40B4-BE49-F238E27FC236}">
-                <a16:creationId xmlns:a16="http://schemas.microsoft.com/office/drawing/2014/main" xmlns="" id="{E3B68E1F-AD9D-492E-A7BB-46E9667A3C93}"/>
+                <a16:creationId xmlns:a16="http://schemas.microsoft.com/office/drawing/2014/main" id="{E3B68E1F-AD9D-492E-A7BB-46E9667A3C93}"/>
               </a:ext>
             </a:extLst>
           </p:cNvPr>
@@ -13797,7 +13778,7 @@
           <p:cNvPr id="105" name="Rechteck 104">
             <a:extLst>
               <a:ext uri="{FF2B5EF4-FFF2-40B4-BE49-F238E27FC236}">
-                <a16:creationId xmlns:a16="http://schemas.microsoft.com/office/drawing/2014/main" xmlns="" id="{16885F3B-1269-4B76-8D6D-8C3CF4DCF7DF}"/>
+                <a16:creationId xmlns:a16="http://schemas.microsoft.com/office/drawing/2014/main" id="{16885F3B-1269-4B76-8D6D-8C3CF4DCF7DF}"/>
               </a:ext>
             </a:extLst>
           </p:cNvPr>
@@ -13860,7 +13841,7 @@
           <p:cNvPr id="106" name="Rechteck 105">
             <a:extLst>
               <a:ext uri="{FF2B5EF4-FFF2-40B4-BE49-F238E27FC236}">
-                <a16:creationId xmlns:a16="http://schemas.microsoft.com/office/drawing/2014/main" xmlns="" id="{0CFD12B7-0C23-4647-99DE-9583B4926BE6}"/>
+                <a16:creationId xmlns:a16="http://schemas.microsoft.com/office/drawing/2014/main" id="{0CFD12B7-0C23-4647-99DE-9583B4926BE6}"/>
               </a:ext>
             </a:extLst>
           </p:cNvPr>
@@ -13923,7 +13904,7 @@
           <p:cNvPr id="107" name="Rechteck 106">
             <a:extLst>
               <a:ext uri="{FF2B5EF4-FFF2-40B4-BE49-F238E27FC236}">
-                <a16:creationId xmlns:a16="http://schemas.microsoft.com/office/drawing/2014/main" xmlns="" id="{38ABF4FC-903F-466B-92BA-7B7A096E179D}"/>
+                <a16:creationId xmlns:a16="http://schemas.microsoft.com/office/drawing/2014/main" id="{38ABF4FC-903F-466B-92BA-7B7A096E179D}"/>
               </a:ext>
             </a:extLst>
           </p:cNvPr>
@@ -13977,7 +13958,7 @@
           <p:cNvPr id="108" name="Rechteck 107">
             <a:extLst>
               <a:ext uri="{FF2B5EF4-FFF2-40B4-BE49-F238E27FC236}">
-                <a16:creationId xmlns:a16="http://schemas.microsoft.com/office/drawing/2014/main" xmlns="" id="{D8212A4A-6B6D-4C49-9CE8-A0A1F4A23A0E}"/>
+                <a16:creationId xmlns:a16="http://schemas.microsoft.com/office/drawing/2014/main" id="{D8212A4A-6B6D-4C49-9CE8-A0A1F4A23A0E}"/>
               </a:ext>
             </a:extLst>
           </p:cNvPr>
@@ -14031,7 +14012,7 @@
           <p:cNvPr id="109" name="Rechteck 108">
             <a:extLst>
               <a:ext uri="{FF2B5EF4-FFF2-40B4-BE49-F238E27FC236}">
-                <a16:creationId xmlns:a16="http://schemas.microsoft.com/office/drawing/2014/main" xmlns="" id="{7C6110D8-1128-4431-80E5-9D4B609FF6DA}"/>
+                <a16:creationId xmlns:a16="http://schemas.microsoft.com/office/drawing/2014/main" id="{7C6110D8-1128-4431-80E5-9D4B609FF6DA}"/>
               </a:ext>
             </a:extLst>
           </p:cNvPr>
@@ -14085,7 +14066,7 @@
           <p:cNvPr id="111" name="Gerader Verbinder 110">
             <a:extLst>
               <a:ext uri="{FF2B5EF4-FFF2-40B4-BE49-F238E27FC236}">
-                <a16:creationId xmlns:a16="http://schemas.microsoft.com/office/drawing/2014/main" xmlns="" id="{E429E75C-E85A-486D-9D20-A16A93D3455C}"/>
+                <a16:creationId xmlns:a16="http://schemas.microsoft.com/office/drawing/2014/main" id="{E429E75C-E85A-486D-9D20-A16A93D3455C}"/>
               </a:ext>
             </a:extLst>
           </p:cNvPr>
@@ -14128,7 +14109,7 @@
           <p:cNvPr id="110" name="Raute 109">
             <a:extLst>
               <a:ext uri="{FF2B5EF4-FFF2-40B4-BE49-F238E27FC236}">
-                <a16:creationId xmlns:a16="http://schemas.microsoft.com/office/drawing/2014/main" xmlns="" id="{696CBEC0-4243-4889-A5EF-6205D9121A9E}"/>
+                <a16:creationId xmlns:a16="http://schemas.microsoft.com/office/drawing/2014/main" id="{696CBEC0-4243-4889-A5EF-6205D9121A9E}"/>
               </a:ext>
             </a:extLst>
           </p:cNvPr>
@@ -14182,7 +14163,7 @@
           <p:cNvPr id="112" name="Textfeld 111">
             <a:extLst>
               <a:ext uri="{FF2B5EF4-FFF2-40B4-BE49-F238E27FC236}">
-                <a16:creationId xmlns:a16="http://schemas.microsoft.com/office/drawing/2014/main" xmlns="" id="{65D46D10-1B8C-4DEE-B5AE-DE3909D8A657}"/>
+                <a16:creationId xmlns:a16="http://schemas.microsoft.com/office/drawing/2014/main" id="{65D46D10-1B8C-4DEE-B5AE-DE3909D8A657}"/>
               </a:ext>
             </a:extLst>
           </p:cNvPr>
@@ -14227,7 +14208,7 @@
           <p:cNvPr id="113" name="Rechteck 112">
             <a:extLst>
               <a:ext uri="{FF2B5EF4-FFF2-40B4-BE49-F238E27FC236}">
-                <a16:creationId xmlns:a16="http://schemas.microsoft.com/office/drawing/2014/main" xmlns="" id="{249CE6D6-6F83-4A29-B479-03C77533C739}"/>
+                <a16:creationId xmlns:a16="http://schemas.microsoft.com/office/drawing/2014/main" id="{249CE6D6-6F83-4A29-B479-03C77533C739}"/>
               </a:ext>
             </a:extLst>
           </p:cNvPr>
@@ -14290,7 +14271,7 @@
           <p:cNvPr id="114" name="Textfeld 113">
             <a:extLst>
               <a:ext uri="{FF2B5EF4-FFF2-40B4-BE49-F238E27FC236}">
-                <a16:creationId xmlns:a16="http://schemas.microsoft.com/office/drawing/2014/main" xmlns="" id="{5A7876B0-1142-4BBB-A830-AC7CD9B43076}"/>
+                <a16:creationId xmlns:a16="http://schemas.microsoft.com/office/drawing/2014/main" id="{5A7876B0-1142-4BBB-A830-AC7CD9B43076}"/>
               </a:ext>
             </a:extLst>
           </p:cNvPr>
@@ -14329,7 +14310,7 @@
           <p:cNvPr id="115" name="Textfeld 114">
             <a:extLst>
               <a:ext uri="{FF2B5EF4-FFF2-40B4-BE49-F238E27FC236}">
-                <a16:creationId xmlns:a16="http://schemas.microsoft.com/office/drawing/2014/main" xmlns="" id="{6BAE8BC8-86F0-4FC4-8DFA-449096D58A41}"/>
+                <a16:creationId xmlns:a16="http://schemas.microsoft.com/office/drawing/2014/main" id="{6BAE8BC8-86F0-4FC4-8DFA-449096D58A41}"/>
               </a:ext>
             </a:extLst>
           </p:cNvPr>
@@ -14372,7 +14353,7 @@
           <p:cNvPr id="116" name="Rechteck 115">
             <a:extLst>
               <a:ext uri="{FF2B5EF4-FFF2-40B4-BE49-F238E27FC236}">
-                <a16:creationId xmlns:a16="http://schemas.microsoft.com/office/drawing/2014/main" xmlns="" id="{B1EA919B-3F36-4069-B70F-59BCE62E26B3}"/>
+                <a16:creationId xmlns:a16="http://schemas.microsoft.com/office/drawing/2014/main" id="{B1EA919B-3F36-4069-B70F-59BCE62E26B3}"/>
               </a:ext>
             </a:extLst>
           </p:cNvPr>
@@ -14435,7 +14416,7 @@
           <p:cNvPr id="117" name="Rechteck 116">
             <a:extLst>
               <a:ext uri="{FF2B5EF4-FFF2-40B4-BE49-F238E27FC236}">
-                <a16:creationId xmlns:a16="http://schemas.microsoft.com/office/drawing/2014/main" xmlns="" id="{14637B72-094E-49B5-B67D-8E241AAD81D3}"/>
+                <a16:creationId xmlns:a16="http://schemas.microsoft.com/office/drawing/2014/main" id="{14637B72-094E-49B5-B67D-8E241AAD81D3}"/>
               </a:ext>
             </a:extLst>
           </p:cNvPr>
@@ -14489,7 +14470,7 @@
           <p:cNvPr id="118" name="Gerader Verbinder 117">
             <a:extLst>
               <a:ext uri="{FF2B5EF4-FFF2-40B4-BE49-F238E27FC236}">
-                <a16:creationId xmlns:a16="http://schemas.microsoft.com/office/drawing/2014/main" xmlns="" id="{8504279F-7A37-477E-A714-24DC91E56180}"/>
+                <a16:creationId xmlns:a16="http://schemas.microsoft.com/office/drawing/2014/main" id="{8504279F-7A37-477E-A714-24DC91E56180}"/>
               </a:ext>
             </a:extLst>
           </p:cNvPr>
@@ -14532,7 +14513,7 @@
           <p:cNvPr id="35" name="Gerader Verbinder 34">
             <a:extLst>
               <a:ext uri="{FF2B5EF4-FFF2-40B4-BE49-F238E27FC236}">
-                <a16:creationId xmlns:a16="http://schemas.microsoft.com/office/drawing/2014/main" xmlns="" id="{051E5BD2-4898-4E14-BA07-5B791E341D5C}"/>
+                <a16:creationId xmlns:a16="http://schemas.microsoft.com/office/drawing/2014/main" id="{051E5BD2-4898-4E14-BA07-5B791E341D5C}"/>
               </a:ext>
             </a:extLst>
           </p:cNvPr>
@@ -14569,7 +14550,7 @@
           <p:cNvPr id="41" name="Gerader Verbinder 40">
             <a:extLst>
               <a:ext uri="{FF2B5EF4-FFF2-40B4-BE49-F238E27FC236}">
-                <a16:creationId xmlns:a16="http://schemas.microsoft.com/office/drawing/2014/main" xmlns="" id="{903130E9-0E46-4CD0-8E3F-669FD5710F79}"/>
+                <a16:creationId xmlns:a16="http://schemas.microsoft.com/office/drawing/2014/main" id="{903130E9-0E46-4CD0-8E3F-669FD5710F79}"/>
               </a:ext>
             </a:extLst>
           </p:cNvPr>
@@ -14606,7 +14587,7 @@
           <p:cNvPr id="119" name="Textfeld 118">
             <a:extLst>
               <a:ext uri="{FF2B5EF4-FFF2-40B4-BE49-F238E27FC236}">
-                <a16:creationId xmlns:a16="http://schemas.microsoft.com/office/drawing/2014/main" xmlns="" id="{66B8A5C8-1CD9-4C80-90AD-DFE68E877FA8}"/>
+                <a16:creationId xmlns:a16="http://schemas.microsoft.com/office/drawing/2014/main" id="{66B8A5C8-1CD9-4C80-90AD-DFE68E877FA8}"/>
               </a:ext>
             </a:extLst>
           </p:cNvPr>
@@ -14649,7 +14630,7 @@
           <p:cNvPr id="120" name="Rechteck 119">
             <a:extLst>
               <a:ext uri="{FF2B5EF4-FFF2-40B4-BE49-F238E27FC236}">
-                <a16:creationId xmlns:a16="http://schemas.microsoft.com/office/drawing/2014/main" xmlns="" id="{AE3BE23D-3C75-4CB2-AE8C-714BC6047870}"/>
+                <a16:creationId xmlns:a16="http://schemas.microsoft.com/office/drawing/2014/main" id="{AE3BE23D-3C75-4CB2-AE8C-714BC6047870}"/>
               </a:ext>
             </a:extLst>
           </p:cNvPr>
@@ -14712,7 +14693,7 @@
           <p:cNvPr id="121" name="Rechteck 120">
             <a:extLst>
               <a:ext uri="{FF2B5EF4-FFF2-40B4-BE49-F238E27FC236}">
-                <a16:creationId xmlns:a16="http://schemas.microsoft.com/office/drawing/2014/main" xmlns="" id="{18919D88-E96F-41FD-AB56-1E1A29F2FFAB}"/>
+                <a16:creationId xmlns:a16="http://schemas.microsoft.com/office/drawing/2014/main" id="{18919D88-E96F-41FD-AB56-1E1A29F2FFAB}"/>
               </a:ext>
             </a:extLst>
           </p:cNvPr>
@@ -14775,7 +14756,7 @@
           <p:cNvPr id="122" name="Textfeld 121">
             <a:extLst>
               <a:ext uri="{FF2B5EF4-FFF2-40B4-BE49-F238E27FC236}">
-                <a16:creationId xmlns:a16="http://schemas.microsoft.com/office/drawing/2014/main" xmlns="" id="{83BAAE11-E154-4484-BB48-A79DA218A53E}"/>
+                <a16:creationId xmlns:a16="http://schemas.microsoft.com/office/drawing/2014/main" id="{83BAAE11-E154-4484-BB48-A79DA218A53E}"/>
               </a:ext>
             </a:extLst>
           </p:cNvPr>
@@ -14820,7 +14801,7 @@
           <p:cNvPr id="123" name="Textfeld 122">
             <a:extLst>
               <a:ext uri="{FF2B5EF4-FFF2-40B4-BE49-F238E27FC236}">
-                <a16:creationId xmlns:a16="http://schemas.microsoft.com/office/drawing/2014/main" xmlns="" id="{2B400FDD-8872-40F1-B032-D6622787E617}"/>
+                <a16:creationId xmlns:a16="http://schemas.microsoft.com/office/drawing/2014/main" id="{2B400FDD-8872-40F1-B032-D6622787E617}"/>
               </a:ext>
             </a:extLst>
           </p:cNvPr>
@@ -14936,7 +14917,7 @@
           <p:cNvPr id="123" name="Textfeld 122">
             <a:extLst>
               <a:ext uri="{FF2B5EF4-FFF2-40B4-BE49-F238E27FC236}">
-                <a16:creationId xmlns:a16="http://schemas.microsoft.com/office/drawing/2014/main" xmlns="" id="{2B400FDD-8872-40F1-B032-D6622787E617}"/>
+                <a16:creationId xmlns:a16="http://schemas.microsoft.com/office/drawing/2014/main" id="{2B400FDD-8872-40F1-B032-D6622787E617}"/>
               </a:ext>
             </a:extLst>
           </p:cNvPr>
@@ -14972,7 +14953,7 @@
           <p:cNvPr id="124" name="Rechteck 123">
             <a:extLst>
               <a:ext uri="{FF2B5EF4-FFF2-40B4-BE49-F238E27FC236}">
-                <a16:creationId xmlns:a16="http://schemas.microsoft.com/office/drawing/2014/main" xmlns="" id="{1D0B0084-9DB9-4110-A326-1B8DF1877ADA}"/>
+                <a16:creationId xmlns:a16="http://schemas.microsoft.com/office/drawing/2014/main" id="{1D0B0084-9DB9-4110-A326-1B8DF1877ADA}"/>
               </a:ext>
             </a:extLst>
           </p:cNvPr>
@@ -15026,7 +15007,7 @@
           <p:cNvPr id="125" name="Rechteck 124">
             <a:extLst>
               <a:ext uri="{FF2B5EF4-FFF2-40B4-BE49-F238E27FC236}">
-                <a16:creationId xmlns:a16="http://schemas.microsoft.com/office/drawing/2014/main" xmlns="" id="{F6C729E2-B82C-41CF-BCFE-79359A75B0DA}"/>
+                <a16:creationId xmlns:a16="http://schemas.microsoft.com/office/drawing/2014/main" id="{F6C729E2-B82C-41CF-BCFE-79359A75B0DA}"/>
               </a:ext>
             </a:extLst>
           </p:cNvPr>
@@ -15080,7 +15061,7 @@
           <p:cNvPr id="126" name="Textfeld 125">
             <a:extLst>
               <a:ext uri="{FF2B5EF4-FFF2-40B4-BE49-F238E27FC236}">
-                <a16:creationId xmlns:a16="http://schemas.microsoft.com/office/drawing/2014/main" xmlns="" id="{83B2DA25-F598-40D6-944E-25536ACBD548}"/>
+                <a16:creationId xmlns:a16="http://schemas.microsoft.com/office/drawing/2014/main" id="{83B2DA25-F598-40D6-944E-25536ACBD548}"/>
               </a:ext>
             </a:extLst>
           </p:cNvPr>
@@ -15115,7 +15096,7 @@
           <p:cNvPr id="127" name="Rechteck 126">
             <a:extLst>
               <a:ext uri="{FF2B5EF4-FFF2-40B4-BE49-F238E27FC236}">
-                <a16:creationId xmlns:a16="http://schemas.microsoft.com/office/drawing/2014/main" xmlns="" id="{DB2D2A93-C4FF-4DB4-A604-A7750537F543}"/>
+                <a16:creationId xmlns:a16="http://schemas.microsoft.com/office/drawing/2014/main" id="{DB2D2A93-C4FF-4DB4-A604-A7750537F543}"/>
               </a:ext>
             </a:extLst>
           </p:cNvPr>
@@ -15178,7 +15159,7 @@
           <p:cNvPr id="128" name="Rechteck 127">
             <a:extLst>
               <a:ext uri="{FF2B5EF4-FFF2-40B4-BE49-F238E27FC236}">
-                <a16:creationId xmlns:a16="http://schemas.microsoft.com/office/drawing/2014/main" xmlns="" id="{51C56C47-2212-4584-A183-DA041EB14CA4}"/>
+                <a16:creationId xmlns:a16="http://schemas.microsoft.com/office/drawing/2014/main" id="{51C56C47-2212-4584-A183-DA041EB14CA4}"/>
               </a:ext>
             </a:extLst>
           </p:cNvPr>
@@ -15232,7 +15213,7 @@
           <p:cNvPr id="129" name="Rechteck 128">
             <a:extLst>
               <a:ext uri="{FF2B5EF4-FFF2-40B4-BE49-F238E27FC236}">
-                <a16:creationId xmlns:a16="http://schemas.microsoft.com/office/drawing/2014/main" xmlns="" id="{2ACFBDCA-4D12-416C-98BC-413E056284F4}"/>
+                <a16:creationId xmlns:a16="http://schemas.microsoft.com/office/drawing/2014/main" id="{2ACFBDCA-4D12-416C-98BC-413E056284F4}"/>
               </a:ext>
             </a:extLst>
           </p:cNvPr>
@@ -15286,7 +15267,7 @@
           <p:cNvPr id="130" name="Rechteck 129">
             <a:extLst>
               <a:ext uri="{FF2B5EF4-FFF2-40B4-BE49-F238E27FC236}">
-                <a16:creationId xmlns:a16="http://schemas.microsoft.com/office/drawing/2014/main" xmlns="" id="{7784AF6F-3BD0-4763-AC2C-0227B3283088}"/>
+                <a16:creationId xmlns:a16="http://schemas.microsoft.com/office/drawing/2014/main" id="{7784AF6F-3BD0-4763-AC2C-0227B3283088}"/>
               </a:ext>
             </a:extLst>
           </p:cNvPr>
@@ -15340,7 +15321,7 @@
           <p:cNvPr id="131" name="Rechteck 130">
             <a:extLst>
               <a:ext uri="{FF2B5EF4-FFF2-40B4-BE49-F238E27FC236}">
-                <a16:creationId xmlns:a16="http://schemas.microsoft.com/office/drawing/2014/main" xmlns="" id="{4D7A4007-986A-4ABF-BF22-44BE68A931F6}"/>
+                <a16:creationId xmlns:a16="http://schemas.microsoft.com/office/drawing/2014/main" id="{4D7A4007-986A-4ABF-BF22-44BE68A931F6}"/>
               </a:ext>
             </a:extLst>
           </p:cNvPr>
@@ -15394,7 +15375,7 @@
           <p:cNvPr id="132" name="Rechteck 131">
             <a:extLst>
               <a:ext uri="{FF2B5EF4-FFF2-40B4-BE49-F238E27FC236}">
-                <a16:creationId xmlns:a16="http://schemas.microsoft.com/office/drawing/2014/main" xmlns="" id="{FF00D229-4D13-41E3-8810-C3BCF8980586}"/>
+                <a16:creationId xmlns:a16="http://schemas.microsoft.com/office/drawing/2014/main" id="{FF00D229-4D13-41E3-8810-C3BCF8980586}"/>
               </a:ext>
             </a:extLst>
           </p:cNvPr>
@@ -15448,7 +15429,7 @@
           <p:cNvPr id="133" name="Gerader Verbinder 132">
             <a:extLst>
               <a:ext uri="{FF2B5EF4-FFF2-40B4-BE49-F238E27FC236}">
-                <a16:creationId xmlns:a16="http://schemas.microsoft.com/office/drawing/2014/main" xmlns="" id="{FA885B5E-C7DE-4263-B564-B969D3DA52E0}"/>
+                <a16:creationId xmlns:a16="http://schemas.microsoft.com/office/drawing/2014/main" id="{FA885B5E-C7DE-4263-B564-B969D3DA52E0}"/>
               </a:ext>
             </a:extLst>
           </p:cNvPr>
@@ -15492,7 +15473,7 @@
           <p:cNvPr id="134" name="Raute 133">
             <a:extLst>
               <a:ext uri="{FF2B5EF4-FFF2-40B4-BE49-F238E27FC236}">
-                <a16:creationId xmlns:a16="http://schemas.microsoft.com/office/drawing/2014/main" xmlns="" id="{572BD07C-332C-4FC9-99A9-2DD9CBE55520}"/>
+                <a16:creationId xmlns:a16="http://schemas.microsoft.com/office/drawing/2014/main" id="{572BD07C-332C-4FC9-99A9-2DD9CBE55520}"/>
               </a:ext>
             </a:extLst>
           </p:cNvPr>
@@ -15546,7 +15527,7 @@
           <p:cNvPr id="135" name="Textfeld 134">
             <a:extLst>
               <a:ext uri="{FF2B5EF4-FFF2-40B4-BE49-F238E27FC236}">
-                <a16:creationId xmlns:a16="http://schemas.microsoft.com/office/drawing/2014/main" xmlns="" id="{26D99CCC-5720-448E-9DC9-37651F5BB72F}"/>
+                <a16:creationId xmlns:a16="http://schemas.microsoft.com/office/drawing/2014/main" id="{26D99CCC-5720-448E-9DC9-37651F5BB72F}"/>
               </a:ext>
             </a:extLst>
           </p:cNvPr>
@@ -15585,7 +15566,7 @@
           <p:cNvPr id="136" name="Rechteck 135">
             <a:extLst>
               <a:ext uri="{FF2B5EF4-FFF2-40B4-BE49-F238E27FC236}">
-                <a16:creationId xmlns:a16="http://schemas.microsoft.com/office/drawing/2014/main" xmlns="" id="{7094793A-237D-492B-B9C9-41FED4F6A7B3}"/>
+                <a16:creationId xmlns:a16="http://schemas.microsoft.com/office/drawing/2014/main" id="{7094793A-237D-492B-B9C9-41FED4F6A7B3}"/>
               </a:ext>
             </a:extLst>
           </p:cNvPr>
@@ -15648,7 +15629,7 @@
           <p:cNvPr id="137" name="Textfeld 136">
             <a:extLst>
               <a:ext uri="{FF2B5EF4-FFF2-40B4-BE49-F238E27FC236}">
-                <a16:creationId xmlns:a16="http://schemas.microsoft.com/office/drawing/2014/main" xmlns="" id="{981BC3C5-E394-4165-AE4E-C9636FFF3881}"/>
+                <a16:creationId xmlns:a16="http://schemas.microsoft.com/office/drawing/2014/main" id="{981BC3C5-E394-4165-AE4E-C9636FFF3881}"/>
               </a:ext>
             </a:extLst>
           </p:cNvPr>
@@ -15683,7 +15664,7 @@
           <p:cNvPr id="138" name="Textfeld 137">
             <a:extLst>
               <a:ext uri="{FF2B5EF4-FFF2-40B4-BE49-F238E27FC236}">
-                <a16:creationId xmlns:a16="http://schemas.microsoft.com/office/drawing/2014/main" xmlns="" id="{F04A0DD9-B02F-4D0D-9BCE-B54EEAD82C27}"/>
+                <a16:creationId xmlns:a16="http://schemas.microsoft.com/office/drawing/2014/main" id="{F04A0DD9-B02F-4D0D-9BCE-B54EEAD82C27}"/>
               </a:ext>
             </a:extLst>
           </p:cNvPr>
@@ -15719,7 +15700,7 @@
           <p:cNvPr id="139" name="Textfeld 138">
             <a:extLst>
               <a:ext uri="{FF2B5EF4-FFF2-40B4-BE49-F238E27FC236}">
-                <a16:creationId xmlns:a16="http://schemas.microsoft.com/office/drawing/2014/main" xmlns="" id="{C5131BE0-37E0-4F19-820A-C7CD69F61AF0}"/>
+                <a16:creationId xmlns:a16="http://schemas.microsoft.com/office/drawing/2014/main" id="{C5131BE0-37E0-4F19-820A-C7CD69F61AF0}"/>
               </a:ext>
             </a:extLst>
           </p:cNvPr>
@@ -15754,7 +15735,7 @@
           <p:cNvPr id="140" name="Textfeld 139">
             <a:extLst>
               <a:ext uri="{FF2B5EF4-FFF2-40B4-BE49-F238E27FC236}">
-                <a16:creationId xmlns:a16="http://schemas.microsoft.com/office/drawing/2014/main" xmlns="" id="{88281BF1-6A0D-4D82-8B83-D95A81156F77}"/>
+                <a16:creationId xmlns:a16="http://schemas.microsoft.com/office/drawing/2014/main" id="{88281BF1-6A0D-4D82-8B83-D95A81156F77}"/>
               </a:ext>
             </a:extLst>
           </p:cNvPr>
@@ -15789,7 +15770,7 @@
           <p:cNvPr id="141" name="Textfeld 140">
             <a:extLst>
               <a:ext uri="{FF2B5EF4-FFF2-40B4-BE49-F238E27FC236}">
-                <a16:creationId xmlns:a16="http://schemas.microsoft.com/office/drawing/2014/main" xmlns="" id="{EE6468DB-2598-4C64-BC61-D4DAB7C0C82E}"/>
+                <a16:creationId xmlns:a16="http://schemas.microsoft.com/office/drawing/2014/main" id="{EE6468DB-2598-4C64-BC61-D4DAB7C0C82E}"/>
               </a:ext>
             </a:extLst>
           </p:cNvPr>
@@ -15824,7 +15805,7 @@
           <p:cNvPr id="142" name="Rechteck 141">
             <a:extLst>
               <a:ext uri="{FF2B5EF4-FFF2-40B4-BE49-F238E27FC236}">
-                <a16:creationId xmlns:a16="http://schemas.microsoft.com/office/drawing/2014/main" xmlns="" id="{7A2A93F2-CC24-4A4A-A5B1-0DFC5C9903B6}"/>
+                <a16:creationId xmlns:a16="http://schemas.microsoft.com/office/drawing/2014/main" id="{7A2A93F2-CC24-4A4A-A5B1-0DFC5C9903B6}"/>
               </a:ext>
             </a:extLst>
           </p:cNvPr>
@@ -15887,7 +15868,7 @@
           <p:cNvPr id="143" name="Rechteck 142">
             <a:extLst>
               <a:ext uri="{FF2B5EF4-FFF2-40B4-BE49-F238E27FC236}">
-                <a16:creationId xmlns:a16="http://schemas.microsoft.com/office/drawing/2014/main" xmlns="" id="{9A00F121-11ED-4B5E-8733-E22C5816D045}"/>
+                <a16:creationId xmlns:a16="http://schemas.microsoft.com/office/drawing/2014/main" id="{9A00F121-11ED-4B5E-8733-E22C5816D045}"/>
               </a:ext>
             </a:extLst>
           </p:cNvPr>
@@ -15950,7 +15931,7 @@
           <p:cNvPr id="144" name="Rechteck 143">
             <a:extLst>
               <a:ext uri="{FF2B5EF4-FFF2-40B4-BE49-F238E27FC236}">
-                <a16:creationId xmlns:a16="http://schemas.microsoft.com/office/drawing/2014/main" xmlns="" id="{709B9BDD-B5D1-4230-8461-F051D5A27808}"/>
+                <a16:creationId xmlns:a16="http://schemas.microsoft.com/office/drawing/2014/main" id="{709B9BDD-B5D1-4230-8461-F051D5A27808}"/>
               </a:ext>
             </a:extLst>
           </p:cNvPr>
@@ -16013,7 +15994,7 @@
           <p:cNvPr id="145" name="Rechteck 144">
             <a:extLst>
               <a:ext uri="{FF2B5EF4-FFF2-40B4-BE49-F238E27FC236}">
-                <a16:creationId xmlns:a16="http://schemas.microsoft.com/office/drawing/2014/main" xmlns="" id="{F7E0A31F-DDB5-45CB-AFC5-E4C4B71497F5}"/>
+                <a16:creationId xmlns:a16="http://schemas.microsoft.com/office/drawing/2014/main" id="{F7E0A31F-DDB5-45CB-AFC5-E4C4B71497F5}"/>
               </a:ext>
             </a:extLst>
           </p:cNvPr>
@@ -16076,7 +16057,7 @@
           <p:cNvPr id="147" name="Textfeld 146">
             <a:extLst>
               <a:ext uri="{FF2B5EF4-FFF2-40B4-BE49-F238E27FC236}">
-                <a16:creationId xmlns:a16="http://schemas.microsoft.com/office/drawing/2014/main" xmlns="" id="{E37B2D86-38DA-4ABE-8CB2-7AB26E76C8CA}"/>
+                <a16:creationId xmlns:a16="http://schemas.microsoft.com/office/drawing/2014/main" id="{E37B2D86-38DA-4ABE-8CB2-7AB26E76C8CA}"/>
               </a:ext>
             </a:extLst>
           </p:cNvPr>
@@ -16111,7 +16092,7 @@
           <p:cNvPr id="148" name="Rechteck 147">
             <a:extLst>
               <a:ext uri="{FF2B5EF4-FFF2-40B4-BE49-F238E27FC236}">
-                <a16:creationId xmlns:a16="http://schemas.microsoft.com/office/drawing/2014/main" xmlns="" id="{64E90F03-D539-4ABB-BE8F-19CCAC580B6C}"/>
+                <a16:creationId xmlns:a16="http://schemas.microsoft.com/office/drawing/2014/main" id="{64E90F03-D539-4ABB-BE8F-19CCAC580B6C}"/>
               </a:ext>
             </a:extLst>
           </p:cNvPr>
@@ -16165,7 +16146,7 @@
           <p:cNvPr id="149" name="Textfeld 148">
             <a:extLst>
               <a:ext uri="{FF2B5EF4-FFF2-40B4-BE49-F238E27FC236}">
-                <a16:creationId xmlns:a16="http://schemas.microsoft.com/office/drawing/2014/main" xmlns="" id="{A7D21C41-F368-42CA-B33D-665C025B1009}"/>
+                <a16:creationId xmlns:a16="http://schemas.microsoft.com/office/drawing/2014/main" id="{A7D21C41-F368-42CA-B33D-665C025B1009}"/>
               </a:ext>
             </a:extLst>
           </p:cNvPr>
@@ -16200,7 +16181,7 @@
           <p:cNvPr id="150" name="Rechteck 149">
             <a:extLst>
               <a:ext uri="{FF2B5EF4-FFF2-40B4-BE49-F238E27FC236}">
-                <a16:creationId xmlns:a16="http://schemas.microsoft.com/office/drawing/2014/main" xmlns="" id="{20410506-B08A-42AB-A629-8FA1E7C2DE51}"/>
+                <a16:creationId xmlns:a16="http://schemas.microsoft.com/office/drawing/2014/main" id="{20410506-B08A-42AB-A629-8FA1E7C2DE51}"/>
               </a:ext>
             </a:extLst>
           </p:cNvPr>
@@ -16263,7 +16244,7 @@
           <p:cNvPr id="151" name="Rechteck 150">
             <a:extLst>
               <a:ext uri="{FF2B5EF4-FFF2-40B4-BE49-F238E27FC236}">
-                <a16:creationId xmlns:a16="http://schemas.microsoft.com/office/drawing/2014/main" xmlns="" id="{17C94D1A-AEF6-4A77-A4CB-68AAF40395D3}"/>
+                <a16:creationId xmlns:a16="http://schemas.microsoft.com/office/drawing/2014/main" id="{17C94D1A-AEF6-4A77-A4CB-68AAF40395D3}"/>
               </a:ext>
             </a:extLst>
           </p:cNvPr>
@@ -16317,7 +16298,7 @@
           <p:cNvPr id="152" name="Rechteck 151">
             <a:extLst>
               <a:ext uri="{FF2B5EF4-FFF2-40B4-BE49-F238E27FC236}">
-                <a16:creationId xmlns:a16="http://schemas.microsoft.com/office/drawing/2014/main" xmlns="" id="{866BA32A-F047-4A8E-B712-E762346EE295}"/>
+                <a16:creationId xmlns:a16="http://schemas.microsoft.com/office/drawing/2014/main" id="{866BA32A-F047-4A8E-B712-E762346EE295}"/>
               </a:ext>
             </a:extLst>
           </p:cNvPr>
@@ -16371,7 +16352,7 @@
           <p:cNvPr id="153" name="Textfeld 152">
             <a:extLst>
               <a:ext uri="{FF2B5EF4-FFF2-40B4-BE49-F238E27FC236}">
-                <a16:creationId xmlns:a16="http://schemas.microsoft.com/office/drawing/2014/main" xmlns="" id="{A782769E-F4CE-412A-A9D8-B75599691453}"/>
+                <a16:creationId xmlns:a16="http://schemas.microsoft.com/office/drawing/2014/main" id="{A782769E-F4CE-412A-A9D8-B75599691453}"/>
               </a:ext>
             </a:extLst>
           </p:cNvPr>
@@ -16406,7 +16387,7 @@
           <p:cNvPr id="154" name="Rechteck 153">
             <a:extLst>
               <a:ext uri="{FF2B5EF4-FFF2-40B4-BE49-F238E27FC236}">
-                <a16:creationId xmlns:a16="http://schemas.microsoft.com/office/drawing/2014/main" xmlns="" id="{F39E7346-E054-4002-A616-04F8C4F76CC8}"/>
+                <a16:creationId xmlns:a16="http://schemas.microsoft.com/office/drawing/2014/main" id="{F39E7346-E054-4002-A616-04F8C4F76CC8}"/>
               </a:ext>
             </a:extLst>
           </p:cNvPr>
@@ -16469,7 +16450,7 @@
           <p:cNvPr id="156" name="Rechteck 155">
             <a:extLst>
               <a:ext uri="{FF2B5EF4-FFF2-40B4-BE49-F238E27FC236}">
-                <a16:creationId xmlns:a16="http://schemas.microsoft.com/office/drawing/2014/main" xmlns="" id="{1014A5AA-F71E-490B-875A-4767BBA57E6C}"/>
+                <a16:creationId xmlns:a16="http://schemas.microsoft.com/office/drawing/2014/main" id="{1014A5AA-F71E-490B-875A-4767BBA57E6C}"/>
               </a:ext>
             </a:extLst>
           </p:cNvPr>
@@ -16523,7 +16504,7 @@
           <p:cNvPr id="157" name="Rechteck 156">
             <a:extLst>
               <a:ext uri="{FF2B5EF4-FFF2-40B4-BE49-F238E27FC236}">
-                <a16:creationId xmlns:a16="http://schemas.microsoft.com/office/drawing/2014/main" xmlns="" id="{6487344A-FECA-4786-AD9A-DE15693E9BCA}"/>
+                <a16:creationId xmlns:a16="http://schemas.microsoft.com/office/drawing/2014/main" id="{6487344A-FECA-4786-AD9A-DE15693E9BCA}"/>
               </a:ext>
             </a:extLst>
           </p:cNvPr>
@@ -16577,7 +16558,7 @@
           <p:cNvPr id="177" name="Rechteck 176">
             <a:extLst>
               <a:ext uri="{FF2B5EF4-FFF2-40B4-BE49-F238E27FC236}">
-                <a16:creationId xmlns:a16="http://schemas.microsoft.com/office/drawing/2014/main" xmlns="" id="{8E717932-8CA8-47FD-BF07-2CFE7FDB48E8}"/>
+                <a16:creationId xmlns:a16="http://schemas.microsoft.com/office/drawing/2014/main" id="{8E717932-8CA8-47FD-BF07-2CFE7FDB48E8}"/>
               </a:ext>
             </a:extLst>
           </p:cNvPr>
@@ -16631,7 +16612,7 @@
           <p:cNvPr id="178" name="Rechteck 177">
             <a:extLst>
               <a:ext uri="{FF2B5EF4-FFF2-40B4-BE49-F238E27FC236}">
-                <a16:creationId xmlns:a16="http://schemas.microsoft.com/office/drawing/2014/main" xmlns="" id="{C7684207-C61A-4EAE-80E5-E7A9BE7D9E2D}"/>
+                <a16:creationId xmlns:a16="http://schemas.microsoft.com/office/drawing/2014/main" id="{C7684207-C61A-4EAE-80E5-E7A9BE7D9E2D}"/>
               </a:ext>
             </a:extLst>
           </p:cNvPr>
@@ -16685,7 +16666,7 @@
           <p:cNvPr id="163" name="Rechteck 162">
             <a:extLst>
               <a:ext uri="{FF2B5EF4-FFF2-40B4-BE49-F238E27FC236}">
-                <a16:creationId xmlns:a16="http://schemas.microsoft.com/office/drawing/2014/main" xmlns="" id="{0DA104C6-9B8D-4D6B-B029-C10978D35416}"/>
+                <a16:creationId xmlns:a16="http://schemas.microsoft.com/office/drawing/2014/main" id="{0DA104C6-9B8D-4D6B-B029-C10978D35416}"/>
               </a:ext>
             </a:extLst>
           </p:cNvPr>
@@ -16748,7 +16729,7 @@
           <p:cNvPr id="181" name="Rechteck 180">
             <a:extLst>
               <a:ext uri="{FF2B5EF4-FFF2-40B4-BE49-F238E27FC236}">
-                <a16:creationId xmlns:a16="http://schemas.microsoft.com/office/drawing/2014/main" xmlns="" id="{333F340E-152B-4377-A8AB-2554EBC752E4}"/>
+                <a16:creationId xmlns:a16="http://schemas.microsoft.com/office/drawing/2014/main" id="{333F340E-152B-4377-A8AB-2554EBC752E4}"/>
               </a:ext>
             </a:extLst>
           </p:cNvPr>
@@ -16802,7 +16783,7 @@
           <p:cNvPr id="182" name="Gerader Verbinder 181">
             <a:extLst>
               <a:ext uri="{FF2B5EF4-FFF2-40B4-BE49-F238E27FC236}">
-                <a16:creationId xmlns:a16="http://schemas.microsoft.com/office/drawing/2014/main" xmlns="" id="{B5929FB4-F9A9-4D92-AD29-686D6DDAF677}"/>
+                <a16:creationId xmlns:a16="http://schemas.microsoft.com/office/drawing/2014/main" id="{B5929FB4-F9A9-4D92-AD29-686D6DDAF677}"/>
               </a:ext>
             </a:extLst>
           </p:cNvPr>
@@ -16845,7 +16826,7 @@
           <p:cNvPr id="183" name="Gerader Verbinder 182">
             <a:extLst>
               <a:ext uri="{FF2B5EF4-FFF2-40B4-BE49-F238E27FC236}">
-                <a16:creationId xmlns:a16="http://schemas.microsoft.com/office/drawing/2014/main" xmlns="" id="{308332D0-6827-4739-89B0-91A21A906936}"/>
+                <a16:creationId xmlns:a16="http://schemas.microsoft.com/office/drawing/2014/main" id="{308332D0-6827-4739-89B0-91A21A906936}"/>
               </a:ext>
             </a:extLst>
           </p:cNvPr>
@@ -16888,7 +16869,7 @@
           <p:cNvPr id="180" name="Raute 179">
             <a:extLst>
               <a:ext uri="{FF2B5EF4-FFF2-40B4-BE49-F238E27FC236}">
-                <a16:creationId xmlns:a16="http://schemas.microsoft.com/office/drawing/2014/main" xmlns="" id="{8C8B1616-7A02-49E5-BDEC-D20C15F4B725}"/>
+                <a16:creationId xmlns:a16="http://schemas.microsoft.com/office/drawing/2014/main" id="{8C8B1616-7A02-49E5-BDEC-D20C15F4B725}"/>
               </a:ext>
             </a:extLst>
           </p:cNvPr>
@@ -16942,7 +16923,7 @@
           <p:cNvPr id="184" name="Rechteck 183">
             <a:extLst>
               <a:ext uri="{FF2B5EF4-FFF2-40B4-BE49-F238E27FC236}">
-                <a16:creationId xmlns:a16="http://schemas.microsoft.com/office/drawing/2014/main" xmlns="" id="{CA389CF6-7F23-4E52-8E62-6C793F393A0E}"/>
+                <a16:creationId xmlns:a16="http://schemas.microsoft.com/office/drawing/2014/main" id="{CA389CF6-7F23-4E52-8E62-6C793F393A0E}"/>
               </a:ext>
             </a:extLst>
           </p:cNvPr>
@@ -17005,7 +16986,7 @@
           <p:cNvPr id="185" name="Rechteck 184">
             <a:extLst>
               <a:ext uri="{FF2B5EF4-FFF2-40B4-BE49-F238E27FC236}">
-                <a16:creationId xmlns:a16="http://schemas.microsoft.com/office/drawing/2014/main" xmlns="" id="{CED01C11-F1C0-4A26-8A83-FBAA52A66B0A}"/>
+                <a16:creationId xmlns:a16="http://schemas.microsoft.com/office/drawing/2014/main" id="{CED01C11-F1C0-4A26-8A83-FBAA52A66B0A}"/>
               </a:ext>
             </a:extLst>
           </p:cNvPr>
@@ -17068,7 +17049,7 @@
           <p:cNvPr id="186" name="Rechteck 185">
             <a:extLst>
               <a:ext uri="{FF2B5EF4-FFF2-40B4-BE49-F238E27FC236}">
-                <a16:creationId xmlns:a16="http://schemas.microsoft.com/office/drawing/2014/main" xmlns="" id="{930CC77B-884D-40F2-ABBE-B0BFCEE0C4BC}"/>
+                <a16:creationId xmlns:a16="http://schemas.microsoft.com/office/drawing/2014/main" id="{930CC77B-884D-40F2-ABBE-B0BFCEE0C4BC}"/>
               </a:ext>
             </a:extLst>
           </p:cNvPr>
@@ -17131,7 +17112,7 @@
           <p:cNvPr id="187" name="Rechteck 186">
             <a:extLst>
               <a:ext uri="{FF2B5EF4-FFF2-40B4-BE49-F238E27FC236}">
-                <a16:creationId xmlns:a16="http://schemas.microsoft.com/office/drawing/2014/main" xmlns="" id="{FA5E8438-BF96-4903-BC64-C2F8AC3207DD}"/>
+                <a16:creationId xmlns:a16="http://schemas.microsoft.com/office/drawing/2014/main" id="{FA5E8438-BF96-4903-BC64-C2F8AC3207DD}"/>
               </a:ext>
             </a:extLst>
           </p:cNvPr>
@@ -17194,7 +17175,7 @@
           <p:cNvPr id="188" name="Rechteck 187">
             <a:extLst>
               <a:ext uri="{FF2B5EF4-FFF2-40B4-BE49-F238E27FC236}">
-                <a16:creationId xmlns:a16="http://schemas.microsoft.com/office/drawing/2014/main" xmlns="" id="{24D7F8E3-3167-4D0A-8069-C46462ACCEF8}"/>
+                <a16:creationId xmlns:a16="http://schemas.microsoft.com/office/drawing/2014/main" id="{24D7F8E3-3167-4D0A-8069-C46462ACCEF8}"/>
               </a:ext>
             </a:extLst>
           </p:cNvPr>
@@ -17257,7 +17238,7 @@
           <p:cNvPr id="189" name="Rechteck 188">
             <a:extLst>
               <a:ext uri="{FF2B5EF4-FFF2-40B4-BE49-F238E27FC236}">
-                <a16:creationId xmlns:a16="http://schemas.microsoft.com/office/drawing/2014/main" xmlns="" id="{38C1CDF0-7A22-48A7-ADA6-DF83795508F1}"/>
+                <a16:creationId xmlns:a16="http://schemas.microsoft.com/office/drawing/2014/main" id="{38C1CDF0-7A22-48A7-ADA6-DF83795508F1}"/>
               </a:ext>
             </a:extLst>
           </p:cNvPr>
@@ -17320,7 +17301,7 @@
           <p:cNvPr id="190" name="Textfeld 189">
             <a:extLst>
               <a:ext uri="{FF2B5EF4-FFF2-40B4-BE49-F238E27FC236}">
-                <a16:creationId xmlns:a16="http://schemas.microsoft.com/office/drawing/2014/main" xmlns="" id="{8BB160DE-E5B8-4853-83D9-F0604CEF5B90}"/>
+                <a16:creationId xmlns:a16="http://schemas.microsoft.com/office/drawing/2014/main" id="{8BB160DE-E5B8-4853-83D9-F0604CEF5B90}"/>
               </a:ext>
             </a:extLst>
           </p:cNvPr>
@@ -17355,7 +17336,7 @@
           <p:cNvPr id="191" name="Textfeld 190">
             <a:extLst>
               <a:ext uri="{FF2B5EF4-FFF2-40B4-BE49-F238E27FC236}">
-                <a16:creationId xmlns:a16="http://schemas.microsoft.com/office/drawing/2014/main" xmlns="" id="{0E1E2370-090E-42E0-9BE0-D14AAE4AEC59}"/>
+                <a16:creationId xmlns:a16="http://schemas.microsoft.com/office/drawing/2014/main" id="{0E1E2370-090E-42E0-9BE0-D14AAE4AEC59}"/>
               </a:ext>
             </a:extLst>
           </p:cNvPr>
@@ -17390,7 +17371,7 @@
           <p:cNvPr id="192" name="Textfeld 191">
             <a:extLst>
               <a:ext uri="{FF2B5EF4-FFF2-40B4-BE49-F238E27FC236}">
-                <a16:creationId xmlns:a16="http://schemas.microsoft.com/office/drawing/2014/main" xmlns="" id="{266DB539-1946-43E6-8A95-116FF9D204A5}"/>
+                <a16:creationId xmlns:a16="http://schemas.microsoft.com/office/drawing/2014/main" id="{266DB539-1946-43E6-8A95-116FF9D204A5}"/>
               </a:ext>
             </a:extLst>
           </p:cNvPr>
@@ -17425,7 +17406,7 @@
           <p:cNvPr id="193" name="Textfeld 192">
             <a:extLst>
               <a:ext uri="{FF2B5EF4-FFF2-40B4-BE49-F238E27FC236}">
-                <a16:creationId xmlns:a16="http://schemas.microsoft.com/office/drawing/2014/main" xmlns="" id="{FB785F0C-DA15-4320-A12A-A03769F8434C}"/>
+                <a16:creationId xmlns:a16="http://schemas.microsoft.com/office/drawing/2014/main" id="{FB785F0C-DA15-4320-A12A-A03769F8434C}"/>
               </a:ext>
             </a:extLst>
           </p:cNvPr>
@@ -17460,7 +17441,7 @@
           <p:cNvPr id="194" name="Textfeld 193">
             <a:extLst>
               <a:ext uri="{FF2B5EF4-FFF2-40B4-BE49-F238E27FC236}">
-                <a16:creationId xmlns:a16="http://schemas.microsoft.com/office/drawing/2014/main" xmlns="" id="{8752ACAB-9E14-49DF-A752-B18A240FCD48}"/>
+                <a16:creationId xmlns:a16="http://schemas.microsoft.com/office/drawing/2014/main" id="{8752ACAB-9E14-49DF-A752-B18A240FCD48}"/>
               </a:ext>
             </a:extLst>
           </p:cNvPr>
@@ -17495,7 +17476,7 @@
           <p:cNvPr id="195" name="Textfeld 194">
             <a:extLst>
               <a:ext uri="{FF2B5EF4-FFF2-40B4-BE49-F238E27FC236}">
-                <a16:creationId xmlns:a16="http://schemas.microsoft.com/office/drawing/2014/main" xmlns="" id="{6B3E0930-4533-4B9C-9FE3-C81A593BAE30}"/>
+                <a16:creationId xmlns:a16="http://schemas.microsoft.com/office/drawing/2014/main" id="{6B3E0930-4533-4B9C-9FE3-C81A593BAE30}"/>
               </a:ext>
             </a:extLst>
           </p:cNvPr>
@@ -17530,7 +17511,7 @@
           <p:cNvPr id="196" name="Textfeld 195">
             <a:extLst>
               <a:ext uri="{FF2B5EF4-FFF2-40B4-BE49-F238E27FC236}">
-                <a16:creationId xmlns:a16="http://schemas.microsoft.com/office/drawing/2014/main" xmlns="" id="{9867FF4D-1C1D-4FB4-82B8-638CA72B013F}"/>
+                <a16:creationId xmlns:a16="http://schemas.microsoft.com/office/drawing/2014/main" id="{9867FF4D-1C1D-4FB4-82B8-638CA72B013F}"/>
               </a:ext>
             </a:extLst>
           </p:cNvPr>
@@ -17565,7 +17546,7 @@
           <p:cNvPr id="197" name="Textfeld 196">
             <a:extLst>
               <a:ext uri="{FF2B5EF4-FFF2-40B4-BE49-F238E27FC236}">
-                <a16:creationId xmlns:a16="http://schemas.microsoft.com/office/drawing/2014/main" xmlns="" id="{C8F430F6-9BCB-4306-B66C-22D38BE01108}"/>
+                <a16:creationId xmlns:a16="http://schemas.microsoft.com/office/drawing/2014/main" id="{C8F430F6-9BCB-4306-B66C-22D38BE01108}"/>
               </a:ext>
             </a:extLst>
           </p:cNvPr>
@@ -17600,7 +17581,7 @@
           <p:cNvPr id="198" name="Textfeld 197">
             <a:extLst>
               <a:ext uri="{FF2B5EF4-FFF2-40B4-BE49-F238E27FC236}">
-                <a16:creationId xmlns:a16="http://schemas.microsoft.com/office/drawing/2014/main" xmlns="" id="{4C759BCE-B9AF-4F6A-B1A4-22B2594D42B0}"/>
+                <a16:creationId xmlns:a16="http://schemas.microsoft.com/office/drawing/2014/main" id="{4C759BCE-B9AF-4F6A-B1A4-22B2594D42B0}"/>
               </a:ext>
             </a:extLst>
           </p:cNvPr>
@@ -17635,7 +17616,7 @@
           <p:cNvPr id="199" name="Textfeld 198">
             <a:extLst>
               <a:ext uri="{FF2B5EF4-FFF2-40B4-BE49-F238E27FC236}">
-                <a16:creationId xmlns:a16="http://schemas.microsoft.com/office/drawing/2014/main" xmlns="" id="{768BE735-E065-4CE5-9F81-412DD477D1AD}"/>
+                <a16:creationId xmlns:a16="http://schemas.microsoft.com/office/drawing/2014/main" id="{768BE735-E065-4CE5-9F81-412DD477D1AD}"/>
               </a:ext>
             </a:extLst>
           </p:cNvPr>
@@ -17671,7 +17652,7 @@
           <p:cNvPr id="200" name="Rechteck 199">
             <a:extLst>
               <a:ext uri="{FF2B5EF4-FFF2-40B4-BE49-F238E27FC236}">
-                <a16:creationId xmlns:a16="http://schemas.microsoft.com/office/drawing/2014/main" xmlns="" id="{C15C3029-B158-4892-A241-278317C2187F}"/>
+                <a16:creationId xmlns:a16="http://schemas.microsoft.com/office/drawing/2014/main" id="{C15C3029-B158-4892-A241-278317C2187F}"/>
               </a:ext>
             </a:extLst>
           </p:cNvPr>
@@ -17725,7 +17706,7 @@
           <p:cNvPr id="201" name="Textfeld 200">
             <a:extLst>
               <a:ext uri="{FF2B5EF4-FFF2-40B4-BE49-F238E27FC236}">
-                <a16:creationId xmlns:a16="http://schemas.microsoft.com/office/drawing/2014/main" xmlns="" id="{CBF2752A-7FD0-409B-8C54-5FD60996C645}"/>
+                <a16:creationId xmlns:a16="http://schemas.microsoft.com/office/drawing/2014/main" id="{CBF2752A-7FD0-409B-8C54-5FD60996C645}"/>
               </a:ext>
             </a:extLst>
           </p:cNvPr>
@@ -17760,7 +17741,7 @@
           <p:cNvPr id="202" name="Rechteck 201">
             <a:extLst>
               <a:ext uri="{FF2B5EF4-FFF2-40B4-BE49-F238E27FC236}">
-                <a16:creationId xmlns:a16="http://schemas.microsoft.com/office/drawing/2014/main" xmlns="" id="{62B6F6A9-1AA2-41FE-9A32-6FEA100228A1}"/>
+                <a16:creationId xmlns:a16="http://schemas.microsoft.com/office/drawing/2014/main" id="{62B6F6A9-1AA2-41FE-9A32-6FEA100228A1}"/>
               </a:ext>
             </a:extLst>
           </p:cNvPr>
@@ -17907,7 +17888,7 @@
           <p:cNvPr id="123" name="Textfeld 122">
             <a:extLst>
               <a:ext uri="{FF2B5EF4-FFF2-40B4-BE49-F238E27FC236}">
-                <a16:creationId xmlns:a16="http://schemas.microsoft.com/office/drawing/2014/main" xmlns="" id="{2B400FDD-8872-40F1-B032-D6622787E617}"/>
+                <a16:creationId xmlns:a16="http://schemas.microsoft.com/office/drawing/2014/main" id="{2B400FDD-8872-40F1-B032-D6622787E617}"/>
               </a:ext>
             </a:extLst>
           </p:cNvPr>
@@ -17951,7 +17932,7 @@
           <p:cNvPr id="4" name="Rechteck 3">
             <a:extLst>
               <a:ext uri="{FF2B5EF4-FFF2-40B4-BE49-F238E27FC236}">
-                <a16:creationId xmlns:a16="http://schemas.microsoft.com/office/drawing/2014/main" xmlns="" id="{AFB85A01-098C-4A4C-A653-8597303D2364}"/>
+                <a16:creationId xmlns:a16="http://schemas.microsoft.com/office/drawing/2014/main" id="{AFB85A01-098C-4A4C-A653-8597303D2364}"/>
               </a:ext>
             </a:extLst>
           </p:cNvPr>
@@ -18005,7 +17986,7 @@
           <p:cNvPr id="5" name="Rechteck 4">
             <a:extLst>
               <a:ext uri="{FF2B5EF4-FFF2-40B4-BE49-F238E27FC236}">
-                <a16:creationId xmlns:a16="http://schemas.microsoft.com/office/drawing/2014/main" xmlns="" id="{7A2492BD-101B-4AC4-AD0F-F6063D249933}"/>
+                <a16:creationId xmlns:a16="http://schemas.microsoft.com/office/drawing/2014/main" id="{7A2492BD-101B-4AC4-AD0F-F6063D249933}"/>
               </a:ext>
             </a:extLst>
           </p:cNvPr>
@@ -18059,7 +18040,7 @@
           <p:cNvPr id="6" name="Textfeld 5">
             <a:extLst>
               <a:ext uri="{FF2B5EF4-FFF2-40B4-BE49-F238E27FC236}">
-                <a16:creationId xmlns:a16="http://schemas.microsoft.com/office/drawing/2014/main" xmlns="" id="{8BDF34FA-88E9-410C-A2D3-A4CA51A160DC}"/>
+                <a16:creationId xmlns:a16="http://schemas.microsoft.com/office/drawing/2014/main" id="{8BDF34FA-88E9-410C-A2D3-A4CA51A160DC}"/>
               </a:ext>
             </a:extLst>
           </p:cNvPr>
@@ -18094,7 +18075,7 @@
           <p:cNvPr id="7" name="Rechteck 6">
             <a:extLst>
               <a:ext uri="{FF2B5EF4-FFF2-40B4-BE49-F238E27FC236}">
-                <a16:creationId xmlns:a16="http://schemas.microsoft.com/office/drawing/2014/main" xmlns="" id="{FCF00A6C-B3E8-420B-94E1-037CB7B4DA98}"/>
+                <a16:creationId xmlns:a16="http://schemas.microsoft.com/office/drawing/2014/main" id="{FCF00A6C-B3E8-420B-94E1-037CB7B4DA98}"/>
               </a:ext>
             </a:extLst>
           </p:cNvPr>
@@ -18157,7 +18138,7 @@
           <p:cNvPr id="9" name="Rechteck 8">
             <a:extLst>
               <a:ext uri="{FF2B5EF4-FFF2-40B4-BE49-F238E27FC236}">
-                <a16:creationId xmlns:a16="http://schemas.microsoft.com/office/drawing/2014/main" xmlns="" id="{FBDF469F-F43C-4167-B3D0-E82E918BAF14}"/>
+                <a16:creationId xmlns:a16="http://schemas.microsoft.com/office/drawing/2014/main" id="{FBDF469F-F43C-4167-B3D0-E82E918BAF14}"/>
               </a:ext>
             </a:extLst>
           </p:cNvPr>
@@ -18211,7 +18192,7 @@
           <p:cNvPr id="16" name="Rechteck 15">
             <a:extLst>
               <a:ext uri="{FF2B5EF4-FFF2-40B4-BE49-F238E27FC236}">
-                <a16:creationId xmlns:a16="http://schemas.microsoft.com/office/drawing/2014/main" xmlns="" id="{919D0325-3FCA-4CF6-96E3-52343993606B}"/>
+                <a16:creationId xmlns:a16="http://schemas.microsoft.com/office/drawing/2014/main" id="{919D0325-3FCA-4CF6-96E3-52343993606B}"/>
               </a:ext>
             </a:extLst>
           </p:cNvPr>
@@ -18274,7 +18255,7 @@
           <p:cNvPr id="30" name="Rechteck 29">
             <a:extLst>
               <a:ext uri="{FF2B5EF4-FFF2-40B4-BE49-F238E27FC236}">
-                <a16:creationId xmlns:a16="http://schemas.microsoft.com/office/drawing/2014/main" xmlns="" id="{8C633E04-1879-4354-B454-748334D3752E}"/>
+                <a16:creationId xmlns:a16="http://schemas.microsoft.com/office/drawing/2014/main" id="{8C633E04-1879-4354-B454-748334D3752E}"/>
               </a:ext>
             </a:extLst>
           </p:cNvPr>
@@ -18328,7 +18309,7 @@
           <p:cNvPr id="31" name="Rechteck 30">
             <a:extLst>
               <a:ext uri="{FF2B5EF4-FFF2-40B4-BE49-F238E27FC236}">
-                <a16:creationId xmlns:a16="http://schemas.microsoft.com/office/drawing/2014/main" xmlns="" id="{E4E450FD-0DFC-4912-A477-07DD8E5FC7C1}"/>
+                <a16:creationId xmlns:a16="http://schemas.microsoft.com/office/drawing/2014/main" id="{E4E450FD-0DFC-4912-A477-07DD8E5FC7C1}"/>
               </a:ext>
             </a:extLst>
           </p:cNvPr>
@@ -18382,7 +18363,7 @@
           <p:cNvPr id="32" name="Textfeld 31">
             <a:extLst>
               <a:ext uri="{FF2B5EF4-FFF2-40B4-BE49-F238E27FC236}">
-                <a16:creationId xmlns:a16="http://schemas.microsoft.com/office/drawing/2014/main" xmlns="" id="{750065E5-F123-402F-966F-9BCFEC66C186}"/>
+                <a16:creationId xmlns:a16="http://schemas.microsoft.com/office/drawing/2014/main" id="{750065E5-F123-402F-966F-9BCFEC66C186}"/>
               </a:ext>
             </a:extLst>
           </p:cNvPr>
@@ -18417,7 +18398,7 @@
           <p:cNvPr id="33" name="Rechteck 32">
             <a:extLst>
               <a:ext uri="{FF2B5EF4-FFF2-40B4-BE49-F238E27FC236}">
-                <a16:creationId xmlns:a16="http://schemas.microsoft.com/office/drawing/2014/main" xmlns="" id="{1979B4AE-0A58-4B36-A628-95A066CFD2EC}"/>
+                <a16:creationId xmlns:a16="http://schemas.microsoft.com/office/drawing/2014/main" id="{1979B4AE-0A58-4B36-A628-95A066CFD2EC}"/>
               </a:ext>
             </a:extLst>
           </p:cNvPr>
@@ -18480,7 +18461,7 @@
           <p:cNvPr id="37" name="Rechteck 36">
             <a:extLst>
               <a:ext uri="{FF2B5EF4-FFF2-40B4-BE49-F238E27FC236}">
-                <a16:creationId xmlns:a16="http://schemas.microsoft.com/office/drawing/2014/main" xmlns="" id="{0367905F-3F3B-4651-9AE4-6D3AD2B5C3B5}"/>
+                <a16:creationId xmlns:a16="http://schemas.microsoft.com/office/drawing/2014/main" id="{0367905F-3F3B-4651-9AE4-6D3AD2B5C3B5}"/>
               </a:ext>
             </a:extLst>
           </p:cNvPr>
@@ -18534,7 +18515,7 @@
           <p:cNvPr id="38" name="Rechteck 37">
             <a:extLst>
               <a:ext uri="{FF2B5EF4-FFF2-40B4-BE49-F238E27FC236}">
-                <a16:creationId xmlns:a16="http://schemas.microsoft.com/office/drawing/2014/main" xmlns="" id="{2824AFBA-8560-425F-84CE-2D3C64775893}"/>
+                <a16:creationId xmlns:a16="http://schemas.microsoft.com/office/drawing/2014/main" id="{2824AFBA-8560-425F-84CE-2D3C64775893}"/>
               </a:ext>
             </a:extLst>
           </p:cNvPr>
@@ -18597,7 +18578,7 @@
           <p:cNvPr id="59" name="Rechteck 58">
             <a:extLst>
               <a:ext uri="{FF2B5EF4-FFF2-40B4-BE49-F238E27FC236}">
-                <a16:creationId xmlns:a16="http://schemas.microsoft.com/office/drawing/2014/main" xmlns="" id="{27177E9A-7601-4EFB-A460-ABC72A0C703D}"/>
+                <a16:creationId xmlns:a16="http://schemas.microsoft.com/office/drawing/2014/main" id="{27177E9A-7601-4EFB-A460-ABC72A0C703D}"/>
               </a:ext>
             </a:extLst>
           </p:cNvPr>
@@ -18651,7 +18632,7 @@
           <p:cNvPr id="63" name="Rechteck 62">
             <a:extLst>
               <a:ext uri="{FF2B5EF4-FFF2-40B4-BE49-F238E27FC236}">
-                <a16:creationId xmlns:a16="http://schemas.microsoft.com/office/drawing/2014/main" xmlns="" id="{A9B3B15B-FE83-4885-AABC-08B88171A0F3}"/>
+                <a16:creationId xmlns:a16="http://schemas.microsoft.com/office/drawing/2014/main" id="{A9B3B15B-FE83-4885-AABC-08B88171A0F3}"/>
               </a:ext>
             </a:extLst>
           </p:cNvPr>
@@ -18705,7 +18686,7 @@
           <p:cNvPr id="64" name="Rechteck 63">
             <a:extLst>
               <a:ext uri="{FF2B5EF4-FFF2-40B4-BE49-F238E27FC236}">
-                <a16:creationId xmlns:a16="http://schemas.microsoft.com/office/drawing/2014/main" xmlns="" id="{EE53352C-647C-4C9C-B572-5E65E2B311D8}"/>
+                <a16:creationId xmlns:a16="http://schemas.microsoft.com/office/drawing/2014/main" id="{EE53352C-647C-4C9C-B572-5E65E2B311D8}"/>
               </a:ext>
             </a:extLst>
           </p:cNvPr>
@@ -18759,7 +18740,7 @@
           <p:cNvPr id="65" name="Textfeld 64">
             <a:extLst>
               <a:ext uri="{FF2B5EF4-FFF2-40B4-BE49-F238E27FC236}">
-                <a16:creationId xmlns:a16="http://schemas.microsoft.com/office/drawing/2014/main" xmlns="" id="{A42B9B39-7F45-42A1-8253-F784CA265C32}"/>
+                <a16:creationId xmlns:a16="http://schemas.microsoft.com/office/drawing/2014/main" id="{A42B9B39-7F45-42A1-8253-F784CA265C32}"/>
               </a:ext>
             </a:extLst>
           </p:cNvPr>
@@ -18798,7 +18779,7 @@
           <p:cNvPr id="66" name="Textfeld 65">
             <a:extLst>
               <a:ext uri="{FF2B5EF4-FFF2-40B4-BE49-F238E27FC236}">
-                <a16:creationId xmlns:a16="http://schemas.microsoft.com/office/drawing/2014/main" xmlns="" id="{5699EDD6-01E0-4A51-B746-991E03A6B35B}"/>
+                <a16:creationId xmlns:a16="http://schemas.microsoft.com/office/drawing/2014/main" id="{5699EDD6-01E0-4A51-B746-991E03A6B35B}"/>
               </a:ext>
             </a:extLst>
           </p:cNvPr>
@@ -18833,7 +18814,7 @@
           <p:cNvPr id="67" name="Textfeld 66">
             <a:extLst>
               <a:ext uri="{FF2B5EF4-FFF2-40B4-BE49-F238E27FC236}">
-                <a16:creationId xmlns:a16="http://schemas.microsoft.com/office/drawing/2014/main" xmlns="" id="{5BDA03A1-D7CC-4DC8-9E18-A3672B859CD3}"/>
+                <a16:creationId xmlns:a16="http://schemas.microsoft.com/office/drawing/2014/main" id="{5BDA03A1-D7CC-4DC8-9E18-A3672B859CD3}"/>
               </a:ext>
             </a:extLst>
           </p:cNvPr>
@@ -18868,7 +18849,7 @@
           <p:cNvPr id="69" name="Rechteck 68">
             <a:extLst>
               <a:ext uri="{FF2B5EF4-FFF2-40B4-BE49-F238E27FC236}">
-                <a16:creationId xmlns:a16="http://schemas.microsoft.com/office/drawing/2014/main" xmlns="" id="{437C97E8-4DA5-4BB0-86FA-5558DA5D02F4}"/>
+                <a16:creationId xmlns:a16="http://schemas.microsoft.com/office/drawing/2014/main" id="{437C97E8-4DA5-4BB0-86FA-5558DA5D02F4}"/>
               </a:ext>
             </a:extLst>
           </p:cNvPr>
@@ -18931,7 +18912,7 @@
           <p:cNvPr id="70" name="Rechteck 69">
             <a:extLst>
               <a:ext uri="{FF2B5EF4-FFF2-40B4-BE49-F238E27FC236}">
-                <a16:creationId xmlns:a16="http://schemas.microsoft.com/office/drawing/2014/main" xmlns="" id="{D47607D0-E4C9-446A-9867-EF835CD3D09F}"/>
+                <a16:creationId xmlns:a16="http://schemas.microsoft.com/office/drawing/2014/main" id="{D47607D0-E4C9-446A-9867-EF835CD3D09F}"/>
               </a:ext>
             </a:extLst>
           </p:cNvPr>
@@ -18994,7 +18975,7 @@
           <p:cNvPr id="71" name="Rechteck 70">
             <a:extLst>
               <a:ext uri="{FF2B5EF4-FFF2-40B4-BE49-F238E27FC236}">
-                <a16:creationId xmlns:a16="http://schemas.microsoft.com/office/drawing/2014/main" xmlns="" id="{73F1C874-0310-47CC-BFCC-DE465E244D8E}"/>
+                <a16:creationId xmlns:a16="http://schemas.microsoft.com/office/drawing/2014/main" id="{73F1C874-0310-47CC-BFCC-DE465E244D8E}"/>
               </a:ext>
             </a:extLst>
           </p:cNvPr>
@@ -19048,7 +19029,7 @@
           <p:cNvPr id="72" name="Textfeld 71">
             <a:extLst>
               <a:ext uri="{FF2B5EF4-FFF2-40B4-BE49-F238E27FC236}">
-                <a16:creationId xmlns:a16="http://schemas.microsoft.com/office/drawing/2014/main" xmlns="" id="{D0B6069B-B44E-47EB-9476-8CF8C113F79F}"/>
+                <a16:creationId xmlns:a16="http://schemas.microsoft.com/office/drawing/2014/main" id="{D0B6069B-B44E-47EB-9476-8CF8C113F79F}"/>
               </a:ext>
             </a:extLst>
           </p:cNvPr>
@@ -19083,7 +19064,7 @@
           <p:cNvPr id="73" name="Rechteck 72">
             <a:extLst>
               <a:ext uri="{FF2B5EF4-FFF2-40B4-BE49-F238E27FC236}">
-                <a16:creationId xmlns:a16="http://schemas.microsoft.com/office/drawing/2014/main" xmlns="" id="{5728342D-B612-433D-94A1-16B020F16260}"/>
+                <a16:creationId xmlns:a16="http://schemas.microsoft.com/office/drawing/2014/main" id="{5728342D-B612-433D-94A1-16B020F16260}"/>
               </a:ext>
             </a:extLst>
           </p:cNvPr>
@@ -19146,7 +19127,7 @@
           <p:cNvPr id="74" name="Rechteck 73">
             <a:extLst>
               <a:ext uri="{FF2B5EF4-FFF2-40B4-BE49-F238E27FC236}">
-                <a16:creationId xmlns:a16="http://schemas.microsoft.com/office/drawing/2014/main" xmlns="" id="{932D4EDA-A4BE-42A6-A0B8-9CA3EFC8A655}"/>
+                <a16:creationId xmlns:a16="http://schemas.microsoft.com/office/drawing/2014/main" id="{932D4EDA-A4BE-42A6-A0B8-9CA3EFC8A655}"/>
               </a:ext>
             </a:extLst>
           </p:cNvPr>
@@ -19200,7 +19181,7 @@
           <p:cNvPr id="75" name="Rechteck 74">
             <a:extLst>
               <a:ext uri="{FF2B5EF4-FFF2-40B4-BE49-F238E27FC236}">
-                <a16:creationId xmlns:a16="http://schemas.microsoft.com/office/drawing/2014/main" xmlns="" id="{0C590D71-46FC-401F-AB78-7AE81CC587E9}"/>
+                <a16:creationId xmlns:a16="http://schemas.microsoft.com/office/drawing/2014/main" id="{0C590D71-46FC-401F-AB78-7AE81CC587E9}"/>
               </a:ext>
             </a:extLst>
           </p:cNvPr>
@@ -19254,7 +19235,7 @@
           <p:cNvPr id="76" name="Rechteck 75">
             <a:extLst>
               <a:ext uri="{FF2B5EF4-FFF2-40B4-BE49-F238E27FC236}">
-                <a16:creationId xmlns:a16="http://schemas.microsoft.com/office/drawing/2014/main" xmlns="" id="{8C9793FF-77D4-4409-A19A-730862D5EFEB}"/>
+                <a16:creationId xmlns:a16="http://schemas.microsoft.com/office/drawing/2014/main" id="{8C9793FF-77D4-4409-A19A-730862D5EFEB}"/>
               </a:ext>
             </a:extLst>
           </p:cNvPr>
@@ -19308,7 +19289,7 @@
           <p:cNvPr id="77" name="Textfeld 76">
             <a:extLst>
               <a:ext uri="{FF2B5EF4-FFF2-40B4-BE49-F238E27FC236}">
-                <a16:creationId xmlns:a16="http://schemas.microsoft.com/office/drawing/2014/main" xmlns="" id="{38DB2DA8-C374-4323-9D9A-715F03BF6977}"/>
+                <a16:creationId xmlns:a16="http://schemas.microsoft.com/office/drawing/2014/main" id="{38DB2DA8-C374-4323-9D9A-715F03BF6977}"/>
               </a:ext>
             </a:extLst>
           </p:cNvPr>
@@ -19355,7 +19336,7 @@
           <p:cNvPr id="78" name="Textfeld 77">
             <a:extLst>
               <a:ext uri="{FF2B5EF4-FFF2-40B4-BE49-F238E27FC236}">
-                <a16:creationId xmlns:a16="http://schemas.microsoft.com/office/drawing/2014/main" xmlns="" id="{396D6063-D93A-462C-B2B2-D9101149072B}"/>
+                <a16:creationId xmlns:a16="http://schemas.microsoft.com/office/drawing/2014/main" id="{396D6063-D93A-462C-B2B2-D9101149072B}"/>
               </a:ext>
             </a:extLst>
           </p:cNvPr>
@@ -19390,7 +19371,7 @@
           <p:cNvPr id="79" name="Rechteck 78">
             <a:extLst>
               <a:ext uri="{FF2B5EF4-FFF2-40B4-BE49-F238E27FC236}">
-                <a16:creationId xmlns:a16="http://schemas.microsoft.com/office/drawing/2014/main" xmlns="" id="{87A132F8-27AC-42E9-A941-730C5A2446E6}"/>
+                <a16:creationId xmlns:a16="http://schemas.microsoft.com/office/drawing/2014/main" id="{87A132F8-27AC-42E9-A941-730C5A2446E6}"/>
               </a:ext>
             </a:extLst>
           </p:cNvPr>
@@ -19453,7 +19434,7 @@
           <p:cNvPr id="80" name="Rechteck 79">
             <a:extLst>
               <a:ext uri="{FF2B5EF4-FFF2-40B4-BE49-F238E27FC236}">
-                <a16:creationId xmlns:a16="http://schemas.microsoft.com/office/drawing/2014/main" xmlns="" id="{419AEA1B-DBB9-455B-A540-6F16A9E672AB}"/>
+                <a16:creationId xmlns:a16="http://schemas.microsoft.com/office/drawing/2014/main" id="{419AEA1B-DBB9-455B-A540-6F16A9E672AB}"/>
               </a:ext>
             </a:extLst>
           </p:cNvPr>
@@ -19516,7 +19497,7 @@
           <p:cNvPr id="81" name="Textfeld 80">
             <a:extLst>
               <a:ext uri="{FF2B5EF4-FFF2-40B4-BE49-F238E27FC236}">
-                <a16:creationId xmlns:a16="http://schemas.microsoft.com/office/drawing/2014/main" xmlns="" id="{B8046AA4-69FF-4F14-B646-31DF609BC718}"/>
+                <a16:creationId xmlns:a16="http://schemas.microsoft.com/office/drawing/2014/main" id="{B8046AA4-69FF-4F14-B646-31DF609BC718}"/>
               </a:ext>
             </a:extLst>
           </p:cNvPr>
@@ -19551,7 +19532,7 @@
           <p:cNvPr id="82" name="Rechteck 81">
             <a:extLst>
               <a:ext uri="{FF2B5EF4-FFF2-40B4-BE49-F238E27FC236}">
-                <a16:creationId xmlns:a16="http://schemas.microsoft.com/office/drawing/2014/main" xmlns="" id="{2B049764-4B52-49B3-A122-1C4CD799C7D3}"/>
+                <a16:creationId xmlns:a16="http://schemas.microsoft.com/office/drawing/2014/main" id="{2B049764-4B52-49B3-A122-1C4CD799C7D3}"/>
               </a:ext>
             </a:extLst>
           </p:cNvPr>
@@ -19614,7 +19595,7 @@
           <p:cNvPr id="83" name="Textfeld 82">
             <a:extLst>
               <a:ext uri="{FF2B5EF4-FFF2-40B4-BE49-F238E27FC236}">
-                <a16:creationId xmlns:a16="http://schemas.microsoft.com/office/drawing/2014/main" xmlns="" id="{2650FC96-831B-451C-9896-9F1573984235}"/>
+                <a16:creationId xmlns:a16="http://schemas.microsoft.com/office/drawing/2014/main" id="{2650FC96-831B-451C-9896-9F1573984235}"/>
               </a:ext>
             </a:extLst>
           </p:cNvPr>
@@ -19654,7 +19635,7 @@
           <p:cNvPr id="84" name="Rechteck 83">
             <a:extLst>
               <a:ext uri="{FF2B5EF4-FFF2-40B4-BE49-F238E27FC236}">
-                <a16:creationId xmlns:a16="http://schemas.microsoft.com/office/drawing/2014/main" xmlns="" id="{CCF8096E-018F-4682-8E38-370C53C719F0}"/>
+                <a16:creationId xmlns:a16="http://schemas.microsoft.com/office/drawing/2014/main" id="{CCF8096E-018F-4682-8E38-370C53C719F0}"/>
               </a:ext>
             </a:extLst>
           </p:cNvPr>
@@ -19708,7 +19689,7 @@
           <p:cNvPr id="85" name="Textfeld 84">
             <a:extLst>
               <a:ext uri="{FF2B5EF4-FFF2-40B4-BE49-F238E27FC236}">
-                <a16:creationId xmlns:a16="http://schemas.microsoft.com/office/drawing/2014/main" xmlns="" id="{78ACE688-C4BC-47C3-84B6-91D76840C8A6}"/>
+                <a16:creationId xmlns:a16="http://schemas.microsoft.com/office/drawing/2014/main" id="{78ACE688-C4BC-47C3-84B6-91D76840C8A6}"/>
               </a:ext>
             </a:extLst>
           </p:cNvPr>
@@ -19743,7 +19724,7 @@
           <p:cNvPr id="86" name="Rechteck 85">
             <a:extLst>
               <a:ext uri="{FF2B5EF4-FFF2-40B4-BE49-F238E27FC236}">
-                <a16:creationId xmlns:a16="http://schemas.microsoft.com/office/drawing/2014/main" xmlns="" id="{24A6E6D9-7BC0-46C7-8879-545FAD0363D7}"/>
+                <a16:creationId xmlns:a16="http://schemas.microsoft.com/office/drawing/2014/main" id="{24A6E6D9-7BC0-46C7-8879-545FAD0363D7}"/>
               </a:ext>
             </a:extLst>
           </p:cNvPr>
@@ -19806,7 +19787,7 @@
           <p:cNvPr id="87" name="Rechteck 86">
             <a:extLst>
               <a:ext uri="{FF2B5EF4-FFF2-40B4-BE49-F238E27FC236}">
-                <a16:creationId xmlns:a16="http://schemas.microsoft.com/office/drawing/2014/main" xmlns="" id="{925B8AEF-E11C-4B41-9945-427CB68B794B}"/>
+                <a16:creationId xmlns:a16="http://schemas.microsoft.com/office/drawing/2014/main" id="{925B8AEF-E11C-4B41-9945-427CB68B794B}"/>
               </a:ext>
             </a:extLst>
           </p:cNvPr>
@@ -19860,7 +19841,7 @@
           <p:cNvPr id="88" name="Rechteck 87">
             <a:extLst>
               <a:ext uri="{FF2B5EF4-FFF2-40B4-BE49-F238E27FC236}">
-                <a16:creationId xmlns:a16="http://schemas.microsoft.com/office/drawing/2014/main" xmlns="" id="{84C05619-430F-443D-93A5-E134DDB16F4F}"/>
+                <a16:creationId xmlns:a16="http://schemas.microsoft.com/office/drawing/2014/main" id="{84C05619-430F-443D-93A5-E134DDB16F4F}"/>
               </a:ext>
             </a:extLst>
           </p:cNvPr>
@@ -19914,7 +19895,7 @@
           <p:cNvPr id="89" name="Rechteck 88">
             <a:extLst>
               <a:ext uri="{FF2B5EF4-FFF2-40B4-BE49-F238E27FC236}">
-                <a16:creationId xmlns:a16="http://schemas.microsoft.com/office/drawing/2014/main" xmlns="" id="{DEE4E21E-DEB5-40F0-9FB5-8C5AFE11FE82}"/>
+                <a16:creationId xmlns:a16="http://schemas.microsoft.com/office/drawing/2014/main" id="{DEE4E21E-DEB5-40F0-9FB5-8C5AFE11FE82}"/>
               </a:ext>
             </a:extLst>
           </p:cNvPr>
@@ -19968,7 +19949,7 @@
           <p:cNvPr id="91" name="Gerader Verbinder 90">
             <a:extLst>
               <a:ext uri="{FF2B5EF4-FFF2-40B4-BE49-F238E27FC236}">
-                <a16:creationId xmlns:a16="http://schemas.microsoft.com/office/drawing/2014/main" xmlns="" id="{9EF53D31-C236-4B7D-B0EB-467024974C15}"/>
+                <a16:creationId xmlns:a16="http://schemas.microsoft.com/office/drawing/2014/main" id="{9EF53D31-C236-4B7D-B0EB-467024974C15}"/>
               </a:ext>
             </a:extLst>
           </p:cNvPr>
@@ -20011,7 +19992,7 @@
           <p:cNvPr id="93" name="Textfeld 92">
             <a:extLst>
               <a:ext uri="{FF2B5EF4-FFF2-40B4-BE49-F238E27FC236}">
-                <a16:creationId xmlns:a16="http://schemas.microsoft.com/office/drawing/2014/main" xmlns="" id="{E008FC1D-BFB2-4128-87C1-C0BC6EA23849}"/>
+                <a16:creationId xmlns:a16="http://schemas.microsoft.com/office/drawing/2014/main" id="{E008FC1D-BFB2-4128-87C1-C0BC6EA23849}"/>
               </a:ext>
             </a:extLst>
           </p:cNvPr>
@@ -20046,7 +20027,7 @@
           <p:cNvPr id="94" name="Rechteck 93">
             <a:extLst>
               <a:ext uri="{FF2B5EF4-FFF2-40B4-BE49-F238E27FC236}">
-                <a16:creationId xmlns:a16="http://schemas.microsoft.com/office/drawing/2014/main" xmlns="" id="{89A4C4E6-3132-40B0-BA96-5D55D48953BB}"/>
+                <a16:creationId xmlns:a16="http://schemas.microsoft.com/office/drawing/2014/main" id="{89A4C4E6-3132-40B0-BA96-5D55D48953BB}"/>
               </a:ext>
             </a:extLst>
           </p:cNvPr>
@@ -20109,7 +20090,7 @@
           <p:cNvPr id="95" name="Textfeld 94">
             <a:extLst>
               <a:ext uri="{FF2B5EF4-FFF2-40B4-BE49-F238E27FC236}">
-                <a16:creationId xmlns:a16="http://schemas.microsoft.com/office/drawing/2014/main" xmlns="" id="{43E20746-E8B0-43EE-91C4-A4E5E24F1B9A}"/>
+                <a16:creationId xmlns:a16="http://schemas.microsoft.com/office/drawing/2014/main" id="{43E20746-E8B0-43EE-91C4-A4E5E24F1B9A}"/>
               </a:ext>
             </a:extLst>
           </p:cNvPr>
@@ -20144,7 +20125,7 @@
           <p:cNvPr id="96" name="Textfeld 95">
             <a:extLst>
               <a:ext uri="{FF2B5EF4-FFF2-40B4-BE49-F238E27FC236}">
-                <a16:creationId xmlns:a16="http://schemas.microsoft.com/office/drawing/2014/main" xmlns="" id="{6C0F7A1A-EDB1-403D-B3FC-BD720754F88A}"/>
+                <a16:creationId xmlns:a16="http://schemas.microsoft.com/office/drawing/2014/main" id="{6C0F7A1A-EDB1-403D-B3FC-BD720754F88A}"/>
               </a:ext>
             </a:extLst>
           </p:cNvPr>
@@ -20179,7 +20160,7 @@
           <p:cNvPr id="97" name="Textfeld 96">
             <a:extLst>
               <a:ext uri="{FF2B5EF4-FFF2-40B4-BE49-F238E27FC236}">
-                <a16:creationId xmlns:a16="http://schemas.microsoft.com/office/drawing/2014/main" xmlns="" id="{8E713411-1C74-4B06-93AA-AB0F7C5F99E5}"/>
+                <a16:creationId xmlns:a16="http://schemas.microsoft.com/office/drawing/2014/main" id="{8E713411-1C74-4B06-93AA-AB0F7C5F99E5}"/>
               </a:ext>
             </a:extLst>
           </p:cNvPr>
@@ -20214,7 +20195,7 @@
           <p:cNvPr id="98" name="Rechteck 97">
             <a:extLst>
               <a:ext uri="{FF2B5EF4-FFF2-40B4-BE49-F238E27FC236}">
-                <a16:creationId xmlns:a16="http://schemas.microsoft.com/office/drawing/2014/main" xmlns="" id="{05E2C6A2-A3FA-42BC-B5A5-B9576542BD22}"/>
+                <a16:creationId xmlns:a16="http://schemas.microsoft.com/office/drawing/2014/main" id="{05E2C6A2-A3FA-42BC-B5A5-B9576542BD22}"/>
               </a:ext>
             </a:extLst>
           </p:cNvPr>
@@ -20268,7 +20249,7 @@
           <p:cNvPr id="99" name="Rechteck 98">
             <a:extLst>
               <a:ext uri="{FF2B5EF4-FFF2-40B4-BE49-F238E27FC236}">
-                <a16:creationId xmlns:a16="http://schemas.microsoft.com/office/drawing/2014/main" xmlns="" id="{6C8A782D-9BE1-47D5-83C2-A6FC58A23BD2}"/>
+                <a16:creationId xmlns:a16="http://schemas.microsoft.com/office/drawing/2014/main" id="{6C8A782D-9BE1-47D5-83C2-A6FC58A23BD2}"/>
               </a:ext>
             </a:extLst>
           </p:cNvPr>
@@ -20331,7 +20312,7 @@
           <p:cNvPr id="100" name="Textfeld 99">
             <a:extLst>
               <a:ext uri="{FF2B5EF4-FFF2-40B4-BE49-F238E27FC236}">
-                <a16:creationId xmlns:a16="http://schemas.microsoft.com/office/drawing/2014/main" xmlns="" id="{9A54A553-34FD-4D42-BC4A-2BAE499C3370}"/>
+                <a16:creationId xmlns:a16="http://schemas.microsoft.com/office/drawing/2014/main" id="{9A54A553-34FD-4D42-BC4A-2BAE499C3370}"/>
               </a:ext>
             </a:extLst>
           </p:cNvPr>
@@ -20366,7 +20347,7 @@
           <p:cNvPr id="101" name="Gerader Verbinder 100">
             <a:extLst>
               <a:ext uri="{FF2B5EF4-FFF2-40B4-BE49-F238E27FC236}">
-                <a16:creationId xmlns:a16="http://schemas.microsoft.com/office/drawing/2014/main" xmlns="" id="{174405FB-CCFF-4898-B3F1-D982A67CB3A8}"/>
+                <a16:creationId xmlns:a16="http://schemas.microsoft.com/office/drawing/2014/main" id="{174405FB-CCFF-4898-B3F1-D982A67CB3A8}"/>
               </a:ext>
             </a:extLst>
           </p:cNvPr>
@@ -20403,7 +20384,7 @@
           <p:cNvPr id="103" name="Gerader Verbinder 102">
             <a:extLst>
               <a:ext uri="{FF2B5EF4-FFF2-40B4-BE49-F238E27FC236}">
-                <a16:creationId xmlns:a16="http://schemas.microsoft.com/office/drawing/2014/main" xmlns="" id="{9B0FFE43-E70E-4AF0-9563-59B213B96014}"/>
+                <a16:creationId xmlns:a16="http://schemas.microsoft.com/office/drawing/2014/main" id="{9B0FFE43-E70E-4AF0-9563-59B213B96014}"/>
               </a:ext>
             </a:extLst>
           </p:cNvPr>
@@ -20442,7 +20423,7 @@
           <p:cNvPr id="106" name="Gerader Verbinder 105">
             <a:extLst>
               <a:ext uri="{FF2B5EF4-FFF2-40B4-BE49-F238E27FC236}">
-                <a16:creationId xmlns:a16="http://schemas.microsoft.com/office/drawing/2014/main" xmlns="" id="{472066A7-9458-41F9-8D12-03AC7F64F04A}"/>
+                <a16:creationId xmlns:a16="http://schemas.microsoft.com/office/drawing/2014/main" id="{472066A7-9458-41F9-8D12-03AC7F64F04A}"/>
               </a:ext>
             </a:extLst>
           </p:cNvPr>
@@ -20481,7 +20462,7 @@
           <p:cNvPr id="107" name="Gerader Verbinder 106">
             <a:extLst>
               <a:ext uri="{FF2B5EF4-FFF2-40B4-BE49-F238E27FC236}">
-                <a16:creationId xmlns:a16="http://schemas.microsoft.com/office/drawing/2014/main" xmlns="" id="{D74D717D-822F-4C06-B669-0E72D3757D0F}"/>
+                <a16:creationId xmlns:a16="http://schemas.microsoft.com/office/drawing/2014/main" id="{D74D717D-822F-4C06-B669-0E72D3757D0F}"/>
               </a:ext>
             </a:extLst>
           </p:cNvPr>
@@ -20590,7 +20571,7 @@
           <p:cNvPr id="2" name="Rechteck 1">
             <a:extLst>
               <a:ext uri="{FF2B5EF4-FFF2-40B4-BE49-F238E27FC236}">
-                <a16:creationId xmlns:a16="http://schemas.microsoft.com/office/drawing/2014/main" xmlns="" id="{789D4BB0-1841-441A-997B-7C401B8BCCDF}"/>
+                <a16:creationId xmlns:a16="http://schemas.microsoft.com/office/drawing/2014/main" id="{789D4BB0-1841-441A-997B-7C401B8BCCDF}"/>
               </a:ext>
             </a:extLst>
           </p:cNvPr>
@@ -20644,7 +20625,7 @@
           <p:cNvPr id="4" name="Rechteck 3">
             <a:extLst>
               <a:ext uri="{FF2B5EF4-FFF2-40B4-BE49-F238E27FC236}">
-                <a16:creationId xmlns:a16="http://schemas.microsoft.com/office/drawing/2014/main" xmlns="" id="{5A9DEE85-B450-4F58-B1E4-288CFAD40E8F}"/>
+                <a16:creationId xmlns:a16="http://schemas.microsoft.com/office/drawing/2014/main" id="{5A9DEE85-B450-4F58-B1E4-288CFAD40E8F}"/>
               </a:ext>
             </a:extLst>
           </p:cNvPr>
@@ -20698,7 +20679,7 @@
           <p:cNvPr id="5" name="Textfeld 4">
             <a:extLst>
               <a:ext uri="{FF2B5EF4-FFF2-40B4-BE49-F238E27FC236}">
-                <a16:creationId xmlns:a16="http://schemas.microsoft.com/office/drawing/2014/main" xmlns="" id="{188D7BE6-4ADB-4E45-8116-007446A5DA25}"/>
+                <a16:creationId xmlns:a16="http://schemas.microsoft.com/office/drawing/2014/main" id="{188D7BE6-4ADB-4E45-8116-007446A5DA25}"/>
               </a:ext>
             </a:extLst>
           </p:cNvPr>
@@ -20733,7 +20714,7 @@
           <p:cNvPr id="6" name="Rechteck 5">
             <a:extLst>
               <a:ext uri="{FF2B5EF4-FFF2-40B4-BE49-F238E27FC236}">
-                <a16:creationId xmlns:a16="http://schemas.microsoft.com/office/drawing/2014/main" xmlns="" id="{1FE21EBA-28AA-42B3-8C09-9B931B5BEB70}"/>
+                <a16:creationId xmlns:a16="http://schemas.microsoft.com/office/drawing/2014/main" id="{1FE21EBA-28AA-42B3-8C09-9B931B5BEB70}"/>
               </a:ext>
             </a:extLst>
           </p:cNvPr>
@@ -20787,7 +20768,7 @@
           <p:cNvPr id="7" name="Rechteck 6">
             <a:extLst>
               <a:ext uri="{FF2B5EF4-FFF2-40B4-BE49-F238E27FC236}">
-                <a16:creationId xmlns:a16="http://schemas.microsoft.com/office/drawing/2014/main" xmlns="" id="{198504FF-B49F-40CF-8B78-4EABC12894EB}"/>
+                <a16:creationId xmlns:a16="http://schemas.microsoft.com/office/drawing/2014/main" id="{198504FF-B49F-40CF-8B78-4EABC12894EB}"/>
               </a:ext>
             </a:extLst>
           </p:cNvPr>
@@ -20843,7 +20824,7 @@
           <p:cNvPr id="8" name="Textfeld 7">
             <a:extLst>
               <a:ext uri="{FF2B5EF4-FFF2-40B4-BE49-F238E27FC236}">
-                <a16:creationId xmlns:a16="http://schemas.microsoft.com/office/drawing/2014/main" xmlns="" id="{BBBD69C0-C370-432B-964D-A3EB28505C6A}"/>
+                <a16:creationId xmlns:a16="http://schemas.microsoft.com/office/drawing/2014/main" id="{BBBD69C0-C370-432B-964D-A3EB28505C6A}"/>
               </a:ext>
             </a:extLst>
           </p:cNvPr>
@@ -20878,7 +20859,7 @@
           <p:cNvPr id="9" name="Rechteck 8">
             <a:extLst>
               <a:ext uri="{FF2B5EF4-FFF2-40B4-BE49-F238E27FC236}">
-                <a16:creationId xmlns:a16="http://schemas.microsoft.com/office/drawing/2014/main" xmlns="" id="{3E6AF859-3F91-4FCF-8E24-466E5D3CD574}"/>
+                <a16:creationId xmlns:a16="http://schemas.microsoft.com/office/drawing/2014/main" id="{3E6AF859-3F91-4FCF-8E24-466E5D3CD574}"/>
               </a:ext>
             </a:extLst>
           </p:cNvPr>
@@ -20932,7 +20913,7 @@
           <p:cNvPr id="11" name="Textfeld 10">
             <a:extLst>
               <a:ext uri="{FF2B5EF4-FFF2-40B4-BE49-F238E27FC236}">
-                <a16:creationId xmlns:a16="http://schemas.microsoft.com/office/drawing/2014/main" xmlns="" id="{691D1973-7F94-4C7D-AC73-27E85F3F47F8}"/>
+                <a16:creationId xmlns:a16="http://schemas.microsoft.com/office/drawing/2014/main" id="{691D1973-7F94-4C7D-AC73-27E85F3F47F8}"/>
               </a:ext>
             </a:extLst>
           </p:cNvPr>
@@ -20967,7 +20948,7 @@
           <p:cNvPr id="24" name="Rechteck 23">
             <a:extLst>
               <a:ext uri="{FF2B5EF4-FFF2-40B4-BE49-F238E27FC236}">
-                <a16:creationId xmlns:a16="http://schemas.microsoft.com/office/drawing/2014/main" xmlns="" id="{A2B6F4AC-FF10-4C37-ACAB-050A459996B6}"/>
+                <a16:creationId xmlns:a16="http://schemas.microsoft.com/office/drawing/2014/main" id="{A2B6F4AC-FF10-4C37-ACAB-050A459996B6}"/>
               </a:ext>
             </a:extLst>
           </p:cNvPr>
@@ -21030,7 +21011,7 @@
           <p:cNvPr id="27" name="Rechteck 26">
             <a:extLst>
               <a:ext uri="{FF2B5EF4-FFF2-40B4-BE49-F238E27FC236}">
-                <a16:creationId xmlns:a16="http://schemas.microsoft.com/office/drawing/2014/main" xmlns="" id="{9237488E-D8CA-4901-893F-F5CBC81D9E05}"/>
+                <a16:creationId xmlns:a16="http://schemas.microsoft.com/office/drawing/2014/main" id="{9237488E-D8CA-4901-893F-F5CBC81D9E05}"/>
               </a:ext>
             </a:extLst>
           </p:cNvPr>
@@ -21093,7 +21074,7 @@
           <p:cNvPr id="31" name="Rechteck 30">
             <a:extLst>
               <a:ext uri="{FF2B5EF4-FFF2-40B4-BE49-F238E27FC236}">
-                <a16:creationId xmlns:a16="http://schemas.microsoft.com/office/drawing/2014/main" xmlns="" id="{E42C97CA-F519-4D22-BEC6-9B43C0C2DFE4}"/>
+                <a16:creationId xmlns:a16="http://schemas.microsoft.com/office/drawing/2014/main" id="{E42C97CA-F519-4D22-BEC6-9B43C0C2DFE4}"/>
               </a:ext>
             </a:extLst>
           </p:cNvPr>
@@ -21156,7 +21137,7 @@
           <p:cNvPr id="123" name="Textfeld 122">
             <a:extLst>
               <a:ext uri="{FF2B5EF4-FFF2-40B4-BE49-F238E27FC236}">
-                <a16:creationId xmlns:a16="http://schemas.microsoft.com/office/drawing/2014/main" xmlns="" id="{2B400FDD-8872-40F1-B032-D6622787E617}"/>
+                <a16:creationId xmlns:a16="http://schemas.microsoft.com/office/drawing/2014/main" id="{2B400FDD-8872-40F1-B032-D6622787E617}"/>
               </a:ext>
             </a:extLst>
           </p:cNvPr>
@@ -21204,7 +21185,7 @@
           <p:cNvPr id="124" name="Rechteck 123">
             <a:extLst>
               <a:ext uri="{FF2B5EF4-FFF2-40B4-BE49-F238E27FC236}">
-                <a16:creationId xmlns:a16="http://schemas.microsoft.com/office/drawing/2014/main" xmlns="" id="{B1DB0AB9-08F0-4CCD-A5FF-7226116B22D3}"/>
+                <a16:creationId xmlns:a16="http://schemas.microsoft.com/office/drawing/2014/main" id="{B1DB0AB9-08F0-4CCD-A5FF-7226116B22D3}"/>
               </a:ext>
             </a:extLst>
           </p:cNvPr>
@@ -21258,7 +21239,7 @@
           <p:cNvPr id="126" name="Rechteck 125">
             <a:extLst>
               <a:ext uri="{FF2B5EF4-FFF2-40B4-BE49-F238E27FC236}">
-                <a16:creationId xmlns:a16="http://schemas.microsoft.com/office/drawing/2014/main" xmlns="" id="{9CE53FEB-25F1-40C3-ACA3-7C8850A8ED75}"/>
+                <a16:creationId xmlns:a16="http://schemas.microsoft.com/office/drawing/2014/main" id="{9CE53FEB-25F1-40C3-ACA3-7C8850A8ED75}"/>
               </a:ext>
             </a:extLst>
           </p:cNvPr>
@@ -21321,7 +21302,7 @@
           <p:cNvPr id="129" name="Rechteck 128">
             <a:extLst>
               <a:ext uri="{FF2B5EF4-FFF2-40B4-BE49-F238E27FC236}">
-                <a16:creationId xmlns:a16="http://schemas.microsoft.com/office/drawing/2014/main" xmlns="" id="{5F6C0731-325E-4B05-9D52-6F4F0D8F812C}"/>
+                <a16:creationId xmlns:a16="http://schemas.microsoft.com/office/drawing/2014/main" id="{5F6C0731-325E-4B05-9D52-6F4F0D8F812C}"/>
               </a:ext>
             </a:extLst>
           </p:cNvPr>
@@ -21375,7 +21356,7 @@
           <p:cNvPr id="144" name="Textfeld 143">
             <a:extLst>
               <a:ext uri="{FF2B5EF4-FFF2-40B4-BE49-F238E27FC236}">
-                <a16:creationId xmlns:a16="http://schemas.microsoft.com/office/drawing/2014/main" xmlns="" id="{16F80077-8A27-4B56-909C-106310606029}"/>
+                <a16:creationId xmlns:a16="http://schemas.microsoft.com/office/drawing/2014/main" id="{16F80077-8A27-4B56-909C-106310606029}"/>
               </a:ext>
             </a:extLst>
           </p:cNvPr>
@@ -21410,7 +21391,7 @@
           <p:cNvPr id="145" name="Textfeld 144">
             <a:extLst>
               <a:ext uri="{FF2B5EF4-FFF2-40B4-BE49-F238E27FC236}">
-                <a16:creationId xmlns:a16="http://schemas.microsoft.com/office/drawing/2014/main" xmlns="" id="{80000E6F-795E-4437-B081-A536221E69FB}"/>
+                <a16:creationId xmlns:a16="http://schemas.microsoft.com/office/drawing/2014/main" id="{80000E6F-795E-4437-B081-A536221E69FB}"/>
               </a:ext>
             </a:extLst>
           </p:cNvPr>
@@ -21446,7 +21427,7 @@
           <p:cNvPr id="157" name="Textfeld 156">
             <a:extLst>
               <a:ext uri="{FF2B5EF4-FFF2-40B4-BE49-F238E27FC236}">
-                <a16:creationId xmlns:a16="http://schemas.microsoft.com/office/drawing/2014/main" xmlns="" id="{893F4E6A-B618-4675-9B3B-720F19AEC5E0}"/>
+                <a16:creationId xmlns:a16="http://schemas.microsoft.com/office/drawing/2014/main" id="{893F4E6A-B618-4675-9B3B-720F19AEC5E0}"/>
               </a:ext>
             </a:extLst>
           </p:cNvPr>
@@ -21485,7 +21466,7 @@
           <p:cNvPr id="158" name="Rechteck 157">
             <a:extLst>
               <a:ext uri="{FF2B5EF4-FFF2-40B4-BE49-F238E27FC236}">
-                <a16:creationId xmlns:a16="http://schemas.microsoft.com/office/drawing/2014/main" xmlns="" id="{36137C8E-7B3E-4E3B-836C-A114D5DEB152}"/>
+                <a16:creationId xmlns:a16="http://schemas.microsoft.com/office/drawing/2014/main" id="{36137C8E-7B3E-4E3B-836C-A114D5DEB152}"/>
               </a:ext>
             </a:extLst>
           </p:cNvPr>
@@ -21539,7 +21520,7 @@
           <p:cNvPr id="125" name="Gerader Verbinder 124">
             <a:extLst>
               <a:ext uri="{FF2B5EF4-FFF2-40B4-BE49-F238E27FC236}">
-                <a16:creationId xmlns:a16="http://schemas.microsoft.com/office/drawing/2014/main" xmlns="" id="{F36EFE7E-864C-46BB-BA27-24D095378D2B}"/>
+                <a16:creationId xmlns:a16="http://schemas.microsoft.com/office/drawing/2014/main" id="{F36EFE7E-864C-46BB-BA27-24D095378D2B}"/>
               </a:ext>
             </a:extLst>
           </p:cNvPr>
@@ -21582,7 +21563,7 @@
           <p:cNvPr id="128" name="Raute 127">
             <a:extLst>
               <a:ext uri="{FF2B5EF4-FFF2-40B4-BE49-F238E27FC236}">
-                <a16:creationId xmlns:a16="http://schemas.microsoft.com/office/drawing/2014/main" xmlns="" id="{ADC0B8DE-1BCD-4BB7-8E98-A12184099DAC}"/>
+                <a16:creationId xmlns:a16="http://schemas.microsoft.com/office/drawing/2014/main" id="{ADC0B8DE-1BCD-4BB7-8E98-A12184099DAC}"/>
               </a:ext>
             </a:extLst>
           </p:cNvPr>
@@ -21636,7 +21617,7 @@
           <p:cNvPr id="159" name="Textfeld 158">
             <a:extLst>
               <a:ext uri="{FF2B5EF4-FFF2-40B4-BE49-F238E27FC236}">
-                <a16:creationId xmlns:a16="http://schemas.microsoft.com/office/drawing/2014/main" xmlns="" id="{4639424B-F9E7-408E-B18F-4235DCA11EB4}"/>
+                <a16:creationId xmlns:a16="http://schemas.microsoft.com/office/drawing/2014/main" id="{4639424B-F9E7-408E-B18F-4235DCA11EB4}"/>
               </a:ext>
             </a:extLst>
           </p:cNvPr>
@@ -21671,7 +21652,7 @@
           <p:cNvPr id="160" name="Rechteck 159">
             <a:extLst>
               <a:ext uri="{FF2B5EF4-FFF2-40B4-BE49-F238E27FC236}">
-                <a16:creationId xmlns:a16="http://schemas.microsoft.com/office/drawing/2014/main" xmlns="" id="{976A5B3E-AA38-450B-AD0F-BB26490F403A}"/>
+                <a16:creationId xmlns:a16="http://schemas.microsoft.com/office/drawing/2014/main" id="{976A5B3E-AA38-450B-AD0F-BB26490F403A}"/>
               </a:ext>
             </a:extLst>
           </p:cNvPr>
@@ -21734,7 +21715,7 @@
           <p:cNvPr id="161" name="Rechteck 160">
             <a:extLst>
               <a:ext uri="{FF2B5EF4-FFF2-40B4-BE49-F238E27FC236}">
-                <a16:creationId xmlns:a16="http://schemas.microsoft.com/office/drawing/2014/main" xmlns="" id="{E3CD374F-6962-4419-A039-24E068D46F26}"/>
+                <a16:creationId xmlns:a16="http://schemas.microsoft.com/office/drawing/2014/main" id="{E3CD374F-6962-4419-A039-24E068D46F26}"/>
               </a:ext>
             </a:extLst>
           </p:cNvPr>
@@ -21797,7 +21778,7 @@
           <p:cNvPr id="162" name="Textfeld 161">
             <a:extLst>
               <a:ext uri="{FF2B5EF4-FFF2-40B4-BE49-F238E27FC236}">
-                <a16:creationId xmlns:a16="http://schemas.microsoft.com/office/drawing/2014/main" xmlns="" id="{1C444873-93F1-4C42-A02F-25C520FEF365}"/>
+                <a16:creationId xmlns:a16="http://schemas.microsoft.com/office/drawing/2014/main" id="{1C444873-93F1-4C42-A02F-25C520FEF365}"/>
               </a:ext>
             </a:extLst>
           </p:cNvPr>
@@ -21832,7 +21813,7 @@
           <p:cNvPr id="163" name="Rechteck 162">
             <a:extLst>
               <a:ext uri="{FF2B5EF4-FFF2-40B4-BE49-F238E27FC236}">
-                <a16:creationId xmlns:a16="http://schemas.microsoft.com/office/drawing/2014/main" xmlns="" id="{BEB3C4DC-D74C-4427-93D1-782DD57ED106}"/>
+                <a16:creationId xmlns:a16="http://schemas.microsoft.com/office/drawing/2014/main" id="{BEB3C4DC-D74C-4427-93D1-782DD57ED106}"/>
               </a:ext>
             </a:extLst>
           </p:cNvPr>
@@ -21886,7 +21867,7 @@
           <p:cNvPr id="164" name="Rechteck 163">
             <a:extLst>
               <a:ext uri="{FF2B5EF4-FFF2-40B4-BE49-F238E27FC236}">
-                <a16:creationId xmlns:a16="http://schemas.microsoft.com/office/drawing/2014/main" xmlns="" id="{C15C47F6-8710-4E38-BFAE-82974CCA4032}"/>
+                <a16:creationId xmlns:a16="http://schemas.microsoft.com/office/drawing/2014/main" id="{C15C47F6-8710-4E38-BFAE-82974CCA4032}"/>
               </a:ext>
             </a:extLst>
           </p:cNvPr>
@@ -21949,7 +21930,7 @@
           <p:cNvPr id="165" name="Textfeld 164">
             <a:extLst>
               <a:ext uri="{FF2B5EF4-FFF2-40B4-BE49-F238E27FC236}">
-                <a16:creationId xmlns:a16="http://schemas.microsoft.com/office/drawing/2014/main" xmlns="" id="{F51B4C30-461E-4540-9CA8-5BD65EF48C81}"/>
+                <a16:creationId xmlns:a16="http://schemas.microsoft.com/office/drawing/2014/main" id="{F51B4C30-461E-4540-9CA8-5BD65EF48C81}"/>
               </a:ext>
             </a:extLst>
           </p:cNvPr>
@@ -21984,7 +21965,7 @@
           <p:cNvPr id="173" name="Rechteck 172">
             <a:extLst>
               <a:ext uri="{FF2B5EF4-FFF2-40B4-BE49-F238E27FC236}">
-                <a16:creationId xmlns:a16="http://schemas.microsoft.com/office/drawing/2014/main" xmlns="" id="{A5FECA04-3E6A-4FA2-9781-3AF20E0E8E15}"/>
+                <a16:creationId xmlns:a16="http://schemas.microsoft.com/office/drawing/2014/main" id="{A5FECA04-3E6A-4FA2-9781-3AF20E0E8E15}"/>
               </a:ext>
             </a:extLst>
           </p:cNvPr>
@@ -22038,7 +22019,7 @@
           <p:cNvPr id="174" name="Rechteck 173">
             <a:extLst>
               <a:ext uri="{FF2B5EF4-FFF2-40B4-BE49-F238E27FC236}">
-                <a16:creationId xmlns:a16="http://schemas.microsoft.com/office/drawing/2014/main" xmlns="" id="{30BEDE39-05C6-4AE7-9A6E-C9276954274B}"/>
+                <a16:creationId xmlns:a16="http://schemas.microsoft.com/office/drawing/2014/main" id="{30BEDE39-05C6-4AE7-9A6E-C9276954274B}"/>
               </a:ext>
             </a:extLst>
           </p:cNvPr>
@@ -22092,7 +22073,7 @@
           <p:cNvPr id="175" name="Textfeld 174">
             <a:extLst>
               <a:ext uri="{FF2B5EF4-FFF2-40B4-BE49-F238E27FC236}">
-                <a16:creationId xmlns:a16="http://schemas.microsoft.com/office/drawing/2014/main" xmlns="" id="{8ECAB9FD-3F13-4A53-B2F1-8DB69E4ACB3A}"/>
+                <a16:creationId xmlns:a16="http://schemas.microsoft.com/office/drawing/2014/main" id="{8ECAB9FD-3F13-4A53-B2F1-8DB69E4ACB3A}"/>
               </a:ext>
             </a:extLst>
           </p:cNvPr>
@@ -22127,7 +22108,7 @@
           <p:cNvPr id="176" name="Rechteck 175">
             <a:extLst>
               <a:ext uri="{FF2B5EF4-FFF2-40B4-BE49-F238E27FC236}">
-                <a16:creationId xmlns:a16="http://schemas.microsoft.com/office/drawing/2014/main" xmlns="" id="{1991C4C2-8D89-447B-8532-723FEDFF1574}"/>
+                <a16:creationId xmlns:a16="http://schemas.microsoft.com/office/drawing/2014/main" id="{1991C4C2-8D89-447B-8532-723FEDFF1574}"/>
               </a:ext>
             </a:extLst>
           </p:cNvPr>
@@ -22181,7 +22162,7 @@
           <p:cNvPr id="177" name="Rechteck 176">
             <a:extLst>
               <a:ext uri="{FF2B5EF4-FFF2-40B4-BE49-F238E27FC236}">
-                <a16:creationId xmlns:a16="http://schemas.microsoft.com/office/drawing/2014/main" xmlns="" id="{E9BC4ADF-0DF1-4604-973E-ED8961A03DB8}"/>
+                <a16:creationId xmlns:a16="http://schemas.microsoft.com/office/drawing/2014/main" id="{E9BC4ADF-0DF1-4604-973E-ED8961A03DB8}"/>
               </a:ext>
             </a:extLst>
           </p:cNvPr>
@@ -22237,7 +22218,7 @@
           <p:cNvPr id="178" name="Textfeld 177">
             <a:extLst>
               <a:ext uri="{FF2B5EF4-FFF2-40B4-BE49-F238E27FC236}">
-                <a16:creationId xmlns:a16="http://schemas.microsoft.com/office/drawing/2014/main" xmlns="" id="{161D3489-4C30-4BB7-97FB-41836162537A}"/>
+                <a16:creationId xmlns:a16="http://schemas.microsoft.com/office/drawing/2014/main" id="{161D3489-4C30-4BB7-97FB-41836162537A}"/>
               </a:ext>
             </a:extLst>
           </p:cNvPr>
@@ -22272,7 +22253,7 @@
           <p:cNvPr id="179" name="Rechteck 178">
             <a:extLst>
               <a:ext uri="{FF2B5EF4-FFF2-40B4-BE49-F238E27FC236}">
-                <a16:creationId xmlns:a16="http://schemas.microsoft.com/office/drawing/2014/main" xmlns="" id="{D252927C-5956-46F6-B660-E4D82858958B}"/>
+                <a16:creationId xmlns:a16="http://schemas.microsoft.com/office/drawing/2014/main" id="{D252927C-5956-46F6-B660-E4D82858958B}"/>
               </a:ext>
             </a:extLst>
           </p:cNvPr>
@@ -22326,7 +22307,7 @@
           <p:cNvPr id="180" name="Textfeld 179">
             <a:extLst>
               <a:ext uri="{FF2B5EF4-FFF2-40B4-BE49-F238E27FC236}">
-                <a16:creationId xmlns:a16="http://schemas.microsoft.com/office/drawing/2014/main" xmlns="" id="{1AEDD302-C964-44A4-9FA8-B008E27DF74C}"/>
+                <a16:creationId xmlns:a16="http://schemas.microsoft.com/office/drawing/2014/main" id="{1AEDD302-C964-44A4-9FA8-B008E27DF74C}"/>
               </a:ext>
             </a:extLst>
           </p:cNvPr>
@@ -22361,7 +22342,7 @@
           <p:cNvPr id="181" name="Rechteck 180">
             <a:extLst>
               <a:ext uri="{FF2B5EF4-FFF2-40B4-BE49-F238E27FC236}">
-                <a16:creationId xmlns:a16="http://schemas.microsoft.com/office/drawing/2014/main" xmlns="" id="{C91AC55E-05BE-448B-86A2-54EF89FD3F19}"/>
+                <a16:creationId xmlns:a16="http://schemas.microsoft.com/office/drawing/2014/main" id="{C91AC55E-05BE-448B-86A2-54EF89FD3F19}"/>
               </a:ext>
             </a:extLst>
           </p:cNvPr>
@@ -22424,7 +22405,7 @@
           <p:cNvPr id="182" name="Rechteck 181">
             <a:extLst>
               <a:ext uri="{FF2B5EF4-FFF2-40B4-BE49-F238E27FC236}">
-                <a16:creationId xmlns:a16="http://schemas.microsoft.com/office/drawing/2014/main" xmlns="" id="{1A7237AA-960F-4624-9431-7075FA21BB66}"/>
+                <a16:creationId xmlns:a16="http://schemas.microsoft.com/office/drawing/2014/main" id="{1A7237AA-960F-4624-9431-7075FA21BB66}"/>
               </a:ext>
             </a:extLst>
           </p:cNvPr>
@@ -22487,7 +22468,7 @@
           <p:cNvPr id="183" name="Rechteck 182">
             <a:extLst>
               <a:ext uri="{FF2B5EF4-FFF2-40B4-BE49-F238E27FC236}">
-                <a16:creationId xmlns:a16="http://schemas.microsoft.com/office/drawing/2014/main" xmlns="" id="{55E7A829-4F8F-4E1D-8EB2-08BDBAA15290}"/>
+                <a16:creationId xmlns:a16="http://schemas.microsoft.com/office/drawing/2014/main" id="{55E7A829-4F8F-4E1D-8EB2-08BDBAA15290}"/>
               </a:ext>
             </a:extLst>
           </p:cNvPr>
@@ -22550,7 +22531,7 @@
           <p:cNvPr id="184" name="Rechteck 183">
             <a:extLst>
               <a:ext uri="{FF2B5EF4-FFF2-40B4-BE49-F238E27FC236}">
-                <a16:creationId xmlns:a16="http://schemas.microsoft.com/office/drawing/2014/main" xmlns="" id="{2696C218-36FF-44FC-83EE-55A0BF8A0063}"/>
+                <a16:creationId xmlns:a16="http://schemas.microsoft.com/office/drawing/2014/main" id="{2696C218-36FF-44FC-83EE-55A0BF8A0063}"/>
               </a:ext>
             </a:extLst>
           </p:cNvPr>
@@ -22604,7 +22585,7 @@
           <p:cNvPr id="185" name="Rechteck 184">
             <a:extLst>
               <a:ext uri="{FF2B5EF4-FFF2-40B4-BE49-F238E27FC236}">
-                <a16:creationId xmlns:a16="http://schemas.microsoft.com/office/drawing/2014/main" xmlns="" id="{5E70273C-5ABF-4E6F-A5CB-1FAB4D26E2D0}"/>
+                <a16:creationId xmlns:a16="http://schemas.microsoft.com/office/drawing/2014/main" id="{5E70273C-5ABF-4E6F-A5CB-1FAB4D26E2D0}"/>
               </a:ext>
             </a:extLst>
           </p:cNvPr>
@@ -22667,7 +22648,7 @@
           <p:cNvPr id="186" name="Rechteck 185">
             <a:extLst>
               <a:ext uri="{FF2B5EF4-FFF2-40B4-BE49-F238E27FC236}">
-                <a16:creationId xmlns:a16="http://schemas.microsoft.com/office/drawing/2014/main" xmlns="" id="{823A0BFD-DFDB-464E-8095-91E3BFC144F5}"/>
+                <a16:creationId xmlns:a16="http://schemas.microsoft.com/office/drawing/2014/main" id="{823A0BFD-DFDB-464E-8095-91E3BFC144F5}"/>
               </a:ext>
             </a:extLst>
           </p:cNvPr>
@@ -22721,7 +22702,7 @@
           <p:cNvPr id="187" name="Textfeld 186">
             <a:extLst>
               <a:ext uri="{FF2B5EF4-FFF2-40B4-BE49-F238E27FC236}">
-                <a16:creationId xmlns:a16="http://schemas.microsoft.com/office/drawing/2014/main" xmlns="" id="{1043F500-7A57-40C2-AC18-9A8E4DBEA5A6}"/>
+                <a16:creationId xmlns:a16="http://schemas.microsoft.com/office/drawing/2014/main" id="{1043F500-7A57-40C2-AC18-9A8E4DBEA5A6}"/>
               </a:ext>
             </a:extLst>
           </p:cNvPr>
@@ -22757,7 +22738,7 @@
           <p:cNvPr id="188" name="Textfeld 187">
             <a:extLst>
               <a:ext uri="{FF2B5EF4-FFF2-40B4-BE49-F238E27FC236}">
-                <a16:creationId xmlns:a16="http://schemas.microsoft.com/office/drawing/2014/main" xmlns="" id="{596FF3AB-6707-4091-BBB7-3AF7F13F8749}"/>
+                <a16:creationId xmlns:a16="http://schemas.microsoft.com/office/drawing/2014/main" id="{596FF3AB-6707-4091-BBB7-3AF7F13F8749}"/>
               </a:ext>
             </a:extLst>
           </p:cNvPr>
@@ -22793,7 +22774,7 @@
           <p:cNvPr id="189" name="Textfeld 188">
             <a:extLst>
               <a:ext uri="{FF2B5EF4-FFF2-40B4-BE49-F238E27FC236}">
-                <a16:creationId xmlns:a16="http://schemas.microsoft.com/office/drawing/2014/main" xmlns="" id="{5648D406-ED06-4DA2-AF28-257759C82DF2}"/>
+                <a16:creationId xmlns:a16="http://schemas.microsoft.com/office/drawing/2014/main" id="{5648D406-ED06-4DA2-AF28-257759C82DF2}"/>
               </a:ext>
             </a:extLst>
           </p:cNvPr>
@@ -22832,7 +22813,7 @@
           <p:cNvPr id="190" name="Rechteck 189">
             <a:extLst>
               <a:ext uri="{FF2B5EF4-FFF2-40B4-BE49-F238E27FC236}">
-                <a16:creationId xmlns:a16="http://schemas.microsoft.com/office/drawing/2014/main" xmlns="" id="{28AC5E95-4EE9-419A-94EC-7C0F9D01EB74}"/>
+                <a16:creationId xmlns:a16="http://schemas.microsoft.com/office/drawing/2014/main" id="{28AC5E95-4EE9-419A-94EC-7C0F9D01EB74}"/>
               </a:ext>
             </a:extLst>
           </p:cNvPr>
@@ -22886,7 +22867,7 @@
           <p:cNvPr id="191" name="Gerader Verbinder 190">
             <a:extLst>
               <a:ext uri="{FF2B5EF4-FFF2-40B4-BE49-F238E27FC236}">
-                <a16:creationId xmlns:a16="http://schemas.microsoft.com/office/drawing/2014/main" xmlns="" id="{23847999-3B3E-43D7-ABC2-A1000E9CF12A}"/>
+                <a16:creationId xmlns:a16="http://schemas.microsoft.com/office/drawing/2014/main" id="{23847999-3B3E-43D7-ABC2-A1000E9CF12A}"/>
               </a:ext>
             </a:extLst>
           </p:cNvPr>
@@ -22929,7 +22910,7 @@
           <p:cNvPr id="192" name="Raute 191">
             <a:extLst>
               <a:ext uri="{FF2B5EF4-FFF2-40B4-BE49-F238E27FC236}">
-                <a16:creationId xmlns:a16="http://schemas.microsoft.com/office/drawing/2014/main" xmlns="" id="{175589AA-0FCB-44B7-AF36-F34CBC4C9BEB}"/>
+                <a16:creationId xmlns:a16="http://schemas.microsoft.com/office/drawing/2014/main" id="{175589AA-0FCB-44B7-AF36-F34CBC4C9BEB}"/>
               </a:ext>
             </a:extLst>
           </p:cNvPr>
@@ -22983,7 +22964,7 @@
           <p:cNvPr id="193" name="Textfeld 192">
             <a:extLst>
               <a:ext uri="{FF2B5EF4-FFF2-40B4-BE49-F238E27FC236}">
-                <a16:creationId xmlns:a16="http://schemas.microsoft.com/office/drawing/2014/main" xmlns="" id="{C5D5A354-4848-4112-8DE9-6D276D58B7AB}"/>
+                <a16:creationId xmlns:a16="http://schemas.microsoft.com/office/drawing/2014/main" id="{C5D5A354-4848-4112-8DE9-6D276D58B7AB}"/>
               </a:ext>
             </a:extLst>
           </p:cNvPr>
@@ -23018,7 +22999,7 @@
           <p:cNvPr id="194" name="Rechteck 193">
             <a:extLst>
               <a:ext uri="{FF2B5EF4-FFF2-40B4-BE49-F238E27FC236}">
-                <a16:creationId xmlns:a16="http://schemas.microsoft.com/office/drawing/2014/main" xmlns="" id="{4D6876DC-C48D-4102-9F01-EDD8C138F61C}"/>
+                <a16:creationId xmlns:a16="http://schemas.microsoft.com/office/drawing/2014/main" id="{4D6876DC-C48D-4102-9F01-EDD8C138F61C}"/>
               </a:ext>
             </a:extLst>
           </p:cNvPr>
@@ -23081,7 +23062,7 @@
           <p:cNvPr id="195" name="Rechteck 194">
             <a:extLst>
               <a:ext uri="{FF2B5EF4-FFF2-40B4-BE49-F238E27FC236}">
-                <a16:creationId xmlns:a16="http://schemas.microsoft.com/office/drawing/2014/main" xmlns="" id="{9A133214-C232-4611-A649-F7827DA055FD}"/>
+                <a16:creationId xmlns:a16="http://schemas.microsoft.com/office/drawing/2014/main" id="{9A133214-C232-4611-A649-F7827DA055FD}"/>
               </a:ext>
             </a:extLst>
           </p:cNvPr>
@@ -23144,7 +23125,7 @@
           <p:cNvPr id="196" name="Textfeld 195">
             <a:extLst>
               <a:ext uri="{FF2B5EF4-FFF2-40B4-BE49-F238E27FC236}">
-                <a16:creationId xmlns:a16="http://schemas.microsoft.com/office/drawing/2014/main" xmlns="" id="{23DB7643-F688-4ED2-AFE9-8B551B51D0D3}"/>
+                <a16:creationId xmlns:a16="http://schemas.microsoft.com/office/drawing/2014/main" id="{23DB7643-F688-4ED2-AFE9-8B551B51D0D3}"/>
               </a:ext>
             </a:extLst>
           </p:cNvPr>
@@ -23179,7 +23160,7 @@
           <p:cNvPr id="200" name="Rechteck 199">
             <a:extLst>
               <a:ext uri="{FF2B5EF4-FFF2-40B4-BE49-F238E27FC236}">
-                <a16:creationId xmlns:a16="http://schemas.microsoft.com/office/drawing/2014/main" xmlns="" id="{218A8910-F38A-4729-8993-77217D8B19B0}"/>
+                <a16:creationId xmlns:a16="http://schemas.microsoft.com/office/drawing/2014/main" id="{218A8910-F38A-4729-8993-77217D8B19B0}"/>
               </a:ext>
             </a:extLst>
           </p:cNvPr>
@@ -23233,7 +23214,7 @@
           <p:cNvPr id="201" name="Rechteck 200">
             <a:extLst>
               <a:ext uri="{FF2B5EF4-FFF2-40B4-BE49-F238E27FC236}">
-                <a16:creationId xmlns:a16="http://schemas.microsoft.com/office/drawing/2014/main" xmlns="" id="{575A1339-AA95-4992-8572-E6EDDAC47E4A}"/>
+                <a16:creationId xmlns:a16="http://schemas.microsoft.com/office/drawing/2014/main" id="{575A1339-AA95-4992-8572-E6EDDAC47E4A}"/>
               </a:ext>
             </a:extLst>
           </p:cNvPr>
@@ -23296,7 +23277,7 @@
           <p:cNvPr id="202" name="Textfeld 201">
             <a:extLst>
               <a:ext uri="{FF2B5EF4-FFF2-40B4-BE49-F238E27FC236}">
-                <a16:creationId xmlns:a16="http://schemas.microsoft.com/office/drawing/2014/main" xmlns="" id="{719F9740-8AB1-4737-9E47-88FF3A33542A}"/>
+                <a16:creationId xmlns:a16="http://schemas.microsoft.com/office/drawing/2014/main" id="{719F9740-8AB1-4737-9E47-88FF3A33542A}"/>
               </a:ext>
             </a:extLst>
           </p:cNvPr>
@@ -23331,7 +23312,7 @@
           <p:cNvPr id="203" name="Rechteck 202">
             <a:extLst>
               <a:ext uri="{FF2B5EF4-FFF2-40B4-BE49-F238E27FC236}">
-                <a16:creationId xmlns:a16="http://schemas.microsoft.com/office/drawing/2014/main" xmlns="" id="{92B50848-E51A-44C4-9E2C-792B75F4BC7F}"/>
+                <a16:creationId xmlns:a16="http://schemas.microsoft.com/office/drawing/2014/main" id="{92B50848-E51A-44C4-9E2C-792B75F4BC7F}"/>
               </a:ext>
             </a:extLst>
           </p:cNvPr>
@@ -23385,7 +23366,7 @@
           <p:cNvPr id="204" name="Rechteck 203">
             <a:extLst>
               <a:ext uri="{FF2B5EF4-FFF2-40B4-BE49-F238E27FC236}">
-                <a16:creationId xmlns:a16="http://schemas.microsoft.com/office/drawing/2014/main" xmlns="" id="{6B1923CB-3152-497B-AFF2-D382C4A260E7}"/>
+                <a16:creationId xmlns:a16="http://schemas.microsoft.com/office/drawing/2014/main" id="{6B1923CB-3152-497B-AFF2-D382C4A260E7}"/>
               </a:ext>
             </a:extLst>
           </p:cNvPr>
@@ -23439,7 +23420,7 @@
           <p:cNvPr id="206" name="Rechteck 205">
             <a:extLst>
               <a:ext uri="{FF2B5EF4-FFF2-40B4-BE49-F238E27FC236}">
-                <a16:creationId xmlns:a16="http://schemas.microsoft.com/office/drawing/2014/main" xmlns="" id="{EECAD654-5DB4-4522-8113-46F3DF0618CD}"/>
+                <a16:creationId xmlns:a16="http://schemas.microsoft.com/office/drawing/2014/main" id="{EECAD654-5DB4-4522-8113-46F3DF0618CD}"/>
               </a:ext>
             </a:extLst>
           </p:cNvPr>
@@ -23502,7 +23483,7 @@
           <p:cNvPr id="207" name="Textfeld 206">
             <a:extLst>
               <a:ext uri="{FF2B5EF4-FFF2-40B4-BE49-F238E27FC236}">
-                <a16:creationId xmlns:a16="http://schemas.microsoft.com/office/drawing/2014/main" xmlns="" id="{19EC9A53-C942-482C-B041-B54072B52B2E}"/>
+                <a16:creationId xmlns:a16="http://schemas.microsoft.com/office/drawing/2014/main" id="{19EC9A53-C942-482C-B041-B54072B52B2E}"/>
               </a:ext>
             </a:extLst>
           </p:cNvPr>
@@ -23541,7 +23522,7 @@
           <p:cNvPr id="209" name="Rechteck 208">
             <a:extLst>
               <a:ext uri="{FF2B5EF4-FFF2-40B4-BE49-F238E27FC236}">
-                <a16:creationId xmlns:a16="http://schemas.microsoft.com/office/drawing/2014/main" xmlns="" id="{4C6D6D9B-C180-4574-B528-7814F1B1EAA2}"/>
+                <a16:creationId xmlns:a16="http://schemas.microsoft.com/office/drawing/2014/main" id="{4C6D6D9B-C180-4574-B528-7814F1B1EAA2}"/>
               </a:ext>
             </a:extLst>
           </p:cNvPr>
@@ -23595,7 +23576,7 @@
           <p:cNvPr id="210" name="Rechteck 209">
             <a:extLst>
               <a:ext uri="{FF2B5EF4-FFF2-40B4-BE49-F238E27FC236}">
-                <a16:creationId xmlns:a16="http://schemas.microsoft.com/office/drawing/2014/main" xmlns="" id="{E5EEEB04-83D2-45BA-97CE-7BB83B11F1FF}"/>
+                <a16:creationId xmlns:a16="http://schemas.microsoft.com/office/drawing/2014/main" id="{E5EEEB04-83D2-45BA-97CE-7BB83B11F1FF}"/>
               </a:ext>
             </a:extLst>
           </p:cNvPr>
@@ -23649,7 +23630,7 @@
           <p:cNvPr id="205" name="Gerader Verbinder 204">
             <a:extLst>
               <a:ext uri="{FF2B5EF4-FFF2-40B4-BE49-F238E27FC236}">
-                <a16:creationId xmlns:a16="http://schemas.microsoft.com/office/drawing/2014/main" xmlns="" id="{2EB76DEE-63A2-4DD1-AF51-21357CE30BE8}"/>
+                <a16:creationId xmlns:a16="http://schemas.microsoft.com/office/drawing/2014/main" id="{2EB76DEE-63A2-4DD1-AF51-21357CE30BE8}"/>
               </a:ext>
             </a:extLst>
           </p:cNvPr>
@@ -23692,7 +23673,7 @@
           <p:cNvPr id="208" name="Raute 207">
             <a:extLst>
               <a:ext uri="{FF2B5EF4-FFF2-40B4-BE49-F238E27FC236}">
-                <a16:creationId xmlns:a16="http://schemas.microsoft.com/office/drawing/2014/main" xmlns="" id="{D0CA42B3-D308-4C21-92CA-2558BFFDFD9F}"/>
+                <a16:creationId xmlns:a16="http://schemas.microsoft.com/office/drawing/2014/main" id="{D0CA42B3-D308-4C21-92CA-2558BFFDFD9F}"/>
               </a:ext>
             </a:extLst>
           </p:cNvPr>
@@ -23746,7 +23727,7 @@
           <p:cNvPr id="211" name="Textfeld 210">
             <a:extLst>
               <a:ext uri="{FF2B5EF4-FFF2-40B4-BE49-F238E27FC236}">
-                <a16:creationId xmlns:a16="http://schemas.microsoft.com/office/drawing/2014/main" xmlns="" id="{12A3A6C0-9EE0-4DD2-B7E3-19CEDAABFBBE}"/>
+                <a16:creationId xmlns:a16="http://schemas.microsoft.com/office/drawing/2014/main" id="{12A3A6C0-9EE0-4DD2-B7E3-19CEDAABFBBE}"/>
               </a:ext>
             </a:extLst>
           </p:cNvPr>
@@ -23782,7 +23763,7 @@
           <p:cNvPr id="212" name="Textfeld 211">
             <a:extLst>
               <a:ext uri="{FF2B5EF4-FFF2-40B4-BE49-F238E27FC236}">
-                <a16:creationId xmlns:a16="http://schemas.microsoft.com/office/drawing/2014/main" xmlns="" id="{8A717970-7CE9-416F-B3CA-AD1A6909D827}"/>
+                <a16:creationId xmlns:a16="http://schemas.microsoft.com/office/drawing/2014/main" id="{8A717970-7CE9-416F-B3CA-AD1A6909D827}"/>
               </a:ext>
             </a:extLst>
           </p:cNvPr>
@@ -23818,7 +23799,7 @@
           <p:cNvPr id="213" name="Rechteck 212">
             <a:extLst>
               <a:ext uri="{FF2B5EF4-FFF2-40B4-BE49-F238E27FC236}">
-                <a16:creationId xmlns:a16="http://schemas.microsoft.com/office/drawing/2014/main" xmlns="" id="{94DC884A-CCE5-44AE-8B5D-8FB57021619A}"/>
+                <a16:creationId xmlns:a16="http://schemas.microsoft.com/office/drawing/2014/main" id="{94DC884A-CCE5-44AE-8B5D-8FB57021619A}"/>
               </a:ext>
             </a:extLst>
           </p:cNvPr>
@@ -23881,7 +23862,7 @@
           <p:cNvPr id="214" name="Textfeld 213">
             <a:extLst>
               <a:ext uri="{FF2B5EF4-FFF2-40B4-BE49-F238E27FC236}">
-                <a16:creationId xmlns:a16="http://schemas.microsoft.com/office/drawing/2014/main" xmlns="" id="{5FAF4723-F0EF-4420-BE69-365B93777135}"/>
+                <a16:creationId xmlns:a16="http://schemas.microsoft.com/office/drawing/2014/main" id="{5FAF4723-F0EF-4420-BE69-365B93777135}"/>
               </a:ext>
             </a:extLst>
           </p:cNvPr>
@@ -23916,7 +23897,7 @@
           <p:cNvPr id="215" name="Rechteck 214">
             <a:extLst>
               <a:ext uri="{FF2B5EF4-FFF2-40B4-BE49-F238E27FC236}">
-                <a16:creationId xmlns:a16="http://schemas.microsoft.com/office/drawing/2014/main" xmlns="" id="{CAF0E100-F642-4BF8-BEE8-010D5EA454F1}"/>
+                <a16:creationId xmlns:a16="http://schemas.microsoft.com/office/drawing/2014/main" id="{CAF0E100-F642-4BF8-BEE8-010D5EA454F1}"/>
               </a:ext>
             </a:extLst>
           </p:cNvPr>
@@ -23979,7 +23960,7 @@
           <p:cNvPr id="216" name="Textfeld 215">
             <a:extLst>
               <a:ext uri="{FF2B5EF4-FFF2-40B4-BE49-F238E27FC236}">
-                <a16:creationId xmlns:a16="http://schemas.microsoft.com/office/drawing/2014/main" xmlns="" id="{87D34C1A-3364-48F9-BC18-20A05D935F97}"/>
+                <a16:creationId xmlns:a16="http://schemas.microsoft.com/office/drawing/2014/main" id="{87D34C1A-3364-48F9-BC18-20A05D935F97}"/>
               </a:ext>
             </a:extLst>
           </p:cNvPr>
@@ -24014,7 +23995,7 @@
           <p:cNvPr id="217" name="Rechteck 216">
             <a:extLst>
               <a:ext uri="{FF2B5EF4-FFF2-40B4-BE49-F238E27FC236}">
-                <a16:creationId xmlns:a16="http://schemas.microsoft.com/office/drawing/2014/main" xmlns="" id="{A0265648-CAE2-4460-BCBA-C1DF3903FCDB}"/>
+                <a16:creationId xmlns:a16="http://schemas.microsoft.com/office/drawing/2014/main" id="{A0265648-CAE2-4460-BCBA-C1DF3903FCDB}"/>
               </a:ext>
             </a:extLst>
           </p:cNvPr>
@@ -24068,7 +24049,7 @@
           <p:cNvPr id="218" name="Rechteck 217">
             <a:extLst>
               <a:ext uri="{FF2B5EF4-FFF2-40B4-BE49-F238E27FC236}">
-                <a16:creationId xmlns:a16="http://schemas.microsoft.com/office/drawing/2014/main" xmlns="" id="{03AFB55D-3E39-4F47-B48C-32DA78B65923}"/>
+                <a16:creationId xmlns:a16="http://schemas.microsoft.com/office/drawing/2014/main" id="{03AFB55D-3E39-4F47-B48C-32DA78B65923}"/>
               </a:ext>
             </a:extLst>
           </p:cNvPr>
@@ -24131,7 +24112,7 @@
           <p:cNvPr id="219" name="Textfeld 218">
             <a:extLst>
               <a:ext uri="{FF2B5EF4-FFF2-40B4-BE49-F238E27FC236}">
-                <a16:creationId xmlns:a16="http://schemas.microsoft.com/office/drawing/2014/main" xmlns="" id="{36CFACF6-37E2-4A1D-898D-0A5BD5A73671}"/>
+                <a16:creationId xmlns:a16="http://schemas.microsoft.com/office/drawing/2014/main" id="{36CFACF6-37E2-4A1D-898D-0A5BD5A73671}"/>
               </a:ext>
             </a:extLst>
           </p:cNvPr>
@@ -24166,7 +24147,7 @@
           <p:cNvPr id="172" name="Abgerundete rechteckige Legende 32">
             <a:extLst>
               <a:ext uri="{FF2B5EF4-FFF2-40B4-BE49-F238E27FC236}">
-                <a16:creationId xmlns:a16="http://schemas.microsoft.com/office/drawing/2014/main" xmlns="" id="{C66C3AEA-6C0C-47D4-891E-1FBDB7B23809}"/>
+                <a16:creationId xmlns:a16="http://schemas.microsoft.com/office/drawing/2014/main" id="{C66C3AEA-6C0C-47D4-891E-1FBDB7B23809}"/>
               </a:ext>
             </a:extLst>
           </p:cNvPr>
@@ -24308,7 +24289,7 @@
           <p:cNvPr id="173" name="Rechteck 172">
             <a:extLst>
               <a:ext uri="{FF2B5EF4-FFF2-40B4-BE49-F238E27FC236}">
-                <a16:creationId xmlns:a16="http://schemas.microsoft.com/office/drawing/2014/main" xmlns="" id="{A5FECA04-3E6A-4FA2-9781-3AF20E0E8E15}"/>
+                <a16:creationId xmlns:a16="http://schemas.microsoft.com/office/drawing/2014/main" id="{A5FECA04-3E6A-4FA2-9781-3AF20E0E8E15}"/>
               </a:ext>
             </a:extLst>
           </p:cNvPr>
@@ -24362,7 +24343,7 @@
           <p:cNvPr id="174" name="Rechteck 173">
             <a:extLst>
               <a:ext uri="{FF2B5EF4-FFF2-40B4-BE49-F238E27FC236}">
-                <a16:creationId xmlns:a16="http://schemas.microsoft.com/office/drawing/2014/main" xmlns="" id="{30BEDE39-05C6-4AE7-9A6E-C9276954274B}"/>
+                <a16:creationId xmlns:a16="http://schemas.microsoft.com/office/drawing/2014/main" id="{30BEDE39-05C6-4AE7-9A6E-C9276954274B}"/>
               </a:ext>
             </a:extLst>
           </p:cNvPr>
@@ -24416,7 +24397,7 @@
           <p:cNvPr id="175" name="Textfeld 174">
             <a:extLst>
               <a:ext uri="{FF2B5EF4-FFF2-40B4-BE49-F238E27FC236}">
-                <a16:creationId xmlns:a16="http://schemas.microsoft.com/office/drawing/2014/main" xmlns="" id="{8ECAB9FD-3F13-4A53-B2F1-8DB69E4ACB3A}"/>
+                <a16:creationId xmlns:a16="http://schemas.microsoft.com/office/drawing/2014/main" id="{8ECAB9FD-3F13-4A53-B2F1-8DB69E4ACB3A}"/>
               </a:ext>
             </a:extLst>
           </p:cNvPr>
@@ -24451,7 +24432,7 @@
           <p:cNvPr id="176" name="Rechteck 175">
             <a:extLst>
               <a:ext uri="{FF2B5EF4-FFF2-40B4-BE49-F238E27FC236}">
-                <a16:creationId xmlns:a16="http://schemas.microsoft.com/office/drawing/2014/main" xmlns="" id="{1991C4C2-8D89-447B-8532-723FEDFF1574}"/>
+                <a16:creationId xmlns:a16="http://schemas.microsoft.com/office/drawing/2014/main" id="{1991C4C2-8D89-447B-8532-723FEDFF1574}"/>
               </a:ext>
             </a:extLst>
           </p:cNvPr>
@@ -24505,7 +24486,7 @@
           <p:cNvPr id="177" name="Rechteck 176">
             <a:extLst>
               <a:ext uri="{FF2B5EF4-FFF2-40B4-BE49-F238E27FC236}">
-                <a16:creationId xmlns:a16="http://schemas.microsoft.com/office/drawing/2014/main" xmlns="" id="{E9BC4ADF-0DF1-4604-973E-ED8961A03DB8}"/>
+                <a16:creationId xmlns:a16="http://schemas.microsoft.com/office/drawing/2014/main" id="{E9BC4ADF-0DF1-4604-973E-ED8961A03DB8}"/>
               </a:ext>
             </a:extLst>
           </p:cNvPr>
@@ -24561,7 +24542,7 @@
           <p:cNvPr id="178" name="Textfeld 177">
             <a:extLst>
               <a:ext uri="{FF2B5EF4-FFF2-40B4-BE49-F238E27FC236}">
-                <a16:creationId xmlns:a16="http://schemas.microsoft.com/office/drawing/2014/main" xmlns="" id="{161D3489-4C30-4BB7-97FB-41836162537A}"/>
+                <a16:creationId xmlns:a16="http://schemas.microsoft.com/office/drawing/2014/main" id="{161D3489-4C30-4BB7-97FB-41836162537A}"/>
               </a:ext>
             </a:extLst>
           </p:cNvPr>
@@ -24596,7 +24577,7 @@
           <p:cNvPr id="179" name="Rechteck 178">
             <a:extLst>
               <a:ext uri="{FF2B5EF4-FFF2-40B4-BE49-F238E27FC236}">
-                <a16:creationId xmlns:a16="http://schemas.microsoft.com/office/drawing/2014/main" xmlns="" id="{D252927C-5956-46F6-B660-E4D82858958B}"/>
+                <a16:creationId xmlns:a16="http://schemas.microsoft.com/office/drawing/2014/main" id="{D252927C-5956-46F6-B660-E4D82858958B}"/>
               </a:ext>
             </a:extLst>
           </p:cNvPr>
@@ -24650,7 +24631,7 @@
           <p:cNvPr id="180" name="Textfeld 179">
             <a:extLst>
               <a:ext uri="{FF2B5EF4-FFF2-40B4-BE49-F238E27FC236}">
-                <a16:creationId xmlns:a16="http://schemas.microsoft.com/office/drawing/2014/main" xmlns="" id="{1AEDD302-C964-44A4-9FA8-B008E27DF74C}"/>
+                <a16:creationId xmlns:a16="http://schemas.microsoft.com/office/drawing/2014/main" id="{1AEDD302-C964-44A4-9FA8-B008E27DF74C}"/>
               </a:ext>
             </a:extLst>
           </p:cNvPr>
@@ -24685,7 +24666,7 @@
           <p:cNvPr id="181" name="Rechteck 180">
             <a:extLst>
               <a:ext uri="{FF2B5EF4-FFF2-40B4-BE49-F238E27FC236}">
-                <a16:creationId xmlns:a16="http://schemas.microsoft.com/office/drawing/2014/main" xmlns="" id="{C91AC55E-05BE-448B-86A2-54EF89FD3F19}"/>
+                <a16:creationId xmlns:a16="http://schemas.microsoft.com/office/drawing/2014/main" id="{C91AC55E-05BE-448B-86A2-54EF89FD3F19}"/>
               </a:ext>
             </a:extLst>
           </p:cNvPr>
@@ -24748,7 +24729,7 @@
           <p:cNvPr id="182" name="Rechteck 181">
             <a:extLst>
               <a:ext uri="{FF2B5EF4-FFF2-40B4-BE49-F238E27FC236}">
-                <a16:creationId xmlns:a16="http://schemas.microsoft.com/office/drawing/2014/main" xmlns="" id="{1A7237AA-960F-4624-9431-7075FA21BB66}"/>
+                <a16:creationId xmlns:a16="http://schemas.microsoft.com/office/drawing/2014/main" id="{1A7237AA-960F-4624-9431-7075FA21BB66}"/>
               </a:ext>
             </a:extLst>
           </p:cNvPr>
@@ -24811,7 +24792,7 @@
           <p:cNvPr id="183" name="Rechteck 182">
             <a:extLst>
               <a:ext uri="{FF2B5EF4-FFF2-40B4-BE49-F238E27FC236}">
-                <a16:creationId xmlns:a16="http://schemas.microsoft.com/office/drawing/2014/main" xmlns="" id="{55E7A829-4F8F-4E1D-8EB2-08BDBAA15290}"/>
+                <a16:creationId xmlns:a16="http://schemas.microsoft.com/office/drawing/2014/main" id="{55E7A829-4F8F-4E1D-8EB2-08BDBAA15290}"/>
               </a:ext>
             </a:extLst>
           </p:cNvPr>
@@ -24874,7 +24855,7 @@
           <p:cNvPr id="203" name="Rechteck 202">
             <a:extLst>
               <a:ext uri="{FF2B5EF4-FFF2-40B4-BE49-F238E27FC236}">
-                <a16:creationId xmlns:a16="http://schemas.microsoft.com/office/drawing/2014/main" xmlns="" id="{92B50848-E51A-44C4-9E2C-792B75F4BC7F}"/>
+                <a16:creationId xmlns:a16="http://schemas.microsoft.com/office/drawing/2014/main" id="{92B50848-E51A-44C4-9E2C-792B75F4BC7F}"/>
               </a:ext>
             </a:extLst>
           </p:cNvPr>
@@ -24928,7 +24909,7 @@
           <p:cNvPr id="204" name="Rechteck 203">
             <a:extLst>
               <a:ext uri="{FF2B5EF4-FFF2-40B4-BE49-F238E27FC236}">
-                <a16:creationId xmlns:a16="http://schemas.microsoft.com/office/drawing/2014/main" xmlns="" id="{6B1923CB-3152-497B-AFF2-D382C4A260E7}"/>
+                <a16:creationId xmlns:a16="http://schemas.microsoft.com/office/drawing/2014/main" id="{6B1923CB-3152-497B-AFF2-D382C4A260E7}"/>
               </a:ext>
             </a:extLst>
           </p:cNvPr>
@@ -24982,7 +24963,7 @@
           <p:cNvPr id="206" name="Rechteck 205">
             <a:extLst>
               <a:ext uri="{FF2B5EF4-FFF2-40B4-BE49-F238E27FC236}">
-                <a16:creationId xmlns:a16="http://schemas.microsoft.com/office/drawing/2014/main" xmlns="" id="{EECAD654-5DB4-4522-8113-46F3DF0618CD}"/>
+                <a16:creationId xmlns:a16="http://schemas.microsoft.com/office/drawing/2014/main" id="{EECAD654-5DB4-4522-8113-46F3DF0618CD}"/>
               </a:ext>
             </a:extLst>
           </p:cNvPr>
@@ -25045,7 +25026,7 @@
           <p:cNvPr id="207" name="Textfeld 206">
             <a:extLst>
               <a:ext uri="{FF2B5EF4-FFF2-40B4-BE49-F238E27FC236}">
-                <a16:creationId xmlns:a16="http://schemas.microsoft.com/office/drawing/2014/main" xmlns="" id="{19EC9A53-C942-482C-B041-B54072B52B2E}"/>
+                <a16:creationId xmlns:a16="http://schemas.microsoft.com/office/drawing/2014/main" id="{19EC9A53-C942-482C-B041-B54072B52B2E}"/>
               </a:ext>
             </a:extLst>
           </p:cNvPr>
@@ -25084,7 +25065,7 @@
           <p:cNvPr id="209" name="Rechteck 208">
             <a:extLst>
               <a:ext uri="{FF2B5EF4-FFF2-40B4-BE49-F238E27FC236}">
-                <a16:creationId xmlns:a16="http://schemas.microsoft.com/office/drawing/2014/main" xmlns="" id="{4C6D6D9B-C180-4574-B528-7814F1B1EAA2}"/>
+                <a16:creationId xmlns:a16="http://schemas.microsoft.com/office/drawing/2014/main" id="{4C6D6D9B-C180-4574-B528-7814F1B1EAA2}"/>
               </a:ext>
             </a:extLst>
           </p:cNvPr>
@@ -25138,7 +25119,7 @@
           <p:cNvPr id="210" name="Rechteck 209">
             <a:extLst>
               <a:ext uri="{FF2B5EF4-FFF2-40B4-BE49-F238E27FC236}">
-                <a16:creationId xmlns:a16="http://schemas.microsoft.com/office/drawing/2014/main" xmlns="" id="{E5EEEB04-83D2-45BA-97CE-7BB83B11F1FF}"/>
+                <a16:creationId xmlns:a16="http://schemas.microsoft.com/office/drawing/2014/main" id="{E5EEEB04-83D2-45BA-97CE-7BB83B11F1FF}"/>
               </a:ext>
             </a:extLst>
           </p:cNvPr>
@@ -25192,7 +25173,7 @@
           <p:cNvPr id="205" name="Gerader Verbinder 204">
             <a:extLst>
               <a:ext uri="{FF2B5EF4-FFF2-40B4-BE49-F238E27FC236}">
-                <a16:creationId xmlns:a16="http://schemas.microsoft.com/office/drawing/2014/main" xmlns="" id="{2EB76DEE-63A2-4DD1-AF51-21357CE30BE8}"/>
+                <a16:creationId xmlns:a16="http://schemas.microsoft.com/office/drawing/2014/main" id="{2EB76DEE-63A2-4DD1-AF51-21357CE30BE8}"/>
               </a:ext>
             </a:extLst>
           </p:cNvPr>
@@ -25235,7 +25216,7 @@
           <p:cNvPr id="208" name="Raute 207">
             <a:extLst>
               <a:ext uri="{FF2B5EF4-FFF2-40B4-BE49-F238E27FC236}">
-                <a16:creationId xmlns:a16="http://schemas.microsoft.com/office/drawing/2014/main" xmlns="" id="{D0CA42B3-D308-4C21-92CA-2558BFFDFD9F}"/>
+                <a16:creationId xmlns:a16="http://schemas.microsoft.com/office/drawing/2014/main" id="{D0CA42B3-D308-4C21-92CA-2558BFFDFD9F}"/>
               </a:ext>
             </a:extLst>
           </p:cNvPr>
@@ -25289,7 +25270,7 @@
           <p:cNvPr id="211" name="Textfeld 210">
             <a:extLst>
               <a:ext uri="{FF2B5EF4-FFF2-40B4-BE49-F238E27FC236}">
-                <a16:creationId xmlns:a16="http://schemas.microsoft.com/office/drawing/2014/main" xmlns="" id="{12A3A6C0-9EE0-4DD2-B7E3-19CEDAABFBBE}"/>
+                <a16:creationId xmlns:a16="http://schemas.microsoft.com/office/drawing/2014/main" id="{12A3A6C0-9EE0-4DD2-B7E3-19CEDAABFBBE}"/>
               </a:ext>
             </a:extLst>
           </p:cNvPr>
@@ -25325,7 +25306,7 @@
           <p:cNvPr id="212" name="Textfeld 211">
             <a:extLst>
               <a:ext uri="{FF2B5EF4-FFF2-40B4-BE49-F238E27FC236}">
-                <a16:creationId xmlns:a16="http://schemas.microsoft.com/office/drawing/2014/main" xmlns="" id="{8A717970-7CE9-416F-B3CA-AD1A6909D827}"/>
+                <a16:creationId xmlns:a16="http://schemas.microsoft.com/office/drawing/2014/main" id="{8A717970-7CE9-416F-B3CA-AD1A6909D827}"/>
               </a:ext>
             </a:extLst>
           </p:cNvPr>
@@ -25361,7 +25342,7 @@
           <p:cNvPr id="213" name="Rechteck 212">
             <a:extLst>
               <a:ext uri="{FF2B5EF4-FFF2-40B4-BE49-F238E27FC236}">
-                <a16:creationId xmlns:a16="http://schemas.microsoft.com/office/drawing/2014/main" xmlns="" id="{94DC884A-CCE5-44AE-8B5D-8FB57021619A}"/>
+                <a16:creationId xmlns:a16="http://schemas.microsoft.com/office/drawing/2014/main" id="{94DC884A-CCE5-44AE-8B5D-8FB57021619A}"/>
               </a:ext>
             </a:extLst>
           </p:cNvPr>
@@ -25424,7 +25405,7 @@
           <p:cNvPr id="214" name="Textfeld 213">
             <a:extLst>
               <a:ext uri="{FF2B5EF4-FFF2-40B4-BE49-F238E27FC236}">
-                <a16:creationId xmlns:a16="http://schemas.microsoft.com/office/drawing/2014/main" xmlns="" id="{5FAF4723-F0EF-4420-BE69-365B93777135}"/>
+                <a16:creationId xmlns:a16="http://schemas.microsoft.com/office/drawing/2014/main" id="{5FAF4723-F0EF-4420-BE69-365B93777135}"/>
               </a:ext>
             </a:extLst>
           </p:cNvPr>
@@ -25459,7 +25440,7 @@
           <p:cNvPr id="215" name="Rechteck 214">
             <a:extLst>
               <a:ext uri="{FF2B5EF4-FFF2-40B4-BE49-F238E27FC236}">
-                <a16:creationId xmlns:a16="http://schemas.microsoft.com/office/drawing/2014/main" xmlns="" id="{CAF0E100-F642-4BF8-BEE8-010D5EA454F1}"/>
+                <a16:creationId xmlns:a16="http://schemas.microsoft.com/office/drawing/2014/main" id="{CAF0E100-F642-4BF8-BEE8-010D5EA454F1}"/>
               </a:ext>
             </a:extLst>
           </p:cNvPr>
@@ -25522,7 +25503,7 @@
           <p:cNvPr id="216" name="Textfeld 215">
             <a:extLst>
               <a:ext uri="{FF2B5EF4-FFF2-40B4-BE49-F238E27FC236}">
-                <a16:creationId xmlns:a16="http://schemas.microsoft.com/office/drawing/2014/main" xmlns="" id="{87D34C1A-3364-48F9-BC18-20A05D935F97}"/>
+                <a16:creationId xmlns:a16="http://schemas.microsoft.com/office/drawing/2014/main" id="{87D34C1A-3364-48F9-BC18-20A05D935F97}"/>
               </a:ext>
             </a:extLst>
           </p:cNvPr>
@@ -25557,7 +25538,7 @@
           <p:cNvPr id="217" name="Rechteck 216">
             <a:extLst>
               <a:ext uri="{FF2B5EF4-FFF2-40B4-BE49-F238E27FC236}">
-                <a16:creationId xmlns:a16="http://schemas.microsoft.com/office/drawing/2014/main" xmlns="" id="{A0265648-CAE2-4460-BCBA-C1DF3903FCDB}"/>
+                <a16:creationId xmlns:a16="http://schemas.microsoft.com/office/drawing/2014/main" id="{A0265648-CAE2-4460-BCBA-C1DF3903FCDB}"/>
               </a:ext>
             </a:extLst>
           </p:cNvPr>
@@ -25611,7 +25592,7 @@
           <p:cNvPr id="218" name="Rechteck 217">
             <a:extLst>
               <a:ext uri="{FF2B5EF4-FFF2-40B4-BE49-F238E27FC236}">
-                <a16:creationId xmlns:a16="http://schemas.microsoft.com/office/drawing/2014/main" xmlns="" id="{03AFB55D-3E39-4F47-B48C-32DA78B65923}"/>
+                <a16:creationId xmlns:a16="http://schemas.microsoft.com/office/drawing/2014/main" id="{03AFB55D-3E39-4F47-B48C-32DA78B65923}"/>
               </a:ext>
             </a:extLst>
           </p:cNvPr>
@@ -25674,7 +25655,7 @@
           <p:cNvPr id="219" name="Textfeld 218">
             <a:extLst>
               <a:ext uri="{FF2B5EF4-FFF2-40B4-BE49-F238E27FC236}">
-                <a16:creationId xmlns:a16="http://schemas.microsoft.com/office/drawing/2014/main" xmlns="" id="{36CFACF6-37E2-4A1D-898D-0A5BD5A73671}"/>
+                <a16:creationId xmlns:a16="http://schemas.microsoft.com/office/drawing/2014/main" id="{36CFACF6-37E2-4A1D-898D-0A5BD5A73671}"/>
               </a:ext>
             </a:extLst>
           </p:cNvPr>
@@ -25709,7 +25690,7 @@
           <p:cNvPr id="76" name="Rechteck 75">
             <a:extLst>
               <a:ext uri="{FF2B5EF4-FFF2-40B4-BE49-F238E27FC236}">
-                <a16:creationId xmlns:a16="http://schemas.microsoft.com/office/drawing/2014/main" xmlns="" id="{9C03BDC8-565A-4537-9767-E84E9C9D3BAF}"/>
+                <a16:creationId xmlns:a16="http://schemas.microsoft.com/office/drawing/2014/main" id="{9C03BDC8-565A-4537-9767-E84E9C9D3BAF}"/>
               </a:ext>
             </a:extLst>
           </p:cNvPr>
@@ -25763,7 +25744,7 @@
           <p:cNvPr id="77" name="Rechteck 76">
             <a:extLst>
               <a:ext uri="{FF2B5EF4-FFF2-40B4-BE49-F238E27FC236}">
-                <a16:creationId xmlns:a16="http://schemas.microsoft.com/office/drawing/2014/main" xmlns="" id="{C8D0DD91-6B0A-4D3D-AB15-E8F9AF889D3D}"/>
+                <a16:creationId xmlns:a16="http://schemas.microsoft.com/office/drawing/2014/main" id="{C8D0DD91-6B0A-4D3D-AB15-E8F9AF889D3D}"/>
               </a:ext>
             </a:extLst>
           </p:cNvPr>
@@ -25817,7 +25798,7 @@
           <p:cNvPr id="78" name="Rechteck 77">
             <a:extLst>
               <a:ext uri="{FF2B5EF4-FFF2-40B4-BE49-F238E27FC236}">
-                <a16:creationId xmlns:a16="http://schemas.microsoft.com/office/drawing/2014/main" xmlns="" id="{B185B66C-7EDE-4234-AE47-22F07F4DD187}"/>
+                <a16:creationId xmlns:a16="http://schemas.microsoft.com/office/drawing/2014/main" id="{B185B66C-7EDE-4234-AE47-22F07F4DD187}"/>
               </a:ext>
             </a:extLst>
           </p:cNvPr>
@@ -25871,7 +25852,7 @@
           <p:cNvPr id="191" name="Gerader Verbinder 190">
             <a:extLst>
               <a:ext uri="{FF2B5EF4-FFF2-40B4-BE49-F238E27FC236}">
-                <a16:creationId xmlns:a16="http://schemas.microsoft.com/office/drawing/2014/main" xmlns="" id="{23847999-3B3E-43D7-ABC2-A1000E9CF12A}"/>
+                <a16:creationId xmlns:a16="http://schemas.microsoft.com/office/drawing/2014/main" id="{23847999-3B3E-43D7-ABC2-A1000E9CF12A}"/>
               </a:ext>
             </a:extLst>
           </p:cNvPr>
@@ -25914,7 +25895,7 @@
           <p:cNvPr id="192" name="Raute 191">
             <a:extLst>
               <a:ext uri="{FF2B5EF4-FFF2-40B4-BE49-F238E27FC236}">
-                <a16:creationId xmlns:a16="http://schemas.microsoft.com/office/drawing/2014/main" xmlns="" id="{175589AA-0FCB-44B7-AF36-F34CBC4C9BEB}"/>
+                <a16:creationId xmlns:a16="http://schemas.microsoft.com/office/drawing/2014/main" id="{175589AA-0FCB-44B7-AF36-F34CBC4C9BEB}"/>
               </a:ext>
             </a:extLst>
           </p:cNvPr>
@@ -25968,7 +25949,7 @@
           <p:cNvPr id="189" name="Textfeld 188">
             <a:extLst>
               <a:ext uri="{FF2B5EF4-FFF2-40B4-BE49-F238E27FC236}">
-                <a16:creationId xmlns:a16="http://schemas.microsoft.com/office/drawing/2014/main" xmlns="" id="{5648D406-ED06-4DA2-AF28-257759C82DF2}"/>
+                <a16:creationId xmlns:a16="http://schemas.microsoft.com/office/drawing/2014/main" id="{5648D406-ED06-4DA2-AF28-257759C82DF2}"/>
               </a:ext>
             </a:extLst>
           </p:cNvPr>
@@ -26007,7 +25988,7 @@
           <p:cNvPr id="185" name="Rechteck 184">
             <a:extLst>
               <a:ext uri="{FF2B5EF4-FFF2-40B4-BE49-F238E27FC236}">
-                <a16:creationId xmlns:a16="http://schemas.microsoft.com/office/drawing/2014/main" xmlns="" id="{5E70273C-5ABF-4E6F-A5CB-1FAB4D26E2D0}"/>
+                <a16:creationId xmlns:a16="http://schemas.microsoft.com/office/drawing/2014/main" id="{5E70273C-5ABF-4E6F-A5CB-1FAB4D26E2D0}"/>
               </a:ext>
             </a:extLst>
           </p:cNvPr>
@@ -26070,7 +26051,7 @@
           <p:cNvPr id="187" name="Textfeld 186">
             <a:extLst>
               <a:ext uri="{FF2B5EF4-FFF2-40B4-BE49-F238E27FC236}">
-                <a16:creationId xmlns:a16="http://schemas.microsoft.com/office/drawing/2014/main" xmlns="" id="{1043F500-7A57-40C2-AC18-9A8E4DBEA5A6}"/>
+                <a16:creationId xmlns:a16="http://schemas.microsoft.com/office/drawing/2014/main" id="{1043F500-7A57-40C2-AC18-9A8E4DBEA5A6}"/>
               </a:ext>
             </a:extLst>
           </p:cNvPr>
@@ -26106,7 +26087,7 @@
           <p:cNvPr id="188" name="Textfeld 187">
             <a:extLst>
               <a:ext uri="{FF2B5EF4-FFF2-40B4-BE49-F238E27FC236}">
-                <a16:creationId xmlns:a16="http://schemas.microsoft.com/office/drawing/2014/main" xmlns="" id="{596FF3AB-6707-4091-BBB7-3AF7F13F8749}"/>
+                <a16:creationId xmlns:a16="http://schemas.microsoft.com/office/drawing/2014/main" id="{596FF3AB-6707-4091-BBB7-3AF7F13F8749}"/>
               </a:ext>
             </a:extLst>
           </p:cNvPr>
@@ -26142,7 +26123,7 @@
           <p:cNvPr id="193" name="Textfeld 192">
             <a:extLst>
               <a:ext uri="{FF2B5EF4-FFF2-40B4-BE49-F238E27FC236}">
-                <a16:creationId xmlns:a16="http://schemas.microsoft.com/office/drawing/2014/main" xmlns="" id="{C5D5A354-4848-4112-8DE9-6D276D58B7AB}"/>
+                <a16:creationId xmlns:a16="http://schemas.microsoft.com/office/drawing/2014/main" id="{C5D5A354-4848-4112-8DE9-6D276D58B7AB}"/>
               </a:ext>
             </a:extLst>
           </p:cNvPr>
@@ -26177,7 +26158,7 @@
           <p:cNvPr id="196" name="Textfeld 195">
             <a:extLst>
               <a:ext uri="{FF2B5EF4-FFF2-40B4-BE49-F238E27FC236}">
-                <a16:creationId xmlns:a16="http://schemas.microsoft.com/office/drawing/2014/main" xmlns="" id="{23DB7643-F688-4ED2-AFE9-8B551B51D0D3}"/>
+                <a16:creationId xmlns:a16="http://schemas.microsoft.com/office/drawing/2014/main" id="{23DB7643-F688-4ED2-AFE9-8B551B51D0D3}"/>
               </a:ext>
             </a:extLst>
           </p:cNvPr>
@@ -26212,7 +26193,7 @@
           <p:cNvPr id="194" name="Rechteck 193">
             <a:extLst>
               <a:ext uri="{FF2B5EF4-FFF2-40B4-BE49-F238E27FC236}">
-                <a16:creationId xmlns:a16="http://schemas.microsoft.com/office/drawing/2014/main" xmlns="" id="{4D6876DC-C48D-4102-9F01-EDD8C138F61C}"/>
+                <a16:creationId xmlns:a16="http://schemas.microsoft.com/office/drawing/2014/main" id="{4D6876DC-C48D-4102-9F01-EDD8C138F61C}"/>
               </a:ext>
             </a:extLst>
           </p:cNvPr>
@@ -26275,7 +26256,7 @@
           <p:cNvPr id="195" name="Rechteck 194">
             <a:extLst>
               <a:ext uri="{FF2B5EF4-FFF2-40B4-BE49-F238E27FC236}">
-                <a16:creationId xmlns:a16="http://schemas.microsoft.com/office/drawing/2014/main" xmlns="" id="{9A133214-C232-4611-A649-F7827DA055FD}"/>
+                <a16:creationId xmlns:a16="http://schemas.microsoft.com/office/drawing/2014/main" id="{9A133214-C232-4611-A649-F7827DA055FD}"/>
               </a:ext>
             </a:extLst>
           </p:cNvPr>
@@ -26338,7 +26319,7 @@
           <p:cNvPr id="202" name="Textfeld 201">
             <a:extLst>
               <a:ext uri="{FF2B5EF4-FFF2-40B4-BE49-F238E27FC236}">
-                <a16:creationId xmlns:a16="http://schemas.microsoft.com/office/drawing/2014/main" xmlns="" id="{719F9740-8AB1-4737-9E47-88FF3A33542A}"/>
+                <a16:creationId xmlns:a16="http://schemas.microsoft.com/office/drawing/2014/main" id="{719F9740-8AB1-4737-9E47-88FF3A33542A}"/>
               </a:ext>
             </a:extLst>
           </p:cNvPr>
@@ -26373,7 +26354,7 @@
           <p:cNvPr id="201" name="Rechteck 200">
             <a:extLst>
               <a:ext uri="{FF2B5EF4-FFF2-40B4-BE49-F238E27FC236}">
-                <a16:creationId xmlns:a16="http://schemas.microsoft.com/office/drawing/2014/main" xmlns="" id="{575A1339-AA95-4992-8572-E6EDDAC47E4A}"/>
+                <a16:creationId xmlns:a16="http://schemas.microsoft.com/office/drawing/2014/main" id="{575A1339-AA95-4992-8572-E6EDDAC47E4A}"/>
               </a:ext>
             </a:extLst>
           </p:cNvPr>
@@ -26466,7 +26447,7 @@
           <p:cNvPr id="47" name="Rechteck 46">
             <a:extLst>
               <a:ext uri="{FF2B5EF4-FFF2-40B4-BE49-F238E27FC236}">
-                <a16:creationId xmlns:a16="http://schemas.microsoft.com/office/drawing/2014/main" xmlns="" id="{C8D0DD91-6B0A-4D3D-AB15-E8F9AF889D3D}"/>
+                <a16:creationId xmlns:a16="http://schemas.microsoft.com/office/drawing/2014/main" id="{C8D0DD91-6B0A-4D3D-AB15-E8F9AF889D3D}"/>
               </a:ext>
             </a:extLst>
           </p:cNvPr>
@@ -26523,7 +26504,7 @@
           <p:cNvPr id="49" name="Gerader Verbinder 48">
             <a:extLst>
               <a:ext uri="{FF2B5EF4-FFF2-40B4-BE49-F238E27FC236}">
-                <a16:creationId xmlns:a16="http://schemas.microsoft.com/office/drawing/2014/main" xmlns="" id="{23847999-3B3E-43D7-ABC2-A1000E9CF12A}"/>
+                <a16:creationId xmlns:a16="http://schemas.microsoft.com/office/drawing/2014/main" id="{23847999-3B3E-43D7-ABC2-A1000E9CF12A}"/>
               </a:ext>
             </a:extLst>
           </p:cNvPr>
@@ -26566,7 +26547,7 @@
           <p:cNvPr id="60" name="Gerader Verbinder 59">
             <a:extLst>
               <a:ext uri="{FF2B5EF4-FFF2-40B4-BE49-F238E27FC236}">
-                <a16:creationId xmlns:a16="http://schemas.microsoft.com/office/drawing/2014/main" xmlns="" id="{23847999-3B3E-43D7-ABC2-A1000E9CF12A}"/>
+                <a16:creationId xmlns:a16="http://schemas.microsoft.com/office/drawing/2014/main" id="{23847999-3B3E-43D7-ABC2-A1000E9CF12A}"/>
               </a:ext>
             </a:extLst>
           </p:cNvPr>
@@ -26609,7 +26590,7 @@
           <p:cNvPr id="66" name="Gerader Verbinder 65">
             <a:extLst>
               <a:ext uri="{FF2B5EF4-FFF2-40B4-BE49-F238E27FC236}">
-                <a16:creationId xmlns:a16="http://schemas.microsoft.com/office/drawing/2014/main" xmlns="" id="{23847999-3B3E-43D7-ABC2-A1000E9CF12A}"/>
+                <a16:creationId xmlns:a16="http://schemas.microsoft.com/office/drawing/2014/main" id="{23847999-3B3E-43D7-ABC2-A1000E9CF12A}"/>
               </a:ext>
             </a:extLst>
           </p:cNvPr>
@@ -26652,7 +26633,7 @@
           <p:cNvPr id="50" name="Raute 49">
             <a:extLst>
               <a:ext uri="{FF2B5EF4-FFF2-40B4-BE49-F238E27FC236}">
-                <a16:creationId xmlns:a16="http://schemas.microsoft.com/office/drawing/2014/main" xmlns="" id="{175589AA-0FCB-44B7-AF36-F34CBC4C9BEB}"/>
+                <a16:creationId xmlns:a16="http://schemas.microsoft.com/office/drawing/2014/main" id="{175589AA-0FCB-44B7-AF36-F34CBC4C9BEB}"/>
               </a:ext>
             </a:extLst>
           </p:cNvPr>
@@ -26724,10 +26705,9 @@
           <a:lstStyle/>
           <a:p>
             <a:r>
-              <a:rPr lang="de-DE" dirty="0" smtClean="0"/>
+              <a:rPr lang="de-DE" dirty="0"/>
               <a:t>2px</a:t>
             </a:r>
-            <a:endParaRPr lang="de-DE" dirty="0"/>
           </a:p>
         </p:txBody>
       </p:sp>
@@ -26830,10 +26810,9 @@
           <a:lstStyle/>
           <a:p>
             <a:r>
-              <a:rPr lang="de-DE" dirty="0" smtClean="0"/>
+              <a:rPr lang="de-DE" dirty="0"/>
               <a:t>2px</a:t>
             </a:r>
-            <a:endParaRPr lang="de-DE" dirty="0"/>
           </a:p>
         </p:txBody>
       </p:sp>
@@ -26899,11 +26878,7 @@
           <a:p>
             <a:r>
               <a:rPr lang="de-DE" dirty="0" err="1"/>
-              <a:t>f</a:t>
-            </a:r>
-            <a:r>
-              <a:rPr lang="de-DE" dirty="0" err="1" smtClean="0"/>
-              <a:t>ill:pref</a:t>
+              <a:t>fill:pref</a:t>
             </a:r>
             <a:endParaRPr lang="de-DE" dirty="0"/>
           </a:p>
@@ -27008,22 +26983,14 @@
           <a:lstStyle/>
           <a:p>
             <a:r>
-              <a:rPr lang="de-DE" dirty="0" smtClean="0"/>
+              <a:rPr lang="de-DE" dirty="0"/>
               <a:t>R = (Rautenbreite-2 / 2) * Zoomfaktor</a:t>
             </a:r>
           </a:p>
           <a:p>
             <a:r>
               <a:rPr lang="de-DE" dirty="0"/>
-              <a:t> </a:t>
-            </a:r>
-            <a:r>
-              <a:rPr lang="de-DE" dirty="0" smtClean="0"/>
-              <a:t>  Muss </a:t>
-            </a:r>
-            <a:r>
-              <a:rPr lang="de-DE" dirty="0"/>
-              <a:t>bei </a:t>
+              <a:t>   Muss bei </a:t>
             </a:r>
             <a:r>
               <a:rPr lang="de-DE" dirty="0" err="1"/>
@@ -27059,7 +27026,7 @@
           <a:lstStyle/>
           <a:p>
             <a:r>
-              <a:rPr lang="de-DE" dirty="0" err="1" smtClean="0"/>
+              <a:rPr lang="de-DE" dirty="0" err="1"/>
               <a:t>Rpx</a:t>
             </a:r>
             <a:endParaRPr lang="de-DE" dirty="0"/>
@@ -27127,7 +27094,7 @@
           <a:lstStyle/>
           <a:p>
             <a:r>
-              <a:rPr lang="de-DE" dirty="0" err="1" smtClean="0"/>
+              <a:rPr lang="de-DE" dirty="0" err="1"/>
               <a:t>Rpx</a:t>
             </a:r>
             <a:endParaRPr lang="de-DE" dirty="0"/>
@@ -27195,7 +27162,7 @@
           <a:lstStyle/>
           <a:p>
             <a:r>
-              <a:rPr lang="de-DE" dirty="0" err="1" smtClean="0"/>
+              <a:rPr lang="de-DE" dirty="0" err="1"/>
               <a:t>IFpx</a:t>
             </a:r>
             <a:endParaRPr lang="de-DE" dirty="0"/>
@@ -27225,28 +27192,23 @@
           <a:lstStyle/>
           <a:p>
             <a:r>
-              <a:rPr lang="de-DE" dirty="0" smtClean="0"/>
+              <a:rPr lang="de-DE" dirty="0"/>
               <a:t>IF = (B – 2R – 2) * Userdefiniertes Rechts-Links-Verhältnis (initial 50%)</a:t>
             </a:r>
           </a:p>
           <a:p>
             <a:r>
               <a:rPr lang="de-DE" dirty="0"/>
-              <a:t> </a:t>
-            </a:r>
-            <a:r>
-              <a:rPr lang="de-DE" dirty="0" smtClean="0"/>
-              <a:t>  Muss bei </a:t>
-            </a:r>
-            <a:r>
-              <a:rPr lang="de-DE" dirty="0" err="1" smtClean="0"/>
+              <a:t>   Muss bei </a:t>
+            </a:r>
+            <a:r>
+              <a:rPr lang="de-DE" dirty="0" err="1"/>
               <a:t>Resizing</a:t>
             </a:r>
             <a:r>
-              <a:rPr lang="de-DE" dirty="0" smtClean="0"/>
+              <a:rPr lang="de-DE" dirty="0"/>
               <a:t> (neues B) und Zoomen neu berechnet werden</a:t>
             </a:r>
-            <a:endParaRPr lang="de-DE" dirty="0"/>
           </a:p>
         </p:txBody>
       </p:sp>
@@ -27314,10 +27276,9 @@
           <a:lstStyle/>
           <a:p>
             <a:r>
-              <a:rPr lang="de-DE" dirty="0" smtClean="0"/>
+              <a:rPr lang="de-DE" dirty="0"/>
               <a:t>B</a:t>
             </a:r>
-            <a:endParaRPr lang="de-DE" dirty="0"/>
           </a:p>
         </p:txBody>
       </p:sp>
@@ -27382,7 +27343,7 @@
           <a:lstStyle/>
           <a:p>
             <a:r>
-              <a:rPr lang="de-DE" dirty="0" err="1" smtClean="0"/>
+              <a:rPr lang="de-DE" dirty="0" err="1"/>
               <a:t>fill:pref:grow</a:t>
             </a:r>
             <a:endParaRPr lang="de-DE" dirty="0"/>
@@ -27412,7 +27373,7 @@
           <a:lstStyle/>
           <a:p>
             <a:r>
-              <a:rPr lang="de-DE" dirty="0" err="1" smtClean="0"/>
+              <a:rPr lang="de-DE" dirty="0" err="1"/>
               <a:t>fill:pref:grow</a:t>
             </a:r>
             <a:endParaRPr lang="de-DE" dirty="0"/>
@@ -27480,7 +27441,7 @@
           <a:lstStyle/>
           <a:p>
             <a:r>
-              <a:rPr lang="de-DE" dirty="0" err="1" smtClean="0"/>
+              <a:rPr lang="de-DE" dirty="0" err="1"/>
               <a:t>ELSEpx</a:t>
             </a:r>
             <a:endParaRPr lang="de-DE" dirty="0"/>
@@ -27510,28 +27471,23 @@
           <a:lstStyle/>
           <a:p>
             <a:r>
-              <a:rPr lang="de-DE" dirty="0" smtClean="0"/>
+              <a:rPr lang="de-DE" dirty="0"/>
               <a:t>ELSE = (B – IF – 2R – 2)</a:t>
             </a:r>
           </a:p>
           <a:p>
             <a:r>
               <a:rPr lang="de-DE" dirty="0"/>
-              <a:t> </a:t>
-            </a:r>
-            <a:r>
-              <a:rPr lang="de-DE" dirty="0" smtClean="0"/>
-              <a:t>  Muss bei </a:t>
-            </a:r>
-            <a:r>
-              <a:rPr lang="de-DE" dirty="0" err="1" smtClean="0"/>
+              <a:t>   Muss bei </a:t>
+            </a:r>
+            <a:r>
+              <a:rPr lang="de-DE" dirty="0" err="1"/>
               <a:t>Resizing</a:t>
             </a:r>
             <a:r>
-              <a:rPr lang="de-DE" dirty="0" smtClean="0"/>
+              <a:rPr lang="de-DE" dirty="0"/>
               <a:t> (neues B) und Zoomen neu berechnet werden</a:t>
             </a:r>
-            <a:endParaRPr lang="de-DE" dirty="0"/>
           </a:p>
         </p:txBody>
       </p:sp>
@@ -27558,22 +27514,21 @@
           <a:lstStyle/>
           <a:p>
             <a:r>
-              <a:rPr lang="de-DE" dirty="0" err="1" smtClean="0"/>
+              <a:rPr lang="de-DE" dirty="0" err="1"/>
               <a:t>FormLayout</a:t>
             </a:r>
             <a:r>
-              <a:rPr lang="de-DE" dirty="0" smtClean="0"/>
+              <a:rPr lang="de-DE" dirty="0"/>
               <a:t> für </a:t>
             </a:r>
             <a:r>
-              <a:rPr lang="de-DE" dirty="0" err="1" smtClean="0"/>
+              <a:rPr lang="de-DE" dirty="0" err="1"/>
               <a:t>If</a:t>
             </a:r>
             <a:r>
-              <a:rPr lang="de-DE" dirty="0" smtClean="0"/>
+              <a:rPr lang="de-DE" dirty="0"/>
               <a:t>-Else</a:t>
             </a:r>
-            <a:endParaRPr lang="de-DE" dirty="0"/>
           </a:p>
         </p:txBody>
       </p:sp>
@@ -27607,6 +27562,303 @@
           <a:chExt cx="0" cy="0"/>
         </a:xfrm>
       </p:grpSpPr>
+      <p:pic>
+        <p:nvPicPr>
+          <p:cNvPr id="3" name="Grafik 2">
+            <a:extLst>
+              <a:ext uri="{FF2B5EF4-FFF2-40B4-BE49-F238E27FC236}">
+                <a16:creationId xmlns:a16="http://schemas.microsoft.com/office/drawing/2014/main" id="{9966E1EA-446A-CD4E-3DD3-FB28D73E2825}"/>
+              </a:ext>
+            </a:extLst>
+          </p:cNvPr>
+          <p:cNvPicPr>
+            <a:picLocks noChangeAspect="1"/>
+          </p:cNvPicPr>
+          <p:nvPr/>
+        </p:nvPicPr>
+        <p:blipFill>
+          <a:blip r:embed="rId2"/>
+          <a:stretch>
+            <a:fillRect/>
+          </a:stretch>
+        </p:blipFill>
+        <p:spPr>
+          <a:xfrm>
+            <a:off x="2347389" y="1876208"/>
+            <a:ext cx="7497221" cy="3105583"/>
+          </a:xfrm>
+          <a:prstGeom prst="rect">
+            <a:avLst/>
+          </a:prstGeom>
+        </p:spPr>
+      </p:pic>
+      <p:sp>
+        <p:nvSpPr>
+          <p:cNvPr id="4" name="Textfeld 3">
+            <a:extLst>
+              <a:ext uri="{FF2B5EF4-FFF2-40B4-BE49-F238E27FC236}">
+                <a16:creationId xmlns:a16="http://schemas.microsoft.com/office/drawing/2014/main" id="{CFB66B19-1FC9-56F3-9888-BDEDFB492D01}"/>
+              </a:ext>
+            </a:extLst>
+          </p:cNvPr>
+          <p:cNvSpPr txBox="1"/>
+          <p:nvPr/>
+        </p:nvSpPr>
+        <p:spPr>
+          <a:xfrm>
+            <a:off x="5070426" y="2180366"/>
+            <a:ext cx="1905192" cy="246221"/>
+          </a:xfrm>
+          <a:prstGeom prst="rect">
+            <a:avLst/>
+          </a:prstGeom>
+          <a:solidFill>
+            <a:srgbClr val="FFC000">
+              <a:alpha val="67059"/>
+            </a:srgbClr>
+          </a:solidFill>
+        </p:spPr>
+        <p:txBody>
+          <a:bodyPr wrap="none" lIns="36000" tIns="0" rIns="36000" bIns="0" rtlCol="0">
+            <a:spAutoFit/>
+          </a:bodyPr>
+          <a:lstStyle/>
+          <a:p>
+            <a:r>
+              <a:rPr lang="de-DE" sz="1600" b="1" dirty="0" err="1"/>
+              <a:t>Document</a:t>
+            </a:r>
+            <a:r>
+              <a:rPr lang="de-DE" sz="1600" b="1" dirty="0"/>
+              <a:t> &amp; step </a:t>
+            </a:r>
+            <a:r>
+              <a:rPr lang="de-DE" sz="1600" b="1" dirty="0" err="1"/>
+              <a:t>ops</a:t>
+            </a:r>
+            <a:endParaRPr lang="de-DE" sz="1600" b="1" dirty="0"/>
+          </a:p>
+        </p:txBody>
+      </p:sp>
+      <p:sp>
+        <p:nvSpPr>
+          <p:cNvPr id="8" name="Textfeld 7">
+            <a:extLst>
+              <a:ext uri="{FF2B5EF4-FFF2-40B4-BE49-F238E27FC236}">
+                <a16:creationId xmlns:a16="http://schemas.microsoft.com/office/drawing/2014/main" id="{C7DCACD1-C26E-2E3F-1627-8A2C315FD756}"/>
+              </a:ext>
+            </a:extLst>
+          </p:cNvPr>
+          <p:cNvSpPr txBox="1"/>
+          <p:nvPr/>
+        </p:nvSpPr>
+        <p:spPr>
+          <a:xfrm>
+            <a:off x="8390233" y="2407733"/>
+            <a:ext cx="1350874" cy="246221"/>
+          </a:xfrm>
+          <a:prstGeom prst="rect">
+            <a:avLst/>
+          </a:prstGeom>
+          <a:solidFill>
+            <a:srgbClr val="FFC000">
+              <a:alpha val="67059"/>
+            </a:srgbClr>
+          </a:solidFill>
+        </p:spPr>
+        <p:txBody>
+          <a:bodyPr wrap="none" lIns="36000" tIns="0" rIns="36000" bIns="0" rtlCol="0">
+            <a:spAutoFit/>
+          </a:bodyPr>
+          <a:lstStyle/>
+          <a:p>
+            <a:r>
+              <a:rPr lang="de-DE" sz="1600" b="1" dirty="0"/>
+              <a:t>Text </a:t>
+            </a:r>
+            <a:r>
+              <a:rPr lang="de-DE" sz="1600" b="1" dirty="0" err="1"/>
+              <a:t>properties</a:t>
+            </a:r>
+            <a:endParaRPr lang="de-DE" sz="1600" b="1" dirty="0"/>
+          </a:p>
+        </p:txBody>
+      </p:sp>
+      <p:sp>
+        <p:nvSpPr>
+          <p:cNvPr id="10" name="Textfeld 9">
+            <a:extLst>
+              <a:ext uri="{FF2B5EF4-FFF2-40B4-BE49-F238E27FC236}">
+                <a16:creationId xmlns:a16="http://schemas.microsoft.com/office/drawing/2014/main" id="{434E9959-BCAB-6AB6-809A-4BCBD3BD51CE}"/>
+              </a:ext>
+            </a:extLst>
+          </p:cNvPr>
+          <p:cNvSpPr txBox="1"/>
+          <p:nvPr/>
+        </p:nvSpPr>
+        <p:spPr>
+          <a:xfrm>
+            <a:off x="2425764" y="4497403"/>
+            <a:ext cx="1280021" cy="246221"/>
+          </a:xfrm>
+          <a:prstGeom prst="rect">
+            <a:avLst/>
+          </a:prstGeom>
+          <a:solidFill>
+            <a:srgbClr val="FFC000">
+              <a:alpha val="67059"/>
+            </a:srgbClr>
+          </a:solidFill>
+        </p:spPr>
+        <p:txBody>
+          <a:bodyPr wrap="none" lIns="36000" tIns="0" rIns="36000" bIns="0" rtlCol="0">
+            <a:spAutoFit/>
+          </a:bodyPr>
+          <a:lstStyle/>
+          <a:p>
+            <a:r>
+              <a:rPr lang="de-DE" sz="1600" b="1" dirty="0" err="1"/>
+              <a:t>Steps</a:t>
+            </a:r>
+            <a:r>
+              <a:rPr lang="de-DE" sz="1600" b="1" dirty="0"/>
+              <a:t> </a:t>
+            </a:r>
+            <a:r>
+              <a:rPr lang="de-DE" sz="1600" b="1" dirty="0" err="1"/>
+              <a:t>creation</a:t>
+            </a:r>
+            <a:endParaRPr lang="de-DE" sz="1600" b="1" dirty="0"/>
+          </a:p>
+        </p:txBody>
+      </p:sp>
+      <p:sp>
+        <p:nvSpPr>
+          <p:cNvPr id="12" name="Textfeld 11">
+            <a:extLst>
+              <a:ext uri="{FF2B5EF4-FFF2-40B4-BE49-F238E27FC236}">
+                <a16:creationId xmlns:a16="http://schemas.microsoft.com/office/drawing/2014/main" id="{0F02F489-C4D1-7655-B30A-7E507A50C800}"/>
+              </a:ext>
+            </a:extLst>
+          </p:cNvPr>
+          <p:cNvSpPr txBox="1"/>
+          <p:nvPr/>
+        </p:nvSpPr>
+        <p:spPr>
+          <a:xfrm>
+            <a:off x="5273746" y="3182779"/>
+            <a:ext cx="1377163" cy="246221"/>
+          </a:xfrm>
+          <a:prstGeom prst="rect">
+            <a:avLst/>
+          </a:prstGeom>
+          <a:solidFill>
+            <a:srgbClr val="FFC000">
+              <a:alpha val="67059"/>
+            </a:srgbClr>
+          </a:solidFill>
+        </p:spPr>
+        <p:txBody>
+          <a:bodyPr wrap="none" lIns="36000" tIns="0" rIns="36000" bIns="0" rtlCol="0">
+            <a:spAutoFit/>
+          </a:bodyPr>
+          <a:lstStyle/>
+          <a:p>
+            <a:r>
+              <a:rPr lang="de-DE" sz="1600" b="1" dirty="0"/>
+              <a:t>Diagramm area</a:t>
+            </a:r>
+          </a:p>
+        </p:txBody>
+      </p:sp>
+      <p:sp>
+        <p:nvSpPr>
+          <p:cNvPr id="14" name="Textfeld 13">
+            <a:extLst>
+              <a:ext uri="{FF2B5EF4-FFF2-40B4-BE49-F238E27FC236}">
+                <a16:creationId xmlns:a16="http://schemas.microsoft.com/office/drawing/2014/main" id="{92EBF14A-C219-919C-3D88-235388B4F6B0}"/>
+              </a:ext>
+            </a:extLst>
+          </p:cNvPr>
+          <p:cNvSpPr txBox="1"/>
+          <p:nvPr/>
+        </p:nvSpPr>
+        <p:spPr>
+          <a:xfrm>
+            <a:off x="4039763" y="4431414"/>
+            <a:ext cx="1233983" cy="246221"/>
+          </a:xfrm>
+          <a:prstGeom prst="rect">
+            <a:avLst/>
+          </a:prstGeom>
+          <a:solidFill>
+            <a:srgbClr val="FFC000">
+              <a:alpha val="67059"/>
+            </a:srgbClr>
+          </a:solidFill>
+        </p:spPr>
+        <p:txBody>
+          <a:bodyPr wrap="none" lIns="36000" tIns="0" rIns="36000" bIns="0" rtlCol="0">
+            <a:spAutoFit/>
+          </a:bodyPr>
+          <a:lstStyle/>
+          <a:p>
+            <a:r>
+              <a:rPr lang="de-DE" sz="1600" b="1" dirty="0"/>
+              <a:t>Outro </a:t>
+            </a:r>
+            <a:r>
+              <a:rPr lang="de-DE" sz="1600" b="1" dirty="0" err="1"/>
+              <a:t>section</a:t>
+            </a:r>
+            <a:endParaRPr lang="de-DE" sz="1600" b="1" dirty="0"/>
+          </a:p>
+        </p:txBody>
+      </p:sp>
+      <p:sp>
+        <p:nvSpPr>
+          <p:cNvPr id="16" name="Textfeld 15">
+            <a:extLst>
+              <a:ext uri="{FF2B5EF4-FFF2-40B4-BE49-F238E27FC236}">
+                <a16:creationId xmlns:a16="http://schemas.microsoft.com/office/drawing/2014/main" id="{230C3FD7-0203-A004-1775-15781CAA9A52}"/>
+              </a:ext>
+            </a:extLst>
+          </p:cNvPr>
+          <p:cNvSpPr txBox="1"/>
+          <p:nvPr/>
+        </p:nvSpPr>
+        <p:spPr>
+          <a:xfrm>
+            <a:off x="4039763" y="2748150"/>
+            <a:ext cx="1147100" cy="246221"/>
+          </a:xfrm>
+          <a:prstGeom prst="rect">
+            <a:avLst/>
+          </a:prstGeom>
+          <a:solidFill>
+            <a:srgbClr val="FFC000">
+              <a:alpha val="67059"/>
+            </a:srgbClr>
+          </a:solidFill>
+        </p:spPr>
+        <p:txBody>
+          <a:bodyPr wrap="none" lIns="36000" tIns="0" rIns="36000" bIns="0" rtlCol="0">
+            <a:spAutoFit/>
+          </a:bodyPr>
+          <a:lstStyle/>
+          <a:p>
+            <a:r>
+              <a:rPr lang="de-DE" sz="1600" b="1" dirty="0"/>
+              <a:t>Intro </a:t>
+            </a:r>
+            <a:r>
+              <a:rPr lang="de-DE" sz="1600" b="1" dirty="0" err="1"/>
+              <a:t>section</a:t>
+            </a:r>
+            <a:endParaRPr lang="de-DE" sz="1600" b="1" dirty="0"/>
+          </a:p>
+        </p:txBody>
+      </p:sp>
     </p:spTree>
     <p:extLst>
       <p:ext uri="{BB962C8B-B14F-4D97-AF65-F5344CB8AC3E}">
@@ -27642,7 +27894,7 @@
           <p:cNvPr id="45" name="Rechteck 44">
             <a:extLst>
               <a:ext uri="{FF2B5EF4-FFF2-40B4-BE49-F238E27FC236}">
-                <a16:creationId xmlns:a16="http://schemas.microsoft.com/office/drawing/2014/main" xmlns="" id="{BE0622CD-514A-460B-8F0C-194485DCB382}"/>
+                <a16:creationId xmlns:a16="http://schemas.microsoft.com/office/drawing/2014/main" id="{BE0622CD-514A-460B-8F0C-194485DCB382}"/>
               </a:ext>
             </a:extLst>
           </p:cNvPr>
@@ -27723,7 +27975,7 @@
           <p:cNvPr id="44" name="Rechteck 43">
             <a:extLst>
               <a:ext uri="{FF2B5EF4-FFF2-40B4-BE49-F238E27FC236}">
-                <a16:creationId xmlns:a16="http://schemas.microsoft.com/office/drawing/2014/main" xmlns="" id="{C19919CC-DF6A-4463-AF95-7459171A3BD9}"/>
+                <a16:creationId xmlns:a16="http://schemas.microsoft.com/office/drawing/2014/main" id="{C19919CC-DF6A-4463-AF95-7459171A3BD9}"/>
               </a:ext>
             </a:extLst>
           </p:cNvPr>
@@ -27804,7 +28056,7 @@
           <p:cNvPr id="6" name="Rechteck 5">
             <a:extLst>
               <a:ext uri="{FF2B5EF4-FFF2-40B4-BE49-F238E27FC236}">
-                <a16:creationId xmlns:a16="http://schemas.microsoft.com/office/drawing/2014/main" xmlns="" id="{5E7DB929-572D-4E95-82E8-B6DD989776DD}"/>
+                <a16:creationId xmlns:a16="http://schemas.microsoft.com/office/drawing/2014/main" id="{5E7DB929-572D-4E95-82E8-B6DD989776DD}"/>
               </a:ext>
             </a:extLst>
           </p:cNvPr>
@@ -27887,7 +28139,7 @@
           <p:cNvPr id="7" name="Textfeld 6">
             <a:extLst>
               <a:ext uri="{FF2B5EF4-FFF2-40B4-BE49-F238E27FC236}">
-                <a16:creationId xmlns:a16="http://schemas.microsoft.com/office/drawing/2014/main" xmlns="" id="{672F2C52-F706-4C2C-9BA1-C4050D78BE85}"/>
+                <a16:creationId xmlns:a16="http://schemas.microsoft.com/office/drawing/2014/main" id="{672F2C52-F706-4C2C-9BA1-C4050D78BE85}"/>
               </a:ext>
             </a:extLst>
           </p:cNvPr>
@@ -27952,7 +28204,7 @@
           <p:cNvPr id="10" name="Rechteck 9">
             <a:extLst>
               <a:ext uri="{FF2B5EF4-FFF2-40B4-BE49-F238E27FC236}">
-                <a16:creationId xmlns:a16="http://schemas.microsoft.com/office/drawing/2014/main" xmlns="" id="{32A3E22E-D260-4C45-BA90-93973AE9B3A5}"/>
+                <a16:creationId xmlns:a16="http://schemas.microsoft.com/office/drawing/2014/main" id="{32A3E22E-D260-4C45-BA90-93973AE9B3A5}"/>
               </a:ext>
             </a:extLst>
           </p:cNvPr>
@@ -28040,7 +28292,7 @@
           <p:cNvPr id="11" name="Rechteck 10">
             <a:extLst>
               <a:ext uri="{FF2B5EF4-FFF2-40B4-BE49-F238E27FC236}">
-                <a16:creationId xmlns:a16="http://schemas.microsoft.com/office/drawing/2014/main" xmlns="" id="{D1F4732C-79DE-42D2-A58B-E8C11266ACF7}"/>
+                <a16:creationId xmlns:a16="http://schemas.microsoft.com/office/drawing/2014/main" id="{D1F4732C-79DE-42D2-A58B-E8C11266ACF7}"/>
               </a:ext>
             </a:extLst>
           </p:cNvPr>
@@ -28123,7 +28375,7 @@
           <p:cNvPr id="12" name="Textfeld 11">
             <a:extLst>
               <a:ext uri="{FF2B5EF4-FFF2-40B4-BE49-F238E27FC236}">
-                <a16:creationId xmlns:a16="http://schemas.microsoft.com/office/drawing/2014/main" xmlns="" id="{02FC1387-79DE-4020-9DA1-A6B3234ADFEC}"/>
+                <a16:creationId xmlns:a16="http://schemas.microsoft.com/office/drawing/2014/main" id="{02FC1387-79DE-4020-9DA1-A6B3234ADFEC}"/>
               </a:ext>
             </a:extLst>
           </p:cNvPr>
@@ -28191,7 +28443,7 @@
           <p:cNvPr id="13" name="Rechteck 12">
             <a:extLst>
               <a:ext uri="{FF2B5EF4-FFF2-40B4-BE49-F238E27FC236}">
-                <a16:creationId xmlns:a16="http://schemas.microsoft.com/office/drawing/2014/main" xmlns="" id="{752BB21E-3E26-4787-B6E4-98DA671FB7D0}"/>
+                <a16:creationId xmlns:a16="http://schemas.microsoft.com/office/drawing/2014/main" id="{752BB21E-3E26-4787-B6E4-98DA671FB7D0}"/>
               </a:ext>
             </a:extLst>
           </p:cNvPr>
@@ -28279,7 +28531,7 @@
           <p:cNvPr id="14" name="Rechteck 13">
             <a:extLst>
               <a:ext uri="{FF2B5EF4-FFF2-40B4-BE49-F238E27FC236}">
-                <a16:creationId xmlns:a16="http://schemas.microsoft.com/office/drawing/2014/main" xmlns="" id="{5AAAAF96-C88F-4697-97AA-CB25F4EE9CBE}"/>
+                <a16:creationId xmlns:a16="http://schemas.microsoft.com/office/drawing/2014/main" id="{5AAAAF96-C88F-4697-97AA-CB25F4EE9CBE}"/>
               </a:ext>
             </a:extLst>
           </p:cNvPr>
@@ -28362,7 +28614,7 @@
           <p:cNvPr id="15" name="Textfeld 14">
             <a:extLst>
               <a:ext uri="{FF2B5EF4-FFF2-40B4-BE49-F238E27FC236}">
-                <a16:creationId xmlns:a16="http://schemas.microsoft.com/office/drawing/2014/main" xmlns="" id="{4AE2C204-1AD2-4A57-A158-D3E391AA6D54}"/>
+                <a16:creationId xmlns:a16="http://schemas.microsoft.com/office/drawing/2014/main" id="{4AE2C204-1AD2-4A57-A158-D3E391AA6D54}"/>
               </a:ext>
             </a:extLst>
           </p:cNvPr>
@@ -28505,7 +28757,7 @@
           <p:cNvPr id="16" name="Rechteck 15">
             <a:extLst>
               <a:ext uri="{FF2B5EF4-FFF2-40B4-BE49-F238E27FC236}">
-                <a16:creationId xmlns:a16="http://schemas.microsoft.com/office/drawing/2014/main" xmlns="" id="{01D6F112-ACD3-4890-BEE5-D0DD7EC947C7}"/>
+                <a16:creationId xmlns:a16="http://schemas.microsoft.com/office/drawing/2014/main" id="{01D6F112-ACD3-4890-BEE5-D0DD7EC947C7}"/>
               </a:ext>
             </a:extLst>
           </p:cNvPr>
@@ -28593,7 +28845,7 @@
           <p:cNvPr id="17" name="Rechteck 16">
             <a:extLst>
               <a:ext uri="{FF2B5EF4-FFF2-40B4-BE49-F238E27FC236}">
-                <a16:creationId xmlns:a16="http://schemas.microsoft.com/office/drawing/2014/main" xmlns="" id="{EA1DA133-D603-48EA-92C1-2DAA12C39D85}"/>
+                <a16:creationId xmlns:a16="http://schemas.microsoft.com/office/drawing/2014/main" id="{EA1DA133-D603-48EA-92C1-2DAA12C39D85}"/>
               </a:ext>
             </a:extLst>
           </p:cNvPr>
@@ -28676,7 +28928,7 @@
           <p:cNvPr id="18" name="Textfeld 17">
             <a:extLst>
               <a:ext uri="{FF2B5EF4-FFF2-40B4-BE49-F238E27FC236}">
-                <a16:creationId xmlns:a16="http://schemas.microsoft.com/office/drawing/2014/main" xmlns="" id="{C53853E5-B461-4D3A-9188-0293B6DDD832}"/>
+                <a16:creationId xmlns:a16="http://schemas.microsoft.com/office/drawing/2014/main" id="{C53853E5-B461-4D3A-9188-0293B6DDD832}"/>
               </a:ext>
             </a:extLst>
           </p:cNvPr>
@@ -28746,7 +28998,7 @@
           <p:cNvPr id="19" name="Rechteck 18">
             <a:extLst>
               <a:ext uri="{FF2B5EF4-FFF2-40B4-BE49-F238E27FC236}">
-                <a16:creationId xmlns:a16="http://schemas.microsoft.com/office/drawing/2014/main" xmlns="" id="{A6985B62-B09B-46F3-9598-C2B18CE11416}"/>
+                <a16:creationId xmlns:a16="http://schemas.microsoft.com/office/drawing/2014/main" id="{A6985B62-B09B-46F3-9598-C2B18CE11416}"/>
               </a:ext>
             </a:extLst>
           </p:cNvPr>
@@ -28836,7 +29088,7 @@
           <p:cNvPr id="20" name="Rechteck 19">
             <a:extLst>
               <a:ext uri="{FF2B5EF4-FFF2-40B4-BE49-F238E27FC236}">
-                <a16:creationId xmlns:a16="http://schemas.microsoft.com/office/drawing/2014/main" xmlns="" id="{4F5A0364-3EAA-4EE8-8B99-9623CB507C49}"/>
+                <a16:creationId xmlns:a16="http://schemas.microsoft.com/office/drawing/2014/main" id="{4F5A0364-3EAA-4EE8-8B99-9623CB507C49}"/>
               </a:ext>
             </a:extLst>
           </p:cNvPr>
@@ -28917,7 +29169,7 @@
           <p:cNvPr id="21" name="Textfeld 20">
             <a:extLst>
               <a:ext uri="{FF2B5EF4-FFF2-40B4-BE49-F238E27FC236}">
-                <a16:creationId xmlns:a16="http://schemas.microsoft.com/office/drawing/2014/main" xmlns="" id="{D6FB7548-3D28-4AB5-AE59-C2442EF7AD0B}"/>
+                <a16:creationId xmlns:a16="http://schemas.microsoft.com/office/drawing/2014/main" id="{D6FB7548-3D28-4AB5-AE59-C2442EF7AD0B}"/>
               </a:ext>
             </a:extLst>
           </p:cNvPr>
@@ -28982,7 +29234,7 @@
           <p:cNvPr id="22" name="Rechteck 21">
             <a:extLst>
               <a:ext uri="{FF2B5EF4-FFF2-40B4-BE49-F238E27FC236}">
-                <a16:creationId xmlns:a16="http://schemas.microsoft.com/office/drawing/2014/main" xmlns="" id="{2B993EC2-FADA-4E55-95D7-5E5592E0B3F0}"/>
+                <a16:creationId xmlns:a16="http://schemas.microsoft.com/office/drawing/2014/main" id="{2B993EC2-FADA-4E55-95D7-5E5592E0B3F0}"/>
               </a:ext>
             </a:extLst>
           </p:cNvPr>
@@ -29070,7 +29322,7 @@
           <p:cNvPr id="23" name="Flussdiagramm: Verzweigung 22">
             <a:extLst>
               <a:ext uri="{FF2B5EF4-FFF2-40B4-BE49-F238E27FC236}">
-                <a16:creationId xmlns:a16="http://schemas.microsoft.com/office/drawing/2014/main" xmlns="" id="{605B1548-1E32-4D6D-B8E2-C30E1E6E5D23}"/>
+                <a16:creationId xmlns:a16="http://schemas.microsoft.com/office/drawing/2014/main" id="{605B1548-1E32-4D6D-B8E2-C30E1E6E5D23}"/>
               </a:ext>
             </a:extLst>
           </p:cNvPr>
@@ -29153,7 +29405,7 @@
           <p:cNvPr id="25" name="Gerader Verbinder 24">
             <a:extLst>
               <a:ext uri="{FF2B5EF4-FFF2-40B4-BE49-F238E27FC236}">
-                <a16:creationId xmlns:a16="http://schemas.microsoft.com/office/drawing/2014/main" xmlns="" id="{A2C7D6EE-6738-46BE-9D2A-9F8FD98231C3}"/>
+                <a16:creationId xmlns:a16="http://schemas.microsoft.com/office/drawing/2014/main" id="{A2C7D6EE-6738-46BE-9D2A-9F8FD98231C3}"/>
               </a:ext>
             </a:extLst>
           </p:cNvPr>
@@ -29197,7 +29449,7 @@
           <p:cNvPr id="26" name="Gerader Verbinder 25">
             <a:extLst>
               <a:ext uri="{FF2B5EF4-FFF2-40B4-BE49-F238E27FC236}">
-                <a16:creationId xmlns:a16="http://schemas.microsoft.com/office/drawing/2014/main" xmlns="" id="{FDC038D3-387F-4886-8CEE-C6A85FC7202D}"/>
+                <a16:creationId xmlns:a16="http://schemas.microsoft.com/office/drawing/2014/main" id="{FDC038D3-387F-4886-8CEE-C6A85FC7202D}"/>
               </a:ext>
             </a:extLst>
           </p:cNvPr>
@@ -29240,7 +29492,7 @@
           <p:cNvPr id="28" name="Gerader Verbinder 27">
             <a:extLst>
               <a:ext uri="{FF2B5EF4-FFF2-40B4-BE49-F238E27FC236}">
-                <a16:creationId xmlns:a16="http://schemas.microsoft.com/office/drawing/2014/main" xmlns="" id="{B36979FA-BDED-4A1D-B825-1E2296FFEA21}"/>
+                <a16:creationId xmlns:a16="http://schemas.microsoft.com/office/drawing/2014/main" id="{B36979FA-BDED-4A1D-B825-1E2296FFEA21}"/>
               </a:ext>
             </a:extLst>
           </p:cNvPr>
@@ -29284,7 +29536,7 @@
           <p:cNvPr id="31" name="Gerader Verbinder 30">
             <a:extLst>
               <a:ext uri="{FF2B5EF4-FFF2-40B4-BE49-F238E27FC236}">
-                <a16:creationId xmlns:a16="http://schemas.microsoft.com/office/drawing/2014/main" xmlns="" id="{E6BEA95A-F3A8-4BA3-9EC2-A03D9D760BC7}"/>
+                <a16:creationId xmlns:a16="http://schemas.microsoft.com/office/drawing/2014/main" id="{E6BEA95A-F3A8-4BA3-9EC2-A03D9D760BC7}"/>
               </a:ext>
             </a:extLst>
           </p:cNvPr>
@@ -29327,7 +29579,7 @@
           <p:cNvPr id="34" name="Gerader Verbinder 33">
             <a:extLst>
               <a:ext uri="{FF2B5EF4-FFF2-40B4-BE49-F238E27FC236}">
-                <a16:creationId xmlns:a16="http://schemas.microsoft.com/office/drawing/2014/main" xmlns="" id="{84A372C1-C308-4C2E-B7B5-65187E4F0D36}"/>
+                <a16:creationId xmlns:a16="http://schemas.microsoft.com/office/drawing/2014/main" id="{84A372C1-C308-4C2E-B7B5-65187E4F0D36}"/>
               </a:ext>
             </a:extLst>
           </p:cNvPr>
@@ -29370,7 +29622,7 @@
           <p:cNvPr id="36" name="Gerader Verbinder 35">
             <a:extLst>
               <a:ext uri="{FF2B5EF4-FFF2-40B4-BE49-F238E27FC236}">
-                <a16:creationId xmlns:a16="http://schemas.microsoft.com/office/drawing/2014/main" xmlns="" id="{1F7C7724-C429-454E-A9C6-092605A4BC2D}"/>
+                <a16:creationId xmlns:a16="http://schemas.microsoft.com/office/drawing/2014/main" id="{1F7C7724-C429-454E-A9C6-092605A4BC2D}"/>
               </a:ext>
             </a:extLst>
           </p:cNvPr>
@@ -29413,7 +29665,7 @@
           <p:cNvPr id="38" name="Textfeld 37">
             <a:extLst>
               <a:ext uri="{FF2B5EF4-FFF2-40B4-BE49-F238E27FC236}">
-                <a16:creationId xmlns:a16="http://schemas.microsoft.com/office/drawing/2014/main" xmlns="" id="{75D030C6-DAA2-4F52-AD28-A45A8A20ABC4}"/>
+                <a16:creationId xmlns:a16="http://schemas.microsoft.com/office/drawing/2014/main" id="{75D030C6-DAA2-4F52-AD28-A45A8A20ABC4}"/>
               </a:ext>
             </a:extLst>
           </p:cNvPr>
@@ -29514,7 +29766,7 @@
           <p:cNvPr id="39" name="Rechteck 38">
             <a:extLst>
               <a:ext uri="{FF2B5EF4-FFF2-40B4-BE49-F238E27FC236}">
-                <a16:creationId xmlns:a16="http://schemas.microsoft.com/office/drawing/2014/main" xmlns="" id="{BD83A34B-09D0-44E1-A2D2-C826F949147B}"/>
+                <a16:creationId xmlns:a16="http://schemas.microsoft.com/office/drawing/2014/main" id="{BD83A34B-09D0-44E1-A2D2-C826F949147B}"/>
               </a:ext>
             </a:extLst>
           </p:cNvPr>
@@ -29602,7 +29854,7 @@
           <p:cNvPr id="40" name="Textfeld 39">
             <a:extLst>
               <a:ext uri="{FF2B5EF4-FFF2-40B4-BE49-F238E27FC236}">
-                <a16:creationId xmlns:a16="http://schemas.microsoft.com/office/drawing/2014/main" xmlns="" id="{20304CDD-0D68-4FA8-AB24-52ACD0FFC3DA}"/>
+                <a16:creationId xmlns:a16="http://schemas.microsoft.com/office/drawing/2014/main" id="{20304CDD-0D68-4FA8-AB24-52ACD0FFC3DA}"/>
               </a:ext>
             </a:extLst>
           </p:cNvPr>
@@ -29709,7 +29961,7 @@
           <p:cNvPr id="41" name="Rechteck 40">
             <a:extLst>
               <a:ext uri="{FF2B5EF4-FFF2-40B4-BE49-F238E27FC236}">
-                <a16:creationId xmlns:a16="http://schemas.microsoft.com/office/drawing/2014/main" xmlns="" id="{5EE12F05-72FE-4D21-A134-1EF962759C16}"/>
+                <a16:creationId xmlns:a16="http://schemas.microsoft.com/office/drawing/2014/main" id="{5EE12F05-72FE-4D21-A134-1EF962759C16}"/>
               </a:ext>
             </a:extLst>
           </p:cNvPr>
@@ -29797,7 +30049,7 @@
           <p:cNvPr id="42" name="Textfeld 41">
             <a:extLst>
               <a:ext uri="{FF2B5EF4-FFF2-40B4-BE49-F238E27FC236}">
-                <a16:creationId xmlns:a16="http://schemas.microsoft.com/office/drawing/2014/main" xmlns="" id="{639243E7-DF44-4B8A-8821-654D39B4F293}"/>
+                <a16:creationId xmlns:a16="http://schemas.microsoft.com/office/drawing/2014/main" id="{639243E7-DF44-4B8A-8821-654D39B4F293}"/>
               </a:ext>
             </a:extLst>
           </p:cNvPr>
@@ -29908,7 +30160,7 @@
           <p:cNvPr id="43" name="Rechteck 42">
             <a:extLst>
               <a:ext uri="{FF2B5EF4-FFF2-40B4-BE49-F238E27FC236}">
-                <a16:creationId xmlns:a16="http://schemas.microsoft.com/office/drawing/2014/main" xmlns="" id="{9A7974D8-2E8C-4167-8ED8-ED182EC6892E}"/>
+                <a16:creationId xmlns:a16="http://schemas.microsoft.com/office/drawing/2014/main" id="{9A7974D8-2E8C-4167-8ED8-ED182EC6892E}"/>
               </a:ext>
             </a:extLst>
           </p:cNvPr>
@@ -29998,7 +30250,7 @@
           <p:cNvPr id="46" name="Textfeld 45">
             <a:extLst>
               <a:ext uri="{FF2B5EF4-FFF2-40B4-BE49-F238E27FC236}">
-                <a16:creationId xmlns:a16="http://schemas.microsoft.com/office/drawing/2014/main" xmlns="" id="{5069F620-E394-483F-9947-FB412E14449C}"/>
+                <a16:creationId xmlns:a16="http://schemas.microsoft.com/office/drawing/2014/main" id="{5069F620-E394-483F-9947-FB412E14449C}"/>
               </a:ext>
             </a:extLst>
           </p:cNvPr>
@@ -30066,7 +30318,7 @@
           <p:cNvPr id="50" name="Textfeld 49">
             <a:extLst>
               <a:ext uri="{FF2B5EF4-FFF2-40B4-BE49-F238E27FC236}">
-                <a16:creationId xmlns:a16="http://schemas.microsoft.com/office/drawing/2014/main" xmlns="" id="{C7DEE1C3-E740-4E71-95E8-9BF837E7C8E0}"/>
+                <a16:creationId xmlns:a16="http://schemas.microsoft.com/office/drawing/2014/main" id="{C7DEE1C3-E740-4E71-95E8-9BF837E7C8E0}"/>
               </a:ext>
             </a:extLst>
           </p:cNvPr>
@@ -30136,7 +30388,7 @@
           <p:cNvPr id="53" name="Rechteck 52">
             <a:extLst>
               <a:ext uri="{FF2B5EF4-FFF2-40B4-BE49-F238E27FC236}">
-                <a16:creationId xmlns:a16="http://schemas.microsoft.com/office/drawing/2014/main" xmlns="" id="{07B8D367-13E0-4B9A-ADE8-EAB16A08B3EC}"/>
+                <a16:creationId xmlns:a16="http://schemas.microsoft.com/office/drawing/2014/main" id="{07B8D367-13E0-4B9A-ADE8-EAB16A08B3EC}"/>
               </a:ext>
             </a:extLst>
           </p:cNvPr>
@@ -30219,7 +30471,7 @@
           <p:cNvPr id="54" name="Textfeld 53">
             <a:extLst>
               <a:ext uri="{FF2B5EF4-FFF2-40B4-BE49-F238E27FC236}">
-                <a16:creationId xmlns:a16="http://schemas.microsoft.com/office/drawing/2014/main" xmlns="" id="{6B9A3CCE-7802-40D6-ABE7-DF11B0BDDAF5}"/>
+                <a16:creationId xmlns:a16="http://schemas.microsoft.com/office/drawing/2014/main" id="{6B9A3CCE-7802-40D6-ABE7-DF11B0BDDAF5}"/>
               </a:ext>
             </a:extLst>
           </p:cNvPr>
@@ -30287,7 +30539,7 @@
           <p:cNvPr id="55" name="Rechteck 54">
             <a:extLst>
               <a:ext uri="{FF2B5EF4-FFF2-40B4-BE49-F238E27FC236}">
-                <a16:creationId xmlns:a16="http://schemas.microsoft.com/office/drawing/2014/main" xmlns="" id="{C23B636F-3718-46D7-A7EE-507BC5F875CF}"/>
+                <a16:creationId xmlns:a16="http://schemas.microsoft.com/office/drawing/2014/main" id="{C23B636F-3718-46D7-A7EE-507BC5F875CF}"/>
               </a:ext>
             </a:extLst>
           </p:cNvPr>
@@ -30375,7 +30627,7 @@
           <p:cNvPr id="56" name="Flussdiagramm: Verzweigung 55">
             <a:extLst>
               <a:ext uri="{FF2B5EF4-FFF2-40B4-BE49-F238E27FC236}">
-                <a16:creationId xmlns:a16="http://schemas.microsoft.com/office/drawing/2014/main" xmlns="" id="{3861DF78-49F6-41D6-A8EE-CC51F7C910DC}"/>
+                <a16:creationId xmlns:a16="http://schemas.microsoft.com/office/drawing/2014/main" id="{3861DF78-49F6-41D6-A8EE-CC51F7C910DC}"/>
               </a:ext>
             </a:extLst>
           </p:cNvPr>
@@ -30458,7 +30710,7 @@
           <p:cNvPr id="57" name="Gerader Verbinder 56">
             <a:extLst>
               <a:ext uri="{FF2B5EF4-FFF2-40B4-BE49-F238E27FC236}">
-                <a16:creationId xmlns:a16="http://schemas.microsoft.com/office/drawing/2014/main" xmlns="" id="{FED9E886-5F2A-4EF9-99B3-A8DE23C2F43E}"/>
+                <a16:creationId xmlns:a16="http://schemas.microsoft.com/office/drawing/2014/main" id="{FED9E886-5F2A-4EF9-99B3-A8DE23C2F43E}"/>
               </a:ext>
             </a:extLst>
           </p:cNvPr>
@@ -30502,7 +30754,7 @@
           <p:cNvPr id="58" name="Gerader Verbinder 57">
             <a:extLst>
               <a:ext uri="{FF2B5EF4-FFF2-40B4-BE49-F238E27FC236}">
-                <a16:creationId xmlns:a16="http://schemas.microsoft.com/office/drawing/2014/main" xmlns="" id="{55D52922-B6E8-4F7E-99E0-65055030F77F}"/>
+                <a16:creationId xmlns:a16="http://schemas.microsoft.com/office/drawing/2014/main" id="{55D52922-B6E8-4F7E-99E0-65055030F77F}"/>
               </a:ext>
             </a:extLst>
           </p:cNvPr>
@@ -30545,7 +30797,7 @@
           <p:cNvPr id="59" name="Gerader Verbinder 58">
             <a:extLst>
               <a:ext uri="{FF2B5EF4-FFF2-40B4-BE49-F238E27FC236}">
-                <a16:creationId xmlns:a16="http://schemas.microsoft.com/office/drawing/2014/main" xmlns="" id="{8CA3D68D-52FF-47CA-B1F9-434DEE2B7E1C}"/>
+                <a16:creationId xmlns:a16="http://schemas.microsoft.com/office/drawing/2014/main" id="{8CA3D68D-52FF-47CA-B1F9-434DEE2B7E1C}"/>
               </a:ext>
             </a:extLst>
           </p:cNvPr>
@@ -30589,7 +30841,7 @@
           <p:cNvPr id="60" name="Gerader Verbinder 59">
             <a:extLst>
               <a:ext uri="{FF2B5EF4-FFF2-40B4-BE49-F238E27FC236}">
-                <a16:creationId xmlns:a16="http://schemas.microsoft.com/office/drawing/2014/main" xmlns="" id="{92E74442-E99C-4F20-9D5E-BAC827DCDB54}"/>
+                <a16:creationId xmlns:a16="http://schemas.microsoft.com/office/drawing/2014/main" id="{92E74442-E99C-4F20-9D5E-BAC827DCDB54}"/>
               </a:ext>
             </a:extLst>
           </p:cNvPr>
@@ -30632,7 +30884,7 @@
           <p:cNvPr id="61" name="Gerader Verbinder 60">
             <a:extLst>
               <a:ext uri="{FF2B5EF4-FFF2-40B4-BE49-F238E27FC236}">
-                <a16:creationId xmlns:a16="http://schemas.microsoft.com/office/drawing/2014/main" xmlns="" id="{C64059E0-FB5E-4B79-BA96-15DF0A4E4B09}"/>
+                <a16:creationId xmlns:a16="http://schemas.microsoft.com/office/drawing/2014/main" id="{C64059E0-FB5E-4B79-BA96-15DF0A4E4B09}"/>
               </a:ext>
             </a:extLst>
           </p:cNvPr>
@@ -30675,7 +30927,7 @@
           <p:cNvPr id="63" name="Textfeld 62">
             <a:extLst>
               <a:ext uri="{FF2B5EF4-FFF2-40B4-BE49-F238E27FC236}">
-                <a16:creationId xmlns:a16="http://schemas.microsoft.com/office/drawing/2014/main" xmlns="" id="{29B398EC-3388-477A-99FD-F08BF4259BAA}"/>
+                <a16:creationId xmlns:a16="http://schemas.microsoft.com/office/drawing/2014/main" id="{29B398EC-3388-477A-99FD-F08BF4259BAA}"/>
               </a:ext>
             </a:extLst>
           </p:cNvPr>
@@ -30743,7 +30995,7 @@
           <p:cNvPr id="64" name="Rechteck 63">
             <a:extLst>
               <a:ext uri="{FF2B5EF4-FFF2-40B4-BE49-F238E27FC236}">
-                <a16:creationId xmlns:a16="http://schemas.microsoft.com/office/drawing/2014/main" xmlns="" id="{3957B726-45C8-4B79-8B25-ACA0DF14BAD7}"/>
+                <a16:creationId xmlns:a16="http://schemas.microsoft.com/office/drawing/2014/main" id="{3957B726-45C8-4B79-8B25-ACA0DF14BAD7}"/>
               </a:ext>
             </a:extLst>
           </p:cNvPr>
@@ -30831,7 +31083,7 @@
           <p:cNvPr id="66" name="Rechteck 65">
             <a:extLst>
               <a:ext uri="{FF2B5EF4-FFF2-40B4-BE49-F238E27FC236}">
-                <a16:creationId xmlns:a16="http://schemas.microsoft.com/office/drawing/2014/main" xmlns="" id="{8B1C817D-9BCB-42A4-B889-A93AC772DC83}"/>
+                <a16:creationId xmlns:a16="http://schemas.microsoft.com/office/drawing/2014/main" id="{8B1C817D-9BCB-42A4-B889-A93AC772DC83}"/>
               </a:ext>
             </a:extLst>
           </p:cNvPr>
@@ -30919,7 +31171,7 @@
           <p:cNvPr id="69" name="Textfeld 68">
             <a:extLst>
               <a:ext uri="{FF2B5EF4-FFF2-40B4-BE49-F238E27FC236}">
-                <a16:creationId xmlns:a16="http://schemas.microsoft.com/office/drawing/2014/main" xmlns="" id="{8989343F-B7A4-463D-9D82-FC147975ED85}"/>
+                <a16:creationId xmlns:a16="http://schemas.microsoft.com/office/drawing/2014/main" id="{8989343F-B7A4-463D-9D82-FC147975ED85}"/>
               </a:ext>
             </a:extLst>
           </p:cNvPr>
@@ -30987,7 +31239,7 @@
           <p:cNvPr id="73" name="Textfeld 72">
             <a:extLst>
               <a:ext uri="{FF2B5EF4-FFF2-40B4-BE49-F238E27FC236}">
-                <a16:creationId xmlns:a16="http://schemas.microsoft.com/office/drawing/2014/main" xmlns="" id="{3EA93BE8-7667-4633-B7C8-7126C5273994}"/>
+                <a16:creationId xmlns:a16="http://schemas.microsoft.com/office/drawing/2014/main" id="{3EA93BE8-7667-4633-B7C8-7126C5273994}"/>
               </a:ext>
             </a:extLst>
           </p:cNvPr>
@@ -31055,7 +31307,7 @@
           <p:cNvPr id="74" name="Textfeld 73">
             <a:extLst>
               <a:ext uri="{FF2B5EF4-FFF2-40B4-BE49-F238E27FC236}">
-                <a16:creationId xmlns:a16="http://schemas.microsoft.com/office/drawing/2014/main" xmlns="" id="{10927610-97FB-426A-9626-EFFF25564851}"/>
+                <a16:creationId xmlns:a16="http://schemas.microsoft.com/office/drawing/2014/main" id="{10927610-97FB-426A-9626-EFFF25564851}"/>
               </a:ext>
             </a:extLst>
           </p:cNvPr>
@@ -31123,7 +31375,7 @@
           <p:cNvPr id="49" name="Rechteck 48">
             <a:extLst>
               <a:ext uri="{FF2B5EF4-FFF2-40B4-BE49-F238E27FC236}">
-                <a16:creationId xmlns:a16="http://schemas.microsoft.com/office/drawing/2014/main" xmlns="" id="{E4985257-E640-4C7B-9B97-8AA430D96AF0}"/>
+                <a16:creationId xmlns:a16="http://schemas.microsoft.com/office/drawing/2014/main" id="{E4985257-E640-4C7B-9B97-8AA430D96AF0}"/>
               </a:ext>
             </a:extLst>
           </p:cNvPr>
@@ -31206,7 +31458,7 @@
           <p:cNvPr id="51" name="Textfeld 50">
             <a:extLst>
               <a:ext uri="{FF2B5EF4-FFF2-40B4-BE49-F238E27FC236}">
-                <a16:creationId xmlns:a16="http://schemas.microsoft.com/office/drawing/2014/main" xmlns="" id="{AF5659D3-D7CC-439C-AE0C-E27782F47D82}"/>
+                <a16:creationId xmlns:a16="http://schemas.microsoft.com/office/drawing/2014/main" id="{AF5659D3-D7CC-439C-AE0C-E27782F47D82}"/>
               </a:ext>
             </a:extLst>
           </p:cNvPr>
@@ -31271,7 +31523,7 @@
           <p:cNvPr id="52" name="Rechteck 51">
             <a:extLst>
               <a:ext uri="{FF2B5EF4-FFF2-40B4-BE49-F238E27FC236}">
-                <a16:creationId xmlns:a16="http://schemas.microsoft.com/office/drawing/2014/main" xmlns="" id="{3148A8B5-980C-49A8-AE95-E55FF982A224}"/>
+                <a16:creationId xmlns:a16="http://schemas.microsoft.com/office/drawing/2014/main" id="{3148A8B5-980C-49A8-AE95-E55FF982A224}"/>
               </a:ext>
             </a:extLst>
           </p:cNvPr>
@@ -31957,7 +32209,7 @@
           <p:cNvPr id="72" name="Rechteck 71">
             <a:extLst>
               <a:ext uri="{FF2B5EF4-FFF2-40B4-BE49-F238E27FC236}">
-                <a16:creationId xmlns:a16="http://schemas.microsoft.com/office/drawing/2014/main" xmlns="" id="{C3B77CF2-813C-49FE-895A-9DC2FF17F7F5}"/>
+                <a16:creationId xmlns:a16="http://schemas.microsoft.com/office/drawing/2014/main" id="{C3B77CF2-813C-49FE-895A-9DC2FF17F7F5}"/>
               </a:ext>
             </a:extLst>
           </p:cNvPr>
@@ -32043,7 +32295,7 @@
           <p:cNvPr id="76" name="Rechteck 75">
             <a:extLst>
               <a:ext uri="{FF2B5EF4-FFF2-40B4-BE49-F238E27FC236}">
-                <a16:creationId xmlns:a16="http://schemas.microsoft.com/office/drawing/2014/main" xmlns="" id="{6751CE07-E151-468C-BC13-581C281AEDD0}"/>
+                <a16:creationId xmlns:a16="http://schemas.microsoft.com/office/drawing/2014/main" id="{6751CE07-E151-468C-BC13-581C281AEDD0}"/>
               </a:ext>
             </a:extLst>
           </p:cNvPr>
@@ -32191,7 +32443,7 @@
           <p:cNvPr id="77" name="Textfeld 76">
             <a:extLst>
               <a:ext uri="{FF2B5EF4-FFF2-40B4-BE49-F238E27FC236}">
-                <a16:creationId xmlns:a16="http://schemas.microsoft.com/office/drawing/2014/main" xmlns="" id="{412C5B2F-CBE0-47C8-BABE-EFD7EC23F014}"/>
+                <a16:creationId xmlns:a16="http://schemas.microsoft.com/office/drawing/2014/main" id="{412C5B2F-CBE0-47C8-BABE-EFD7EC23F014}"/>
               </a:ext>
             </a:extLst>
           </p:cNvPr>
@@ -32258,7 +32510,7 @@
           <p:cNvPr id="78" name="Ellipse 77">
             <a:extLst>
               <a:ext uri="{FF2B5EF4-FFF2-40B4-BE49-F238E27FC236}">
-                <a16:creationId xmlns:a16="http://schemas.microsoft.com/office/drawing/2014/main" xmlns="" id="{39006C0F-CB62-4BBE-B4FD-A97CFF701616}"/>
+                <a16:creationId xmlns:a16="http://schemas.microsoft.com/office/drawing/2014/main" id="{39006C0F-CB62-4BBE-B4FD-A97CFF701616}"/>
               </a:ext>
             </a:extLst>
           </p:cNvPr>
@@ -32395,7 +32647,7 @@
           <p:cNvPr id="5" name="Rechteck 4">
             <a:extLst>
               <a:ext uri="{FF2B5EF4-FFF2-40B4-BE49-F238E27FC236}">
-                <a16:creationId xmlns:a16="http://schemas.microsoft.com/office/drawing/2014/main" xmlns="" id="{5E7DB929-572D-4E95-82E8-B6DD989776DD}"/>
+                <a16:creationId xmlns:a16="http://schemas.microsoft.com/office/drawing/2014/main" id="{5E7DB929-572D-4E95-82E8-B6DD989776DD}"/>
               </a:ext>
             </a:extLst>
           </p:cNvPr>
@@ -32449,7 +32701,7 @@
           <p:cNvPr id="6" name="Textfeld 5">
             <a:extLst>
               <a:ext uri="{FF2B5EF4-FFF2-40B4-BE49-F238E27FC236}">
-                <a16:creationId xmlns:a16="http://schemas.microsoft.com/office/drawing/2014/main" xmlns="" id="{672F2C52-F706-4C2C-9BA1-C4050D78BE85}"/>
+                <a16:creationId xmlns:a16="http://schemas.microsoft.com/office/drawing/2014/main" id="{672F2C52-F706-4C2C-9BA1-C4050D78BE85}"/>
               </a:ext>
             </a:extLst>
           </p:cNvPr>
@@ -32484,7 +32736,7 @@
           <p:cNvPr id="7" name="Rechteck 6">
             <a:extLst>
               <a:ext uri="{FF2B5EF4-FFF2-40B4-BE49-F238E27FC236}">
-                <a16:creationId xmlns:a16="http://schemas.microsoft.com/office/drawing/2014/main" xmlns="" id="{32A3E22E-D260-4C45-BA90-93973AE9B3A5}"/>
+                <a16:creationId xmlns:a16="http://schemas.microsoft.com/office/drawing/2014/main" id="{32A3E22E-D260-4C45-BA90-93973AE9B3A5}"/>
               </a:ext>
             </a:extLst>
           </p:cNvPr>
@@ -32547,7 +32799,7 @@
           <p:cNvPr id="8" name="Rechteck 7">
             <a:extLst>
               <a:ext uri="{FF2B5EF4-FFF2-40B4-BE49-F238E27FC236}">
-                <a16:creationId xmlns:a16="http://schemas.microsoft.com/office/drawing/2014/main" xmlns="" id="{5E7DB929-572D-4E95-82E8-B6DD989776DD}"/>
+                <a16:creationId xmlns:a16="http://schemas.microsoft.com/office/drawing/2014/main" id="{5E7DB929-572D-4E95-82E8-B6DD989776DD}"/>
               </a:ext>
             </a:extLst>
           </p:cNvPr>
@@ -32601,7 +32853,7 @@
           <p:cNvPr id="12" name="Rechteck 11">
             <a:extLst>
               <a:ext uri="{FF2B5EF4-FFF2-40B4-BE49-F238E27FC236}">
-                <a16:creationId xmlns:a16="http://schemas.microsoft.com/office/drawing/2014/main" xmlns="" id="{5E7DB929-572D-4E95-82E8-B6DD989776DD}"/>
+                <a16:creationId xmlns:a16="http://schemas.microsoft.com/office/drawing/2014/main" id="{5E7DB929-572D-4E95-82E8-B6DD989776DD}"/>
               </a:ext>
             </a:extLst>
           </p:cNvPr>
@@ -32655,7 +32907,7 @@
           <p:cNvPr id="13" name="Textfeld 12">
             <a:extLst>
               <a:ext uri="{FF2B5EF4-FFF2-40B4-BE49-F238E27FC236}">
-                <a16:creationId xmlns:a16="http://schemas.microsoft.com/office/drawing/2014/main" xmlns="" id="{672F2C52-F706-4C2C-9BA1-C4050D78BE85}"/>
+                <a16:creationId xmlns:a16="http://schemas.microsoft.com/office/drawing/2014/main" id="{672F2C52-F706-4C2C-9BA1-C4050D78BE85}"/>
               </a:ext>
             </a:extLst>
           </p:cNvPr>
@@ -32690,7 +32942,7 @@
           <p:cNvPr id="14" name="Rechteck 13">
             <a:extLst>
               <a:ext uri="{FF2B5EF4-FFF2-40B4-BE49-F238E27FC236}">
-                <a16:creationId xmlns:a16="http://schemas.microsoft.com/office/drawing/2014/main" xmlns="" id="{32A3E22E-D260-4C45-BA90-93973AE9B3A5}"/>
+                <a16:creationId xmlns:a16="http://schemas.microsoft.com/office/drawing/2014/main" id="{32A3E22E-D260-4C45-BA90-93973AE9B3A5}"/>
               </a:ext>
             </a:extLst>
           </p:cNvPr>
@@ -32891,7 +33143,7 @@
           <p:cNvPr id="9" name="Textfeld 8">
             <a:extLst>
               <a:ext uri="{FF2B5EF4-FFF2-40B4-BE49-F238E27FC236}">
-                <a16:creationId xmlns:a16="http://schemas.microsoft.com/office/drawing/2014/main" xmlns="" id="{672F2C52-F706-4C2C-9BA1-C4050D78BE85}"/>
+                <a16:creationId xmlns:a16="http://schemas.microsoft.com/office/drawing/2014/main" id="{672F2C52-F706-4C2C-9BA1-C4050D78BE85}"/>
               </a:ext>
             </a:extLst>
           </p:cNvPr>
@@ -32983,7 +33235,7 @@
           <p:cNvPr id="10" name="Rechteck 9">
             <a:extLst>
               <a:ext uri="{FF2B5EF4-FFF2-40B4-BE49-F238E27FC236}">
-                <a16:creationId xmlns:a16="http://schemas.microsoft.com/office/drawing/2014/main" xmlns="" id="{32A3E22E-D260-4C45-BA90-93973AE9B3A5}"/>
+                <a16:creationId xmlns:a16="http://schemas.microsoft.com/office/drawing/2014/main" id="{32A3E22E-D260-4C45-BA90-93973AE9B3A5}"/>
               </a:ext>
             </a:extLst>
           </p:cNvPr>
@@ -33046,7 +33298,7 @@
           <p:cNvPr id="24" name="Textfeld 23">
             <a:extLst>
               <a:ext uri="{FF2B5EF4-FFF2-40B4-BE49-F238E27FC236}">
-                <a16:creationId xmlns:a16="http://schemas.microsoft.com/office/drawing/2014/main" xmlns="" id="{672F2C52-F706-4C2C-9BA1-C4050D78BE85}"/>
+                <a16:creationId xmlns:a16="http://schemas.microsoft.com/office/drawing/2014/main" id="{672F2C52-F706-4C2C-9BA1-C4050D78BE85}"/>
               </a:ext>
             </a:extLst>
           </p:cNvPr>
@@ -33081,7 +33333,7 @@
           <p:cNvPr id="25" name="Rechteck 24">
             <a:extLst>
               <a:ext uri="{FF2B5EF4-FFF2-40B4-BE49-F238E27FC236}">
-                <a16:creationId xmlns:a16="http://schemas.microsoft.com/office/drawing/2014/main" xmlns="" id="{32A3E22E-D260-4C45-BA90-93973AE9B3A5}"/>
+                <a16:creationId xmlns:a16="http://schemas.microsoft.com/office/drawing/2014/main" id="{32A3E22E-D260-4C45-BA90-93973AE9B3A5}"/>
               </a:ext>
             </a:extLst>
           </p:cNvPr>
@@ -33195,7 +33447,7 @@
           <p:cNvPr id="26" name="Rechteck 25">
             <a:extLst>
               <a:ext uri="{FF2B5EF4-FFF2-40B4-BE49-F238E27FC236}">
-                <a16:creationId xmlns:a16="http://schemas.microsoft.com/office/drawing/2014/main" xmlns="" id="{32A3E22E-D260-4C45-BA90-93973AE9B3A5}"/>
+                <a16:creationId xmlns:a16="http://schemas.microsoft.com/office/drawing/2014/main" id="{32A3E22E-D260-4C45-BA90-93973AE9B3A5}"/>
               </a:ext>
             </a:extLst>
           </p:cNvPr>
@@ -33258,7 +33510,7 @@
           <p:cNvPr id="29" name="Textfeld 28">
             <a:extLst>
               <a:ext uri="{FF2B5EF4-FFF2-40B4-BE49-F238E27FC236}">
-                <a16:creationId xmlns:a16="http://schemas.microsoft.com/office/drawing/2014/main" xmlns="" id="{672F2C52-F706-4C2C-9BA1-C4050D78BE85}"/>
+                <a16:creationId xmlns:a16="http://schemas.microsoft.com/office/drawing/2014/main" id="{672F2C52-F706-4C2C-9BA1-C4050D78BE85}"/>
               </a:ext>
             </a:extLst>
           </p:cNvPr>
@@ -33346,7 +33598,7 @@
           <p:cNvPr id="61" name="Textfeld 60">
             <a:extLst>
               <a:ext uri="{FF2B5EF4-FFF2-40B4-BE49-F238E27FC236}">
-                <a16:creationId xmlns:a16="http://schemas.microsoft.com/office/drawing/2014/main" xmlns="" id="{672F2C52-F706-4C2C-9BA1-C4050D78BE85}"/>
+                <a16:creationId xmlns:a16="http://schemas.microsoft.com/office/drawing/2014/main" id="{672F2C52-F706-4C2C-9BA1-C4050D78BE85}"/>
               </a:ext>
             </a:extLst>
           </p:cNvPr>
@@ -33447,7 +33699,7 @@
           <p:cNvPr id="63" name="Rechteck 62">
             <a:extLst>
               <a:ext uri="{FF2B5EF4-FFF2-40B4-BE49-F238E27FC236}">
-                <a16:creationId xmlns:a16="http://schemas.microsoft.com/office/drawing/2014/main" xmlns="" id="{32A3E22E-D260-4C45-BA90-93973AE9B3A5}"/>
+                <a16:creationId xmlns:a16="http://schemas.microsoft.com/office/drawing/2014/main" id="{32A3E22E-D260-4C45-BA90-93973AE9B3A5}"/>
               </a:ext>
             </a:extLst>
           </p:cNvPr>
@@ -33702,7 +33954,7 @@
           <p:cNvPr id="2" name="Textfeld 1">
             <a:extLst>
               <a:ext uri="{FF2B5EF4-FFF2-40B4-BE49-F238E27FC236}">
-                <a16:creationId xmlns:a16="http://schemas.microsoft.com/office/drawing/2014/main" xmlns="" id="{D6A44DD7-9A28-4B84-81C9-C198C5D59C2F}"/>
+                <a16:creationId xmlns:a16="http://schemas.microsoft.com/office/drawing/2014/main" id="{D6A44DD7-9A28-4B84-81C9-C198C5D59C2F}"/>
               </a:ext>
             </a:extLst>
           </p:cNvPr>
@@ -33820,7 +34072,7 @@
           <p:cNvPr id="4" name="Rechteck 3">
             <a:extLst>
               <a:ext uri="{FF2B5EF4-FFF2-40B4-BE49-F238E27FC236}">
-                <a16:creationId xmlns:a16="http://schemas.microsoft.com/office/drawing/2014/main" xmlns="" id="{5E7DB929-572D-4E95-82E8-B6DD989776DD}"/>
+                <a16:creationId xmlns:a16="http://schemas.microsoft.com/office/drawing/2014/main" id="{5E7DB929-572D-4E95-82E8-B6DD989776DD}"/>
               </a:ext>
             </a:extLst>
           </p:cNvPr>
@@ -33874,7 +34126,7 @@
           <p:cNvPr id="5" name="Textfeld 4">
             <a:extLst>
               <a:ext uri="{FF2B5EF4-FFF2-40B4-BE49-F238E27FC236}">
-                <a16:creationId xmlns:a16="http://schemas.microsoft.com/office/drawing/2014/main" xmlns="" id="{672F2C52-F706-4C2C-9BA1-C4050D78BE85}"/>
+                <a16:creationId xmlns:a16="http://schemas.microsoft.com/office/drawing/2014/main" id="{672F2C52-F706-4C2C-9BA1-C4050D78BE85}"/>
               </a:ext>
             </a:extLst>
           </p:cNvPr>
@@ -33909,7 +34161,7 @@
           <p:cNvPr id="6" name="Rechteck 5">
             <a:extLst>
               <a:ext uri="{FF2B5EF4-FFF2-40B4-BE49-F238E27FC236}">
-                <a16:creationId xmlns:a16="http://schemas.microsoft.com/office/drawing/2014/main" xmlns="" id="{32A3E22E-D260-4C45-BA90-93973AE9B3A5}"/>
+                <a16:creationId xmlns:a16="http://schemas.microsoft.com/office/drawing/2014/main" id="{32A3E22E-D260-4C45-BA90-93973AE9B3A5}"/>
               </a:ext>
             </a:extLst>
           </p:cNvPr>
@@ -33972,7 +34224,7 @@
           <p:cNvPr id="7" name="Rechteck 6">
             <a:extLst>
               <a:ext uri="{FF2B5EF4-FFF2-40B4-BE49-F238E27FC236}">
-                <a16:creationId xmlns:a16="http://schemas.microsoft.com/office/drawing/2014/main" xmlns="" id="{5E7DB929-572D-4E95-82E8-B6DD989776DD}"/>
+                <a16:creationId xmlns:a16="http://schemas.microsoft.com/office/drawing/2014/main" id="{5E7DB929-572D-4E95-82E8-B6DD989776DD}"/>
               </a:ext>
             </a:extLst>
           </p:cNvPr>
@@ -34026,7 +34278,7 @@
           <p:cNvPr id="8" name="Rechteck 7">
             <a:extLst>
               <a:ext uri="{FF2B5EF4-FFF2-40B4-BE49-F238E27FC236}">
-                <a16:creationId xmlns:a16="http://schemas.microsoft.com/office/drawing/2014/main" xmlns="" id="{5E7DB929-572D-4E95-82E8-B6DD989776DD}"/>
+                <a16:creationId xmlns:a16="http://schemas.microsoft.com/office/drawing/2014/main" id="{5E7DB929-572D-4E95-82E8-B6DD989776DD}"/>
               </a:ext>
             </a:extLst>
           </p:cNvPr>
@@ -34080,7 +34332,7 @@
           <p:cNvPr id="9" name="Textfeld 8">
             <a:extLst>
               <a:ext uri="{FF2B5EF4-FFF2-40B4-BE49-F238E27FC236}">
-                <a16:creationId xmlns:a16="http://schemas.microsoft.com/office/drawing/2014/main" xmlns="" id="{672F2C52-F706-4C2C-9BA1-C4050D78BE85}"/>
+                <a16:creationId xmlns:a16="http://schemas.microsoft.com/office/drawing/2014/main" id="{672F2C52-F706-4C2C-9BA1-C4050D78BE85}"/>
               </a:ext>
             </a:extLst>
           </p:cNvPr>
@@ -34115,7 +34367,7 @@
           <p:cNvPr id="10" name="Rechteck 9">
             <a:extLst>
               <a:ext uri="{FF2B5EF4-FFF2-40B4-BE49-F238E27FC236}">
-                <a16:creationId xmlns:a16="http://schemas.microsoft.com/office/drawing/2014/main" xmlns="" id="{32A3E22E-D260-4C45-BA90-93973AE9B3A5}"/>
+                <a16:creationId xmlns:a16="http://schemas.microsoft.com/office/drawing/2014/main" id="{32A3E22E-D260-4C45-BA90-93973AE9B3A5}"/>
               </a:ext>
             </a:extLst>
           </p:cNvPr>
@@ -34316,7 +34568,7 @@
           <p:cNvPr id="14" name="Textfeld 13">
             <a:extLst>
               <a:ext uri="{FF2B5EF4-FFF2-40B4-BE49-F238E27FC236}">
-                <a16:creationId xmlns:a16="http://schemas.microsoft.com/office/drawing/2014/main" xmlns="" id="{672F2C52-F706-4C2C-9BA1-C4050D78BE85}"/>
+                <a16:creationId xmlns:a16="http://schemas.microsoft.com/office/drawing/2014/main" id="{672F2C52-F706-4C2C-9BA1-C4050D78BE85}"/>
               </a:ext>
             </a:extLst>
           </p:cNvPr>
@@ -34408,7 +34660,7 @@
           <p:cNvPr id="16" name="Rechteck 15">
             <a:extLst>
               <a:ext uri="{FF2B5EF4-FFF2-40B4-BE49-F238E27FC236}">
-                <a16:creationId xmlns:a16="http://schemas.microsoft.com/office/drawing/2014/main" xmlns="" id="{32A3E22E-D260-4C45-BA90-93973AE9B3A5}"/>
+                <a16:creationId xmlns:a16="http://schemas.microsoft.com/office/drawing/2014/main" id="{32A3E22E-D260-4C45-BA90-93973AE9B3A5}"/>
               </a:ext>
             </a:extLst>
           </p:cNvPr>
@@ -34471,7 +34723,7 @@
           <p:cNvPr id="17" name="Textfeld 16">
             <a:extLst>
               <a:ext uri="{FF2B5EF4-FFF2-40B4-BE49-F238E27FC236}">
-                <a16:creationId xmlns:a16="http://schemas.microsoft.com/office/drawing/2014/main" xmlns="" id="{672F2C52-F706-4C2C-9BA1-C4050D78BE85}"/>
+                <a16:creationId xmlns:a16="http://schemas.microsoft.com/office/drawing/2014/main" id="{672F2C52-F706-4C2C-9BA1-C4050D78BE85}"/>
               </a:ext>
             </a:extLst>
           </p:cNvPr>
@@ -34506,7 +34758,7 @@
           <p:cNvPr id="18" name="Rechteck 17">
             <a:extLst>
               <a:ext uri="{FF2B5EF4-FFF2-40B4-BE49-F238E27FC236}">
-                <a16:creationId xmlns:a16="http://schemas.microsoft.com/office/drawing/2014/main" xmlns="" id="{32A3E22E-D260-4C45-BA90-93973AE9B3A5}"/>
+                <a16:creationId xmlns:a16="http://schemas.microsoft.com/office/drawing/2014/main" id="{32A3E22E-D260-4C45-BA90-93973AE9B3A5}"/>
               </a:ext>
             </a:extLst>
           </p:cNvPr>
@@ -34620,7 +34872,7 @@
           <p:cNvPr id="20" name="Rechteck 19">
             <a:extLst>
               <a:ext uri="{FF2B5EF4-FFF2-40B4-BE49-F238E27FC236}">
-                <a16:creationId xmlns:a16="http://schemas.microsoft.com/office/drawing/2014/main" xmlns="" id="{32A3E22E-D260-4C45-BA90-93973AE9B3A5}"/>
+                <a16:creationId xmlns:a16="http://schemas.microsoft.com/office/drawing/2014/main" id="{32A3E22E-D260-4C45-BA90-93973AE9B3A5}"/>
               </a:ext>
             </a:extLst>
           </p:cNvPr>
@@ -34683,7 +34935,7 @@
           <p:cNvPr id="21" name="Textfeld 20">
             <a:extLst>
               <a:ext uri="{FF2B5EF4-FFF2-40B4-BE49-F238E27FC236}">
-                <a16:creationId xmlns:a16="http://schemas.microsoft.com/office/drawing/2014/main" xmlns="" id="{672F2C52-F706-4C2C-9BA1-C4050D78BE85}"/>
+                <a16:creationId xmlns:a16="http://schemas.microsoft.com/office/drawing/2014/main" id="{672F2C52-F706-4C2C-9BA1-C4050D78BE85}"/>
               </a:ext>
             </a:extLst>
           </p:cNvPr>
@@ -34856,7 +35108,7 @@
           <p:cNvPr id="25" name="Textfeld 24">
             <a:extLst>
               <a:ext uri="{FF2B5EF4-FFF2-40B4-BE49-F238E27FC236}">
-                <a16:creationId xmlns:a16="http://schemas.microsoft.com/office/drawing/2014/main" xmlns="" id="{672F2C52-F706-4C2C-9BA1-C4050D78BE85}"/>
+                <a16:creationId xmlns:a16="http://schemas.microsoft.com/office/drawing/2014/main" id="{672F2C52-F706-4C2C-9BA1-C4050D78BE85}"/>
               </a:ext>
             </a:extLst>
           </p:cNvPr>
@@ -34948,7 +35200,7 @@
           <p:cNvPr id="27" name="Rechteck 26">
             <a:extLst>
               <a:ext uri="{FF2B5EF4-FFF2-40B4-BE49-F238E27FC236}">
-                <a16:creationId xmlns:a16="http://schemas.microsoft.com/office/drawing/2014/main" xmlns="" id="{32A3E22E-D260-4C45-BA90-93973AE9B3A5}"/>
+                <a16:creationId xmlns:a16="http://schemas.microsoft.com/office/drawing/2014/main" id="{32A3E22E-D260-4C45-BA90-93973AE9B3A5}"/>
               </a:ext>
             </a:extLst>
           </p:cNvPr>
@@ -35011,7 +35263,7 @@
           <p:cNvPr id="28" name="Textfeld 27">
             <a:extLst>
               <a:ext uri="{FF2B5EF4-FFF2-40B4-BE49-F238E27FC236}">
-                <a16:creationId xmlns:a16="http://schemas.microsoft.com/office/drawing/2014/main" xmlns="" id="{672F2C52-F706-4C2C-9BA1-C4050D78BE85}"/>
+                <a16:creationId xmlns:a16="http://schemas.microsoft.com/office/drawing/2014/main" id="{672F2C52-F706-4C2C-9BA1-C4050D78BE85}"/>
               </a:ext>
             </a:extLst>
           </p:cNvPr>
@@ -35046,7 +35298,7 @@
           <p:cNvPr id="29" name="Rechteck 28">
             <a:extLst>
               <a:ext uri="{FF2B5EF4-FFF2-40B4-BE49-F238E27FC236}">
-                <a16:creationId xmlns:a16="http://schemas.microsoft.com/office/drawing/2014/main" xmlns="" id="{32A3E22E-D260-4C45-BA90-93973AE9B3A5}"/>
+                <a16:creationId xmlns:a16="http://schemas.microsoft.com/office/drawing/2014/main" id="{32A3E22E-D260-4C45-BA90-93973AE9B3A5}"/>
               </a:ext>
             </a:extLst>
           </p:cNvPr>
@@ -35160,7 +35412,7 @@
           <p:cNvPr id="31" name="Rechteck 30">
             <a:extLst>
               <a:ext uri="{FF2B5EF4-FFF2-40B4-BE49-F238E27FC236}">
-                <a16:creationId xmlns:a16="http://schemas.microsoft.com/office/drawing/2014/main" xmlns="" id="{32A3E22E-D260-4C45-BA90-93973AE9B3A5}"/>
+                <a16:creationId xmlns:a16="http://schemas.microsoft.com/office/drawing/2014/main" id="{32A3E22E-D260-4C45-BA90-93973AE9B3A5}"/>
               </a:ext>
             </a:extLst>
           </p:cNvPr>
@@ -35223,7 +35475,7 @@
           <p:cNvPr id="32" name="Textfeld 31">
             <a:extLst>
               <a:ext uri="{FF2B5EF4-FFF2-40B4-BE49-F238E27FC236}">
-                <a16:creationId xmlns:a16="http://schemas.microsoft.com/office/drawing/2014/main" xmlns="" id="{672F2C52-F706-4C2C-9BA1-C4050D78BE85}"/>
+                <a16:creationId xmlns:a16="http://schemas.microsoft.com/office/drawing/2014/main" id="{672F2C52-F706-4C2C-9BA1-C4050D78BE85}"/>
               </a:ext>
             </a:extLst>
           </p:cNvPr>
@@ -35334,7 +35586,7 @@
           <p:cNvPr id="35" name="Rechteck 34">
             <a:extLst>
               <a:ext uri="{FF2B5EF4-FFF2-40B4-BE49-F238E27FC236}">
-                <a16:creationId xmlns:a16="http://schemas.microsoft.com/office/drawing/2014/main" xmlns="" id="{5E7DB929-572D-4E95-82E8-B6DD989776DD}"/>
+                <a16:creationId xmlns:a16="http://schemas.microsoft.com/office/drawing/2014/main" id="{5E7DB929-572D-4E95-82E8-B6DD989776DD}"/>
               </a:ext>
             </a:extLst>
           </p:cNvPr>
@@ -35388,7 +35640,7 @@
           <p:cNvPr id="36" name="Textfeld 35">
             <a:extLst>
               <a:ext uri="{FF2B5EF4-FFF2-40B4-BE49-F238E27FC236}">
-                <a16:creationId xmlns:a16="http://schemas.microsoft.com/office/drawing/2014/main" xmlns="" id="{672F2C52-F706-4C2C-9BA1-C4050D78BE85}"/>
+                <a16:creationId xmlns:a16="http://schemas.microsoft.com/office/drawing/2014/main" id="{672F2C52-F706-4C2C-9BA1-C4050D78BE85}"/>
               </a:ext>
             </a:extLst>
           </p:cNvPr>
@@ -35423,7 +35675,7 @@
           <p:cNvPr id="37" name="Rechteck 36">
             <a:extLst>
               <a:ext uri="{FF2B5EF4-FFF2-40B4-BE49-F238E27FC236}">
-                <a16:creationId xmlns:a16="http://schemas.microsoft.com/office/drawing/2014/main" xmlns="" id="{32A3E22E-D260-4C45-BA90-93973AE9B3A5}"/>
+                <a16:creationId xmlns:a16="http://schemas.microsoft.com/office/drawing/2014/main" id="{32A3E22E-D260-4C45-BA90-93973AE9B3A5}"/>
               </a:ext>
             </a:extLst>
           </p:cNvPr>
@@ -35486,7 +35738,7 @@
           <p:cNvPr id="38" name="Rechteck 37">
             <a:extLst>
               <a:ext uri="{FF2B5EF4-FFF2-40B4-BE49-F238E27FC236}">
-                <a16:creationId xmlns:a16="http://schemas.microsoft.com/office/drawing/2014/main" xmlns="" id="{5E7DB929-572D-4E95-82E8-B6DD989776DD}"/>
+                <a16:creationId xmlns:a16="http://schemas.microsoft.com/office/drawing/2014/main" id="{5E7DB929-572D-4E95-82E8-B6DD989776DD}"/>
               </a:ext>
             </a:extLst>
           </p:cNvPr>
@@ -35540,7 +35792,7 @@
           <p:cNvPr id="39" name="Rechteck 38">
             <a:extLst>
               <a:ext uri="{FF2B5EF4-FFF2-40B4-BE49-F238E27FC236}">
-                <a16:creationId xmlns:a16="http://schemas.microsoft.com/office/drawing/2014/main" xmlns="" id="{5E7DB929-572D-4E95-82E8-B6DD989776DD}"/>
+                <a16:creationId xmlns:a16="http://schemas.microsoft.com/office/drawing/2014/main" id="{5E7DB929-572D-4E95-82E8-B6DD989776DD}"/>
               </a:ext>
             </a:extLst>
           </p:cNvPr>
@@ -35594,7 +35846,7 @@
           <p:cNvPr id="40" name="Textfeld 39">
             <a:extLst>
               <a:ext uri="{FF2B5EF4-FFF2-40B4-BE49-F238E27FC236}">
-                <a16:creationId xmlns:a16="http://schemas.microsoft.com/office/drawing/2014/main" xmlns="" id="{672F2C52-F706-4C2C-9BA1-C4050D78BE85}"/>
+                <a16:creationId xmlns:a16="http://schemas.microsoft.com/office/drawing/2014/main" id="{672F2C52-F706-4C2C-9BA1-C4050D78BE85}"/>
               </a:ext>
             </a:extLst>
           </p:cNvPr>
@@ -35629,7 +35881,7 @@
           <p:cNvPr id="41" name="Rechteck 40">
             <a:extLst>
               <a:ext uri="{FF2B5EF4-FFF2-40B4-BE49-F238E27FC236}">
-                <a16:creationId xmlns:a16="http://schemas.microsoft.com/office/drawing/2014/main" xmlns="" id="{32A3E22E-D260-4C45-BA90-93973AE9B3A5}"/>
+                <a16:creationId xmlns:a16="http://schemas.microsoft.com/office/drawing/2014/main" id="{32A3E22E-D260-4C45-BA90-93973AE9B3A5}"/>
               </a:ext>
             </a:extLst>
           </p:cNvPr>
@@ -35830,7 +36082,7 @@
           <p:cNvPr id="45" name="Textfeld 44">
             <a:extLst>
               <a:ext uri="{FF2B5EF4-FFF2-40B4-BE49-F238E27FC236}">
-                <a16:creationId xmlns:a16="http://schemas.microsoft.com/office/drawing/2014/main" xmlns="" id="{672F2C52-F706-4C2C-9BA1-C4050D78BE85}"/>
+                <a16:creationId xmlns:a16="http://schemas.microsoft.com/office/drawing/2014/main" id="{672F2C52-F706-4C2C-9BA1-C4050D78BE85}"/>
               </a:ext>
             </a:extLst>
           </p:cNvPr>
@@ -35922,7 +36174,7 @@
           <p:cNvPr id="47" name="Rechteck 46">
             <a:extLst>
               <a:ext uri="{FF2B5EF4-FFF2-40B4-BE49-F238E27FC236}">
-                <a16:creationId xmlns:a16="http://schemas.microsoft.com/office/drawing/2014/main" xmlns="" id="{32A3E22E-D260-4C45-BA90-93973AE9B3A5}"/>
+                <a16:creationId xmlns:a16="http://schemas.microsoft.com/office/drawing/2014/main" id="{32A3E22E-D260-4C45-BA90-93973AE9B3A5}"/>
               </a:ext>
             </a:extLst>
           </p:cNvPr>
@@ -35985,7 +36237,7 @@
           <p:cNvPr id="48" name="Textfeld 47">
             <a:extLst>
               <a:ext uri="{FF2B5EF4-FFF2-40B4-BE49-F238E27FC236}">
-                <a16:creationId xmlns:a16="http://schemas.microsoft.com/office/drawing/2014/main" xmlns="" id="{672F2C52-F706-4C2C-9BA1-C4050D78BE85}"/>
+                <a16:creationId xmlns:a16="http://schemas.microsoft.com/office/drawing/2014/main" id="{672F2C52-F706-4C2C-9BA1-C4050D78BE85}"/>
               </a:ext>
             </a:extLst>
           </p:cNvPr>
@@ -36020,7 +36272,7 @@
           <p:cNvPr id="49" name="Rechteck 48">
             <a:extLst>
               <a:ext uri="{FF2B5EF4-FFF2-40B4-BE49-F238E27FC236}">
-                <a16:creationId xmlns:a16="http://schemas.microsoft.com/office/drawing/2014/main" xmlns="" id="{32A3E22E-D260-4C45-BA90-93973AE9B3A5}"/>
+                <a16:creationId xmlns:a16="http://schemas.microsoft.com/office/drawing/2014/main" id="{32A3E22E-D260-4C45-BA90-93973AE9B3A5}"/>
               </a:ext>
             </a:extLst>
           </p:cNvPr>
@@ -36134,7 +36386,7 @@
           <p:cNvPr id="51" name="Rechteck 50">
             <a:extLst>
               <a:ext uri="{FF2B5EF4-FFF2-40B4-BE49-F238E27FC236}">
-                <a16:creationId xmlns:a16="http://schemas.microsoft.com/office/drawing/2014/main" xmlns="" id="{32A3E22E-D260-4C45-BA90-93973AE9B3A5}"/>
+                <a16:creationId xmlns:a16="http://schemas.microsoft.com/office/drawing/2014/main" id="{32A3E22E-D260-4C45-BA90-93973AE9B3A5}"/>
               </a:ext>
             </a:extLst>
           </p:cNvPr>
@@ -36197,7 +36449,7 @@
           <p:cNvPr id="52" name="Textfeld 51">
             <a:extLst>
               <a:ext uri="{FF2B5EF4-FFF2-40B4-BE49-F238E27FC236}">
-                <a16:creationId xmlns:a16="http://schemas.microsoft.com/office/drawing/2014/main" xmlns="" id="{672F2C52-F706-4C2C-9BA1-C4050D78BE85}"/>
+                <a16:creationId xmlns:a16="http://schemas.microsoft.com/office/drawing/2014/main" id="{672F2C52-F706-4C2C-9BA1-C4050D78BE85}"/>
               </a:ext>
             </a:extLst>
           </p:cNvPr>
@@ -36370,7 +36622,7 @@
           <p:cNvPr id="56" name="Textfeld 55">
             <a:extLst>
               <a:ext uri="{FF2B5EF4-FFF2-40B4-BE49-F238E27FC236}">
-                <a16:creationId xmlns:a16="http://schemas.microsoft.com/office/drawing/2014/main" xmlns="" id="{672F2C52-F706-4C2C-9BA1-C4050D78BE85}"/>
+                <a16:creationId xmlns:a16="http://schemas.microsoft.com/office/drawing/2014/main" id="{672F2C52-F706-4C2C-9BA1-C4050D78BE85}"/>
               </a:ext>
             </a:extLst>
           </p:cNvPr>
@@ -36462,7 +36714,7 @@
           <p:cNvPr id="58" name="Rechteck 57">
             <a:extLst>
               <a:ext uri="{FF2B5EF4-FFF2-40B4-BE49-F238E27FC236}">
-                <a16:creationId xmlns:a16="http://schemas.microsoft.com/office/drawing/2014/main" xmlns="" id="{32A3E22E-D260-4C45-BA90-93973AE9B3A5}"/>
+                <a16:creationId xmlns:a16="http://schemas.microsoft.com/office/drawing/2014/main" id="{32A3E22E-D260-4C45-BA90-93973AE9B3A5}"/>
               </a:ext>
             </a:extLst>
           </p:cNvPr>
@@ -36525,7 +36777,7 @@
           <p:cNvPr id="59" name="Textfeld 58">
             <a:extLst>
               <a:ext uri="{FF2B5EF4-FFF2-40B4-BE49-F238E27FC236}">
-                <a16:creationId xmlns:a16="http://schemas.microsoft.com/office/drawing/2014/main" xmlns="" id="{672F2C52-F706-4C2C-9BA1-C4050D78BE85}"/>
+                <a16:creationId xmlns:a16="http://schemas.microsoft.com/office/drawing/2014/main" id="{672F2C52-F706-4C2C-9BA1-C4050D78BE85}"/>
               </a:ext>
             </a:extLst>
           </p:cNvPr>
@@ -36560,7 +36812,7 @@
           <p:cNvPr id="60" name="Rechteck 59">
             <a:extLst>
               <a:ext uri="{FF2B5EF4-FFF2-40B4-BE49-F238E27FC236}">
-                <a16:creationId xmlns:a16="http://schemas.microsoft.com/office/drawing/2014/main" xmlns="" id="{32A3E22E-D260-4C45-BA90-93973AE9B3A5}"/>
+                <a16:creationId xmlns:a16="http://schemas.microsoft.com/office/drawing/2014/main" id="{32A3E22E-D260-4C45-BA90-93973AE9B3A5}"/>
               </a:ext>
             </a:extLst>
           </p:cNvPr>
@@ -36674,7 +36926,7 @@
           <p:cNvPr id="62" name="Rechteck 61">
             <a:extLst>
               <a:ext uri="{FF2B5EF4-FFF2-40B4-BE49-F238E27FC236}">
-                <a16:creationId xmlns:a16="http://schemas.microsoft.com/office/drawing/2014/main" xmlns="" id="{32A3E22E-D260-4C45-BA90-93973AE9B3A5}"/>
+                <a16:creationId xmlns:a16="http://schemas.microsoft.com/office/drawing/2014/main" id="{32A3E22E-D260-4C45-BA90-93973AE9B3A5}"/>
               </a:ext>
             </a:extLst>
           </p:cNvPr>
@@ -36737,7 +36989,7 @@
           <p:cNvPr id="63" name="Textfeld 62">
             <a:extLst>
               <a:ext uri="{FF2B5EF4-FFF2-40B4-BE49-F238E27FC236}">
-                <a16:creationId xmlns:a16="http://schemas.microsoft.com/office/drawing/2014/main" xmlns="" id="{672F2C52-F706-4C2C-9BA1-C4050D78BE85}"/>
+                <a16:creationId xmlns:a16="http://schemas.microsoft.com/office/drawing/2014/main" id="{672F2C52-F706-4C2C-9BA1-C4050D78BE85}"/>
               </a:ext>
             </a:extLst>
           </p:cNvPr>
@@ -36772,7 +37024,7 @@
           <p:cNvPr id="65" name="Rechteck 64">
             <a:extLst>
               <a:ext uri="{FF2B5EF4-FFF2-40B4-BE49-F238E27FC236}">
-                <a16:creationId xmlns:a16="http://schemas.microsoft.com/office/drawing/2014/main" xmlns="" id="{5E7DB929-572D-4E95-82E8-B6DD989776DD}"/>
+                <a16:creationId xmlns:a16="http://schemas.microsoft.com/office/drawing/2014/main" id="{5E7DB929-572D-4E95-82E8-B6DD989776DD}"/>
               </a:ext>
             </a:extLst>
           </p:cNvPr>
@@ -36826,7 +37078,7 @@
           <p:cNvPr id="66" name="Textfeld 65">
             <a:extLst>
               <a:ext uri="{FF2B5EF4-FFF2-40B4-BE49-F238E27FC236}">
-                <a16:creationId xmlns:a16="http://schemas.microsoft.com/office/drawing/2014/main" xmlns="" id="{672F2C52-F706-4C2C-9BA1-C4050D78BE85}"/>
+                <a16:creationId xmlns:a16="http://schemas.microsoft.com/office/drawing/2014/main" id="{672F2C52-F706-4C2C-9BA1-C4050D78BE85}"/>
               </a:ext>
             </a:extLst>
           </p:cNvPr>
@@ -36861,7 +37113,7 @@
           <p:cNvPr id="67" name="Rechteck 66">
             <a:extLst>
               <a:ext uri="{FF2B5EF4-FFF2-40B4-BE49-F238E27FC236}">
-                <a16:creationId xmlns:a16="http://schemas.microsoft.com/office/drawing/2014/main" xmlns="" id="{32A3E22E-D260-4C45-BA90-93973AE9B3A5}"/>
+                <a16:creationId xmlns:a16="http://schemas.microsoft.com/office/drawing/2014/main" id="{32A3E22E-D260-4C45-BA90-93973AE9B3A5}"/>
               </a:ext>
             </a:extLst>
           </p:cNvPr>
@@ -37064,7 +37316,7 @@
           <p:cNvPr id="38" name="Rechteck 37">
             <a:extLst>
               <a:ext uri="{FF2B5EF4-FFF2-40B4-BE49-F238E27FC236}">
-                <a16:creationId xmlns:a16="http://schemas.microsoft.com/office/drawing/2014/main" xmlns="" id="{5E7DB929-572D-4E95-82E8-B6DD989776DD}"/>
+                <a16:creationId xmlns:a16="http://schemas.microsoft.com/office/drawing/2014/main" id="{5E7DB929-572D-4E95-82E8-B6DD989776DD}"/>
               </a:ext>
             </a:extLst>
           </p:cNvPr>
@@ -37256,7 +37508,7 @@
           <p:cNvPr id="45" name="Textfeld 44">
             <a:extLst>
               <a:ext uri="{FF2B5EF4-FFF2-40B4-BE49-F238E27FC236}">
-                <a16:creationId xmlns:a16="http://schemas.microsoft.com/office/drawing/2014/main" xmlns="" id="{672F2C52-F706-4C2C-9BA1-C4050D78BE85}"/>
+                <a16:creationId xmlns:a16="http://schemas.microsoft.com/office/drawing/2014/main" id="{672F2C52-F706-4C2C-9BA1-C4050D78BE85}"/>
               </a:ext>
             </a:extLst>
           </p:cNvPr>
@@ -37348,7 +37600,7 @@
           <p:cNvPr id="47" name="Rechteck 46">
             <a:extLst>
               <a:ext uri="{FF2B5EF4-FFF2-40B4-BE49-F238E27FC236}">
-                <a16:creationId xmlns:a16="http://schemas.microsoft.com/office/drawing/2014/main" xmlns="" id="{32A3E22E-D260-4C45-BA90-93973AE9B3A5}"/>
+                <a16:creationId xmlns:a16="http://schemas.microsoft.com/office/drawing/2014/main" id="{32A3E22E-D260-4C45-BA90-93973AE9B3A5}"/>
               </a:ext>
             </a:extLst>
           </p:cNvPr>
@@ -37411,7 +37663,7 @@
           <p:cNvPr id="48" name="Textfeld 47">
             <a:extLst>
               <a:ext uri="{FF2B5EF4-FFF2-40B4-BE49-F238E27FC236}">
-                <a16:creationId xmlns:a16="http://schemas.microsoft.com/office/drawing/2014/main" xmlns="" id="{672F2C52-F706-4C2C-9BA1-C4050D78BE85}"/>
+                <a16:creationId xmlns:a16="http://schemas.microsoft.com/office/drawing/2014/main" id="{672F2C52-F706-4C2C-9BA1-C4050D78BE85}"/>
               </a:ext>
             </a:extLst>
           </p:cNvPr>
@@ -37446,7 +37698,7 @@
           <p:cNvPr id="49" name="Rechteck 48">
             <a:extLst>
               <a:ext uri="{FF2B5EF4-FFF2-40B4-BE49-F238E27FC236}">
-                <a16:creationId xmlns:a16="http://schemas.microsoft.com/office/drawing/2014/main" xmlns="" id="{32A3E22E-D260-4C45-BA90-93973AE9B3A5}"/>
+                <a16:creationId xmlns:a16="http://schemas.microsoft.com/office/drawing/2014/main" id="{32A3E22E-D260-4C45-BA90-93973AE9B3A5}"/>
               </a:ext>
             </a:extLst>
           </p:cNvPr>
@@ -37560,7 +37812,7 @@
           <p:cNvPr id="51" name="Rechteck 50">
             <a:extLst>
               <a:ext uri="{FF2B5EF4-FFF2-40B4-BE49-F238E27FC236}">
-                <a16:creationId xmlns:a16="http://schemas.microsoft.com/office/drawing/2014/main" xmlns="" id="{32A3E22E-D260-4C45-BA90-93973AE9B3A5}"/>
+                <a16:creationId xmlns:a16="http://schemas.microsoft.com/office/drawing/2014/main" id="{32A3E22E-D260-4C45-BA90-93973AE9B3A5}"/>
               </a:ext>
             </a:extLst>
           </p:cNvPr>
@@ -37623,7 +37875,7 @@
           <p:cNvPr id="52" name="Textfeld 51">
             <a:extLst>
               <a:ext uri="{FF2B5EF4-FFF2-40B4-BE49-F238E27FC236}">
-                <a16:creationId xmlns:a16="http://schemas.microsoft.com/office/drawing/2014/main" xmlns="" id="{672F2C52-F706-4C2C-9BA1-C4050D78BE85}"/>
+                <a16:creationId xmlns:a16="http://schemas.microsoft.com/office/drawing/2014/main" id="{672F2C52-F706-4C2C-9BA1-C4050D78BE85}"/>
               </a:ext>
             </a:extLst>
           </p:cNvPr>
@@ -37796,7 +38048,7 @@
           <p:cNvPr id="56" name="Textfeld 55">
             <a:extLst>
               <a:ext uri="{FF2B5EF4-FFF2-40B4-BE49-F238E27FC236}">
-                <a16:creationId xmlns:a16="http://schemas.microsoft.com/office/drawing/2014/main" xmlns="" id="{672F2C52-F706-4C2C-9BA1-C4050D78BE85}"/>
+                <a16:creationId xmlns:a16="http://schemas.microsoft.com/office/drawing/2014/main" id="{672F2C52-F706-4C2C-9BA1-C4050D78BE85}"/>
               </a:ext>
             </a:extLst>
           </p:cNvPr>
@@ -37888,7 +38140,7 @@
           <p:cNvPr id="58" name="Rechteck 57">
             <a:extLst>
               <a:ext uri="{FF2B5EF4-FFF2-40B4-BE49-F238E27FC236}">
-                <a16:creationId xmlns:a16="http://schemas.microsoft.com/office/drawing/2014/main" xmlns="" id="{32A3E22E-D260-4C45-BA90-93973AE9B3A5}"/>
+                <a16:creationId xmlns:a16="http://schemas.microsoft.com/office/drawing/2014/main" id="{32A3E22E-D260-4C45-BA90-93973AE9B3A5}"/>
               </a:ext>
             </a:extLst>
           </p:cNvPr>
@@ -37951,7 +38203,7 @@
           <p:cNvPr id="59" name="Textfeld 58">
             <a:extLst>
               <a:ext uri="{FF2B5EF4-FFF2-40B4-BE49-F238E27FC236}">
-                <a16:creationId xmlns:a16="http://schemas.microsoft.com/office/drawing/2014/main" xmlns="" id="{672F2C52-F706-4C2C-9BA1-C4050D78BE85}"/>
+                <a16:creationId xmlns:a16="http://schemas.microsoft.com/office/drawing/2014/main" id="{672F2C52-F706-4C2C-9BA1-C4050D78BE85}"/>
               </a:ext>
             </a:extLst>
           </p:cNvPr>
@@ -37986,7 +38238,7 @@
           <p:cNvPr id="60" name="Rechteck 59">
             <a:extLst>
               <a:ext uri="{FF2B5EF4-FFF2-40B4-BE49-F238E27FC236}">
-                <a16:creationId xmlns:a16="http://schemas.microsoft.com/office/drawing/2014/main" xmlns="" id="{32A3E22E-D260-4C45-BA90-93973AE9B3A5}"/>
+                <a16:creationId xmlns:a16="http://schemas.microsoft.com/office/drawing/2014/main" id="{32A3E22E-D260-4C45-BA90-93973AE9B3A5}"/>
               </a:ext>
             </a:extLst>
           </p:cNvPr>
@@ -38100,7 +38352,7 @@
           <p:cNvPr id="62" name="Rechteck 61">
             <a:extLst>
               <a:ext uri="{FF2B5EF4-FFF2-40B4-BE49-F238E27FC236}">
-                <a16:creationId xmlns:a16="http://schemas.microsoft.com/office/drawing/2014/main" xmlns="" id="{32A3E22E-D260-4C45-BA90-93973AE9B3A5}"/>
+                <a16:creationId xmlns:a16="http://schemas.microsoft.com/office/drawing/2014/main" id="{32A3E22E-D260-4C45-BA90-93973AE9B3A5}"/>
               </a:ext>
             </a:extLst>
           </p:cNvPr>
@@ -38163,7 +38415,7 @@
           <p:cNvPr id="63" name="Textfeld 62">
             <a:extLst>
               <a:ext uri="{FF2B5EF4-FFF2-40B4-BE49-F238E27FC236}">
-                <a16:creationId xmlns:a16="http://schemas.microsoft.com/office/drawing/2014/main" xmlns="" id="{672F2C52-F706-4C2C-9BA1-C4050D78BE85}"/>
+                <a16:creationId xmlns:a16="http://schemas.microsoft.com/office/drawing/2014/main" id="{672F2C52-F706-4C2C-9BA1-C4050D78BE85}"/>
               </a:ext>
             </a:extLst>
           </p:cNvPr>
@@ -38277,7 +38529,7 @@
           <p:cNvPr id="66" name="Textfeld 65">
             <a:extLst>
               <a:ext uri="{FF2B5EF4-FFF2-40B4-BE49-F238E27FC236}">
-                <a16:creationId xmlns:a16="http://schemas.microsoft.com/office/drawing/2014/main" xmlns="" id="{672F2C52-F706-4C2C-9BA1-C4050D78BE85}"/>
+                <a16:creationId xmlns:a16="http://schemas.microsoft.com/office/drawing/2014/main" id="{672F2C52-F706-4C2C-9BA1-C4050D78BE85}"/>
               </a:ext>
             </a:extLst>
           </p:cNvPr>
@@ -38369,7 +38621,7 @@
           <p:cNvPr id="70" name="Rechteck 69">
             <a:extLst>
               <a:ext uri="{FF2B5EF4-FFF2-40B4-BE49-F238E27FC236}">
-                <a16:creationId xmlns:a16="http://schemas.microsoft.com/office/drawing/2014/main" xmlns="" id="{32A3E22E-D260-4C45-BA90-93973AE9B3A5}"/>
+                <a16:creationId xmlns:a16="http://schemas.microsoft.com/office/drawing/2014/main" id="{32A3E22E-D260-4C45-BA90-93973AE9B3A5}"/>
               </a:ext>
             </a:extLst>
           </p:cNvPr>
@@ -38539,7 +38791,7 @@
           <p:cNvPr id="74" name="Rechteck 73">
             <a:extLst>
               <a:ext uri="{FF2B5EF4-FFF2-40B4-BE49-F238E27FC236}">
-                <a16:creationId xmlns:a16="http://schemas.microsoft.com/office/drawing/2014/main" xmlns="" id="{32A3E22E-D260-4C45-BA90-93973AE9B3A5}"/>
+                <a16:creationId xmlns:a16="http://schemas.microsoft.com/office/drawing/2014/main" id="{32A3E22E-D260-4C45-BA90-93973AE9B3A5}"/>
               </a:ext>
             </a:extLst>
           </p:cNvPr>
@@ -38709,7 +38961,7 @@
           <p:cNvPr id="78" name="Rechteck 77">
             <a:extLst>
               <a:ext uri="{FF2B5EF4-FFF2-40B4-BE49-F238E27FC236}">
-                <a16:creationId xmlns:a16="http://schemas.microsoft.com/office/drawing/2014/main" xmlns="" id="{32A3E22E-D260-4C45-BA90-93973AE9B3A5}"/>
+                <a16:creationId xmlns:a16="http://schemas.microsoft.com/office/drawing/2014/main" id="{32A3E22E-D260-4C45-BA90-93973AE9B3A5}"/>
               </a:ext>
             </a:extLst>
           </p:cNvPr>
@@ -38772,7 +39024,7 @@
           <p:cNvPr id="40" name="Textfeld 39">
             <a:extLst>
               <a:ext uri="{FF2B5EF4-FFF2-40B4-BE49-F238E27FC236}">
-                <a16:creationId xmlns:a16="http://schemas.microsoft.com/office/drawing/2014/main" xmlns="" id="{672F2C52-F706-4C2C-9BA1-C4050D78BE85}"/>
+                <a16:creationId xmlns:a16="http://schemas.microsoft.com/office/drawing/2014/main" id="{672F2C52-F706-4C2C-9BA1-C4050D78BE85}"/>
               </a:ext>
             </a:extLst>
           </p:cNvPr>
@@ -38807,7 +39059,7 @@
           <p:cNvPr id="36" name="Textfeld 35">
             <a:extLst>
               <a:ext uri="{FF2B5EF4-FFF2-40B4-BE49-F238E27FC236}">
-                <a16:creationId xmlns:a16="http://schemas.microsoft.com/office/drawing/2014/main" xmlns="" id="{672F2C52-F706-4C2C-9BA1-C4050D78BE85}"/>
+                <a16:creationId xmlns:a16="http://schemas.microsoft.com/office/drawing/2014/main" id="{672F2C52-F706-4C2C-9BA1-C4050D78BE85}"/>
               </a:ext>
             </a:extLst>
           </p:cNvPr>
@@ -39038,7 +39290,7 @@
           <p:cNvPr id="39" name="Rechteck 38">
             <a:extLst>
               <a:ext uri="{FF2B5EF4-FFF2-40B4-BE49-F238E27FC236}">
-                <a16:creationId xmlns:a16="http://schemas.microsoft.com/office/drawing/2014/main" xmlns="" id="{25FC07D6-1355-407E-BA9F-6963B4E369E4}"/>
+                <a16:creationId xmlns:a16="http://schemas.microsoft.com/office/drawing/2014/main" id="{25FC07D6-1355-407E-BA9F-6963B4E369E4}"/>
               </a:ext>
             </a:extLst>
           </p:cNvPr>
@@ -39092,7 +39344,7 @@
           <p:cNvPr id="41" name="Textfeld 40">
             <a:extLst>
               <a:ext uri="{FF2B5EF4-FFF2-40B4-BE49-F238E27FC236}">
-                <a16:creationId xmlns:a16="http://schemas.microsoft.com/office/drawing/2014/main" xmlns="" id="{241888F5-800D-4489-A1D9-B3C4D866E90A}"/>
+                <a16:creationId xmlns:a16="http://schemas.microsoft.com/office/drawing/2014/main" id="{241888F5-800D-4489-A1D9-B3C4D866E90A}"/>
               </a:ext>
             </a:extLst>
           </p:cNvPr>
@@ -39127,7 +39379,7 @@
           <p:cNvPr id="64" name="Rechteck 63">
             <a:extLst>
               <a:ext uri="{FF2B5EF4-FFF2-40B4-BE49-F238E27FC236}">
-                <a16:creationId xmlns:a16="http://schemas.microsoft.com/office/drawing/2014/main" xmlns="" id="{886DAB4E-C1E2-48A3-AC9D-14F90EB82F87}"/>
+                <a16:creationId xmlns:a16="http://schemas.microsoft.com/office/drawing/2014/main" id="{886DAB4E-C1E2-48A3-AC9D-14F90EB82F87}"/>
               </a:ext>
             </a:extLst>
           </p:cNvPr>
@@ -39190,7 +39442,7 @@
           <p:cNvPr id="65" name="Rechteck 64">
             <a:extLst>
               <a:ext uri="{FF2B5EF4-FFF2-40B4-BE49-F238E27FC236}">
-                <a16:creationId xmlns:a16="http://schemas.microsoft.com/office/drawing/2014/main" xmlns="" id="{600E7E0B-8C9E-4556-AD5E-FF43F7B0879E}"/>
+                <a16:creationId xmlns:a16="http://schemas.microsoft.com/office/drawing/2014/main" id="{600E7E0B-8C9E-4556-AD5E-FF43F7B0879E}"/>
               </a:ext>
             </a:extLst>
           </p:cNvPr>
@@ -39244,7 +39496,7 @@
           <p:cNvPr id="67" name="Rechteck 66">
             <a:extLst>
               <a:ext uri="{FF2B5EF4-FFF2-40B4-BE49-F238E27FC236}">
-                <a16:creationId xmlns:a16="http://schemas.microsoft.com/office/drawing/2014/main" xmlns="" id="{A70CE7A6-3702-4E27-A420-63840AE2E523}"/>
+                <a16:creationId xmlns:a16="http://schemas.microsoft.com/office/drawing/2014/main" id="{A70CE7A6-3702-4E27-A420-63840AE2E523}"/>
               </a:ext>
             </a:extLst>
           </p:cNvPr>
@@ -39298,7 +39550,7 @@
           <p:cNvPr id="72" name="Textfeld 71">
             <a:extLst>
               <a:ext uri="{FF2B5EF4-FFF2-40B4-BE49-F238E27FC236}">
-                <a16:creationId xmlns:a16="http://schemas.microsoft.com/office/drawing/2014/main" xmlns="" id="{1BF9DEE9-25DE-4F8F-A287-25EAB27E4E98}"/>
+                <a16:creationId xmlns:a16="http://schemas.microsoft.com/office/drawing/2014/main" id="{1BF9DEE9-25DE-4F8F-A287-25EAB27E4E98}"/>
               </a:ext>
             </a:extLst>
           </p:cNvPr>
@@ -39333,7 +39585,7 @@
           <p:cNvPr id="76" name="Rechteck 75">
             <a:extLst>
               <a:ext uri="{FF2B5EF4-FFF2-40B4-BE49-F238E27FC236}">
-                <a16:creationId xmlns:a16="http://schemas.microsoft.com/office/drawing/2014/main" xmlns="" id="{E58E81C6-CB52-481B-86EE-A2E39DE0BA4B}"/>
+                <a16:creationId xmlns:a16="http://schemas.microsoft.com/office/drawing/2014/main" id="{E58E81C6-CB52-481B-86EE-A2E39DE0BA4B}"/>
               </a:ext>
             </a:extLst>
           </p:cNvPr>
@@ -39396,7 +39648,7 @@
           <p:cNvPr id="79" name="Abgerundetes Rechteck 41">
             <a:extLst>
               <a:ext uri="{FF2B5EF4-FFF2-40B4-BE49-F238E27FC236}">
-                <a16:creationId xmlns:a16="http://schemas.microsoft.com/office/drawing/2014/main" xmlns="" id="{942A86A4-1593-4395-80B9-3EC4BDFDE4A4}"/>
+                <a16:creationId xmlns:a16="http://schemas.microsoft.com/office/drawing/2014/main" id="{942A86A4-1593-4395-80B9-3EC4BDFDE4A4}"/>
               </a:ext>
             </a:extLst>
           </p:cNvPr>
@@ -39452,7 +39704,7 @@
           <p:cNvPr id="80" name="Gerader Verbinder 79">
             <a:extLst>
               <a:ext uri="{FF2B5EF4-FFF2-40B4-BE49-F238E27FC236}">
-                <a16:creationId xmlns:a16="http://schemas.microsoft.com/office/drawing/2014/main" xmlns="" id="{571CB26C-25E0-48CE-AD63-EAF7C70E2964}"/>
+                <a16:creationId xmlns:a16="http://schemas.microsoft.com/office/drawing/2014/main" id="{571CB26C-25E0-48CE-AD63-EAF7C70E2964}"/>
               </a:ext>
             </a:extLst>
           </p:cNvPr>
@@ -39493,7 +39745,7 @@
           <p:cNvPr id="81" name="Auf der gleichen Seite des Rechtecks liegende Ecken abrunden 43">
             <a:extLst>
               <a:ext uri="{FF2B5EF4-FFF2-40B4-BE49-F238E27FC236}">
-                <a16:creationId xmlns:a16="http://schemas.microsoft.com/office/drawing/2014/main" xmlns="" id="{7042ECD2-8115-4F48-94F3-22CB05726A2F}"/>
+                <a16:creationId xmlns:a16="http://schemas.microsoft.com/office/drawing/2014/main" id="{7042ECD2-8115-4F48-94F3-22CB05726A2F}"/>
               </a:ext>
             </a:extLst>
           </p:cNvPr>
@@ -39552,7 +39804,7 @@
           <p:cNvPr id="82" name="Textfeld 81">
             <a:extLst>
               <a:ext uri="{FF2B5EF4-FFF2-40B4-BE49-F238E27FC236}">
-                <a16:creationId xmlns:a16="http://schemas.microsoft.com/office/drawing/2014/main" xmlns="" id="{E3099B7B-E190-43E5-A4AB-BD41A7E59355}"/>
+                <a16:creationId xmlns:a16="http://schemas.microsoft.com/office/drawing/2014/main" id="{E3099B7B-E190-43E5-A4AB-BD41A7E59355}"/>
               </a:ext>
             </a:extLst>
           </p:cNvPr>
@@ -39587,7 +39839,7 @@
           <p:cNvPr id="83" name="Auf der gleichen Seite des Rechtecks liegende Ecken abrunden 45">
             <a:extLst>
               <a:ext uri="{FF2B5EF4-FFF2-40B4-BE49-F238E27FC236}">
-                <a16:creationId xmlns:a16="http://schemas.microsoft.com/office/drawing/2014/main" xmlns="" id="{C664E9E8-175D-492A-8AE1-A7485D2ADB00}"/>
+                <a16:creationId xmlns:a16="http://schemas.microsoft.com/office/drawing/2014/main" id="{C664E9E8-175D-492A-8AE1-A7485D2ADB00}"/>
               </a:ext>
             </a:extLst>
           </p:cNvPr>
@@ -39650,7 +39902,7 @@
           <p:cNvPr id="84" name="Rechteck 83">
             <a:extLst>
               <a:ext uri="{FF2B5EF4-FFF2-40B4-BE49-F238E27FC236}">
-                <a16:creationId xmlns:a16="http://schemas.microsoft.com/office/drawing/2014/main" xmlns="" id="{FA89C49B-3046-43C2-A6D5-552206354405}"/>
+                <a16:creationId xmlns:a16="http://schemas.microsoft.com/office/drawing/2014/main" id="{FA89C49B-3046-43C2-A6D5-552206354405}"/>
               </a:ext>
             </a:extLst>
           </p:cNvPr>
@@ -39713,7 +39965,7 @@
           <p:cNvPr id="85" name="Textfeld 84">
             <a:extLst>
               <a:ext uri="{FF2B5EF4-FFF2-40B4-BE49-F238E27FC236}">
-                <a16:creationId xmlns:a16="http://schemas.microsoft.com/office/drawing/2014/main" xmlns="" id="{737D41CD-73DB-45E9-8B1F-D63BAD248FD5}"/>
+                <a16:creationId xmlns:a16="http://schemas.microsoft.com/office/drawing/2014/main" id="{737D41CD-73DB-45E9-8B1F-D63BAD248FD5}"/>
               </a:ext>
             </a:extLst>
           </p:cNvPr>
@@ -39748,7 +40000,7 @@
           <p:cNvPr id="86" name="Rechteck 85">
             <a:extLst>
               <a:ext uri="{FF2B5EF4-FFF2-40B4-BE49-F238E27FC236}">
-                <a16:creationId xmlns:a16="http://schemas.microsoft.com/office/drawing/2014/main" xmlns="" id="{8CB4AAC0-B79C-4FDA-8377-834AAE5AAFE6}"/>
+                <a16:creationId xmlns:a16="http://schemas.microsoft.com/office/drawing/2014/main" id="{8CB4AAC0-B79C-4FDA-8377-834AAE5AAFE6}"/>
               </a:ext>
             </a:extLst>
           </p:cNvPr>
@@ -39811,7 +40063,7 @@
           <p:cNvPr id="87" name="Auf der gleichen Seite des Rechtecks liegende Ecken abrunden 49">
             <a:extLst>
               <a:ext uri="{FF2B5EF4-FFF2-40B4-BE49-F238E27FC236}">
-                <a16:creationId xmlns:a16="http://schemas.microsoft.com/office/drawing/2014/main" xmlns="" id="{6F32A964-5ABC-46D9-9C1B-4C84416336BC}"/>
+                <a16:creationId xmlns:a16="http://schemas.microsoft.com/office/drawing/2014/main" id="{6F32A964-5ABC-46D9-9C1B-4C84416336BC}"/>
               </a:ext>
             </a:extLst>
           </p:cNvPr>
@@ -39868,7 +40120,7 @@
           <p:cNvPr id="88" name="Rechteck 87">
             <a:extLst>
               <a:ext uri="{FF2B5EF4-FFF2-40B4-BE49-F238E27FC236}">
-                <a16:creationId xmlns:a16="http://schemas.microsoft.com/office/drawing/2014/main" xmlns="" id="{80C5B548-9931-4E76-9AF9-262A5DAF025B}"/>
+                <a16:creationId xmlns:a16="http://schemas.microsoft.com/office/drawing/2014/main" id="{80C5B548-9931-4E76-9AF9-262A5DAF025B}"/>
               </a:ext>
             </a:extLst>
           </p:cNvPr>
@@ -39931,7 +40183,7 @@
           <p:cNvPr id="89" name="Textfeld 88">
             <a:extLst>
               <a:ext uri="{FF2B5EF4-FFF2-40B4-BE49-F238E27FC236}">
-                <a16:creationId xmlns:a16="http://schemas.microsoft.com/office/drawing/2014/main" xmlns="" id="{B1C1B8CC-C240-4C8E-90EE-2D28AFF38AA6}"/>
+                <a16:creationId xmlns:a16="http://schemas.microsoft.com/office/drawing/2014/main" id="{B1C1B8CC-C240-4C8E-90EE-2D28AFF38AA6}"/>
               </a:ext>
             </a:extLst>
           </p:cNvPr>
@@ -39966,7 +40218,7 @@
           <p:cNvPr id="90" name="Abgerundetes Rechteck 52">
             <a:extLst>
               <a:ext uri="{FF2B5EF4-FFF2-40B4-BE49-F238E27FC236}">
-                <a16:creationId xmlns:a16="http://schemas.microsoft.com/office/drawing/2014/main" xmlns="" id="{84A335A5-286B-4328-8217-DFB41B4F9557}"/>
+                <a16:creationId xmlns:a16="http://schemas.microsoft.com/office/drawing/2014/main" id="{84A335A5-286B-4328-8217-DFB41B4F9557}"/>
               </a:ext>
             </a:extLst>
           </p:cNvPr>
@@ -40022,7 +40274,7 @@
           <p:cNvPr id="91" name="Gerader Verbinder 90">
             <a:extLst>
               <a:ext uri="{FF2B5EF4-FFF2-40B4-BE49-F238E27FC236}">
-                <a16:creationId xmlns:a16="http://schemas.microsoft.com/office/drawing/2014/main" xmlns="" id="{A84D1A20-17DD-4BD2-A6B3-0119A5688A0D}"/>
+                <a16:creationId xmlns:a16="http://schemas.microsoft.com/office/drawing/2014/main" id="{A84D1A20-17DD-4BD2-A6B3-0119A5688A0D}"/>
               </a:ext>
             </a:extLst>
           </p:cNvPr>
@@ -40063,7 +40315,7 @@
           <p:cNvPr id="92" name="Auf der gleichen Seite des Rechtecks liegende Ecken abrunden 54">
             <a:extLst>
               <a:ext uri="{FF2B5EF4-FFF2-40B4-BE49-F238E27FC236}">
-                <a16:creationId xmlns:a16="http://schemas.microsoft.com/office/drawing/2014/main" xmlns="" id="{49B69161-7068-4A2D-B6D8-2417A8E4D0E8}"/>
+                <a16:creationId xmlns:a16="http://schemas.microsoft.com/office/drawing/2014/main" id="{49B69161-7068-4A2D-B6D8-2417A8E4D0E8}"/>
               </a:ext>
             </a:extLst>
           </p:cNvPr>
@@ -40122,7 +40374,7 @@
           <p:cNvPr id="93" name="Textfeld 92">
             <a:extLst>
               <a:ext uri="{FF2B5EF4-FFF2-40B4-BE49-F238E27FC236}">
-                <a16:creationId xmlns:a16="http://schemas.microsoft.com/office/drawing/2014/main" xmlns="" id="{12CBED8E-BD00-4E89-862C-E147AD356C58}"/>
+                <a16:creationId xmlns:a16="http://schemas.microsoft.com/office/drawing/2014/main" id="{12CBED8E-BD00-4E89-862C-E147AD356C58}"/>
               </a:ext>
             </a:extLst>
           </p:cNvPr>
@@ -40157,7 +40409,7 @@
           <p:cNvPr id="94" name="Auf der gleichen Seite des Rechtecks liegende Ecken abrunden 56">
             <a:extLst>
               <a:ext uri="{FF2B5EF4-FFF2-40B4-BE49-F238E27FC236}">
-                <a16:creationId xmlns:a16="http://schemas.microsoft.com/office/drawing/2014/main" xmlns="" id="{DADAD6BA-BDE5-4BBB-82D4-E4BFC6E8740B}"/>
+                <a16:creationId xmlns:a16="http://schemas.microsoft.com/office/drawing/2014/main" id="{DADAD6BA-BDE5-4BBB-82D4-E4BFC6E8740B}"/>
               </a:ext>
             </a:extLst>
           </p:cNvPr>
@@ -40220,7 +40472,7 @@
           <p:cNvPr id="95" name="Rechteck 94">
             <a:extLst>
               <a:ext uri="{FF2B5EF4-FFF2-40B4-BE49-F238E27FC236}">
-                <a16:creationId xmlns:a16="http://schemas.microsoft.com/office/drawing/2014/main" xmlns="" id="{38435F08-866E-4DB9-B864-63A27D58DDCB}"/>
+                <a16:creationId xmlns:a16="http://schemas.microsoft.com/office/drawing/2014/main" id="{38435F08-866E-4DB9-B864-63A27D58DDCB}"/>
               </a:ext>
             </a:extLst>
           </p:cNvPr>
@@ -40283,7 +40535,7 @@
           <p:cNvPr id="96" name="Textfeld 95">
             <a:extLst>
               <a:ext uri="{FF2B5EF4-FFF2-40B4-BE49-F238E27FC236}">
-                <a16:creationId xmlns:a16="http://schemas.microsoft.com/office/drawing/2014/main" xmlns="" id="{0371D7EB-5C06-435B-B218-E0E43C14CAC9}"/>
+                <a16:creationId xmlns:a16="http://schemas.microsoft.com/office/drawing/2014/main" id="{0371D7EB-5C06-435B-B218-E0E43C14CAC9}"/>
               </a:ext>
             </a:extLst>
           </p:cNvPr>
@@ -40318,7 +40570,7 @@
           <p:cNvPr id="97" name="Rechteck 96">
             <a:extLst>
               <a:ext uri="{FF2B5EF4-FFF2-40B4-BE49-F238E27FC236}">
-                <a16:creationId xmlns:a16="http://schemas.microsoft.com/office/drawing/2014/main" xmlns="" id="{48547755-1C8B-4F2D-80F6-B95A509442D0}"/>
+                <a16:creationId xmlns:a16="http://schemas.microsoft.com/office/drawing/2014/main" id="{48547755-1C8B-4F2D-80F6-B95A509442D0}"/>
               </a:ext>
             </a:extLst>
           </p:cNvPr>
@@ -40381,7 +40633,7 @@
           <p:cNvPr id="98" name="Auf der gleichen Seite des Rechtecks liegende Ecken abrunden 60">
             <a:extLst>
               <a:ext uri="{FF2B5EF4-FFF2-40B4-BE49-F238E27FC236}">
-                <a16:creationId xmlns:a16="http://schemas.microsoft.com/office/drawing/2014/main" xmlns="" id="{E74D0EC3-D7FE-4D46-957A-4439144C068E}"/>
+                <a16:creationId xmlns:a16="http://schemas.microsoft.com/office/drawing/2014/main" id="{E74D0EC3-D7FE-4D46-957A-4439144C068E}"/>
               </a:ext>
             </a:extLst>
           </p:cNvPr>
@@ -40438,7 +40690,7 @@
           <p:cNvPr id="99" name="Rechteck 98">
             <a:extLst>
               <a:ext uri="{FF2B5EF4-FFF2-40B4-BE49-F238E27FC236}">
-                <a16:creationId xmlns:a16="http://schemas.microsoft.com/office/drawing/2014/main" xmlns="" id="{7DDBB93F-D69F-4154-A895-9DB104011381}"/>
+                <a16:creationId xmlns:a16="http://schemas.microsoft.com/office/drawing/2014/main" id="{7DDBB93F-D69F-4154-A895-9DB104011381}"/>
               </a:ext>
             </a:extLst>
           </p:cNvPr>
@@ -40501,7 +40753,7 @@
           <p:cNvPr id="100" name="Textfeld 99">
             <a:extLst>
               <a:ext uri="{FF2B5EF4-FFF2-40B4-BE49-F238E27FC236}">
-                <a16:creationId xmlns:a16="http://schemas.microsoft.com/office/drawing/2014/main" xmlns="" id="{853FB407-5353-403B-AF7A-6088AD921F4E}"/>
+                <a16:creationId xmlns:a16="http://schemas.microsoft.com/office/drawing/2014/main" id="{853FB407-5353-403B-AF7A-6088AD921F4E}"/>
               </a:ext>
             </a:extLst>
           </p:cNvPr>
@@ -40536,7 +40788,7 @@
           <p:cNvPr id="101" name="Rechteck 100">
             <a:extLst>
               <a:ext uri="{FF2B5EF4-FFF2-40B4-BE49-F238E27FC236}">
-                <a16:creationId xmlns:a16="http://schemas.microsoft.com/office/drawing/2014/main" xmlns="" id="{C26B5F92-167D-464B-BD1C-3E5A4F1196D9}"/>
+                <a16:creationId xmlns:a16="http://schemas.microsoft.com/office/drawing/2014/main" id="{C26B5F92-167D-464B-BD1C-3E5A4F1196D9}"/>
               </a:ext>
             </a:extLst>
           </p:cNvPr>
@@ -40590,7 +40842,7 @@
           <p:cNvPr id="102" name="Textfeld 101">
             <a:extLst>
               <a:ext uri="{FF2B5EF4-FFF2-40B4-BE49-F238E27FC236}">
-                <a16:creationId xmlns:a16="http://schemas.microsoft.com/office/drawing/2014/main" xmlns="" id="{48FBC9FE-860F-4A86-ACA0-9F164C57DD50}"/>
+                <a16:creationId xmlns:a16="http://schemas.microsoft.com/office/drawing/2014/main" id="{48FBC9FE-860F-4A86-ACA0-9F164C57DD50}"/>
               </a:ext>
             </a:extLst>
           </p:cNvPr>
@@ -40625,7 +40877,7 @@
           <p:cNvPr id="103" name="Rechteck 102">
             <a:extLst>
               <a:ext uri="{FF2B5EF4-FFF2-40B4-BE49-F238E27FC236}">
-                <a16:creationId xmlns:a16="http://schemas.microsoft.com/office/drawing/2014/main" xmlns="" id="{0B13782B-D570-409F-B281-680EF1088A5E}"/>
+                <a16:creationId xmlns:a16="http://schemas.microsoft.com/office/drawing/2014/main" id="{0B13782B-D570-409F-B281-680EF1088A5E}"/>
               </a:ext>
             </a:extLst>
           </p:cNvPr>
@@ -40755,7 +41007,7 @@
           <p:cNvPr id="36" name="Rechteck 35">
             <a:extLst>
               <a:ext uri="{FF2B5EF4-FFF2-40B4-BE49-F238E27FC236}">
-                <a16:creationId xmlns:a16="http://schemas.microsoft.com/office/drawing/2014/main" xmlns="" id="{B8BBB9F0-732F-4918-860E-55DF65FF67F5}"/>
+                <a16:creationId xmlns:a16="http://schemas.microsoft.com/office/drawing/2014/main" id="{B8BBB9F0-732F-4918-860E-55DF65FF67F5}"/>
               </a:ext>
             </a:extLst>
           </p:cNvPr>
@@ -40809,7 +41061,7 @@
           <p:cNvPr id="37" name="Abgerundetes Rechteck 41">
             <a:extLst>
               <a:ext uri="{FF2B5EF4-FFF2-40B4-BE49-F238E27FC236}">
-                <a16:creationId xmlns:a16="http://schemas.microsoft.com/office/drawing/2014/main" xmlns="" id="{E7A34E36-93E6-424A-A0BB-6DDDBB7C3DC1}"/>
+                <a16:creationId xmlns:a16="http://schemas.microsoft.com/office/drawing/2014/main" id="{E7A34E36-93E6-424A-A0BB-6DDDBB7C3DC1}"/>
               </a:ext>
             </a:extLst>
           </p:cNvPr>
@@ -40865,7 +41117,7 @@
           <p:cNvPr id="38" name="Gerader Verbinder 37">
             <a:extLst>
               <a:ext uri="{FF2B5EF4-FFF2-40B4-BE49-F238E27FC236}">
-                <a16:creationId xmlns:a16="http://schemas.microsoft.com/office/drawing/2014/main" xmlns="" id="{74A2F58A-3313-42D7-95A5-0836F4CB8B93}"/>
+                <a16:creationId xmlns:a16="http://schemas.microsoft.com/office/drawing/2014/main" id="{74A2F58A-3313-42D7-95A5-0836F4CB8B93}"/>
               </a:ext>
             </a:extLst>
           </p:cNvPr>
@@ -40906,7 +41158,7 @@
           <p:cNvPr id="40" name="Auf der gleichen Seite des Rechtecks liegende Ecken abrunden 43">
             <a:extLst>
               <a:ext uri="{FF2B5EF4-FFF2-40B4-BE49-F238E27FC236}">
-                <a16:creationId xmlns:a16="http://schemas.microsoft.com/office/drawing/2014/main" xmlns="" id="{F00EA89C-4B52-49FD-BEE1-F662D395E9A2}"/>
+                <a16:creationId xmlns:a16="http://schemas.microsoft.com/office/drawing/2014/main" id="{F00EA89C-4B52-49FD-BEE1-F662D395E9A2}"/>
               </a:ext>
             </a:extLst>
           </p:cNvPr>
@@ -40965,7 +41217,7 @@
           <p:cNvPr id="42" name="Textfeld 41">
             <a:extLst>
               <a:ext uri="{FF2B5EF4-FFF2-40B4-BE49-F238E27FC236}">
-                <a16:creationId xmlns:a16="http://schemas.microsoft.com/office/drawing/2014/main" xmlns="" id="{A7DBF8F9-048E-428D-A508-09C0662128CF}"/>
+                <a16:creationId xmlns:a16="http://schemas.microsoft.com/office/drawing/2014/main" id="{A7DBF8F9-048E-428D-A508-09C0662128CF}"/>
               </a:ext>
             </a:extLst>
           </p:cNvPr>
@@ -41000,7 +41252,7 @@
           <p:cNvPr id="43" name="Auf der gleichen Seite des Rechtecks liegende Ecken abrunden 45">
             <a:extLst>
               <a:ext uri="{FF2B5EF4-FFF2-40B4-BE49-F238E27FC236}">
-                <a16:creationId xmlns:a16="http://schemas.microsoft.com/office/drawing/2014/main" xmlns="" id="{9261DA4D-802C-4674-B2D9-54D838044A1D}"/>
+                <a16:creationId xmlns:a16="http://schemas.microsoft.com/office/drawing/2014/main" id="{9261DA4D-802C-4674-B2D9-54D838044A1D}"/>
               </a:ext>
             </a:extLst>
           </p:cNvPr>
@@ -41063,7 +41315,7 @@
           <p:cNvPr id="44" name="Rechteck 43">
             <a:extLst>
               <a:ext uri="{FF2B5EF4-FFF2-40B4-BE49-F238E27FC236}">
-                <a16:creationId xmlns:a16="http://schemas.microsoft.com/office/drawing/2014/main" xmlns="" id="{76169F4B-D18E-4142-B9EE-811D384B139E}"/>
+                <a16:creationId xmlns:a16="http://schemas.microsoft.com/office/drawing/2014/main" id="{76169F4B-D18E-4142-B9EE-811D384B139E}"/>
               </a:ext>
             </a:extLst>
           </p:cNvPr>
@@ -41126,7 +41378,7 @@
           <p:cNvPr id="45" name="Textfeld 44">
             <a:extLst>
               <a:ext uri="{FF2B5EF4-FFF2-40B4-BE49-F238E27FC236}">
-                <a16:creationId xmlns:a16="http://schemas.microsoft.com/office/drawing/2014/main" xmlns="" id="{F6762C90-ABC0-44E1-897E-0CE6901BCB76}"/>
+                <a16:creationId xmlns:a16="http://schemas.microsoft.com/office/drawing/2014/main" id="{F6762C90-ABC0-44E1-897E-0CE6901BCB76}"/>
               </a:ext>
             </a:extLst>
           </p:cNvPr>
@@ -41161,7 +41413,7 @@
           <p:cNvPr id="46" name="Rechteck 45">
             <a:extLst>
               <a:ext uri="{FF2B5EF4-FFF2-40B4-BE49-F238E27FC236}">
-                <a16:creationId xmlns:a16="http://schemas.microsoft.com/office/drawing/2014/main" xmlns="" id="{5FD2065E-8242-4E64-9164-A8A1E996EF23}"/>
+                <a16:creationId xmlns:a16="http://schemas.microsoft.com/office/drawing/2014/main" id="{5FD2065E-8242-4E64-9164-A8A1E996EF23}"/>
               </a:ext>
             </a:extLst>
           </p:cNvPr>
@@ -41224,7 +41476,7 @@
           <p:cNvPr id="47" name="Auf der gleichen Seite des Rechtecks liegende Ecken abrunden 49">
             <a:extLst>
               <a:ext uri="{FF2B5EF4-FFF2-40B4-BE49-F238E27FC236}">
-                <a16:creationId xmlns:a16="http://schemas.microsoft.com/office/drawing/2014/main" xmlns="" id="{07305AE5-C1A2-4A7F-A611-D127647B8C88}"/>
+                <a16:creationId xmlns:a16="http://schemas.microsoft.com/office/drawing/2014/main" id="{07305AE5-C1A2-4A7F-A611-D127647B8C88}"/>
               </a:ext>
             </a:extLst>
           </p:cNvPr>
@@ -41281,7 +41533,7 @@
           <p:cNvPr id="48" name="Rechteck 47">
             <a:extLst>
               <a:ext uri="{FF2B5EF4-FFF2-40B4-BE49-F238E27FC236}">
-                <a16:creationId xmlns:a16="http://schemas.microsoft.com/office/drawing/2014/main" xmlns="" id="{E4EC608B-9A37-434F-BFAA-0D7CB48465A4}"/>
+                <a16:creationId xmlns:a16="http://schemas.microsoft.com/office/drawing/2014/main" id="{E4EC608B-9A37-434F-BFAA-0D7CB48465A4}"/>
               </a:ext>
             </a:extLst>
           </p:cNvPr>
@@ -41344,7 +41596,7 @@
           <p:cNvPr id="49" name="Textfeld 48">
             <a:extLst>
               <a:ext uri="{FF2B5EF4-FFF2-40B4-BE49-F238E27FC236}">
-                <a16:creationId xmlns:a16="http://schemas.microsoft.com/office/drawing/2014/main" xmlns="" id="{DE9BF053-1801-4EC1-AD2D-DE1B0838C76D}"/>
+                <a16:creationId xmlns:a16="http://schemas.microsoft.com/office/drawing/2014/main" id="{DE9BF053-1801-4EC1-AD2D-DE1B0838C76D}"/>
               </a:ext>
             </a:extLst>
           </p:cNvPr>
@@ -41379,7 +41631,7 @@
           <p:cNvPr id="50" name="Abgerundetes Rechteck 52">
             <a:extLst>
               <a:ext uri="{FF2B5EF4-FFF2-40B4-BE49-F238E27FC236}">
-                <a16:creationId xmlns:a16="http://schemas.microsoft.com/office/drawing/2014/main" xmlns="" id="{E39B91B2-8845-4A37-B64A-9CEF99E5155B}"/>
+                <a16:creationId xmlns:a16="http://schemas.microsoft.com/office/drawing/2014/main" id="{E39B91B2-8845-4A37-B64A-9CEF99E5155B}"/>
               </a:ext>
             </a:extLst>
           </p:cNvPr>
@@ -41435,7 +41687,7 @@
           <p:cNvPr id="51" name="Gerader Verbinder 50">
             <a:extLst>
               <a:ext uri="{FF2B5EF4-FFF2-40B4-BE49-F238E27FC236}">
-                <a16:creationId xmlns:a16="http://schemas.microsoft.com/office/drawing/2014/main" xmlns="" id="{C535C0FE-ABB9-4651-8AB8-D0B1D556AF2D}"/>
+                <a16:creationId xmlns:a16="http://schemas.microsoft.com/office/drawing/2014/main" id="{C535C0FE-ABB9-4651-8AB8-D0B1D556AF2D}"/>
               </a:ext>
             </a:extLst>
           </p:cNvPr>
@@ -41476,7 +41728,7 @@
           <p:cNvPr id="52" name="Auf der gleichen Seite des Rechtecks liegende Ecken abrunden 54">
             <a:extLst>
               <a:ext uri="{FF2B5EF4-FFF2-40B4-BE49-F238E27FC236}">
-                <a16:creationId xmlns:a16="http://schemas.microsoft.com/office/drawing/2014/main" xmlns="" id="{6DEE8115-ADCB-4C6F-BFAB-9C5940C41008}"/>
+                <a16:creationId xmlns:a16="http://schemas.microsoft.com/office/drawing/2014/main" id="{6DEE8115-ADCB-4C6F-BFAB-9C5940C41008}"/>
               </a:ext>
             </a:extLst>
           </p:cNvPr>
@@ -41535,7 +41787,7 @@
           <p:cNvPr id="53" name="Textfeld 52">
             <a:extLst>
               <a:ext uri="{FF2B5EF4-FFF2-40B4-BE49-F238E27FC236}">
-                <a16:creationId xmlns:a16="http://schemas.microsoft.com/office/drawing/2014/main" xmlns="" id="{1E95AA30-70DC-4BFB-8DD9-FAEB61D126D9}"/>
+                <a16:creationId xmlns:a16="http://schemas.microsoft.com/office/drawing/2014/main" id="{1E95AA30-70DC-4BFB-8DD9-FAEB61D126D9}"/>
               </a:ext>
             </a:extLst>
           </p:cNvPr>
@@ -41570,7 +41822,7 @@
           <p:cNvPr id="54" name="Auf der gleichen Seite des Rechtecks liegende Ecken abrunden 56">
             <a:extLst>
               <a:ext uri="{FF2B5EF4-FFF2-40B4-BE49-F238E27FC236}">
-                <a16:creationId xmlns:a16="http://schemas.microsoft.com/office/drawing/2014/main" xmlns="" id="{5C5D59A2-A949-40D5-AA9D-9256600E84B0}"/>
+                <a16:creationId xmlns:a16="http://schemas.microsoft.com/office/drawing/2014/main" id="{5C5D59A2-A949-40D5-AA9D-9256600E84B0}"/>
               </a:ext>
             </a:extLst>
           </p:cNvPr>
@@ -41633,7 +41885,7 @@
           <p:cNvPr id="55" name="Rechteck 54">
             <a:extLst>
               <a:ext uri="{FF2B5EF4-FFF2-40B4-BE49-F238E27FC236}">
-                <a16:creationId xmlns:a16="http://schemas.microsoft.com/office/drawing/2014/main" xmlns="" id="{391E1E04-2060-4032-8AE1-165E276EDD3B}"/>
+                <a16:creationId xmlns:a16="http://schemas.microsoft.com/office/drawing/2014/main" id="{391E1E04-2060-4032-8AE1-165E276EDD3B}"/>
               </a:ext>
             </a:extLst>
           </p:cNvPr>
@@ -41696,7 +41948,7 @@
           <p:cNvPr id="56" name="Textfeld 55">
             <a:extLst>
               <a:ext uri="{FF2B5EF4-FFF2-40B4-BE49-F238E27FC236}">
-                <a16:creationId xmlns:a16="http://schemas.microsoft.com/office/drawing/2014/main" xmlns="" id="{6DF29E29-F7ED-4C20-AB2E-9141DC75BC10}"/>
+                <a16:creationId xmlns:a16="http://schemas.microsoft.com/office/drawing/2014/main" id="{6DF29E29-F7ED-4C20-AB2E-9141DC75BC10}"/>
               </a:ext>
             </a:extLst>
           </p:cNvPr>
@@ -41731,7 +41983,7 @@
           <p:cNvPr id="57" name="Rechteck 56">
             <a:extLst>
               <a:ext uri="{FF2B5EF4-FFF2-40B4-BE49-F238E27FC236}">
-                <a16:creationId xmlns:a16="http://schemas.microsoft.com/office/drawing/2014/main" xmlns="" id="{18C7B381-FD54-4604-9DEE-B2C0BEC8B309}"/>
+                <a16:creationId xmlns:a16="http://schemas.microsoft.com/office/drawing/2014/main" id="{18C7B381-FD54-4604-9DEE-B2C0BEC8B309}"/>
               </a:ext>
             </a:extLst>
           </p:cNvPr>
@@ -41794,7 +42046,7 @@
           <p:cNvPr id="58" name="Auf der gleichen Seite des Rechtecks liegende Ecken abrunden 60">
             <a:extLst>
               <a:ext uri="{FF2B5EF4-FFF2-40B4-BE49-F238E27FC236}">
-                <a16:creationId xmlns:a16="http://schemas.microsoft.com/office/drawing/2014/main" xmlns="" id="{484E2E8F-4A5E-46A7-BD22-A890C2F5FBC1}"/>
+                <a16:creationId xmlns:a16="http://schemas.microsoft.com/office/drawing/2014/main" id="{484E2E8F-4A5E-46A7-BD22-A890C2F5FBC1}"/>
               </a:ext>
             </a:extLst>
           </p:cNvPr>
@@ -41851,7 +42103,7 @@
           <p:cNvPr id="59" name="Rechteck 58">
             <a:extLst>
               <a:ext uri="{FF2B5EF4-FFF2-40B4-BE49-F238E27FC236}">
-                <a16:creationId xmlns:a16="http://schemas.microsoft.com/office/drawing/2014/main" xmlns="" id="{C355BCC7-D566-49E9-95AA-1D28587DEC09}"/>
+                <a16:creationId xmlns:a16="http://schemas.microsoft.com/office/drawing/2014/main" id="{C355BCC7-D566-49E9-95AA-1D28587DEC09}"/>
               </a:ext>
             </a:extLst>
           </p:cNvPr>
@@ -41914,7 +42166,7 @@
           <p:cNvPr id="60" name="Textfeld 59">
             <a:extLst>
               <a:ext uri="{FF2B5EF4-FFF2-40B4-BE49-F238E27FC236}">
-                <a16:creationId xmlns:a16="http://schemas.microsoft.com/office/drawing/2014/main" xmlns="" id="{5EEFAEBF-770C-4D5A-8ACB-D61EECB99672}"/>
+                <a16:creationId xmlns:a16="http://schemas.microsoft.com/office/drawing/2014/main" id="{5EEFAEBF-770C-4D5A-8ACB-D61EECB99672}"/>
               </a:ext>
             </a:extLst>
           </p:cNvPr>
@@ -41949,7 +42201,7 @@
           <p:cNvPr id="61" name="Abgerundetes Rechteck 1">
             <a:extLst>
               <a:ext uri="{FF2B5EF4-FFF2-40B4-BE49-F238E27FC236}">
-                <a16:creationId xmlns:a16="http://schemas.microsoft.com/office/drawing/2014/main" xmlns="" id="{E7F24E8D-AA3F-40D0-ADC6-1E60ECF9E37B}"/>
+                <a16:creationId xmlns:a16="http://schemas.microsoft.com/office/drawing/2014/main" id="{E7F24E8D-AA3F-40D0-ADC6-1E60ECF9E37B}"/>
               </a:ext>
             </a:extLst>
           </p:cNvPr>
@@ -42005,7 +42257,7 @@
           <p:cNvPr id="62" name="Textfeld 61">
             <a:extLst>
               <a:ext uri="{FF2B5EF4-FFF2-40B4-BE49-F238E27FC236}">
-                <a16:creationId xmlns:a16="http://schemas.microsoft.com/office/drawing/2014/main" xmlns="" id="{FC8A8787-F122-48CC-9042-1330D20E67D8}"/>
+                <a16:creationId xmlns:a16="http://schemas.microsoft.com/office/drawing/2014/main" id="{FC8A8787-F122-48CC-9042-1330D20E67D8}"/>
               </a:ext>
             </a:extLst>
           </p:cNvPr>
@@ -42040,7 +42292,7 @@
           <p:cNvPr id="63" name="Auf der gleichen Seite des Rechtecks liegende Ecken abrunden 68">
             <a:extLst>
               <a:ext uri="{FF2B5EF4-FFF2-40B4-BE49-F238E27FC236}">
-                <a16:creationId xmlns:a16="http://schemas.microsoft.com/office/drawing/2014/main" xmlns="" id="{6C0DD40C-0572-451C-9E5F-DEC56115E8DE}"/>
+                <a16:creationId xmlns:a16="http://schemas.microsoft.com/office/drawing/2014/main" id="{6C0DD40C-0572-451C-9E5F-DEC56115E8DE}"/>
               </a:ext>
             </a:extLst>
           </p:cNvPr>
@@ -42103,7 +42355,7 @@
           <p:cNvPr id="66" name="Rechteck 65">
             <a:extLst>
               <a:ext uri="{FF2B5EF4-FFF2-40B4-BE49-F238E27FC236}">
-                <a16:creationId xmlns:a16="http://schemas.microsoft.com/office/drawing/2014/main" xmlns="" id="{47E43D6D-BDDB-43B3-9D5E-B911B240F410}"/>
+                <a16:creationId xmlns:a16="http://schemas.microsoft.com/office/drawing/2014/main" id="{47E43D6D-BDDB-43B3-9D5E-B911B240F410}"/>
               </a:ext>
             </a:extLst>
           </p:cNvPr>
@@ -42166,7 +42418,7 @@
           <p:cNvPr id="69" name="Abgerundetes Rechteck 70">
             <a:extLst>
               <a:ext uri="{FF2B5EF4-FFF2-40B4-BE49-F238E27FC236}">
-                <a16:creationId xmlns:a16="http://schemas.microsoft.com/office/drawing/2014/main" xmlns="" id="{4F96D87C-CCDC-4E11-99F9-97B7DCE631A2}"/>
+                <a16:creationId xmlns:a16="http://schemas.microsoft.com/office/drawing/2014/main" id="{4F96D87C-CCDC-4E11-99F9-97B7DCE631A2}"/>
               </a:ext>
             </a:extLst>
           </p:cNvPr>
@@ -42222,7 +42474,7 @@
           <p:cNvPr id="70" name="Auf der gleichen Seite des Rechtecks liegende Ecken abrunden 72">
             <a:extLst>
               <a:ext uri="{FF2B5EF4-FFF2-40B4-BE49-F238E27FC236}">
-                <a16:creationId xmlns:a16="http://schemas.microsoft.com/office/drawing/2014/main" xmlns="" id="{A59415B5-4ED7-4C7E-9DBF-CFEE0405FFD3}"/>
+                <a16:creationId xmlns:a16="http://schemas.microsoft.com/office/drawing/2014/main" id="{A59415B5-4ED7-4C7E-9DBF-CFEE0405FFD3}"/>
               </a:ext>
             </a:extLst>
           </p:cNvPr>
@@ -42285,7 +42537,7 @@
           <p:cNvPr id="71" name="Rechteck 70">
             <a:extLst>
               <a:ext uri="{FF2B5EF4-FFF2-40B4-BE49-F238E27FC236}">
-                <a16:creationId xmlns:a16="http://schemas.microsoft.com/office/drawing/2014/main" xmlns="" id="{29253880-FFD9-4CDF-A9B0-59D871F5B0D5}"/>
+                <a16:creationId xmlns:a16="http://schemas.microsoft.com/office/drawing/2014/main" id="{29253880-FFD9-4CDF-A9B0-59D871F5B0D5}"/>
               </a:ext>
             </a:extLst>
           </p:cNvPr>
@@ -42348,7 +42600,7 @@
           <p:cNvPr id="73" name="Abgerundetes Rechteck 74">
             <a:extLst>
               <a:ext uri="{FF2B5EF4-FFF2-40B4-BE49-F238E27FC236}">
-                <a16:creationId xmlns:a16="http://schemas.microsoft.com/office/drawing/2014/main" xmlns="" id="{3F4672F2-8445-4F23-9662-61EB518508E3}"/>
+                <a16:creationId xmlns:a16="http://schemas.microsoft.com/office/drawing/2014/main" id="{3F4672F2-8445-4F23-9662-61EB518508E3}"/>
               </a:ext>
             </a:extLst>
           </p:cNvPr>
@@ -42404,7 +42656,7 @@
           <p:cNvPr id="74" name="Auf der gleichen Seite des Rechtecks liegende Ecken abrunden 76">
             <a:extLst>
               <a:ext uri="{FF2B5EF4-FFF2-40B4-BE49-F238E27FC236}">
-                <a16:creationId xmlns:a16="http://schemas.microsoft.com/office/drawing/2014/main" xmlns="" id="{F569F422-4222-45A6-AE14-B694B4C979B8}"/>
+                <a16:creationId xmlns:a16="http://schemas.microsoft.com/office/drawing/2014/main" id="{F569F422-4222-45A6-AE14-B694B4C979B8}"/>
               </a:ext>
             </a:extLst>
           </p:cNvPr>
@@ -42467,7 +42719,7 @@
           <p:cNvPr id="75" name="Rechteck 74">
             <a:extLst>
               <a:ext uri="{FF2B5EF4-FFF2-40B4-BE49-F238E27FC236}">
-                <a16:creationId xmlns:a16="http://schemas.microsoft.com/office/drawing/2014/main" xmlns="" id="{19DF06F7-8371-4B23-BC57-C7401E801048}"/>
+                <a16:creationId xmlns:a16="http://schemas.microsoft.com/office/drawing/2014/main" id="{19DF06F7-8371-4B23-BC57-C7401E801048}"/>
               </a:ext>
             </a:extLst>
           </p:cNvPr>
@@ -42530,7 +42782,7 @@
           <p:cNvPr id="77" name="Textfeld 76">
             <a:extLst>
               <a:ext uri="{FF2B5EF4-FFF2-40B4-BE49-F238E27FC236}">
-                <a16:creationId xmlns:a16="http://schemas.microsoft.com/office/drawing/2014/main" xmlns="" id="{979163B5-6DC0-4013-A627-D22B6E8DC828}"/>
+                <a16:creationId xmlns:a16="http://schemas.microsoft.com/office/drawing/2014/main" id="{979163B5-6DC0-4013-A627-D22B6E8DC828}"/>
               </a:ext>
             </a:extLst>
           </p:cNvPr>
@@ -42565,7 +42817,7 @@
           <p:cNvPr id="78" name="Textfeld 77">
             <a:extLst>
               <a:ext uri="{FF2B5EF4-FFF2-40B4-BE49-F238E27FC236}">
-                <a16:creationId xmlns:a16="http://schemas.microsoft.com/office/drawing/2014/main" xmlns="" id="{7D8985F7-0CD4-4465-A197-C00776DF409C}"/>
+                <a16:creationId xmlns:a16="http://schemas.microsoft.com/office/drawing/2014/main" id="{7D8985F7-0CD4-4465-A197-C00776DF409C}"/>
               </a:ext>
             </a:extLst>
           </p:cNvPr>
@@ -42600,7 +42852,7 @@
           <p:cNvPr id="2" name="Rechteck 1">
             <a:extLst>
               <a:ext uri="{FF2B5EF4-FFF2-40B4-BE49-F238E27FC236}">
-                <a16:creationId xmlns:a16="http://schemas.microsoft.com/office/drawing/2014/main" xmlns="" id="{789D4BB0-1841-441A-997B-7C401B8BCCDF}"/>
+                <a16:creationId xmlns:a16="http://schemas.microsoft.com/office/drawing/2014/main" id="{789D4BB0-1841-441A-997B-7C401B8BCCDF}"/>
               </a:ext>
             </a:extLst>
           </p:cNvPr>
@@ -42654,7 +42906,7 @@
           <p:cNvPr id="4" name="Rechteck 3">
             <a:extLst>
               <a:ext uri="{FF2B5EF4-FFF2-40B4-BE49-F238E27FC236}">
-                <a16:creationId xmlns:a16="http://schemas.microsoft.com/office/drawing/2014/main" xmlns="" id="{5A9DEE85-B450-4F58-B1E4-288CFAD40E8F}"/>
+                <a16:creationId xmlns:a16="http://schemas.microsoft.com/office/drawing/2014/main" id="{5A9DEE85-B450-4F58-B1E4-288CFAD40E8F}"/>
               </a:ext>
             </a:extLst>
           </p:cNvPr>
@@ -42708,7 +42960,7 @@
           <p:cNvPr id="5" name="Textfeld 4">
             <a:extLst>
               <a:ext uri="{FF2B5EF4-FFF2-40B4-BE49-F238E27FC236}">
-                <a16:creationId xmlns:a16="http://schemas.microsoft.com/office/drawing/2014/main" xmlns="" id="{188D7BE6-4ADB-4E45-8116-007446A5DA25}"/>
+                <a16:creationId xmlns:a16="http://schemas.microsoft.com/office/drawing/2014/main" id="{188D7BE6-4ADB-4E45-8116-007446A5DA25}"/>
               </a:ext>
             </a:extLst>
           </p:cNvPr>
@@ -42743,7 +42995,7 @@
           <p:cNvPr id="6" name="Rechteck 5">
             <a:extLst>
               <a:ext uri="{FF2B5EF4-FFF2-40B4-BE49-F238E27FC236}">
-                <a16:creationId xmlns:a16="http://schemas.microsoft.com/office/drawing/2014/main" xmlns="" id="{1FE21EBA-28AA-42B3-8C09-9B931B5BEB70}"/>
+                <a16:creationId xmlns:a16="http://schemas.microsoft.com/office/drawing/2014/main" id="{1FE21EBA-28AA-42B3-8C09-9B931B5BEB70}"/>
               </a:ext>
             </a:extLst>
           </p:cNvPr>
@@ -42797,7 +43049,7 @@
           <p:cNvPr id="7" name="Rechteck 6">
             <a:extLst>
               <a:ext uri="{FF2B5EF4-FFF2-40B4-BE49-F238E27FC236}">
-                <a16:creationId xmlns:a16="http://schemas.microsoft.com/office/drawing/2014/main" xmlns="" id="{198504FF-B49F-40CF-8B78-4EABC12894EB}"/>
+                <a16:creationId xmlns:a16="http://schemas.microsoft.com/office/drawing/2014/main" id="{198504FF-B49F-40CF-8B78-4EABC12894EB}"/>
               </a:ext>
             </a:extLst>
           </p:cNvPr>
@@ -42853,7 +43105,7 @@
           <p:cNvPr id="8" name="Textfeld 7">
             <a:extLst>
               <a:ext uri="{FF2B5EF4-FFF2-40B4-BE49-F238E27FC236}">
-                <a16:creationId xmlns:a16="http://schemas.microsoft.com/office/drawing/2014/main" xmlns="" id="{BBBD69C0-C370-432B-964D-A3EB28505C6A}"/>
+                <a16:creationId xmlns:a16="http://schemas.microsoft.com/office/drawing/2014/main" id="{BBBD69C0-C370-432B-964D-A3EB28505C6A}"/>
               </a:ext>
             </a:extLst>
           </p:cNvPr>
@@ -42888,7 +43140,7 @@
           <p:cNvPr id="9" name="Rechteck 8">
             <a:extLst>
               <a:ext uri="{FF2B5EF4-FFF2-40B4-BE49-F238E27FC236}">
-                <a16:creationId xmlns:a16="http://schemas.microsoft.com/office/drawing/2014/main" xmlns="" id="{3E6AF859-3F91-4FCF-8E24-466E5D3CD574}"/>
+                <a16:creationId xmlns:a16="http://schemas.microsoft.com/office/drawing/2014/main" id="{3E6AF859-3F91-4FCF-8E24-466E5D3CD574}"/>
               </a:ext>
             </a:extLst>
           </p:cNvPr>
@@ -42942,7 +43194,7 @@
           <p:cNvPr id="10" name="Rechteck 9">
             <a:extLst>
               <a:ext uri="{FF2B5EF4-FFF2-40B4-BE49-F238E27FC236}">
-                <a16:creationId xmlns:a16="http://schemas.microsoft.com/office/drawing/2014/main" xmlns="" id="{DA0CC132-0DE3-496A-9F29-83905C77123F}"/>
+                <a16:creationId xmlns:a16="http://schemas.microsoft.com/office/drawing/2014/main" id="{DA0CC132-0DE3-496A-9F29-83905C77123F}"/>
               </a:ext>
             </a:extLst>
           </p:cNvPr>
@@ -42996,7 +43248,7 @@
           <p:cNvPr id="11" name="Textfeld 10">
             <a:extLst>
               <a:ext uri="{FF2B5EF4-FFF2-40B4-BE49-F238E27FC236}">
-                <a16:creationId xmlns:a16="http://schemas.microsoft.com/office/drawing/2014/main" xmlns="" id="{691D1973-7F94-4C7D-AC73-27E85F3F47F8}"/>
+                <a16:creationId xmlns:a16="http://schemas.microsoft.com/office/drawing/2014/main" id="{691D1973-7F94-4C7D-AC73-27E85F3F47F8}"/>
               </a:ext>
             </a:extLst>
           </p:cNvPr>
@@ -43031,7 +43283,7 @@
           <p:cNvPr id="12" name="Textfeld 11">
             <a:extLst>
               <a:ext uri="{FF2B5EF4-FFF2-40B4-BE49-F238E27FC236}">
-                <a16:creationId xmlns:a16="http://schemas.microsoft.com/office/drawing/2014/main" xmlns="" id="{B8757B61-0E5E-431F-8FDB-8348883B620C}"/>
+                <a16:creationId xmlns:a16="http://schemas.microsoft.com/office/drawing/2014/main" id="{B8757B61-0E5E-431F-8FDB-8348883B620C}"/>
               </a:ext>
             </a:extLst>
           </p:cNvPr>
@@ -43066,7 +43318,7 @@
           <p:cNvPr id="13" name="Rechteck 12">
             <a:extLst>
               <a:ext uri="{FF2B5EF4-FFF2-40B4-BE49-F238E27FC236}">
-                <a16:creationId xmlns:a16="http://schemas.microsoft.com/office/drawing/2014/main" xmlns="" id="{F756D5EC-7855-4DB5-A464-FAC4F172B0FE}"/>
+                <a16:creationId xmlns:a16="http://schemas.microsoft.com/office/drawing/2014/main" id="{F756D5EC-7855-4DB5-A464-FAC4F172B0FE}"/>
               </a:ext>
             </a:extLst>
           </p:cNvPr>
@@ -43120,7 +43372,7 @@
           <p:cNvPr id="14" name="Textfeld 13">
             <a:extLst>
               <a:ext uri="{FF2B5EF4-FFF2-40B4-BE49-F238E27FC236}">
-                <a16:creationId xmlns:a16="http://schemas.microsoft.com/office/drawing/2014/main" xmlns="" id="{C015364A-4ED7-42F3-874B-FF07FAC29725}"/>
+                <a16:creationId xmlns:a16="http://schemas.microsoft.com/office/drawing/2014/main" id="{C015364A-4ED7-42F3-874B-FF07FAC29725}"/>
               </a:ext>
             </a:extLst>
           </p:cNvPr>
@@ -43155,7 +43407,7 @@
           <p:cNvPr id="15" name="Rechteck 14">
             <a:extLst>
               <a:ext uri="{FF2B5EF4-FFF2-40B4-BE49-F238E27FC236}">
-                <a16:creationId xmlns:a16="http://schemas.microsoft.com/office/drawing/2014/main" xmlns="" id="{E5B309CE-54CD-4934-BBC9-3C801902A483}"/>
+                <a16:creationId xmlns:a16="http://schemas.microsoft.com/office/drawing/2014/main" id="{E5B309CE-54CD-4934-BBC9-3C801902A483}"/>
               </a:ext>
             </a:extLst>
           </p:cNvPr>
@@ -43209,7 +43461,7 @@
           <p:cNvPr id="16" name="Rechteck 15">
             <a:extLst>
               <a:ext uri="{FF2B5EF4-FFF2-40B4-BE49-F238E27FC236}">
-                <a16:creationId xmlns:a16="http://schemas.microsoft.com/office/drawing/2014/main" xmlns="" id="{17823885-430E-46DC-8654-49DC2DC0CCFA}"/>
+                <a16:creationId xmlns:a16="http://schemas.microsoft.com/office/drawing/2014/main" id="{17823885-430E-46DC-8654-49DC2DC0CCFA}"/>
               </a:ext>
             </a:extLst>
           </p:cNvPr>
@@ -43263,7 +43515,7 @@
           <p:cNvPr id="17" name="Rechteck 16">
             <a:extLst>
               <a:ext uri="{FF2B5EF4-FFF2-40B4-BE49-F238E27FC236}">
-                <a16:creationId xmlns:a16="http://schemas.microsoft.com/office/drawing/2014/main" xmlns="" id="{1F6094E2-313D-4537-9519-68E676526E2D}"/>
+                <a16:creationId xmlns:a16="http://schemas.microsoft.com/office/drawing/2014/main" id="{1F6094E2-313D-4537-9519-68E676526E2D}"/>
               </a:ext>
             </a:extLst>
           </p:cNvPr>
@@ -43317,7 +43569,7 @@
           <p:cNvPr id="18" name="Rechteck 17">
             <a:extLst>
               <a:ext uri="{FF2B5EF4-FFF2-40B4-BE49-F238E27FC236}">
-                <a16:creationId xmlns:a16="http://schemas.microsoft.com/office/drawing/2014/main" xmlns="" id="{1E0899CE-35D9-4373-A27B-63BD792A0C7E}"/>
+                <a16:creationId xmlns:a16="http://schemas.microsoft.com/office/drawing/2014/main" id="{1E0899CE-35D9-4373-A27B-63BD792A0C7E}"/>
               </a:ext>
             </a:extLst>
           </p:cNvPr>
@@ -43373,7 +43625,7 @@
           <p:cNvPr id="19" name="Textfeld 18">
             <a:extLst>
               <a:ext uri="{FF2B5EF4-FFF2-40B4-BE49-F238E27FC236}">
-                <a16:creationId xmlns:a16="http://schemas.microsoft.com/office/drawing/2014/main" xmlns="" id="{835A0D86-C064-49F1-B106-3C5712FD1981}"/>
+                <a16:creationId xmlns:a16="http://schemas.microsoft.com/office/drawing/2014/main" id="{835A0D86-C064-49F1-B106-3C5712FD1981}"/>
               </a:ext>
             </a:extLst>
           </p:cNvPr>
@@ -43408,7 +43660,7 @@
           <p:cNvPr id="20" name="Textfeld 19">
             <a:extLst>
               <a:ext uri="{FF2B5EF4-FFF2-40B4-BE49-F238E27FC236}">
-                <a16:creationId xmlns:a16="http://schemas.microsoft.com/office/drawing/2014/main" xmlns="" id="{ACB1B8CE-4BC7-4CC9-B4D4-343365846CAC}"/>
+                <a16:creationId xmlns:a16="http://schemas.microsoft.com/office/drawing/2014/main" id="{ACB1B8CE-4BC7-4CC9-B4D4-343365846CAC}"/>
               </a:ext>
             </a:extLst>
           </p:cNvPr>
@@ -43443,7 +43695,7 @@
           <p:cNvPr id="21" name="Textfeld 20">
             <a:extLst>
               <a:ext uri="{FF2B5EF4-FFF2-40B4-BE49-F238E27FC236}">
-                <a16:creationId xmlns:a16="http://schemas.microsoft.com/office/drawing/2014/main" xmlns="" id="{CC9F90D0-FF8F-4098-92A7-FD1F9C2BB88C}"/>
+                <a16:creationId xmlns:a16="http://schemas.microsoft.com/office/drawing/2014/main" id="{CC9F90D0-FF8F-4098-92A7-FD1F9C2BB88C}"/>
               </a:ext>
             </a:extLst>
           </p:cNvPr>
@@ -43478,7 +43730,7 @@
           <p:cNvPr id="22" name="Rechteck 21">
             <a:extLst>
               <a:ext uri="{FF2B5EF4-FFF2-40B4-BE49-F238E27FC236}">
-                <a16:creationId xmlns:a16="http://schemas.microsoft.com/office/drawing/2014/main" xmlns="" id="{5413F820-0C89-45AD-B854-9EDA7E2EEA07}"/>
+                <a16:creationId xmlns:a16="http://schemas.microsoft.com/office/drawing/2014/main" id="{5413F820-0C89-45AD-B854-9EDA7E2EEA07}"/>
               </a:ext>
             </a:extLst>
           </p:cNvPr>
@@ -43532,7 +43784,7 @@
           <p:cNvPr id="23" name="Textfeld 22">
             <a:extLst>
               <a:ext uri="{FF2B5EF4-FFF2-40B4-BE49-F238E27FC236}">
-                <a16:creationId xmlns:a16="http://schemas.microsoft.com/office/drawing/2014/main" xmlns="" id="{894E6227-6F36-4A9A-84C8-49D2FDA48B84}"/>
+                <a16:creationId xmlns:a16="http://schemas.microsoft.com/office/drawing/2014/main" id="{894E6227-6F36-4A9A-84C8-49D2FDA48B84}"/>
               </a:ext>
             </a:extLst>
           </p:cNvPr>
@@ -43567,7 +43819,7 @@
           <p:cNvPr id="24" name="Rechteck 23">
             <a:extLst>
               <a:ext uri="{FF2B5EF4-FFF2-40B4-BE49-F238E27FC236}">
-                <a16:creationId xmlns:a16="http://schemas.microsoft.com/office/drawing/2014/main" xmlns="" id="{A2B6F4AC-FF10-4C37-ACAB-050A459996B6}"/>
+                <a16:creationId xmlns:a16="http://schemas.microsoft.com/office/drawing/2014/main" id="{A2B6F4AC-FF10-4C37-ACAB-050A459996B6}"/>
               </a:ext>
             </a:extLst>
           </p:cNvPr>
@@ -43630,7 +43882,7 @@
           <p:cNvPr id="25" name="Rechteck 24">
             <a:extLst>
               <a:ext uri="{FF2B5EF4-FFF2-40B4-BE49-F238E27FC236}">
-                <a16:creationId xmlns:a16="http://schemas.microsoft.com/office/drawing/2014/main" xmlns="" id="{E493A8AB-29BB-40D4-86CE-982993B67A9A}"/>
+                <a16:creationId xmlns:a16="http://schemas.microsoft.com/office/drawing/2014/main" id="{E493A8AB-29BB-40D4-86CE-982993B67A9A}"/>
               </a:ext>
             </a:extLst>
           </p:cNvPr>
@@ -43693,7 +43945,7 @@
           <p:cNvPr id="26" name="Rechteck 25">
             <a:extLst>
               <a:ext uri="{FF2B5EF4-FFF2-40B4-BE49-F238E27FC236}">
-                <a16:creationId xmlns:a16="http://schemas.microsoft.com/office/drawing/2014/main" xmlns="" id="{8F98E980-7A81-43E7-B86F-B34750A903CE}"/>
+                <a16:creationId xmlns:a16="http://schemas.microsoft.com/office/drawing/2014/main" id="{8F98E980-7A81-43E7-B86F-B34750A903CE}"/>
               </a:ext>
             </a:extLst>
           </p:cNvPr>
@@ -43756,7 +44008,7 @@
           <p:cNvPr id="27" name="Rechteck 26">
             <a:extLst>
               <a:ext uri="{FF2B5EF4-FFF2-40B4-BE49-F238E27FC236}">
-                <a16:creationId xmlns:a16="http://schemas.microsoft.com/office/drawing/2014/main" xmlns="" id="{9237488E-D8CA-4901-893F-F5CBC81D9E05}"/>
+                <a16:creationId xmlns:a16="http://schemas.microsoft.com/office/drawing/2014/main" id="{9237488E-D8CA-4901-893F-F5CBC81D9E05}"/>
               </a:ext>
             </a:extLst>
           </p:cNvPr>
@@ -43819,7 +44071,7 @@
           <p:cNvPr id="28" name="Rechteck 27">
             <a:extLst>
               <a:ext uri="{FF2B5EF4-FFF2-40B4-BE49-F238E27FC236}">
-                <a16:creationId xmlns:a16="http://schemas.microsoft.com/office/drawing/2014/main" xmlns="" id="{560609F4-344A-4471-BF9F-1635C4CD6F19}"/>
+                <a16:creationId xmlns:a16="http://schemas.microsoft.com/office/drawing/2014/main" id="{560609F4-344A-4471-BF9F-1635C4CD6F19}"/>
               </a:ext>
             </a:extLst>
           </p:cNvPr>
@@ -43882,7 +44134,7 @@
           <p:cNvPr id="29" name="Rechteck 28">
             <a:extLst>
               <a:ext uri="{FF2B5EF4-FFF2-40B4-BE49-F238E27FC236}">
-                <a16:creationId xmlns:a16="http://schemas.microsoft.com/office/drawing/2014/main" xmlns="" id="{F4E8C2A9-FFE2-48F0-8134-035A63CFC6C2}"/>
+                <a16:creationId xmlns:a16="http://schemas.microsoft.com/office/drawing/2014/main" id="{F4E8C2A9-FFE2-48F0-8134-035A63CFC6C2}"/>
               </a:ext>
             </a:extLst>
           </p:cNvPr>
@@ -43945,7 +44197,7 @@
           <p:cNvPr id="30" name="Rechteck 29">
             <a:extLst>
               <a:ext uri="{FF2B5EF4-FFF2-40B4-BE49-F238E27FC236}">
-                <a16:creationId xmlns:a16="http://schemas.microsoft.com/office/drawing/2014/main" xmlns="" id="{B4FD7538-B21F-4B09-B0DE-C3F2E854EEE9}"/>
+                <a16:creationId xmlns:a16="http://schemas.microsoft.com/office/drawing/2014/main" id="{B4FD7538-B21F-4B09-B0DE-C3F2E854EEE9}"/>
               </a:ext>
             </a:extLst>
           </p:cNvPr>
@@ -44008,7 +44260,7 @@
           <p:cNvPr id="31" name="Rechteck 30">
             <a:extLst>
               <a:ext uri="{FF2B5EF4-FFF2-40B4-BE49-F238E27FC236}">
-                <a16:creationId xmlns:a16="http://schemas.microsoft.com/office/drawing/2014/main" xmlns="" id="{E42C97CA-F519-4D22-BEC6-9B43C0C2DFE4}"/>
+                <a16:creationId xmlns:a16="http://schemas.microsoft.com/office/drawing/2014/main" id="{E42C97CA-F519-4D22-BEC6-9B43C0C2DFE4}"/>
               </a:ext>
             </a:extLst>
           </p:cNvPr>
@@ -44071,7 +44323,7 @@
           <p:cNvPr id="32" name="Rechteck 31">
             <a:extLst>
               <a:ext uri="{FF2B5EF4-FFF2-40B4-BE49-F238E27FC236}">
-                <a16:creationId xmlns:a16="http://schemas.microsoft.com/office/drawing/2014/main" xmlns="" id="{DF02B700-D27E-45AF-916E-BFC806BF15EA}"/>
+                <a16:creationId xmlns:a16="http://schemas.microsoft.com/office/drawing/2014/main" id="{DF02B700-D27E-45AF-916E-BFC806BF15EA}"/>
               </a:ext>
             </a:extLst>
           </p:cNvPr>
@@ -44164,7 +44416,7 @@
           <p:cNvPr id="38" name="Rechteck 37">
             <a:extLst>
               <a:ext uri="{FF2B5EF4-FFF2-40B4-BE49-F238E27FC236}">
-                <a16:creationId xmlns:a16="http://schemas.microsoft.com/office/drawing/2014/main" xmlns="" id="{5E7DB929-572D-4E95-82E8-B6DD989776DD}"/>
+                <a16:creationId xmlns:a16="http://schemas.microsoft.com/office/drawing/2014/main" id="{5E7DB929-572D-4E95-82E8-B6DD989776DD}"/>
               </a:ext>
             </a:extLst>
           </p:cNvPr>
@@ -44356,7 +44608,7 @@
           <p:cNvPr id="45" name="Textfeld 44">
             <a:extLst>
               <a:ext uri="{FF2B5EF4-FFF2-40B4-BE49-F238E27FC236}">
-                <a16:creationId xmlns:a16="http://schemas.microsoft.com/office/drawing/2014/main" xmlns="" id="{672F2C52-F706-4C2C-9BA1-C4050D78BE85}"/>
+                <a16:creationId xmlns:a16="http://schemas.microsoft.com/office/drawing/2014/main" id="{672F2C52-F706-4C2C-9BA1-C4050D78BE85}"/>
               </a:ext>
             </a:extLst>
           </p:cNvPr>
@@ -44448,7 +44700,7 @@
           <p:cNvPr id="47" name="Rechteck 46">
             <a:extLst>
               <a:ext uri="{FF2B5EF4-FFF2-40B4-BE49-F238E27FC236}">
-                <a16:creationId xmlns:a16="http://schemas.microsoft.com/office/drawing/2014/main" xmlns="" id="{32A3E22E-D260-4C45-BA90-93973AE9B3A5}"/>
+                <a16:creationId xmlns:a16="http://schemas.microsoft.com/office/drawing/2014/main" id="{32A3E22E-D260-4C45-BA90-93973AE9B3A5}"/>
               </a:ext>
             </a:extLst>
           </p:cNvPr>
@@ -44511,7 +44763,7 @@
           <p:cNvPr id="48" name="Textfeld 47">
             <a:extLst>
               <a:ext uri="{FF2B5EF4-FFF2-40B4-BE49-F238E27FC236}">
-                <a16:creationId xmlns:a16="http://schemas.microsoft.com/office/drawing/2014/main" xmlns="" id="{672F2C52-F706-4C2C-9BA1-C4050D78BE85}"/>
+                <a16:creationId xmlns:a16="http://schemas.microsoft.com/office/drawing/2014/main" id="{672F2C52-F706-4C2C-9BA1-C4050D78BE85}"/>
               </a:ext>
             </a:extLst>
           </p:cNvPr>
@@ -44546,7 +44798,7 @@
           <p:cNvPr id="49" name="Rechteck 48">
             <a:extLst>
               <a:ext uri="{FF2B5EF4-FFF2-40B4-BE49-F238E27FC236}">
-                <a16:creationId xmlns:a16="http://schemas.microsoft.com/office/drawing/2014/main" xmlns="" id="{32A3E22E-D260-4C45-BA90-93973AE9B3A5}"/>
+                <a16:creationId xmlns:a16="http://schemas.microsoft.com/office/drawing/2014/main" id="{32A3E22E-D260-4C45-BA90-93973AE9B3A5}"/>
               </a:ext>
             </a:extLst>
           </p:cNvPr>
@@ -44660,7 +44912,7 @@
           <p:cNvPr id="51" name="Rechteck 50">
             <a:extLst>
               <a:ext uri="{FF2B5EF4-FFF2-40B4-BE49-F238E27FC236}">
-                <a16:creationId xmlns:a16="http://schemas.microsoft.com/office/drawing/2014/main" xmlns="" id="{32A3E22E-D260-4C45-BA90-93973AE9B3A5}"/>
+                <a16:creationId xmlns:a16="http://schemas.microsoft.com/office/drawing/2014/main" id="{32A3E22E-D260-4C45-BA90-93973AE9B3A5}"/>
               </a:ext>
             </a:extLst>
           </p:cNvPr>
@@ -44723,7 +44975,7 @@
           <p:cNvPr id="52" name="Textfeld 51">
             <a:extLst>
               <a:ext uri="{FF2B5EF4-FFF2-40B4-BE49-F238E27FC236}">
-                <a16:creationId xmlns:a16="http://schemas.microsoft.com/office/drawing/2014/main" xmlns="" id="{672F2C52-F706-4C2C-9BA1-C4050D78BE85}"/>
+                <a16:creationId xmlns:a16="http://schemas.microsoft.com/office/drawing/2014/main" id="{672F2C52-F706-4C2C-9BA1-C4050D78BE85}"/>
               </a:ext>
             </a:extLst>
           </p:cNvPr>
@@ -44861,7 +45113,7 @@
           <p:cNvPr id="56" name="Textfeld 55">
             <a:extLst>
               <a:ext uri="{FF2B5EF4-FFF2-40B4-BE49-F238E27FC236}">
-                <a16:creationId xmlns:a16="http://schemas.microsoft.com/office/drawing/2014/main" xmlns="" id="{672F2C52-F706-4C2C-9BA1-C4050D78BE85}"/>
+                <a16:creationId xmlns:a16="http://schemas.microsoft.com/office/drawing/2014/main" id="{672F2C52-F706-4C2C-9BA1-C4050D78BE85}"/>
               </a:ext>
             </a:extLst>
           </p:cNvPr>
@@ -44953,7 +45205,7 @@
           <p:cNvPr id="58" name="Rechteck 57">
             <a:extLst>
               <a:ext uri="{FF2B5EF4-FFF2-40B4-BE49-F238E27FC236}">
-                <a16:creationId xmlns:a16="http://schemas.microsoft.com/office/drawing/2014/main" xmlns="" id="{32A3E22E-D260-4C45-BA90-93973AE9B3A5}"/>
+                <a16:creationId xmlns:a16="http://schemas.microsoft.com/office/drawing/2014/main" id="{32A3E22E-D260-4C45-BA90-93973AE9B3A5}"/>
               </a:ext>
             </a:extLst>
           </p:cNvPr>
@@ -45016,7 +45268,7 @@
           <p:cNvPr id="59" name="Textfeld 58">
             <a:extLst>
               <a:ext uri="{FF2B5EF4-FFF2-40B4-BE49-F238E27FC236}">
-                <a16:creationId xmlns:a16="http://schemas.microsoft.com/office/drawing/2014/main" xmlns="" id="{672F2C52-F706-4C2C-9BA1-C4050D78BE85}"/>
+                <a16:creationId xmlns:a16="http://schemas.microsoft.com/office/drawing/2014/main" id="{672F2C52-F706-4C2C-9BA1-C4050D78BE85}"/>
               </a:ext>
             </a:extLst>
           </p:cNvPr>
@@ -45051,7 +45303,7 @@
           <p:cNvPr id="60" name="Rechteck 59">
             <a:extLst>
               <a:ext uri="{FF2B5EF4-FFF2-40B4-BE49-F238E27FC236}">
-                <a16:creationId xmlns:a16="http://schemas.microsoft.com/office/drawing/2014/main" xmlns="" id="{32A3E22E-D260-4C45-BA90-93973AE9B3A5}"/>
+                <a16:creationId xmlns:a16="http://schemas.microsoft.com/office/drawing/2014/main" id="{32A3E22E-D260-4C45-BA90-93973AE9B3A5}"/>
               </a:ext>
             </a:extLst>
           </p:cNvPr>
@@ -45165,7 +45417,7 @@
           <p:cNvPr id="62" name="Rechteck 61">
             <a:extLst>
               <a:ext uri="{FF2B5EF4-FFF2-40B4-BE49-F238E27FC236}">
-                <a16:creationId xmlns:a16="http://schemas.microsoft.com/office/drawing/2014/main" xmlns="" id="{32A3E22E-D260-4C45-BA90-93973AE9B3A5}"/>
+                <a16:creationId xmlns:a16="http://schemas.microsoft.com/office/drawing/2014/main" id="{32A3E22E-D260-4C45-BA90-93973AE9B3A5}"/>
               </a:ext>
             </a:extLst>
           </p:cNvPr>
@@ -45228,7 +45480,7 @@
           <p:cNvPr id="63" name="Textfeld 62">
             <a:extLst>
               <a:ext uri="{FF2B5EF4-FFF2-40B4-BE49-F238E27FC236}">
-                <a16:creationId xmlns:a16="http://schemas.microsoft.com/office/drawing/2014/main" xmlns="" id="{672F2C52-F706-4C2C-9BA1-C4050D78BE85}"/>
+                <a16:creationId xmlns:a16="http://schemas.microsoft.com/office/drawing/2014/main" id="{672F2C52-F706-4C2C-9BA1-C4050D78BE85}"/>
               </a:ext>
             </a:extLst>
           </p:cNvPr>
@@ -45411,7 +45663,7 @@
           <p:cNvPr id="74" name="Rechteck 73">
             <a:extLst>
               <a:ext uri="{FF2B5EF4-FFF2-40B4-BE49-F238E27FC236}">
-                <a16:creationId xmlns:a16="http://schemas.microsoft.com/office/drawing/2014/main" xmlns="" id="{32A3E22E-D260-4C45-BA90-93973AE9B3A5}"/>
+                <a16:creationId xmlns:a16="http://schemas.microsoft.com/office/drawing/2014/main" id="{32A3E22E-D260-4C45-BA90-93973AE9B3A5}"/>
               </a:ext>
             </a:extLst>
           </p:cNvPr>
@@ -45581,7 +45833,7 @@
           <p:cNvPr id="78" name="Rechteck 77">
             <a:extLst>
               <a:ext uri="{FF2B5EF4-FFF2-40B4-BE49-F238E27FC236}">
-                <a16:creationId xmlns:a16="http://schemas.microsoft.com/office/drawing/2014/main" xmlns="" id="{32A3E22E-D260-4C45-BA90-93973AE9B3A5}"/>
+                <a16:creationId xmlns:a16="http://schemas.microsoft.com/office/drawing/2014/main" id="{32A3E22E-D260-4C45-BA90-93973AE9B3A5}"/>
               </a:ext>
             </a:extLst>
           </p:cNvPr>
@@ -45644,7 +45896,7 @@
           <p:cNvPr id="40" name="Textfeld 39">
             <a:extLst>
               <a:ext uri="{FF2B5EF4-FFF2-40B4-BE49-F238E27FC236}">
-                <a16:creationId xmlns:a16="http://schemas.microsoft.com/office/drawing/2014/main" xmlns="" id="{672F2C52-F706-4C2C-9BA1-C4050D78BE85}"/>
+                <a16:creationId xmlns:a16="http://schemas.microsoft.com/office/drawing/2014/main" id="{672F2C52-F706-4C2C-9BA1-C4050D78BE85}"/>
               </a:ext>
             </a:extLst>
           </p:cNvPr>
@@ -45679,7 +45931,7 @@
           <p:cNvPr id="36" name="Textfeld 35">
             <a:extLst>
               <a:ext uri="{FF2B5EF4-FFF2-40B4-BE49-F238E27FC236}">
-                <a16:creationId xmlns:a16="http://schemas.microsoft.com/office/drawing/2014/main" xmlns="" id="{672F2C52-F706-4C2C-9BA1-C4050D78BE85}"/>
+                <a16:creationId xmlns:a16="http://schemas.microsoft.com/office/drawing/2014/main" id="{672F2C52-F706-4C2C-9BA1-C4050D78BE85}"/>
               </a:ext>
             </a:extLst>
           </p:cNvPr>
@@ -45714,7 +45966,7 @@
           <p:cNvPr id="3" name="Textfeld 2">
             <a:extLst>
               <a:ext uri="{FF2B5EF4-FFF2-40B4-BE49-F238E27FC236}">
-                <a16:creationId xmlns:a16="http://schemas.microsoft.com/office/drawing/2014/main" xmlns="" id="{556EE535-A27B-4A2D-8474-79923069F1EF}"/>
+                <a16:creationId xmlns:a16="http://schemas.microsoft.com/office/drawing/2014/main" id="{556EE535-A27B-4A2D-8474-79923069F1EF}"/>
               </a:ext>
             </a:extLst>
           </p:cNvPr>
@@ -45769,7 +46021,7 @@
           <p:cNvPr id="69" name="Rechteck 68">
             <a:extLst>
               <a:ext uri="{FF2B5EF4-FFF2-40B4-BE49-F238E27FC236}">
-                <a16:creationId xmlns:a16="http://schemas.microsoft.com/office/drawing/2014/main" xmlns="" id="{B55422A7-5528-4871-9809-C06E36E0A8C0}"/>
+                <a16:creationId xmlns:a16="http://schemas.microsoft.com/office/drawing/2014/main" id="{B55422A7-5528-4871-9809-C06E36E0A8C0}"/>
               </a:ext>
             </a:extLst>
           </p:cNvPr>
@@ -45823,7 +46075,7 @@
           <p:cNvPr id="70" name="Abgerundetes Rechteck 41">
             <a:extLst>
               <a:ext uri="{FF2B5EF4-FFF2-40B4-BE49-F238E27FC236}">
-                <a16:creationId xmlns:a16="http://schemas.microsoft.com/office/drawing/2014/main" xmlns="" id="{30281D6E-934B-4AD9-B906-86141DDAD1B3}"/>
+                <a16:creationId xmlns:a16="http://schemas.microsoft.com/office/drawing/2014/main" id="{30281D6E-934B-4AD9-B906-86141DDAD1B3}"/>
               </a:ext>
             </a:extLst>
           </p:cNvPr>
@@ -45879,7 +46131,7 @@
           <p:cNvPr id="72" name="Gerader Verbinder 71">
             <a:extLst>
               <a:ext uri="{FF2B5EF4-FFF2-40B4-BE49-F238E27FC236}">
-                <a16:creationId xmlns:a16="http://schemas.microsoft.com/office/drawing/2014/main" xmlns="" id="{A5036101-8713-4201-85EA-B0B9C22B8BA3}"/>
+                <a16:creationId xmlns:a16="http://schemas.microsoft.com/office/drawing/2014/main" id="{A5036101-8713-4201-85EA-B0B9C22B8BA3}"/>
               </a:ext>
             </a:extLst>
           </p:cNvPr>
@@ -45920,7 +46172,7 @@
           <p:cNvPr id="76" name="Auf der gleichen Seite des Rechtecks liegende Ecken abrunden 43">
             <a:extLst>
               <a:ext uri="{FF2B5EF4-FFF2-40B4-BE49-F238E27FC236}">
-                <a16:creationId xmlns:a16="http://schemas.microsoft.com/office/drawing/2014/main" xmlns="" id="{5ED2A35E-1C90-4EFF-AF99-FE858F9E90E7}"/>
+                <a16:creationId xmlns:a16="http://schemas.microsoft.com/office/drawing/2014/main" id="{5ED2A35E-1C90-4EFF-AF99-FE858F9E90E7}"/>
               </a:ext>
             </a:extLst>
           </p:cNvPr>
@@ -45979,7 +46231,7 @@
           <p:cNvPr id="79" name="Textfeld 78">
             <a:extLst>
               <a:ext uri="{FF2B5EF4-FFF2-40B4-BE49-F238E27FC236}">
-                <a16:creationId xmlns:a16="http://schemas.microsoft.com/office/drawing/2014/main" xmlns="" id="{9635E6E4-7D9D-4B45-9955-D781BAB33C8F}"/>
+                <a16:creationId xmlns:a16="http://schemas.microsoft.com/office/drawing/2014/main" id="{9635E6E4-7D9D-4B45-9955-D781BAB33C8F}"/>
               </a:ext>
             </a:extLst>
           </p:cNvPr>
@@ -46014,7 +46266,7 @@
           <p:cNvPr id="80" name="Auf der gleichen Seite des Rechtecks liegende Ecken abrunden 45">
             <a:extLst>
               <a:ext uri="{FF2B5EF4-FFF2-40B4-BE49-F238E27FC236}">
-                <a16:creationId xmlns:a16="http://schemas.microsoft.com/office/drawing/2014/main" xmlns="" id="{AF9A1B04-B1EF-40F9-9AD2-A1FF82FE68DA}"/>
+                <a16:creationId xmlns:a16="http://schemas.microsoft.com/office/drawing/2014/main" id="{AF9A1B04-B1EF-40F9-9AD2-A1FF82FE68DA}"/>
               </a:ext>
             </a:extLst>
           </p:cNvPr>
@@ -46077,7 +46329,7 @@
           <p:cNvPr id="81" name="Rechteck 80">
             <a:extLst>
               <a:ext uri="{FF2B5EF4-FFF2-40B4-BE49-F238E27FC236}">
-                <a16:creationId xmlns:a16="http://schemas.microsoft.com/office/drawing/2014/main" xmlns="" id="{46AD4765-8B1B-460C-BBB0-5ED18132F34E}"/>
+                <a16:creationId xmlns:a16="http://schemas.microsoft.com/office/drawing/2014/main" id="{46AD4765-8B1B-460C-BBB0-5ED18132F34E}"/>
               </a:ext>
             </a:extLst>
           </p:cNvPr>
@@ -46140,7 +46392,7 @@
           <p:cNvPr id="82" name="Textfeld 81">
             <a:extLst>
               <a:ext uri="{FF2B5EF4-FFF2-40B4-BE49-F238E27FC236}">
-                <a16:creationId xmlns:a16="http://schemas.microsoft.com/office/drawing/2014/main" xmlns="" id="{F71DF5F2-1E06-4C95-8FBE-8F7E1C8540C7}"/>
+                <a16:creationId xmlns:a16="http://schemas.microsoft.com/office/drawing/2014/main" id="{F71DF5F2-1E06-4C95-8FBE-8F7E1C8540C7}"/>
               </a:ext>
             </a:extLst>
           </p:cNvPr>
@@ -46175,7 +46427,7 @@
           <p:cNvPr id="83" name="Rechteck 82">
             <a:extLst>
               <a:ext uri="{FF2B5EF4-FFF2-40B4-BE49-F238E27FC236}">
-                <a16:creationId xmlns:a16="http://schemas.microsoft.com/office/drawing/2014/main" xmlns="" id="{683ADD30-DE47-47FA-8F58-F1DEEAFB85A7}"/>
+                <a16:creationId xmlns:a16="http://schemas.microsoft.com/office/drawing/2014/main" id="{683ADD30-DE47-47FA-8F58-F1DEEAFB85A7}"/>
               </a:ext>
             </a:extLst>
           </p:cNvPr>
@@ -46238,7 +46490,7 @@
           <p:cNvPr id="84" name="Auf der gleichen Seite des Rechtecks liegende Ecken abrunden 49">
             <a:extLst>
               <a:ext uri="{FF2B5EF4-FFF2-40B4-BE49-F238E27FC236}">
-                <a16:creationId xmlns:a16="http://schemas.microsoft.com/office/drawing/2014/main" xmlns="" id="{7A6ADD47-77C4-4451-97CE-7B037DD6E812}"/>
+                <a16:creationId xmlns:a16="http://schemas.microsoft.com/office/drawing/2014/main" id="{7A6ADD47-77C4-4451-97CE-7B037DD6E812}"/>
               </a:ext>
             </a:extLst>
           </p:cNvPr>
@@ -46295,7 +46547,7 @@
           <p:cNvPr id="85" name="Rechteck 84">
             <a:extLst>
               <a:ext uri="{FF2B5EF4-FFF2-40B4-BE49-F238E27FC236}">
-                <a16:creationId xmlns:a16="http://schemas.microsoft.com/office/drawing/2014/main" xmlns="" id="{5CA02B74-E748-41D9-895B-19EBEFFFE3C7}"/>
+                <a16:creationId xmlns:a16="http://schemas.microsoft.com/office/drawing/2014/main" id="{5CA02B74-E748-41D9-895B-19EBEFFFE3C7}"/>
               </a:ext>
             </a:extLst>
           </p:cNvPr>
@@ -46358,7 +46610,7 @@
           <p:cNvPr id="86" name="Textfeld 85">
             <a:extLst>
               <a:ext uri="{FF2B5EF4-FFF2-40B4-BE49-F238E27FC236}">
-                <a16:creationId xmlns:a16="http://schemas.microsoft.com/office/drawing/2014/main" xmlns="" id="{9ABE3EDF-0865-4B96-9BEC-73DB8F388889}"/>
+                <a16:creationId xmlns:a16="http://schemas.microsoft.com/office/drawing/2014/main" id="{9ABE3EDF-0865-4B96-9BEC-73DB8F388889}"/>
               </a:ext>
             </a:extLst>
           </p:cNvPr>
@@ -46393,7 +46645,7 @@
           <p:cNvPr id="87" name="Abgerundetes Rechteck 52">
             <a:extLst>
               <a:ext uri="{FF2B5EF4-FFF2-40B4-BE49-F238E27FC236}">
-                <a16:creationId xmlns:a16="http://schemas.microsoft.com/office/drawing/2014/main" xmlns="" id="{9BBD0D85-5019-4A65-9315-71724DEA53D4}"/>
+                <a16:creationId xmlns:a16="http://schemas.microsoft.com/office/drawing/2014/main" id="{9BBD0D85-5019-4A65-9315-71724DEA53D4}"/>
               </a:ext>
             </a:extLst>
           </p:cNvPr>
@@ -46449,7 +46701,7 @@
           <p:cNvPr id="88" name="Gerader Verbinder 87">
             <a:extLst>
               <a:ext uri="{FF2B5EF4-FFF2-40B4-BE49-F238E27FC236}">
-                <a16:creationId xmlns:a16="http://schemas.microsoft.com/office/drawing/2014/main" xmlns="" id="{35E2C495-9641-46AA-AE8C-A16C54567686}"/>
+                <a16:creationId xmlns:a16="http://schemas.microsoft.com/office/drawing/2014/main" id="{35E2C495-9641-46AA-AE8C-A16C54567686}"/>
               </a:ext>
             </a:extLst>
           </p:cNvPr>
@@ -46490,7 +46742,7 @@
           <p:cNvPr id="89" name="Auf der gleichen Seite des Rechtecks liegende Ecken abrunden 54">
             <a:extLst>
               <a:ext uri="{FF2B5EF4-FFF2-40B4-BE49-F238E27FC236}">
-                <a16:creationId xmlns:a16="http://schemas.microsoft.com/office/drawing/2014/main" xmlns="" id="{B50CDFC1-581D-4556-A8D3-0972BB69D428}"/>
+                <a16:creationId xmlns:a16="http://schemas.microsoft.com/office/drawing/2014/main" id="{B50CDFC1-581D-4556-A8D3-0972BB69D428}"/>
               </a:ext>
             </a:extLst>
           </p:cNvPr>
@@ -46549,7 +46801,7 @@
           <p:cNvPr id="90" name="Textfeld 89">
             <a:extLst>
               <a:ext uri="{FF2B5EF4-FFF2-40B4-BE49-F238E27FC236}">
-                <a16:creationId xmlns:a16="http://schemas.microsoft.com/office/drawing/2014/main" xmlns="" id="{8F1EC3AA-A06F-4A9C-A913-040F85C8C87F}"/>
+                <a16:creationId xmlns:a16="http://schemas.microsoft.com/office/drawing/2014/main" id="{8F1EC3AA-A06F-4A9C-A913-040F85C8C87F}"/>
               </a:ext>
             </a:extLst>
           </p:cNvPr>
@@ -46584,7 +46836,7 @@
           <p:cNvPr id="91" name="Auf der gleichen Seite des Rechtecks liegende Ecken abrunden 56">
             <a:extLst>
               <a:ext uri="{FF2B5EF4-FFF2-40B4-BE49-F238E27FC236}">
-                <a16:creationId xmlns:a16="http://schemas.microsoft.com/office/drawing/2014/main" xmlns="" id="{5371D1F4-D815-475E-951B-1BC63A85E455}"/>
+                <a16:creationId xmlns:a16="http://schemas.microsoft.com/office/drawing/2014/main" id="{5371D1F4-D815-475E-951B-1BC63A85E455}"/>
               </a:ext>
             </a:extLst>
           </p:cNvPr>
@@ -46647,7 +46899,7 @@
           <p:cNvPr id="92" name="Rechteck 91">
             <a:extLst>
               <a:ext uri="{FF2B5EF4-FFF2-40B4-BE49-F238E27FC236}">
-                <a16:creationId xmlns:a16="http://schemas.microsoft.com/office/drawing/2014/main" xmlns="" id="{8BBCCEC6-BDE4-428D-94B8-CDB469C3BFE5}"/>
+                <a16:creationId xmlns:a16="http://schemas.microsoft.com/office/drawing/2014/main" id="{8BBCCEC6-BDE4-428D-94B8-CDB469C3BFE5}"/>
               </a:ext>
             </a:extLst>
           </p:cNvPr>
@@ -46710,7 +46962,7 @@
           <p:cNvPr id="93" name="Textfeld 92">
             <a:extLst>
               <a:ext uri="{FF2B5EF4-FFF2-40B4-BE49-F238E27FC236}">
-                <a16:creationId xmlns:a16="http://schemas.microsoft.com/office/drawing/2014/main" xmlns="" id="{9ECB0E76-98B5-48BB-A39F-B64376FCE93C}"/>
+                <a16:creationId xmlns:a16="http://schemas.microsoft.com/office/drawing/2014/main" id="{9ECB0E76-98B5-48BB-A39F-B64376FCE93C}"/>
               </a:ext>
             </a:extLst>
           </p:cNvPr>
@@ -46745,7 +46997,7 @@
           <p:cNvPr id="94" name="Rechteck 93">
             <a:extLst>
               <a:ext uri="{FF2B5EF4-FFF2-40B4-BE49-F238E27FC236}">
-                <a16:creationId xmlns:a16="http://schemas.microsoft.com/office/drawing/2014/main" xmlns="" id="{1669189D-453E-4FF1-9C2E-DADD3891AF19}"/>
+                <a16:creationId xmlns:a16="http://schemas.microsoft.com/office/drawing/2014/main" id="{1669189D-453E-4FF1-9C2E-DADD3891AF19}"/>
               </a:ext>
             </a:extLst>
           </p:cNvPr>
@@ -46808,7 +47060,7 @@
           <p:cNvPr id="95" name="Auf der gleichen Seite des Rechtecks liegende Ecken abrunden 60">
             <a:extLst>
               <a:ext uri="{FF2B5EF4-FFF2-40B4-BE49-F238E27FC236}">
-                <a16:creationId xmlns:a16="http://schemas.microsoft.com/office/drawing/2014/main" xmlns="" id="{B072D0FF-037C-4524-BCEE-E2140B2647C9}"/>
+                <a16:creationId xmlns:a16="http://schemas.microsoft.com/office/drawing/2014/main" id="{B072D0FF-037C-4524-BCEE-E2140B2647C9}"/>
               </a:ext>
             </a:extLst>
           </p:cNvPr>
@@ -46865,7 +47117,7 @@
           <p:cNvPr id="96" name="Rechteck 95">
             <a:extLst>
               <a:ext uri="{FF2B5EF4-FFF2-40B4-BE49-F238E27FC236}">
-                <a16:creationId xmlns:a16="http://schemas.microsoft.com/office/drawing/2014/main" xmlns="" id="{01336FAF-40AE-40FA-8F78-863782BC6D9E}"/>
+                <a16:creationId xmlns:a16="http://schemas.microsoft.com/office/drawing/2014/main" id="{01336FAF-40AE-40FA-8F78-863782BC6D9E}"/>
               </a:ext>
             </a:extLst>
           </p:cNvPr>
@@ -46928,7 +47180,7 @@
           <p:cNvPr id="97" name="Textfeld 96">
             <a:extLst>
               <a:ext uri="{FF2B5EF4-FFF2-40B4-BE49-F238E27FC236}">
-                <a16:creationId xmlns:a16="http://schemas.microsoft.com/office/drawing/2014/main" xmlns="" id="{7797F830-2D7E-4330-B501-DC7B265731A4}"/>
+                <a16:creationId xmlns:a16="http://schemas.microsoft.com/office/drawing/2014/main" id="{7797F830-2D7E-4330-B501-DC7B265731A4}"/>
               </a:ext>
             </a:extLst>
           </p:cNvPr>
@@ -46963,7 +47215,7 @@
           <p:cNvPr id="98" name="Abgerundetes Rechteck 70">
             <a:extLst>
               <a:ext uri="{FF2B5EF4-FFF2-40B4-BE49-F238E27FC236}">
-                <a16:creationId xmlns:a16="http://schemas.microsoft.com/office/drawing/2014/main" xmlns="" id="{2EC55743-29D6-47E6-8257-B2F921417B96}"/>
+                <a16:creationId xmlns:a16="http://schemas.microsoft.com/office/drawing/2014/main" id="{2EC55743-29D6-47E6-8257-B2F921417B96}"/>
               </a:ext>
             </a:extLst>
           </p:cNvPr>
@@ -47019,7 +47271,7 @@
           <p:cNvPr id="99" name="Auf der gleichen Seite des Rechtecks liegende Ecken abrunden 72">
             <a:extLst>
               <a:ext uri="{FF2B5EF4-FFF2-40B4-BE49-F238E27FC236}">
-                <a16:creationId xmlns:a16="http://schemas.microsoft.com/office/drawing/2014/main" xmlns="" id="{91B830F9-ED74-4191-B291-40E50AB1268D}"/>
+                <a16:creationId xmlns:a16="http://schemas.microsoft.com/office/drawing/2014/main" id="{91B830F9-ED74-4191-B291-40E50AB1268D}"/>
               </a:ext>
             </a:extLst>
           </p:cNvPr>
@@ -47082,7 +47334,7 @@
           <p:cNvPr id="100" name="Rechteck 99">
             <a:extLst>
               <a:ext uri="{FF2B5EF4-FFF2-40B4-BE49-F238E27FC236}">
-                <a16:creationId xmlns:a16="http://schemas.microsoft.com/office/drawing/2014/main" xmlns="" id="{48D63B02-1962-49F1-BD11-3B02FD8107CE}"/>
+                <a16:creationId xmlns:a16="http://schemas.microsoft.com/office/drawing/2014/main" id="{48D63B02-1962-49F1-BD11-3B02FD8107CE}"/>
               </a:ext>
             </a:extLst>
           </p:cNvPr>
@@ -47145,7 +47397,7 @@
           <p:cNvPr id="103" name="Textfeld 102">
             <a:extLst>
               <a:ext uri="{FF2B5EF4-FFF2-40B4-BE49-F238E27FC236}">
-                <a16:creationId xmlns:a16="http://schemas.microsoft.com/office/drawing/2014/main" xmlns="" id="{5E880E95-3C50-40DF-BFC9-B79785B7190E}"/>
+                <a16:creationId xmlns:a16="http://schemas.microsoft.com/office/drawing/2014/main" id="{5E880E95-3C50-40DF-BFC9-B79785B7190E}"/>
               </a:ext>
             </a:extLst>
           </p:cNvPr>
@@ -47180,7 +47432,7 @@
           <p:cNvPr id="104" name="Auf der gleichen Seite des Rechtecks liegende Ecken abrunden 49">
             <a:extLst>
               <a:ext uri="{FF2B5EF4-FFF2-40B4-BE49-F238E27FC236}">
-                <a16:creationId xmlns:a16="http://schemas.microsoft.com/office/drawing/2014/main" xmlns="" id="{DA0CBBA2-1C17-4C62-8308-FE9167EED25F}"/>
+                <a16:creationId xmlns:a16="http://schemas.microsoft.com/office/drawing/2014/main" id="{DA0CBBA2-1C17-4C62-8308-FE9167EED25F}"/>
               </a:ext>
             </a:extLst>
           </p:cNvPr>
@@ -47237,7 +47489,7 @@
           <p:cNvPr id="105" name="Textfeld 104">
             <a:extLst>
               <a:ext uri="{FF2B5EF4-FFF2-40B4-BE49-F238E27FC236}">
-                <a16:creationId xmlns:a16="http://schemas.microsoft.com/office/drawing/2014/main" xmlns="" id="{6DFD087A-E1E9-4E03-BE83-1AC51D4CBB4F}"/>
+                <a16:creationId xmlns:a16="http://schemas.microsoft.com/office/drawing/2014/main" id="{6DFD087A-E1E9-4E03-BE83-1AC51D4CBB4F}"/>
               </a:ext>
             </a:extLst>
           </p:cNvPr>
@@ -47282,7 +47534,7 @@
           <p:cNvPr id="106" name="Auf der gleichen Seite des Rechtecks liegende Ecken abrunden 68">
             <a:extLst>
               <a:ext uri="{FF2B5EF4-FFF2-40B4-BE49-F238E27FC236}">
-                <a16:creationId xmlns:a16="http://schemas.microsoft.com/office/drawing/2014/main" xmlns="" id="{887F92EE-21FD-4C4C-9AE9-B0418622B2D4}"/>
+                <a16:creationId xmlns:a16="http://schemas.microsoft.com/office/drawing/2014/main" id="{887F92EE-21FD-4C4C-9AE9-B0418622B2D4}"/>
               </a:ext>
             </a:extLst>
           </p:cNvPr>
@@ -47345,7 +47597,7 @@
           <p:cNvPr id="107" name="Rechteck 106">
             <a:extLst>
               <a:ext uri="{FF2B5EF4-FFF2-40B4-BE49-F238E27FC236}">
-                <a16:creationId xmlns:a16="http://schemas.microsoft.com/office/drawing/2014/main" xmlns="" id="{F647470D-40A5-4733-8E3F-E33CAADC599A}"/>
+                <a16:creationId xmlns:a16="http://schemas.microsoft.com/office/drawing/2014/main" id="{F647470D-40A5-4733-8E3F-E33CAADC599A}"/>
               </a:ext>
             </a:extLst>
           </p:cNvPr>
@@ -47408,7 +47660,7 @@
           <p:cNvPr id="108" name="Auf der gleichen Seite des Rechtecks liegende Ecken abrunden 49">
             <a:extLst>
               <a:ext uri="{FF2B5EF4-FFF2-40B4-BE49-F238E27FC236}">
-                <a16:creationId xmlns:a16="http://schemas.microsoft.com/office/drawing/2014/main" xmlns="" id="{5C1B7192-D674-4D5E-AD70-8A3BCF875464}"/>
+                <a16:creationId xmlns:a16="http://schemas.microsoft.com/office/drawing/2014/main" id="{5C1B7192-D674-4D5E-AD70-8A3BCF875464}"/>
               </a:ext>
             </a:extLst>
           </p:cNvPr>
@@ -47465,7 +47717,7 @@
           <p:cNvPr id="109" name="Abgerundetes Rechteck 41">
             <a:extLst>
               <a:ext uri="{FF2B5EF4-FFF2-40B4-BE49-F238E27FC236}">
-                <a16:creationId xmlns:a16="http://schemas.microsoft.com/office/drawing/2014/main" xmlns="" id="{B043AF5C-7EBC-45D7-BB1F-74BF4AB2A84E}"/>
+                <a16:creationId xmlns:a16="http://schemas.microsoft.com/office/drawing/2014/main" id="{B043AF5C-7EBC-45D7-BB1F-74BF4AB2A84E}"/>
               </a:ext>
             </a:extLst>
           </p:cNvPr>
@@ -47521,7 +47773,7 @@
           <p:cNvPr id="110" name="Gerader Verbinder 109">
             <a:extLst>
               <a:ext uri="{FF2B5EF4-FFF2-40B4-BE49-F238E27FC236}">
-                <a16:creationId xmlns:a16="http://schemas.microsoft.com/office/drawing/2014/main" xmlns="" id="{C6E2C424-9E5E-48AF-8CC7-EE9122452095}"/>
+                <a16:creationId xmlns:a16="http://schemas.microsoft.com/office/drawing/2014/main" id="{C6E2C424-9E5E-48AF-8CC7-EE9122452095}"/>
               </a:ext>
             </a:extLst>
           </p:cNvPr>
@@ -47562,7 +47814,7 @@
           <p:cNvPr id="111" name="Raute 110">
             <a:extLst>
               <a:ext uri="{FF2B5EF4-FFF2-40B4-BE49-F238E27FC236}">
-                <a16:creationId xmlns:a16="http://schemas.microsoft.com/office/drawing/2014/main" xmlns="" id="{A2AC3C0C-4FDE-4E0C-9D93-8310BD63DB59}"/>
+                <a16:creationId xmlns:a16="http://schemas.microsoft.com/office/drawing/2014/main" id="{A2AC3C0C-4FDE-4E0C-9D93-8310BD63DB59}"/>
               </a:ext>
             </a:extLst>
           </p:cNvPr>
@@ -47616,7 +47868,7 @@
           <p:cNvPr id="112" name="Textfeld 111">
             <a:extLst>
               <a:ext uri="{FF2B5EF4-FFF2-40B4-BE49-F238E27FC236}">
-                <a16:creationId xmlns:a16="http://schemas.microsoft.com/office/drawing/2014/main" xmlns="" id="{427BFF03-92E7-419E-9476-EE225C6EEEA2}"/>
+                <a16:creationId xmlns:a16="http://schemas.microsoft.com/office/drawing/2014/main" id="{427BFF03-92E7-419E-9476-EE225C6EEEA2}"/>
               </a:ext>
             </a:extLst>
           </p:cNvPr>
@@ -47659,7 +47911,7 @@
           <p:cNvPr id="113" name="Rechteck 112">
             <a:extLst>
               <a:ext uri="{FF2B5EF4-FFF2-40B4-BE49-F238E27FC236}">
-                <a16:creationId xmlns:a16="http://schemas.microsoft.com/office/drawing/2014/main" xmlns="" id="{08EA4F5A-5BCA-46C5-A295-67619DA56091}"/>
+                <a16:creationId xmlns:a16="http://schemas.microsoft.com/office/drawing/2014/main" id="{08EA4F5A-5BCA-46C5-A295-67619DA56091}"/>
               </a:ext>
             </a:extLst>
           </p:cNvPr>
@@ -47722,7 +47974,7 @@
           <p:cNvPr id="114" name="Textfeld 113">
             <a:extLst>
               <a:ext uri="{FF2B5EF4-FFF2-40B4-BE49-F238E27FC236}">
-                <a16:creationId xmlns:a16="http://schemas.microsoft.com/office/drawing/2014/main" xmlns="" id="{5FED661A-24C0-499C-B14E-A66B9E764B36}"/>
+                <a16:creationId xmlns:a16="http://schemas.microsoft.com/office/drawing/2014/main" id="{5FED661A-24C0-499C-B14E-A66B9E764B36}"/>
               </a:ext>
             </a:extLst>
           </p:cNvPr>
@@ -47791,7 +48043,7 @@
           <p:cNvPr id="2" name="Rechteck 1">
             <a:extLst>
               <a:ext uri="{FF2B5EF4-FFF2-40B4-BE49-F238E27FC236}">
-                <a16:creationId xmlns:a16="http://schemas.microsoft.com/office/drawing/2014/main" xmlns="" id="{C0DB1083-F1D8-40EE-9D33-AAFD6B7330DA}"/>
+                <a16:creationId xmlns:a16="http://schemas.microsoft.com/office/drawing/2014/main" id="{C0DB1083-F1D8-40EE-9D33-AAFD6B7330DA}"/>
               </a:ext>
             </a:extLst>
           </p:cNvPr>
@@ -47845,7 +48097,7 @@
           <p:cNvPr id="143" name="Abgerundetes Rechteck 41">
             <a:extLst>
               <a:ext uri="{FF2B5EF4-FFF2-40B4-BE49-F238E27FC236}">
-                <a16:creationId xmlns:a16="http://schemas.microsoft.com/office/drawing/2014/main" xmlns="" id="{5D7FD4AB-065C-4057-B194-CF1EB5296172}"/>
+                <a16:creationId xmlns:a16="http://schemas.microsoft.com/office/drawing/2014/main" id="{5D7FD4AB-065C-4057-B194-CF1EB5296172}"/>
               </a:ext>
             </a:extLst>
           </p:cNvPr>
@@ -47950,7 +48202,7 @@
           <p:cNvPr id="112" name="Abgerundetes Rechteck 70">
             <a:extLst>
               <a:ext uri="{FF2B5EF4-FFF2-40B4-BE49-F238E27FC236}">
-                <a16:creationId xmlns:a16="http://schemas.microsoft.com/office/drawing/2014/main" xmlns="" id="{FA1963D0-80CB-4FFF-B49D-800FEB43607C}"/>
+                <a16:creationId xmlns:a16="http://schemas.microsoft.com/office/drawing/2014/main" id="{FA1963D0-80CB-4FFF-B49D-800FEB43607C}"/>
               </a:ext>
             </a:extLst>
           </p:cNvPr>
@@ -48006,7 +48258,7 @@
           <p:cNvPr id="114" name="Auf der gleichen Seite des Rechtecks liegende Ecken abrunden 72">
             <a:extLst>
               <a:ext uri="{FF2B5EF4-FFF2-40B4-BE49-F238E27FC236}">
-                <a16:creationId xmlns:a16="http://schemas.microsoft.com/office/drawing/2014/main" xmlns="" id="{1D8BEE29-FAE8-406C-8635-AA84BB2F64C6}"/>
+                <a16:creationId xmlns:a16="http://schemas.microsoft.com/office/drawing/2014/main" id="{1D8BEE29-FAE8-406C-8635-AA84BB2F64C6}"/>
               </a:ext>
             </a:extLst>
           </p:cNvPr>
@@ -48069,7 +48321,7 @@
           <p:cNvPr id="116" name="Rechteck 115">
             <a:extLst>
               <a:ext uri="{FF2B5EF4-FFF2-40B4-BE49-F238E27FC236}">
-                <a16:creationId xmlns:a16="http://schemas.microsoft.com/office/drawing/2014/main" xmlns="" id="{3FE3603A-C08F-46E3-84DF-CFCE8351AB19}"/>
+                <a16:creationId xmlns:a16="http://schemas.microsoft.com/office/drawing/2014/main" id="{3FE3603A-C08F-46E3-84DF-CFCE8351AB19}"/>
               </a:ext>
             </a:extLst>
           </p:cNvPr>
@@ -48133,7 +48385,7 @@
           <p:cNvPr id="118" name="Textfeld 117">
             <a:extLst>
               <a:ext uri="{FF2B5EF4-FFF2-40B4-BE49-F238E27FC236}">
-                <a16:creationId xmlns:a16="http://schemas.microsoft.com/office/drawing/2014/main" xmlns="" id="{FF3EB85E-F2C4-4B28-8D04-6AF6608616FA}"/>
+                <a16:creationId xmlns:a16="http://schemas.microsoft.com/office/drawing/2014/main" id="{FF3EB85E-F2C4-4B28-8D04-6AF6608616FA}"/>
               </a:ext>
             </a:extLst>
           </p:cNvPr>
@@ -48168,7 +48420,7 @@
           <p:cNvPr id="120" name="Auf der gleichen Seite des Rechtecks liegende Ecken abrunden 49">
             <a:extLst>
               <a:ext uri="{FF2B5EF4-FFF2-40B4-BE49-F238E27FC236}">
-                <a16:creationId xmlns:a16="http://schemas.microsoft.com/office/drawing/2014/main" xmlns="" id="{C6B2ABB4-8182-4E95-9E48-DD26D8B51253}"/>
+                <a16:creationId xmlns:a16="http://schemas.microsoft.com/office/drawing/2014/main" id="{C6B2ABB4-8182-4E95-9E48-DD26D8B51253}"/>
               </a:ext>
             </a:extLst>
           </p:cNvPr>
@@ -48225,7 +48477,7 @@
           <p:cNvPr id="122" name="Textfeld 121">
             <a:extLst>
               <a:ext uri="{FF2B5EF4-FFF2-40B4-BE49-F238E27FC236}">
-                <a16:creationId xmlns:a16="http://schemas.microsoft.com/office/drawing/2014/main" xmlns="" id="{5AADDA05-E9F4-4354-8C5F-682455BC0D28}"/>
+                <a16:creationId xmlns:a16="http://schemas.microsoft.com/office/drawing/2014/main" id="{5AADDA05-E9F4-4354-8C5F-682455BC0D28}"/>
               </a:ext>
             </a:extLst>
           </p:cNvPr>
@@ -48270,7 +48522,7 @@
           <p:cNvPr id="124" name="Auf der gleichen Seite des Rechtecks liegende Ecken abrunden 68">
             <a:extLst>
               <a:ext uri="{FF2B5EF4-FFF2-40B4-BE49-F238E27FC236}">
-                <a16:creationId xmlns:a16="http://schemas.microsoft.com/office/drawing/2014/main" xmlns="" id="{AE8E74B0-DD0E-46D1-9399-1C1283402AFA}"/>
+                <a16:creationId xmlns:a16="http://schemas.microsoft.com/office/drawing/2014/main" id="{AE8E74B0-DD0E-46D1-9399-1C1283402AFA}"/>
               </a:ext>
             </a:extLst>
           </p:cNvPr>
@@ -48333,7 +48585,7 @@
           <p:cNvPr id="126" name="Rechteck 125">
             <a:extLst>
               <a:ext uri="{FF2B5EF4-FFF2-40B4-BE49-F238E27FC236}">
-                <a16:creationId xmlns:a16="http://schemas.microsoft.com/office/drawing/2014/main" xmlns="" id="{E4CF2820-9632-4A47-AF60-F9E659927FDA}"/>
+                <a16:creationId xmlns:a16="http://schemas.microsoft.com/office/drawing/2014/main" id="{E4CF2820-9632-4A47-AF60-F9E659927FDA}"/>
               </a:ext>
             </a:extLst>
           </p:cNvPr>
@@ -48396,7 +48648,7 @@
           <p:cNvPr id="130" name="Abgerundetes Rechteck 41">
             <a:extLst>
               <a:ext uri="{FF2B5EF4-FFF2-40B4-BE49-F238E27FC236}">
-                <a16:creationId xmlns:a16="http://schemas.microsoft.com/office/drawing/2014/main" xmlns="" id="{421E87FC-FC74-47D7-BEAB-9643665CC6CE}"/>
+                <a16:creationId xmlns:a16="http://schemas.microsoft.com/office/drawing/2014/main" id="{421E87FC-FC74-47D7-BEAB-9643665CC6CE}"/>
               </a:ext>
             </a:extLst>
           </p:cNvPr>
@@ -48452,7 +48704,7 @@
           <p:cNvPr id="140" name="Textfeld 139">
             <a:extLst>
               <a:ext uri="{FF2B5EF4-FFF2-40B4-BE49-F238E27FC236}">
-                <a16:creationId xmlns:a16="http://schemas.microsoft.com/office/drawing/2014/main" xmlns="" id="{6BB44C2B-DB4F-4128-B516-30CC131EA952}"/>
+                <a16:creationId xmlns:a16="http://schemas.microsoft.com/office/drawing/2014/main" id="{6BB44C2B-DB4F-4128-B516-30CC131EA952}"/>
               </a:ext>
             </a:extLst>
           </p:cNvPr>
@@ -48491,7 +48743,7 @@
           <p:cNvPr id="142" name="Abgerundetes Rechteck 41">
             <a:extLst>
               <a:ext uri="{FF2B5EF4-FFF2-40B4-BE49-F238E27FC236}">
-                <a16:creationId xmlns:a16="http://schemas.microsoft.com/office/drawing/2014/main" xmlns="" id="{B34A6ADA-AE10-4736-8B0A-C0809B00A530}"/>
+                <a16:creationId xmlns:a16="http://schemas.microsoft.com/office/drawing/2014/main" id="{B34A6ADA-AE10-4736-8B0A-C0809B00A530}"/>
               </a:ext>
             </a:extLst>
           </p:cNvPr>
@@ -48547,7 +48799,7 @@
           <p:cNvPr id="136" name="Textfeld 135">
             <a:extLst>
               <a:ext uri="{FF2B5EF4-FFF2-40B4-BE49-F238E27FC236}">
-                <a16:creationId xmlns:a16="http://schemas.microsoft.com/office/drawing/2014/main" xmlns="" id="{502DE74A-7210-477C-A83A-5C77E168C8C9}"/>
+                <a16:creationId xmlns:a16="http://schemas.microsoft.com/office/drawing/2014/main" id="{502DE74A-7210-477C-A83A-5C77E168C8C9}"/>
               </a:ext>
             </a:extLst>
           </p:cNvPr>
@@ -48590,7 +48842,7 @@
           <p:cNvPr id="138" name="Rechteck 137">
             <a:extLst>
               <a:ext uri="{FF2B5EF4-FFF2-40B4-BE49-F238E27FC236}">
-                <a16:creationId xmlns:a16="http://schemas.microsoft.com/office/drawing/2014/main" xmlns="" id="{0255581D-6B63-49B8-9D84-291BAC44D669}"/>
+                <a16:creationId xmlns:a16="http://schemas.microsoft.com/office/drawing/2014/main" id="{0255581D-6B63-49B8-9D84-291BAC44D669}"/>
               </a:ext>
             </a:extLst>
           </p:cNvPr>
@@ -48653,7 +48905,7 @@
           <p:cNvPr id="90" name="Auf der gleichen Seite des Rechtecks liegende Ecken abrunden 54">
             <a:extLst>
               <a:ext uri="{FF2B5EF4-FFF2-40B4-BE49-F238E27FC236}">
-                <a16:creationId xmlns:a16="http://schemas.microsoft.com/office/drawing/2014/main" xmlns="" id="{9D90D50B-C3C2-439C-8D75-4B05C5EBEA1D}"/>
+                <a16:creationId xmlns:a16="http://schemas.microsoft.com/office/drawing/2014/main" id="{9D90D50B-C3C2-439C-8D75-4B05C5EBEA1D}"/>
               </a:ext>
             </a:extLst>
           </p:cNvPr>
@@ -48712,7 +48964,7 @@
           <p:cNvPr id="92" name="Textfeld 91">
             <a:extLst>
               <a:ext uri="{FF2B5EF4-FFF2-40B4-BE49-F238E27FC236}">
-                <a16:creationId xmlns:a16="http://schemas.microsoft.com/office/drawing/2014/main" xmlns="" id="{17D6B90A-DD3D-42DD-9643-EB237D6F696C}"/>
+                <a16:creationId xmlns:a16="http://schemas.microsoft.com/office/drawing/2014/main" id="{17D6B90A-DD3D-42DD-9643-EB237D6F696C}"/>
               </a:ext>
             </a:extLst>
           </p:cNvPr>
@@ -48750,7 +49002,7 @@
           <p:cNvPr id="94" name="Auf der gleichen Seite des Rechtecks liegende Ecken abrunden 56">
             <a:extLst>
               <a:ext uri="{FF2B5EF4-FFF2-40B4-BE49-F238E27FC236}">
-                <a16:creationId xmlns:a16="http://schemas.microsoft.com/office/drawing/2014/main" xmlns="" id="{7ABC6F58-3FBD-471A-BAE7-978C05912EA0}"/>
+                <a16:creationId xmlns:a16="http://schemas.microsoft.com/office/drawing/2014/main" id="{7ABC6F58-3FBD-471A-BAE7-978C05912EA0}"/>
               </a:ext>
             </a:extLst>
           </p:cNvPr>
@@ -48813,7 +49065,7 @@
           <p:cNvPr id="86" name="Abgerundetes Rechteck 52">
             <a:extLst>
               <a:ext uri="{FF2B5EF4-FFF2-40B4-BE49-F238E27FC236}">
-                <a16:creationId xmlns:a16="http://schemas.microsoft.com/office/drawing/2014/main" xmlns="" id="{19E0814B-C584-4CF7-9B4B-4890D249D799}"/>
+                <a16:creationId xmlns:a16="http://schemas.microsoft.com/office/drawing/2014/main" id="{19E0814B-C584-4CF7-9B4B-4890D249D799}"/>
               </a:ext>
             </a:extLst>
           </p:cNvPr>
@@ -48869,7 +49121,7 @@
           <p:cNvPr id="98" name="Textfeld 97">
             <a:extLst>
               <a:ext uri="{FF2B5EF4-FFF2-40B4-BE49-F238E27FC236}">
-                <a16:creationId xmlns:a16="http://schemas.microsoft.com/office/drawing/2014/main" xmlns="" id="{C33E6CBE-E6E6-4918-A7CF-531535D7A678}"/>
+                <a16:creationId xmlns:a16="http://schemas.microsoft.com/office/drawing/2014/main" id="{C33E6CBE-E6E6-4918-A7CF-531535D7A678}"/>
               </a:ext>
             </a:extLst>
           </p:cNvPr>
@@ -48907,7 +49159,7 @@
           <p:cNvPr id="106" name="Auf der gleichen Seite des Rechtecks liegende Ecken abrunden 60">
             <a:extLst>
               <a:ext uri="{FF2B5EF4-FFF2-40B4-BE49-F238E27FC236}">
-                <a16:creationId xmlns:a16="http://schemas.microsoft.com/office/drawing/2014/main" xmlns="" id="{A1795C50-0D7F-4A96-9A6A-6AE9F4DC9815}"/>
+                <a16:creationId xmlns:a16="http://schemas.microsoft.com/office/drawing/2014/main" id="{A1795C50-0D7F-4A96-9A6A-6AE9F4DC9815}"/>
               </a:ext>
             </a:extLst>
           </p:cNvPr>
@@ -48964,7 +49216,7 @@
           <p:cNvPr id="110" name="Textfeld 109">
             <a:extLst>
               <a:ext uri="{FF2B5EF4-FFF2-40B4-BE49-F238E27FC236}">
-                <a16:creationId xmlns:a16="http://schemas.microsoft.com/office/drawing/2014/main" xmlns="" id="{CC96EC9D-7F3A-4083-9968-83E26D9AA3EC}"/>
+                <a16:creationId xmlns:a16="http://schemas.microsoft.com/office/drawing/2014/main" id="{CC96EC9D-7F3A-4083-9968-83E26D9AA3EC}"/>
               </a:ext>
             </a:extLst>
           </p:cNvPr>
@@ -49002,7 +49254,7 @@
           <p:cNvPr id="100" name="Rechteck 99">
             <a:extLst>
               <a:ext uri="{FF2B5EF4-FFF2-40B4-BE49-F238E27FC236}">
-                <a16:creationId xmlns:a16="http://schemas.microsoft.com/office/drawing/2014/main" xmlns="" id="{F25D66A5-5E3E-473C-94E0-41C1698DF2D7}"/>
+                <a16:creationId xmlns:a16="http://schemas.microsoft.com/office/drawing/2014/main" id="{F25D66A5-5E3E-473C-94E0-41C1698DF2D7}"/>
               </a:ext>
             </a:extLst>
           </p:cNvPr>
@@ -49065,7 +49317,7 @@
           <p:cNvPr id="108" name="Rechteck 107">
             <a:extLst>
               <a:ext uri="{FF2B5EF4-FFF2-40B4-BE49-F238E27FC236}">
-                <a16:creationId xmlns:a16="http://schemas.microsoft.com/office/drawing/2014/main" xmlns="" id="{1238769D-FA46-400E-96E8-ADCE0B4ECA97}"/>
+                <a16:creationId xmlns:a16="http://schemas.microsoft.com/office/drawing/2014/main" id="{1238769D-FA46-400E-96E8-ADCE0B4ECA97}"/>
               </a:ext>
             </a:extLst>
           </p:cNvPr>
@@ -49128,7 +49380,7 @@
           <p:cNvPr id="145" name="Rechteck 144">
             <a:extLst>
               <a:ext uri="{FF2B5EF4-FFF2-40B4-BE49-F238E27FC236}">
-                <a16:creationId xmlns:a16="http://schemas.microsoft.com/office/drawing/2014/main" xmlns="" id="{E371D9FE-5902-4BEF-A097-609CB2680605}"/>
+                <a16:creationId xmlns:a16="http://schemas.microsoft.com/office/drawing/2014/main" id="{E371D9FE-5902-4BEF-A097-609CB2680605}"/>
               </a:ext>
             </a:extLst>
           </p:cNvPr>
@@ -49192,7 +49444,7 @@
           <p:cNvPr id="146" name="Auf der gleichen Seite des Rechtecks liegende Ecken abrunden 60">
             <a:extLst>
               <a:ext uri="{FF2B5EF4-FFF2-40B4-BE49-F238E27FC236}">
-                <a16:creationId xmlns:a16="http://schemas.microsoft.com/office/drawing/2014/main" xmlns="" id="{2D6F2BB4-20DC-4ED9-A2B0-048321E29520}"/>
+                <a16:creationId xmlns:a16="http://schemas.microsoft.com/office/drawing/2014/main" id="{2D6F2BB4-20DC-4ED9-A2B0-048321E29520}"/>
               </a:ext>
             </a:extLst>
           </p:cNvPr>
@@ -49249,7 +49501,7 @@
           <p:cNvPr id="132" name="Gerader Verbinder 131">
             <a:extLst>
               <a:ext uri="{FF2B5EF4-FFF2-40B4-BE49-F238E27FC236}">
-                <a16:creationId xmlns:a16="http://schemas.microsoft.com/office/drawing/2014/main" xmlns="" id="{EF3D99D6-A1E4-469D-9897-E6F9E1BCF385}"/>
+                <a16:creationId xmlns:a16="http://schemas.microsoft.com/office/drawing/2014/main" id="{EF3D99D6-A1E4-469D-9897-E6F9E1BCF385}"/>
               </a:ext>
             </a:extLst>
           </p:cNvPr>
@@ -49290,7 +49542,7 @@
           <p:cNvPr id="134" name="Raute 133">
             <a:extLst>
               <a:ext uri="{FF2B5EF4-FFF2-40B4-BE49-F238E27FC236}">
-                <a16:creationId xmlns:a16="http://schemas.microsoft.com/office/drawing/2014/main" xmlns="" id="{152F27A4-6578-41A2-98C4-396512BF0D38}"/>
+                <a16:creationId xmlns:a16="http://schemas.microsoft.com/office/drawing/2014/main" id="{152F27A4-6578-41A2-98C4-396512BF0D38}"/>
               </a:ext>
             </a:extLst>
           </p:cNvPr>
@@ -49344,7 +49596,7 @@
           <p:cNvPr id="147" name="Textfeld 146">
             <a:extLst>
               <a:ext uri="{FF2B5EF4-FFF2-40B4-BE49-F238E27FC236}">
-                <a16:creationId xmlns:a16="http://schemas.microsoft.com/office/drawing/2014/main" xmlns="" id="{64EDA1D1-96B4-4E42-8EC9-9B017DE43D1E}"/>
+                <a16:creationId xmlns:a16="http://schemas.microsoft.com/office/drawing/2014/main" id="{64EDA1D1-96B4-4E42-8EC9-9B017DE43D1E}"/>
               </a:ext>
             </a:extLst>
           </p:cNvPr>
@@ -49387,7 +49639,7 @@
           <p:cNvPr id="148" name="Rechteck 147">
             <a:extLst>
               <a:ext uri="{FF2B5EF4-FFF2-40B4-BE49-F238E27FC236}">
-                <a16:creationId xmlns:a16="http://schemas.microsoft.com/office/drawing/2014/main" xmlns="" id="{9340A7D6-B9A4-4EBB-AD0C-AC636416F907}"/>
+                <a16:creationId xmlns:a16="http://schemas.microsoft.com/office/drawing/2014/main" id="{9340A7D6-B9A4-4EBB-AD0C-AC636416F907}"/>
               </a:ext>
             </a:extLst>
           </p:cNvPr>
@@ -49450,7 +49702,7 @@
           <p:cNvPr id="149" name="Abgerundetes Rechteck 70">
             <a:extLst>
               <a:ext uri="{FF2B5EF4-FFF2-40B4-BE49-F238E27FC236}">
-                <a16:creationId xmlns:a16="http://schemas.microsoft.com/office/drawing/2014/main" xmlns="" id="{EA69C895-4F6F-41F3-AF27-B47CC27810B0}"/>
+                <a16:creationId xmlns:a16="http://schemas.microsoft.com/office/drawing/2014/main" id="{EA69C895-4F6F-41F3-AF27-B47CC27810B0}"/>
               </a:ext>
             </a:extLst>
           </p:cNvPr>
@@ -49506,7 +49758,7 @@
           <p:cNvPr id="150" name="Textfeld 149">
             <a:extLst>
               <a:ext uri="{FF2B5EF4-FFF2-40B4-BE49-F238E27FC236}">
-                <a16:creationId xmlns:a16="http://schemas.microsoft.com/office/drawing/2014/main" xmlns="" id="{35E3BB20-ACCF-49D7-B8AD-8A30D7F58526}"/>
+                <a16:creationId xmlns:a16="http://schemas.microsoft.com/office/drawing/2014/main" id="{35E3BB20-ACCF-49D7-B8AD-8A30D7F58526}"/>
               </a:ext>
             </a:extLst>
           </p:cNvPr>
@@ -49541,7 +49793,7 @@
           <p:cNvPr id="151" name="Auf der gleichen Seite des Rechtecks liegende Ecken abrunden 72">
             <a:extLst>
               <a:ext uri="{FF2B5EF4-FFF2-40B4-BE49-F238E27FC236}">
-                <a16:creationId xmlns:a16="http://schemas.microsoft.com/office/drawing/2014/main" xmlns="" id="{27119B61-5058-4A72-B4AC-D0061F1D4008}"/>
+                <a16:creationId xmlns:a16="http://schemas.microsoft.com/office/drawing/2014/main" id="{27119B61-5058-4A72-B4AC-D0061F1D4008}"/>
               </a:ext>
             </a:extLst>
           </p:cNvPr>
@@ -49604,7 +49856,7 @@
           <p:cNvPr id="152" name="Rechteck 151">
             <a:extLst>
               <a:ext uri="{FF2B5EF4-FFF2-40B4-BE49-F238E27FC236}">
-                <a16:creationId xmlns:a16="http://schemas.microsoft.com/office/drawing/2014/main" xmlns="" id="{2D5E61A0-4DF7-437C-9477-A9BF2B786AB4}"/>
+                <a16:creationId xmlns:a16="http://schemas.microsoft.com/office/drawing/2014/main" id="{2D5E61A0-4DF7-437C-9477-A9BF2B786AB4}"/>
               </a:ext>
             </a:extLst>
           </p:cNvPr>
@@ -49668,7 +49920,7 @@
           <p:cNvPr id="4" name="Textfeld 3">
             <a:extLst>
               <a:ext uri="{FF2B5EF4-FFF2-40B4-BE49-F238E27FC236}">
-                <a16:creationId xmlns:a16="http://schemas.microsoft.com/office/drawing/2014/main" xmlns="" id="{99209DB7-0909-491E-B208-CC75007E4A66}"/>
+                <a16:creationId xmlns:a16="http://schemas.microsoft.com/office/drawing/2014/main" id="{99209DB7-0909-491E-B208-CC75007E4A66}"/>
               </a:ext>
             </a:extLst>
           </p:cNvPr>
@@ -49716,7 +49968,7 @@
           <p:cNvPr id="5" name="Rechteck 4">
             <a:extLst>
               <a:ext uri="{FF2B5EF4-FFF2-40B4-BE49-F238E27FC236}">
-                <a16:creationId xmlns:a16="http://schemas.microsoft.com/office/drawing/2014/main" xmlns="" id="{2BA0F6F9-39B9-4B22-B1B7-19E9041C5905}"/>
+                <a16:creationId xmlns:a16="http://schemas.microsoft.com/office/drawing/2014/main" id="{2BA0F6F9-39B9-4B22-B1B7-19E9041C5905}"/>
               </a:ext>
             </a:extLst>
           </p:cNvPr>
@@ -49770,7 +50022,7 @@
           <p:cNvPr id="6" name="Abgerundetes Rechteck 70">
             <a:extLst>
               <a:ext uri="{FF2B5EF4-FFF2-40B4-BE49-F238E27FC236}">
-                <a16:creationId xmlns:a16="http://schemas.microsoft.com/office/drawing/2014/main" xmlns="" id="{7D8DB6A1-0DC1-401F-BFAD-7EA57F74C3F2}"/>
+                <a16:creationId xmlns:a16="http://schemas.microsoft.com/office/drawing/2014/main" id="{7D8DB6A1-0DC1-401F-BFAD-7EA57F74C3F2}"/>
               </a:ext>
             </a:extLst>
           </p:cNvPr>
@@ -49826,7 +50078,7 @@
           <p:cNvPr id="8" name="Textfeld 7">
             <a:extLst>
               <a:ext uri="{FF2B5EF4-FFF2-40B4-BE49-F238E27FC236}">
-                <a16:creationId xmlns:a16="http://schemas.microsoft.com/office/drawing/2014/main" xmlns="" id="{C5D99700-8BEB-4141-857A-6952C9E836DF}"/>
+                <a16:creationId xmlns:a16="http://schemas.microsoft.com/office/drawing/2014/main" id="{C5D99700-8BEB-4141-857A-6952C9E836DF}"/>
               </a:ext>
             </a:extLst>
           </p:cNvPr>
@@ -49861,7 +50113,7 @@
           <p:cNvPr id="13" name="Auf der gleichen Seite des Rechtecks liegende Ecken abrunden 72">
             <a:extLst>
               <a:ext uri="{FF2B5EF4-FFF2-40B4-BE49-F238E27FC236}">
-                <a16:creationId xmlns:a16="http://schemas.microsoft.com/office/drawing/2014/main" xmlns="" id="{55C992B6-DDB7-4D3A-94A9-12AC38726221}"/>
+                <a16:creationId xmlns:a16="http://schemas.microsoft.com/office/drawing/2014/main" id="{55C992B6-DDB7-4D3A-94A9-12AC38726221}"/>
               </a:ext>
             </a:extLst>
           </p:cNvPr>
@@ -49924,7 +50176,7 @@
           <p:cNvPr id="14" name="Rechteck 13">
             <a:extLst>
               <a:ext uri="{FF2B5EF4-FFF2-40B4-BE49-F238E27FC236}">
-                <a16:creationId xmlns:a16="http://schemas.microsoft.com/office/drawing/2014/main" xmlns="" id="{D0FEB6D6-0ECB-439E-A5FC-5992B11A907F}"/>
+                <a16:creationId xmlns:a16="http://schemas.microsoft.com/office/drawing/2014/main" id="{D0FEB6D6-0ECB-439E-A5FC-5992B11A907F}"/>
               </a:ext>
             </a:extLst>
           </p:cNvPr>
@@ -49988,7 +50240,7 @@
           <p:cNvPr id="15" name="Auf der gleichen Seite des Rechtecks liegende Ecken abrunden 49">
             <a:extLst>
               <a:ext uri="{FF2B5EF4-FFF2-40B4-BE49-F238E27FC236}">
-                <a16:creationId xmlns:a16="http://schemas.microsoft.com/office/drawing/2014/main" xmlns="" id="{06F28DAC-7E3C-492D-A119-0E3215AEB2DA}"/>
+                <a16:creationId xmlns:a16="http://schemas.microsoft.com/office/drawing/2014/main" id="{06F28DAC-7E3C-492D-A119-0E3215AEB2DA}"/>
               </a:ext>
             </a:extLst>
           </p:cNvPr>
@@ -50045,7 +50297,7 @@
           <p:cNvPr id="16" name="Abgerundetes Rechteck 41">
             <a:extLst>
               <a:ext uri="{FF2B5EF4-FFF2-40B4-BE49-F238E27FC236}">
-                <a16:creationId xmlns:a16="http://schemas.microsoft.com/office/drawing/2014/main" xmlns="" id="{3E4B531E-8C37-4FE2-BD6F-DCE2F77F721E}"/>
+                <a16:creationId xmlns:a16="http://schemas.microsoft.com/office/drawing/2014/main" id="{3E4B531E-8C37-4FE2-BD6F-DCE2F77F721E}"/>
               </a:ext>
             </a:extLst>
           </p:cNvPr>
@@ -50101,7 +50353,7 @@
           <p:cNvPr id="17" name="Abgerundetes Rechteck 41">
             <a:extLst>
               <a:ext uri="{FF2B5EF4-FFF2-40B4-BE49-F238E27FC236}">
-                <a16:creationId xmlns:a16="http://schemas.microsoft.com/office/drawing/2014/main" xmlns="" id="{D5C7E359-0400-4E1A-9975-7E075B853D5C}"/>
+                <a16:creationId xmlns:a16="http://schemas.microsoft.com/office/drawing/2014/main" id="{D5C7E359-0400-4E1A-9975-7E075B853D5C}"/>
               </a:ext>
             </a:extLst>
           </p:cNvPr>
@@ -50157,7 +50409,7 @@
           <p:cNvPr id="19" name="Textfeld 18">
             <a:extLst>
               <a:ext uri="{FF2B5EF4-FFF2-40B4-BE49-F238E27FC236}">
-                <a16:creationId xmlns:a16="http://schemas.microsoft.com/office/drawing/2014/main" xmlns="" id="{51CF6C6F-60F9-4139-9BA0-4F591C80B5CD}"/>
+                <a16:creationId xmlns:a16="http://schemas.microsoft.com/office/drawing/2014/main" id="{51CF6C6F-60F9-4139-9BA0-4F591C80B5CD}"/>
               </a:ext>
             </a:extLst>
           </p:cNvPr>
@@ -50196,7 +50448,7 @@
           <p:cNvPr id="20" name="Textfeld 19">
             <a:extLst>
               <a:ext uri="{FF2B5EF4-FFF2-40B4-BE49-F238E27FC236}">
-                <a16:creationId xmlns:a16="http://schemas.microsoft.com/office/drawing/2014/main" xmlns="" id="{04B15787-DA14-41D2-9715-C1BC278E1ECB}"/>
+                <a16:creationId xmlns:a16="http://schemas.microsoft.com/office/drawing/2014/main" id="{04B15787-DA14-41D2-9715-C1BC278E1ECB}"/>
               </a:ext>
             </a:extLst>
           </p:cNvPr>
@@ -50231,7 +50483,7 @@
           <p:cNvPr id="21" name="Textfeld 20">
             <a:extLst>
               <a:ext uri="{FF2B5EF4-FFF2-40B4-BE49-F238E27FC236}">
-                <a16:creationId xmlns:a16="http://schemas.microsoft.com/office/drawing/2014/main" xmlns="" id="{ED9C423E-A25B-4AC8-9558-A2F86F09B667}"/>
+                <a16:creationId xmlns:a16="http://schemas.microsoft.com/office/drawing/2014/main" id="{ED9C423E-A25B-4AC8-9558-A2F86F09B667}"/>
               </a:ext>
             </a:extLst>
           </p:cNvPr>
@@ -50267,7 +50519,7 @@
           <p:cNvPr id="22" name="Auf der gleichen Seite des Rechtecks liegende Ecken abrunden 72">
             <a:extLst>
               <a:ext uri="{FF2B5EF4-FFF2-40B4-BE49-F238E27FC236}">
-                <a16:creationId xmlns:a16="http://schemas.microsoft.com/office/drawing/2014/main" xmlns="" id="{F5252EE2-9683-454A-8190-3471D4BADAC5}"/>
+                <a16:creationId xmlns:a16="http://schemas.microsoft.com/office/drawing/2014/main" id="{F5252EE2-9683-454A-8190-3471D4BADAC5}"/>
               </a:ext>
             </a:extLst>
           </p:cNvPr>
@@ -50330,7 +50582,7 @@
           <p:cNvPr id="23" name="Rechteck 22">
             <a:extLst>
               <a:ext uri="{FF2B5EF4-FFF2-40B4-BE49-F238E27FC236}">
-                <a16:creationId xmlns:a16="http://schemas.microsoft.com/office/drawing/2014/main" xmlns="" id="{0900E0A5-16B7-4BC5-8909-0A54C1AACFE4}"/>
+                <a16:creationId xmlns:a16="http://schemas.microsoft.com/office/drawing/2014/main" id="{0900E0A5-16B7-4BC5-8909-0A54C1AACFE4}"/>
               </a:ext>
             </a:extLst>
           </p:cNvPr>
@@ -50394,7 +50646,7 @@
           <p:cNvPr id="24" name="Textfeld 23">
             <a:extLst>
               <a:ext uri="{FF2B5EF4-FFF2-40B4-BE49-F238E27FC236}">
-                <a16:creationId xmlns:a16="http://schemas.microsoft.com/office/drawing/2014/main" xmlns="" id="{E2B05D16-00B4-47D1-B087-F2E7D0F1D36A}"/>
+                <a16:creationId xmlns:a16="http://schemas.microsoft.com/office/drawing/2014/main" id="{E2B05D16-00B4-47D1-B087-F2E7D0F1D36A}"/>
               </a:ext>
             </a:extLst>
           </p:cNvPr>
@@ -50429,7 +50681,7 @@
           <p:cNvPr id="25" name="Textfeld 24">
             <a:extLst>
               <a:ext uri="{FF2B5EF4-FFF2-40B4-BE49-F238E27FC236}">
-                <a16:creationId xmlns:a16="http://schemas.microsoft.com/office/drawing/2014/main" xmlns="" id="{25C766CA-CE13-4FBC-81BB-B32FAB18D79C}"/>
+                <a16:creationId xmlns:a16="http://schemas.microsoft.com/office/drawing/2014/main" id="{25C766CA-CE13-4FBC-81BB-B32FAB18D79C}"/>
               </a:ext>
             </a:extLst>
           </p:cNvPr>
@@ -50464,7 +50716,7 @@
           <p:cNvPr id="26" name="Rechteck 25">
             <a:extLst>
               <a:ext uri="{FF2B5EF4-FFF2-40B4-BE49-F238E27FC236}">
-                <a16:creationId xmlns:a16="http://schemas.microsoft.com/office/drawing/2014/main" xmlns="" id="{67723523-BCA2-494C-B745-E4EA10797C43}"/>
+                <a16:creationId xmlns:a16="http://schemas.microsoft.com/office/drawing/2014/main" id="{67723523-BCA2-494C-B745-E4EA10797C43}"/>
               </a:ext>
             </a:extLst>
           </p:cNvPr>
@@ -50527,7 +50779,7 @@
           <p:cNvPr id="27" name="Rechteck 26">
             <a:extLst>
               <a:ext uri="{FF2B5EF4-FFF2-40B4-BE49-F238E27FC236}">
-                <a16:creationId xmlns:a16="http://schemas.microsoft.com/office/drawing/2014/main" xmlns="" id="{FD9C6720-90AC-4CE3-A1DD-EF9861A7A310}"/>
+                <a16:creationId xmlns:a16="http://schemas.microsoft.com/office/drawing/2014/main" id="{FD9C6720-90AC-4CE3-A1DD-EF9861A7A310}"/>
               </a:ext>
             </a:extLst>
           </p:cNvPr>
@@ -50590,7 +50842,7 @@
           <p:cNvPr id="29" name="Abgerundetes Rechteck 41">
             <a:extLst>
               <a:ext uri="{FF2B5EF4-FFF2-40B4-BE49-F238E27FC236}">
-                <a16:creationId xmlns:a16="http://schemas.microsoft.com/office/drawing/2014/main" xmlns="" id="{5B5AD3D6-DD36-44BB-BC1F-CEB2569BA1F8}"/>
+                <a16:creationId xmlns:a16="http://schemas.microsoft.com/office/drawing/2014/main" id="{5B5AD3D6-DD36-44BB-BC1F-CEB2569BA1F8}"/>
               </a:ext>
             </a:extLst>
           </p:cNvPr>
@@ -50646,7 +50898,7 @@
           <p:cNvPr id="30" name="Textfeld 29">
             <a:extLst>
               <a:ext uri="{FF2B5EF4-FFF2-40B4-BE49-F238E27FC236}">
-                <a16:creationId xmlns:a16="http://schemas.microsoft.com/office/drawing/2014/main" xmlns="" id="{C788E9F7-6A2F-4A36-A446-862BEE52108E}"/>
+                <a16:creationId xmlns:a16="http://schemas.microsoft.com/office/drawing/2014/main" id="{C788E9F7-6A2F-4A36-A446-862BEE52108E}"/>
               </a:ext>
             </a:extLst>
           </p:cNvPr>
@@ -50681,7 +50933,7 @@
           <p:cNvPr id="31" name="Textfeld 30">
             <a:extLst>
               <a:ext uri="{FF2B5EF4-FFF2-40B4-BE49-F238E27FC236}">
-                <a16:creationId xmlns:a16="http://schemas.microsoft.com/office/drawing/2014/main" xmlns="" id="{217315E3-EB2C-4C40-9CC1-CBC7CD177B32}"/>
+                <a16:creationId xmlns:a16="http://schemas.microsoft.com/office/drawing/2014/main" id="{217315E3-EB2C-4C40-9CC1-CBC7CD177B32}"/>
               </a:ext>
             </a:extLst>
           </p:cNvPr>
@@ -50716,7 +50968,7 @@
           <p:cNvPr id="229" name="Rechteck 228">
             <a:extLst>
               <a:ext uri="{FF2B5EF4-FFF2-40B4-BE49-F238E27FC236}">
-                <a16:creationId xmlns:a16="http://schemas.microsoft.com/office/drawing/2014/main" xmlns="" id="{0A6227C3-DD89-47AD-BA8D-3347E919DDBD}"/>
+                <a16:creationId xmlns:a16="http://schemas.microsoft.com/office/drawing/2014/main" id="{0A6227C3-DD89-47AD-BA8D-3347E919DDBD}"/>
               </a:ext>
             </a:extLst>
           </p:cNvPr>
@@ -50779,7 +51031,7 @@
           <p:cNvPr id="230" name="Rechteck 229">
             <a:extLst>
               <a:ext uri="{FF2B5EF4-FFF2-40B4-BE49-F238E27FC236}">
-                <a16:creationId xmlns:a16="http://schemas.microsoft.com/office/drawing/2014/main" xmlns="" id="{A4EC7B08-9856-439F-8F0A-453E0800FCDE}"/>
+                <a16:creationId xmlns:a16="http://schemas.microsoft.com/office/drawing/2014/main" id="{A4EC7B08-9856-439F-8F0A-453E0800FCDE}"/>
               </a:ext>
             </a:extLst>
           </p:cNvPr>
@@ -50842,7 +51094,7 @@
           <p:cNvPr id="232" name="Auf der gleichen Seite des Rechtecks liegende Ecken abrunden 60">
             <a:extLst>
               <a:ext uri="{FF2B5EF4-FFF2-40B4-BE49-F238E27FC236}">
-                <a16:creationId xmlns:a16="http://schemas.microsoft.com/office/drawing/2014/main" xmlns="" id="{BD880AB4-597E-4540-BE93-C23AD386DD06}"/>
+                <a16:creationId xmlns:a16="http://schemas.microsoft.com/office/drawing/2014/main" id="{BD880AB4-597E-4540-BE93-C23AD386DD06}"/>
               </a:ext>
             </a:extLst>
           </p:cNvPr>
@@ -50899,7 +51151,7 @@
           <p:cNvPr id="93" name="Gerader Verbinder 92">
             <a:extLst>
               <a:ext uri="{FF2B5EF4-FFF2-40B4-BE49-F238E27FC236}">
-                <a16:creationId xmlns:a16="http://schemas.microsoft.com/office/drawing/2014/main" xmlns="" id="{66352FB1-4C84-4408-8E60-1CE8041E9A6F}"/>
+                <a16:creationId xmlns:a16="http://schemas.microsoft.com/office/drawing/2014/main" id="{66352FB1-4C84-4408-8E60-1CE8041E9A6F}"/>
               </a:ext>
             </a:extLst>
           </p:cNvPr>
@@ -50943,7 +51195,7 @@
           <p:cNvPr id="18" name="Raute 17">
             <a:extLst>
               <a:ext uri="{FF2B5EF4-FFF2-40B4-BE49-F238E27FC236}">
-                <a16:creationId xmlns:a16="http://schemas.microsoft.com/office/drawing/2014/main" xmlns="" id="{9D630159-9EF6-4F49-8EC5-0A7E9C5CB6F9}"/>
+                <a16:creationId xmlns:a16="http://schemas.microsoft.com/office/drawing/2014/main" id="{9D630159-9EF6-4F49-8EC5-0A7E9C5CB6F9}"/>
               </a:ext>
             </a:extLst>
           </p:cNvPr>
@@ -50997,7 +51249,7 @@
           <p:cNvPr id="234" name="Textfeld 233">
             <a:extLst>
               <a:ext uri="{FF2B5EF4-FFF2-40B4-BE49-F238E27FC236}">
-                <a16:creationId xmlns:a16="http://schemas.microsoft.com/office/drawing/2014/main" xmlns="" id="{8E997239-1E92-4D08-83F6-BD185DBBC774}"/>
+                <a16:creationId xmlns:a16="http://schemas.microsoft.com/office/drawing/2014/main" id="{8E997239-1E92-4D08-83F6-BD185DBBC774}"/>
               </a:ext>
             </a:extLst>
           </p:cNvPr>
@@ -51032,7 +51284,7 @@
           <p:cNvPr id="235" name="Textfeld 234">
             <a:extLst>
               <a:ext uri="{FF2B5EF4-FFF2-40B4-BE49-F238E27FC236}">
-                <a16:creationId xmlns:a16="http://schemas.microsoft.com/office/drawing/2014/main" xmlns="" id="{51CCF89F-8278-4CF0-AD35-CDA3D488F98D}"/>
+                <a16:creationId xmlns:a16="http://schemas.microsoft.com/office/drawing/2014/main" id="{51CCF89F-8278-4CF0-AD35-CDA3D488F98D}"/>
               </a:ext>
             </a:extLst>
           </p:cNvPr>
@@ -51067,7 +51319,7 @@
           <p:cNvPr id="236" name="Rechteck 235">
             <a:extLst>
               <a:ext uri="{FF2B5EF4-FFF2-40B4-BE49-F238E27FC236}">
-                <a16:creationId xmlns:a16="http://schemas.microsoft.com/office/drawing/2014/main" xmlns="" id="{150413BE-219C-41DF-9FF6-386BE7C64FD6}"/>
+                <a16:creationId xmlns:a16="http://schemas.microsoft.com/office/drawing/2014/main" id="{150413BE-219C-41DF-9FF6-386BE7C64FD6}"/>
               </a:ext>
             </a:extLst>
           </p:cNvPr>
@@ -51130,7 +51382,7 @@
           <p:cNvPr id="237" name="Rechteck 236">
             <a:extLst>
               <a:ext uri="{FF2B5EF4-FFF2-40B4-BE49-F238E27FC236}">
-                <a16:creationId xmlns:a16="http://schemas.microsoft.com/office/drawing/2014/main" xmlns="" id="{711BB72B-4E37-45BB-B60F-370BD1ACEB08}"/>
+                <a16:creationId xmlns:a16="http://schemas.microsoft.com/office/drawing/2014/main" id="{711BB72B-4E37-45BB-B60F-370BD1ACEB08}"/>
               </a:ext>
             </a:extLst>
           </p:cNvPr>
@@ -51193,7 +51445,7 @@
           <p:cNvPr id="238" name="Abgerundetes Rechteck 70">
             <a:extLst>
               <a:ext uri="{FF2B5EF4-FFF2-40B4-BE49-F238E27FC236}">
-                <a16:creationId xmlns:a16="http://schemas.microsoft.com/office/drawing/2014/main" xmlns="" id="{69121700-5578-4C02-9088-182686BADE0B}"/>
+                <a16:creationId xmlns:a16="http://schemas.microsoft.com/office/drawing/2014/main" id="{69121700-5578-4C02-9088-182686BADE0B}"/>
               </a:ext>
             </a:extLst>
           </p:cNvPr>
@@ -51249,7 +51501,7 @@
           <p:cNvPr id="239" name="Textfeld 238">
             <a:extLst>
               <a:ext uri="{FF2B5EF4-FFF2-40B4-BE49-F238E27FC236}">
-                <a16:creationId xmlns:a16="http://schemas.microsoft.com/office/drawing/2014/main" xmlns="" id="{C9AC2B91-5B62-4859-9EEC-E4692BD08812}"/>
+                <a16:creationId xmlns:a16="http://schemas.microsoft.com/office/drawing/2014/main" id="{C9AC2B91-5B62-4859-9EEC-E4692BD08812}"/>
               </a:ext>
             </a:extLst>
           </p:cNvPr>
@@ -51284,7 +51536,7 @@
           <p:cNvPr id="240" name="Auf der gleichen Seite des Rechtecks liegende Ecken abrunden 72">
             <a:extLst>
               <a:ext uri="{FF2B5EF4-FFF2-40B4-BE49-F238E27FC236}">
-                <a16:creationId xmlns:a16="http://schemas.microsoft.com/office/drawing/2014/main" xmlns="" id="{5086814D-7771-4C28-88A4-39BCDF0802EF}"/>
+                <a16:creationId xmlns:a16="http://schemas.microsoft.com/office/drawing/2014/main" id="{5086814D-7771-4C28-88A4-39BCDF0802EF}"/>
               </a:ext>
             </a:extLst>
           </p:cNvPr>
@@ -51347,7 +51599,7 @@
           <p:cNvPr id="241" name="Rechteck 240">
             <a:extLst>
               <a:ext uri="{FF2B5EF4-FFF2-40B4-BE49-F238E27FC236}">
-                <a16:creationId xmlns:a16="http://schemas.microsoft.com/office/drawing/2014/main" xmlns="" id="{76EE63E9-628B-4B96-956E-C6E32BC7F2E9}"/>
+                <a16:creationId xmlns:a16="http://schemas.microsoft.com/office/drawing/2014/main" id="{76EE63E9-628B-4B96-956E-C6E32BC7F2E9}"/>
               </a:ext>
             </a:extLst>
           </p:cNvPr>
@@ -52010,6 +52262,15 @@
 </file>
 
 <file path=customXml/item1.xml><?xml version="1.0" encoding="utf-8"?>
+<?mso-contentType ?>
+<FormTemplates xmlns="http://schemas.microsoft.com/sharepoint/v3/contenttype/forms">
+  <Display>DocumentLibraryForm</Display>
+  <Edit>DocumentLibraryForm</Edit>
+  <New>DocumentLibraryForm</New>
+</FormTemplates>
+</file>
+
+<file path=customXml/item2.xml><?xml version="1.0" encoding="utf-8"?>
 <ct:contentTypeSchema xmlns:ct="http://schemas.microsoft.com/office/2006/metadata/contentType" xmlns:ma="http://schemas.microsoft.com/office/2006/metadata/properties/metaAttributes" ct:_="" ma:_="" ma:contentTypeName="Dokument" ma:contentTypeID="0x010100BC5A43B739B3F8438D3442D7065E2F03" ma:contentTypeVersion="8" ma:contentTypeDescription="Ein neues Dokument erstellen." ma:contentTypeScope="" ma:versionID="8ebb2eb0dcccb9c926e45f2ac2a7f64a">
   <xsd:schema xmlns:xsd="http://www.w3.org/2001/XMLSchema" xmlns:xs="http://www.w3.org/2001/XMLSchema" xmlns:p="http://schemas.microsoft.com/office/2006/metadata/properties" xmlns:ns2="814c5c6d-65e8-4717-9aee-c06d9d584814" targetNamespace="http://schemas.microsoft.com/office/2006/metadata/properties" ma:root="true" ma:fieldsID="e566a8717d9f292f1efde37085575ef2" ns2:_="">
     <xsd:import namespace="814c5c6d-65e8-4717-9aee-c06d9d584814"/>
@@ -52181,15 +52442,6 @@
 </ct:contentTypeSchema>
 </file>
 
-<file path=customXml/item2.xml><?xml version="1.0" encoding="utf-8"?>
-<?mso-contentType ?>
-<FormTemplates xmlns="http://schemas.microsoft.com/sharepoint/v3/contenttype/forms">
-  <Display>DocumentLibraryForm</Display>
-  <Edit>DocumentLibraryForm</Edit>
-  <New>DocumentLibraryForm</New>
-</FormTemplates>
-</file>
-
 <file path=customXml/item3.xml><?xml version="1.0" encoding="utf-8"?>
 <p:properties xmlns:p="http://schemas.microsoft.com/office/2006/metadata/properties" xmlns:xsi="http://www.w3.org/2001/XMLSchema-instance" xmlns:pc="http://schemas.microsoft.com/office/infopath/2007/PartnerControls">
   <documentManagement/>
@@ -52197,6 +52449,14 @@
 </file>
 
 <file path=customXml/itemProps1.xml><?xml version="1.0" encoding="utf-8"?>
+<ds:datastoreItem xmlns:ds="http://schemas.openxmlformats.org/officeDocument/2006/customXml" ds:itemID="{4DF6DB84-0773-4571-961D-F1D872F4F170}">
+  <ds:schemaRefs>
+    <ds:schemaRef ds:uri="http://schemas.microsoft.com/sharepoint/v3/contenttype/forms"/>
+  </ds:schemaRefs>
+</ds:datastoreItem>
+</file>
+
+<file path=customXml/itemProps2.xml><?xml version="1.0" encoding="utf-8"?>
 <ds:datastoreItem xmlns:ds="http://schemas.openxmlformats.org/officeDocument/2006/customXml" ds:itemID="{3AF020B6-5615-4388-B89B-B3204D3C239E}">
   <ds:schemaRefs>
     <ds:schemaRef ds:uri="814c5c6d-65e8-4717-9aee-c06d9d584814"/>
@@ -52214,14 +52474,6 @@
 </ds:datastoreItem>
 </file>
 
-<file path=customXml/itemProps2.xml><?xml version="1.0" encoding="utf-8"?>
-<ds:datastoreItem xmlns:ds="http://schemas.openxmlformats.org/officeDocument/2006/customXml" ds:itemID="{4DF6DB84-0773-4571-961D-F1D872F4F170}">
-  <ds:schemaRefs>
-    <ds:schemaRef ds:uri="http://schemas.microsoft.com/sharepoint/v3/contenttype/forms"/>
-  </ds:schemaRefs>
-</ds:datastoreItem>
-</file>
-
 <file path=customXml/itemProps3.xml><?xml version="1.0" encoding="utf-8"?>
 <ds:datastoreItem xmlns:ds="http://schemas.openxmlformats.org/officeDocument/2006/customXml" ds:itemID="{1EFBCB5E-DECB-4440-972A-0F21260E2935}">
   <ds:schemaRefs>

--- a/specifications/specman-layouts.pptx
+++ b/specifications/specman-layouts.pptx
@@ -5,7 +5,7 @@
     <p:sldMasterId id="2147483648" r:id="rId4"/>
   </p:sldMasterIdLst>
   <p:notesMasterIdLst>
-    <p:notesMasterId r:id="rId23"/>
+    <p:notesMasterId r:id="rId24"/>
   </p:notesMasterIdLst>
   <p:sldIdLst>
     <p:sldId id="259" r:id="rId5"/>
@@ -26,6 +26,7 @@
     <p:sldId id="278" r:id="rId20"/>
     <p:sldId id="279" r:id="rId21"/>
     <p:sldId id="260" r:id="rId22"/>
+    <p:sldId id="280" r:id="rId23"/>
   </p:sldIdLst>
   <p:sldSz cx="12192000" cy="6858000"/>
   <p:notesSz cx="6858000" cy="9144000"/>
@@ -251,7 +252,7 @@
           <a:p>
             <a:fld id="{68297BE5-535F-4A47-ACDC-4AEBF6241C77}" type="datetimeFigureOut">
               <a:rPr lang="de-DE" smtClean="0"/>
-              <a:t>01.10.2026</a:t>
+              <a:t>02.10.2026</a:t>
             </a:fld>
             <a:endParaRPr lang="de-DE"/>
           </a:p>
@@ -749,7 +750,7 @@
           <a:p>
             <a:fld id="{9D2EA739-B840-41DB-9666-B44BD9009BC9}" type="datetimeFigureOut">
               <a:rPr lang="de-DE" smtClean="0"/>
-              <a:t>01.10.2026</a:t>
+              <a:t>02.10.2026</a:t>
             </a:fld>
             <a:endParaRPr lang="de-DE"/>
           </a:p>
@@ -947,7 +948,7 @@
           <a:p>
             <a:fld id="{9D2EA739-B840-41DB-9666-B44BD9009BC9}" type="datetimeFigureOut">
               <a:rPr lang="de-DE" smtClean="0"/>
-              <a:t>01.10.2026</a:t>
+              <a:t>02.10.2026</a:t>
             </a:fld>
             <a:endParaRPr lang="de-DE"/>
           </a:p>
@@ -1155,7 +1156,7 @@
           <a:p>
             <a:fld id="{9D2EA739-B840-41DB-9666-B44BD9009BC9}" type="datetimeFigureOut">
               <a:rPr lang="de-DE" smtClean="0"/>
-              <a:t>01.10.2026</a:t>
+              <a:t>02.10.2026</a:t>
             </a:fld>
             <a:endParaRPr lang="de-DE"/>
           </a:p>
@@ -1353,7 +1354,7 @@
           <a:p>
             <a:fld id="{9D2EA739-B840-41DB-9666-B44BD9009BC9}" type="datetimeFigureOut">
               <a:rPr lang="de-DE" smtClean="0"/>
-              <a:t>01.10.2026</a:t>
+              <a:t>02.10.2026</a:t>
             </a:fld>
             <a:endParaRPr lang="de-DE"/>
           </a:p>
@@ -1628,7 +1629,7 @@
           <a:p>
             <a:fld id="{9D2EA739-B840-41DB-9666-B44BD9009BC9}" type="datetimeFigureOut">
               <a:rPr lang="de-DE" smtClean="0"/>
-              <a:t>01.10.2026</a:t>
+              <a:t>02.10.2026</a:t>
             </a:fld>
             <a:endParaRPr lang="de-DE"/>
           </a:p>
@@ -1893,7 +1894,7 @@
           <a:p>
             <a:fld id="{9D2EA739-B840-41DB-9666-B44BD9009BC9}" type="datetimeFigureOut">
               <a:rPr lang="de-DE" smtClean="0"/>
-              <a:t>01.10.2026</a:t>
+              <a:t>02.10.2026</a:t>
             </a:fld>
             <a:endParaRPr lang="de-DE"/>
           </a:p>
@@ -2305,7 +2306,7 @@
           <a:p>
             <a:fld id="{9D2EA739-B840-41DB-9666-B44BD9009BC9}" type="datetimeFigureOut">
               <a:rPr lang="de-DE" smtClean="0"/>
-              <a:t>01.10.2026</a:t>
+              <a:t>02.10.2026</a:t>
             </a:fld>
             <a:endParaRPr lang="de-DE"/>
           </a:p>
@@ -2446,7 +2447,7 @@
           <a:p>
             <a:fld id="{9D2EA739-B840-41DB-9666-B44BD9009BC9}" type="datetimeFigureOut">
               <a:rPr lang="de-DE" smtClean="0"/>
-              <a:t>01.10.2026</a:t>
+              <a:t>02.10.2026</a:t>
             </a:fld>
             <a:endParaRPr lang="de-DE"/>
           </a:p>
@@ -2559,7 +2560,7 @@
           <a:p>
             <a:fld id="{9D2EA739-B840-41DB-9666-B44BD9009BC9}" type="datetimeFigureOut">
               <a:rPr lang="de-DE" smtClean="0"/>
-              <a:t>01.10.2026</a:t>
+              <a:t>02.10.2026</a:t>
             </a:fld>
             <a:endParaRPr lang="de-DE"/>
           </a:p>
@@ -2870,7 +2871,7 @@
           <a:p>
             <a:fld id="{9D2EA739-B840-41DB-9666-B44BD9009BC9}" type="datetimeFigureOut">
               <a:rPr lang="de-DE" smtClean="0"/>
-              <a:t>01.10.2026</a:t>
+              <a:t>02.10.2026</a:t>
             </a:fld>
             <a:endParaRPr lang="de-DE"/>
           </a:p>
@@ -3158,7 +3159,7 @@
           <a:p>
             <a:fld id="{9D2EA739-B840-41DB-9666-B44BD9009BC9}" type="datetimeFigureOut">
               <a:rPr lang="de-DE" smtClean="0"/>
-              <a:t>01.10.2026</a:t>
+              <a:t>02.10.2026</a:t>
             </a:fld>
             <a:endParaRPr lang="de-DE"/>
           </a:p>
@@ -3399,7 +3400,7 @@
           <a:p>
             <a:fld id="{9D2EA739-B840-41DB-9666-B44BD9009BC9}" type="datetimeFigureOut">
               <a:rPr lang="de-DE" smtClean="0"/>
-              <a:t>01.10.2026</a:t>
+              <a:t>02.10.2026</a:t>
             </a:fld>
             <a:endParaRPr lang="de-DE"/>
           </a:p>
@@ -27872,6 +27873,2377 @@
 </p:sld>
 </file>
 
+<file path=ppt/slides/slide19.xml><?xml version="1.0" encoding="utf-8"?>
+<p:sld xmlns:a="http://schemas.openxmlformats.org/drawingml/2006/main" xmlns:r="http://schemas.openxmlformats.org/officeDocument/2006/relationships" xmlns:p="http://schemas.openxmlformats.org/presentationml/2006/main">
+  <p:cSld>
+    <p:spTree>
+      <p:nvGrpSpPr>
+        <p:cNvPr id="1" name=""/>
+        <p:cNvGrpSpPr/>
+        <p:nvPr/>
+      </p:nvGrpSpPr>
+      <p:grpSpPr>
+        <a:xfrm>
+          <a:off x="0" y="0"/>
+          <a:ext cx="0" cy="0"/>
+          <a:chOff x="0" y="0"/>
+          <a:chExt cx="0" cy="0"/>
+        </a:xfrm>
+      </p:grpSpPr>
+      <p:sp>
+        <p:nvSpPr>
+          <p:cNvPr id="40" name="Rechteck: abgerundete Ecken 39">
+            <a:extLst>
+              <a:ext uri="{FF2B5EF4-FFF2-40B4-BE49-F238E27FC236}">
+                <a16:creationId xmlns:a16="http://schemas.microsoft.com/office/drawing/2014/main" id="{6221983C-B8B6-BDFA-2303-BC9292118E8F}"/>
+              </a:ext>
+            </a:extLst>
+          </p:cNvPr>
+          <p:cNvSpPr/>
+          <p:nvPr/>
+        </p:nvSpPr>
+        <p:spPr>
+          <a:xfrm>
+            <a:off x="3597401" y="2528557"/>
+            <a:ext cx="1800000" cy="1800000"/>
+          </a:xfrm>
+          <a:prstGeom prst="roundRect">
+            <a:avLst>
+              <a:gd name="adj" fmla="val 3261"/>
+            </a:avLst>
+          </a:prstGeom>
+          <a:solidFill>
+            <a:schemeClr val="bg1"/>
+          </a:solidFill>
+          <a:ln>
+            <a:solidFill>
+              <a:schemeClr val="bg1">
+                <a:lumMod val="65000"/>
+              </a:schemeClr>
+            </a:solidFill>
+          </a:ln>
+        </p:spPr>
+        <p:style>
+          <a:lnRef idx="2">
+            <a:schemeClr val="accent1">
+              <a:shade val="15000"/>
+            </a:schemeClr>
+          </a:lnRef>
+          <a:fillRef idx="1">
+            <a:schemeClr val="accent1"/>
+          </a:fillRef>
+          <a:effectRef idx="0">
+            <a:schemeClr val="accent1"/>
+          </a:effectRef>
+          <a:fontRef idx="minor">
+            <a:schemeClr val="lt1"/>
+          </a:fontRef>
+        </p:style>
+        <p:txBody>
+          <a:bodyPr rtlCol="0" anchor="ctr"/>
+          <a:lstStyle/>
+          <a:p>
+            <a:pPr algn="ctr"/>
+            <a:endParaRPr lang="de-DE"/>
+          </a:p>
+        </p:txBody>
+      </p:sp>
+      <p:sp>
+        <p:nvSpPr>
+          <p:cNvPr id="38" name="Rechteck: abgerundete Ecken 37">
+            <a:extLst>
+              <a:ext uri="{FF2B5EF4-FFF2-40B4-BE49-F238E27FC236}">
+                <a16:creationId xmlns:a16="http://schemas.microsoft.com/office/drawing/2014/main" id="{B203EC54-5F5E-F33D-367E-5A7A6A5D8C78}"/>
+              </a:ext>
+            </a:extLst>
+          </p:cNvPr>
+          <p:cNvSpPr/>
+          <p:nvPr/>
+        </p:nvSpPr>
+        <p:spPr>
+          <a:xfrm>
+            <a:off x="3597401" y="591509"/>
+            <a:ext cx="1800000" cy="1800000"/>
+          </a:xfrm>
+          <a:prstGeom prst="roundRect">
+            <a:avLst>
+              <a:gd name="adj" fmla="val 3261"/>
+            </a:avLst>
+          </a:prstGeom>
+          <a:solidFill>
+            <a:schemeClr val="bg1"/>
+          </a:solidFill>
+          <a:ln>
+            <a:solidFill>
+              <a:schemeClr val="bg1">
+                <a:lumMod val="65000"/>
+              </a:schemeClr>
+            </a:solidFill>
+          </a:ln>
+        </p:spPr>
+        <p:style>
+          <a:lnRef idx="2">
+            <a:schemeClr val="accent1">
+              <a:shade val="15000"/>
+            </a:schemeClr>
+          </a:lnRef>
+          <a:fillRef idx="1">
+            <a:schemeClr val="accent1"/>
+          </a:fillRef>
+          <a:effectRef idx="0">
+            <a:schemeClr val="accent1"/>
+          </a:effectRef>
+          <a:fontRef idx="minor">
+            <a:schemeClr val="lt1"/>
+          </a:fontRef>
+        </p:style>
+        <p:txBody>
+          <a:bodyPr rtlCol="0" anchor="ctr"/>
+          <a:lstStyle/>
+          <a:p>
+            <a:pPr algn="ctr"/>
+            <a:endParaRPr lang="de-DE"/>
+          </a:p>
+        </p:txBody>
+      </p:sp>
+      <p:sp>
+        <p:nvSpPr>
+          <p:cNvPr id="36" name="Rechteck: abgerundete Ecken 35">
+            <a:extLst>
+              <a:ext uri="{FF2B5EF4-FFF2-40B4-BE49-F238E27FC236}">
+                <a16:creationId xmlns:a16="http://schemas.microsoft.com/office/drawing/2014/main" id="{5200B1D6-09DB-DDE0-3B04-6F3FC58B48FD}"/>
+              </a:ext>
+            </a:extLst>
+          </p:cNvPr>
+          <p:cNvSpPr/>
+          <p:nvPr/>
+        </p:nvSpPr>
+        <p:spPr>
+          <a:xfrm>
+            <a:off x="1098225" y="4465605"/>
+            <a:ext cx="1800000" cy="1800000"/>
+          </a:xfrm>
+          <a:prstGeom prst="roundRect">
+            <a:avLst>
+              <a:gd name="adj" fmla="val 2556"/>
+            </a:avLst>
+          </a:prstGeom>
+          <a:solidFill>
+            <a:schemeClr val="bg1"/>
+          </a:solidFill>
+          <a:ln>
+            <a:solidFill>
+              <a:schemeClr val="bg1">
+                <a:lumMod val="65000"/>
+              </a:schemeClr>
+            </a:solidFill>
+          </a:ln>
+        </p:spPr>
+        <p:style>
+          <a:lnRef idx="2">
+            <a:schemeClr val="accent1">
+              <a:shade val="15000"/>
+            </a:schemeClr>
+          </a:lnRef>
+          <a:fillRef idx="1">
+            <a:schemeClr val="accent1"/>
+          </a:fillRef>
+          <a:effectRef idx="0">
+            <a:schemeClr val="accent1"/>
+          </a:effectRef>
+          <a:fontRef idx="minor">
+            <a:schemeClr val="lt1"/>
+          </a:fontRef>
+        </p:style>
+        <p:txBody>
+          <a:bodyPr rtlCol="0" anchor="ctr"/>
+          <a:lstStyle/>
+          <a:p>
+            <a:pPr algn="ctr"/>
+            <a:endParaRPr lang="de-DE"/>
+          </a:p>
+        </p:txBody>
+      </p:sp>
+      <p:sp>
+        <p:nvSpPr>
+          <p:cNvPr id="34" name="Rechteck: abgerundete Ecken 33">
+            <a:extLst>
+              <a:ext uri="{FF2B5EF4-FFF2-40B4-BE49-F238E27FC236}">
+                <a16:creationId xmlns:a16="http://schemas.microsoft.com/office/drawing/2014/main" id="{5DB8D821-309C-8B53-BF71-0700A1A41C98}"/>
+              </a:ext>
+            </a:extLst>
+          </p:cNvPr>
+          <p:cNvSpPr/>
+          <p:nvPr/>
+        </p:nvSpPr>
+        <p:spPr>
+          <a:xfrm>
+            <a:off x="1098225" y="2528557"/>
+            <a:ext cx="1800000" cy="1800000"/>
+          </a:xfrm>
+          <a:prstGeom prst="roundRect">
+            <a:avLst>
+              <a:gd name="adj" fmla="val 3261"/>
+            </a:avLst>
+          </a:prstGeom>
+          <a:solidFill>
+            <a:schemeClr val="bg1"/>
+          </a:solidFill>
+          <a:ln>
+            <a:solidFill>
+              <a:schemeClr val="bg1">
+                <a:lumMod val="65000"/>
+              </a:schemeClr>
+            </a:solidFill>
+          </a:ln>
+        </p:spPr>
+        <p:style>
+          <a:lnRef idx="2">
+            <a:schemeClr val="accent1">
+              <a:shade val="15000"/>
+            </a:schemeClr>
+          </a:lnRef>
+          <a:fillRef idx="1">
+            <a:schemeClr val="accent1"/>
+          </a:fillRef>
+          <a:effectRef idx="0">
+            <a:schemeClr val="accent1"/>
+          </a:effectRef>
+          <a:fontRef idx="minor">
+            <a:schemeClr val="lt1"/>
+          </a:fontRef>
+        </p:style>
+        <p:txBody>
+          <a:bodyPr rtlCol="0" anchor="ctr"/>
+          <a:lstStyle/>
+          <a:p>
+            <a:pPr algn="ctr"/>
+            <a:endParaRPr lang="de-DE"/>
+          </a:p>
+        </p:txBody>
+      </p:sp>
+      <p:sp>
+        <p:nvSpPr>
+          <p:cNvPr id="33" name="Rechteck: abgerundete Ecken 32">
+            <a:extLst>
+              <a:ext uri="{FF2B5EF4-FFF2-40B4-BE49-F238E27FC236}">
+                <a16:creationId xmlns:a16="http://schemas.microsoft.com/office/drawing/2014/main" id="{AADB1F7D-6C6F-6D77-9F62-31D42CEC17F8}"/>
+              </a:ext>
+            </a:extLst>
+          </p:cNvPr>
+          <p:cNvSpPr/>
+          <p:nvPr/>
+        </p:nvSpPr>
+        <p:spPr>
+          <a:xfrm>
+            <a:off x="1098225" y="591509"/>
+            <a:ext cx="1800000" cy="1800000"/>
+          </a:xfrm>
+          <a:prstGeom prst="roundRect">
+            <a:avLst>
+              <a:gd name="adj" fmla="val 3261"/>
+            </a:avLst>
+          </a:prstGeom>
+          <a:solidFill>
+            <a:schemeClr val="bg1"/>
+          </a:solidFill>
+          <a:ln>
+            <a:solidFill>
+              <a:schemeClr val="bg1">
+                <a:lumMod val="65000"/>
+              </a:schemeClr>
+            </a:solidFill>
+          </a:ln>
+        </p:spPr>
+        <p:style>
+          <a:lnRef idx="2">
+            <a:schemeClr val="accent1">
+              <a:shade val="15000"/>
+            </a:schemeClr>
+          </a:lnRef>
+          <a:fillRef idx="1">
+            <a:schemeClr val="accent1"/>
+          </a:fillRef>
+          <a:effectRef idx="0">
+            <a:schemeClr val="accent1"/>
+          </a:effectRef>
+          <a:fontRef idx="minor">
+            <a:schemeClr val="lt1"/>
+          </a:fontRef>
+        </p:style>
+        <p:txBody>
+          <a:bodyPr rtlCol="0" anchor="ctr"/>
+          <a:lstStyle/>
+          <a:p>
+            <a:pPr algn="ctr"/>
+            <a:endParaRPr lang="de-DE"/>
+          </a:p>
+        </p:txBody>
+      </p:sp>
+      <p:sp>
+        <p:nvSpPr>
+          <p:cNvPr id="23" name="Rechteck 22">
+            <a:extLst>
+              <a:ext uri="{FF2B5EF4-FFF2-40B4-BE49-F238E27FC236}">
+                <a16:creationId xmlns:a16="http://schemas.microsoft.com/office/drawing/2014/main" id="{D01EDB23-997C-552F-FD7F-45D1DABA7B96}"/>
+              </a:ext>
+            </a:extLst>
+          </p:cNvPr>
+          <p:cNvSpPr/>
+          <p:nvPr/>
+        </p:nvSpPr>
+        <p:spPr>
+          <a:xfrm>
+            <a:off x="1159751" y="3358976"/>
+            <a:ext cx="789800" cy="669025"/>
+          </a:xfrm>
+          <a:prstGeom prst="rect">
+            <a:avLst/>
+          </a:prstGeom>
+          <a:solidFill>
+            <a:schemeClr val="bg1">
+              <a:lumMod val="85000"/>
+            </a:schemeClr>
+          </a:solidFill>
+          <a:ln>
+            <a:noFill/>
+          </a:ln>
+        </p:spPr>
+        <p:style>
+          <a:lnRef idx="2">
+            <a:schemeClr val="accent1">
+              <a:shade val="15000"/>
+            </a:schemeClr>
+          </a:lnRef>
+          <a:fillRef idx="1">
+            <a:schemeClr val="accent1"/>
+          </a:fillRef>
+          <a:effectRef idx="0">
+            <a:schemeClr val="accent1"/>
+          </a:effectRef>
+          <a:fontRef idx="minor">
+            <a:schemeClr val="lt1"/>
+          </a:fontRef>
+        </p:style>
+        <p:txBody>
+          <a:bodyPr rtlCol="0" anchor="ctr"/>
+          <a:lstStyle/>
+          <a:p>
+            <a:pPr algn="ctr"/>
+            <a:endParaRPr lang="de-DE"/>
+          </a:p>
+        </p:txBody>
+      </p:sp>
+      <p:sp>
+        <p:nvSpPr>
+          <p:cNvPr id="19" name="Rechteck 18">
+            <a:extLst>
+              <a:ext uri="{FF2B5EF4-FFF2-40B4-BE49-F238E27FC236}">
+                <a16:creationId xmlns:a16="http://schemas.microsoft.com/office/drawing/2014/main" id="{222D9655-671B-04C6-FBC5-18DA0CD5A586}"/>
+              </a:ext>
+            </a:extLst>
+          </p:cNvPr>
+          <p:cNvSpPr/>
+          <p:nvPr/>
+        </p:nvSpPr>
+        <p:spPr>
+          <a:xfrm>
+            <a:off x="1797401" y="1366260"/>
+            <a:ext cx="1041498" cy="724693"/>
+          </a:xfrm>
+          <a:prstGeom prst="rect">
+            <a:avLst/>
+          </a:prstGeom>
+          <a:solidFill>
+            <a:schemeClr val="bg1">
+              <a:lumMod val="85000"/>
+            </a:schemeClr>
+          </a:solidFill>
+          <a:ln>
+            <a:noFill/>
+          </a:ln>
+        </p:spPr>
+        <p:style>
+          <a:lnRef idx="2">
+            <a:schemeClr val="accent1">
+              <a:shade val="15000"/>
+            </a:schemeClr>
+          </a:lnRef>
+          <a:fillRef idx="1">
+            <a:schemeClr val="accent1"/>
+          </a:fillRef>
+          <a:effectRef idx="0">
+            <a:schemeClr val="accent1"/>
+          </a:effectRef>
+          <a:fontRef idx="minor">
+            <a:schemeClr val="lt1"/>
+          </a:fontRef>
+        </p:style>
+        <p:txBody>
+          <a:bodyPr rtlCol="0" anchor="ctr"/>
+          <a:lstStyle/>
+          <a:p>
+            <a:pPr algn="ctr"/>
+            <a:endParaRPr lang="de-DE"/>
+          </a:p>
+        </p:txBody>
+      </p:sp>
+      <p:sp>
+        <p:nvSpPr>
+          <p:cNvPr id="18" name="Raute 17">
+            <a:extLst>
+              <a:ext uri="{FF2B5EF4-FFF2-40B4-BE49-F238E27FC236}">
+                <a16:creationId xmlns:a16="http://schemas.microsoft.com/office/drawing/2014/main" id="{E20E2FA5-824E-D254-44E3-7A2873EAFD5E}"/>
+              </a:ext>
+            </a:extLst>
+          </p:cNvPr>
+          <p:cNvSpPr/>
+          <p:nvPr/>
+        </p:nvSpPr>
+        <p:spPr>
+          <a:xfrm>
+            <a:off x="1152300" y="757096"/>
+            <a:ext cx="1152000" cy="1152000"/>
+          </a:xfrm>
+          <a:prstGeom prst="diamond">
+            <a:avLst/>
+          </a:prstGeom>
+          <a:solidFill>
+            <a:schemeClr val="bg1"/>
+          </a:solidFill>
+          <a:ln w="57150">
+            <a:solidFill>
+              <a:schemeClr val="bg1"/>
+            </a:solidFill>
+          </a:ln>
+        </p:spPr>
+        <p:style>
+          <a:lnRef idx="2">
+            <a:schemeClr val="accent1">
+              <a:shade val="15000"/>
+            </a:schemeClr>
+          </a:lnRef>
+          <a:fillRef idx="1">
+            <a:schemeClr val="accent1"/>
+          </a:fillRef>
+          <a:effectRef idx="0">
+            <a:schemeClr val="accent1"/>
+          </a:effectRef>
+          <a:fontRef idx="minor">
+            <a:schemeClr val="lt1"/>
+          </a:fontRef>
+        </p:style>
+        <p:txBody>
+          <a:bodyPr rtlCol="0" anchor="ctr"/>
+          <a:lstStyle/>
+          <a:p>
+            <a:pPr algn="ctr"/>
+            <a:endParaRPr lang="de-DE"/>
+          </a:p>
+        </p:txBody>
+      </p:sp>
+      <p:sp>
+        <p:nvSpPr>
+          <p:cNvPr id="4" name="Rechteck 3">
+            <a:extLst>
+              <a:ext uri="{FF2B5EF4-FFF2-40B4-BE49-F238E27FC236}">
+                <a16:creationId xmlns:a16="http://schemas.microsoft.com/office/drawing/2014/main" id="{2CCFEC2F-D7AF-D25B-83C4-52D794C2CFA0}"/>
+              </a:ext>
+            </a:extLst>
+          </p:cNvPr>
+          <p:cNvSpPr/>
+          <p:nvPr/>
+        </p:nvSpPr>
+        <p:spPr>
+          <a:xfrm>
+            <a:off x="3873337" y="928424"/>
+            <a:ext cx="1144499" cy="1162521"/>
+          </a:xfrm>
+          <a:prstGeom prst="rect">
+            <a:avLst/>
+          </a:prstGeom>
+          <a:noFill/>
+          <a:ln w="57150">
+            <a:solidFill>
+              <a:schemeClr val="tx1"/>
+            </a:solidFill>
+          </a:ln>
+        </p:spPr>
+        <p:style>
+          <a:lnRef idx="2">
+            <a:schemeClr val="accent1">
+              <a:shade val="15000"/>
+            </a:schemeClr>
+          </a:lnRef>
+          <a:fillRef idx="1">
+            <a:schemeClr val="accent1"/>
+          </a:fillRef>
+          <a:effectRef idx="0">
+            <a:schemeClr val="accent1"/>
+          </a:effectRef>
+          <a:fontRef idx="minor">
+            <a:schemeClr val="lt1"/>
+          </a:fontRef>
+        </p:style>
+        <p:txBody>
+          <a:bodyPr rtlCol="0" anchor="ctr"/>
+          <a:lstStyle/>
+          <a:p>
+            <a:pPr algn="ctr"/>
+            <a:endParaRPr lang="de-DE"/>
+          </a:p>
+        </p:txBody>
+      </p:sp>
+      <p:sp>
+        <p:nvSpPr>
+          <p:cNvPr id="5" name="Gleichschenkliges Dreieck 4">
+            <a:extLst>
+              <a:ext uri="{FF2B5EF4-FFF2-40B4-BE49-F238E27FC236}">
+                <a16:creationId xmlns:a16="http://schemas.microsoft.com/office/drawing/2014/main" id="{9604C5C9-9AD1-88E6-EE57-A108974656A5}"/>
+              </a:ext>
+            </a:extLst>
+          </p:cNvPr>
+          <p:cNvSpPr/>
+          <p:nvPr/>
+        </p:nvSpPr>
+        <p:spPr>
+          <a:xfrm rot="16200000">
+            <a:off x="3528593" y="1085636"/>
+            <a:ext cx="1158395" cy="852217"/>
+          </a:xfrm>
+          <a:prstGeom prst="triangle">
+            <a:avLst/>
+          </a:prstGeom>
+          <a:solidFill>
+            <a:schemeClr val="bg1">
+              <a:lumMod val="85000"/>
+            </a:schemeClr>
+          </a:solidFill>
+          <a:ln w="57150">
+            <a:solidFill>
+              <a:schemeClr val="bg1"/>
+            </a:solidFill>
+          </a:ln>
+        </p:spPr>
+        <p:style>
+          <a:lnRef idx="2">
+            <a:schemeClr val="accent1">
+              <a:shade val="15000"/>
+            </a:schemeClr>
+          </a:lnRef>
+          <a:fillRef idx="1">
+            <a:schemeClr val="accent1"/>
+          </a:fillRef>
+          <a:effectRef idx="0">
+            <a:schemeClr val="accent1"/>
+          </a:effectRef>
+          <a:fontRef idx="minor">
+            <a:schemeClr val="lt1"/>
+          </a:fontRef>
+        </p:style>
+        <p:txBody>
+          <a:bodyPr rtlCol="0" anchor="ctr"/>
+          <a:lstStyle/>
+          <a:p>
+            <a:pPr algn="ctr"/>
+            <a:endParaRPr lang="de-DE"/>
+          </a:p>
+        </p:txBody>
+      </p:sp>
+      <p:sp>
+        <p:nvSpPr>
+          <p:cNvPr id="14" name="Raute 13">
+            <a:extLst>
+              <a:ext uri="{FF2B5EF4-FFF2-40B4-BE49-F238E27FC236}">
+                <a16:creationId xmlns:a16="http://schemas.microsoft.com/office/drawing/2014/main" id="{B2E591A7-93AD-0A75-5835-4DD5C055BFDA}"/>
+              </a:ext>
+            </a:extLst>
+          </p:cNvPr>
+          <p:cNvSpPr/>
+          <p:nvPr/>
+        </p:nvSpPr>
+        <p:spPr>
+          <a:xfrm>
+            <a:off x="1241200" y="841667"/>
+            <a:ext cx="972000" cy="972000"/>
+          </a:xfrm>
+          <a:prstGeom prst="diamond">
+            <a:avLst/>
+          </a:prstGeom>
+          <a:solidFill>
+            <a:schemeClr val="bg1"/>
+          </a:solidFill>
+          <a:ln w="57150">
+            <a:solidFill>
+              <a:schemeClr val="tx1"/>
+            </a:solidFill>
+          </a:ln>
+        </p:spPr>
+        <p:style>
+          <a:lnRef idx="2">
+            <a:schemeClr val="accent1">
+              <a:shade val="15000"/>
+            </a:schemeClr>
+          </a:lnRef>
+          <a:fillRef idx="1">
+            <a:schemeClr val="accent1"/>
+          </a:fillRef>
+          <a:effectRef idx="0">
+            <a:schemeClr val="accent1"/>
+          </a:effectRef>
+          <a:fontRef idx="minor">
+            <a:schemeClr val="lt1"/>
+          </a:fontRef>
+        </p:style>
+        <p:txBody>
+          <a:bodyPr rtlCol="0" anchor="ctr"/>
+          <a:lstStyle/>
+          <a:p>
+            <a:pPr algn="ctr"/>
+            <a:endParaRPr lang="de-DE"/>
+          </a:p>
+        </p:txBody>
+      </p:sp>
+      <p:sp>
+        <p:nvSpPr>
+          <p:cNvPr id="20" name="Rechteck 19">
+            <a:extLst>
+              <a:ext uri="{FF2B5EF4-FFF2-40B4-BE49-F238E27FC236}">
+                <a16:creationId xmlns:a16="http://schemas.microsoft.com/office/drawing/2014/main" id="{EC616EE5-49A6-925C-0AFF-1BAB287F35C6}"/>
+              </a:ext>
+            </a:extLst>
+          </p:cNvPr>
+          <p:cNvSpPr/>
+          <p:nvPr/>
+        </p:nvSpPr>
+        <p:spPr>
+          <a:xfrm>
+            <a:off x="2038451" y="3348117"/>
+            <a:ext cx="792000" cy="679884"/>
+          </a:xfrm>
+          <a:prstGeom prst="rect">
+            <a:avLst/>
+          </a:prstGeom>
+          <a:solidFill>
+            <a:schemeClr val="bg1">
+              <a:lumMod val="85000"/>
+            </a:schemeClr>
+          </a:solidFill>
+          <a:ln>
+            <a:noFill/>
+          </a:ln>
+        </p:spPr>
+        <p:style>
+          <a:lnRef idx="2">
+            <a:schemeClr val="accent1">
+              <a:shade val="15000"/>
+            </a:schemeClr>
+          </a:lnRef>
+          <a:fillRef idx="1">
+            <a:schemeClr val="accent1"/>
+          </a:fillRef>
+          <a:effectRef idx="0">
+            <a:schemeClr val="accent1"/>
+          </a:effectRef>
+          <a:fontRef idx="minor">
+            <a:schemeClr val="lt1"/>
+          </a:fontRef>
+        </p:style>
+        <p:txBody>
+          <a:bodyPr rtlCol="0" anchor="ctr"/>
+          <a:lstStyle/>
+          <a:p>
+            <a:pPr algn="ctr"/>
+            <a:endParaRPr lang="de-DE"/>
+          </a:p>
+        </p:txBody>
+      </p:sp>
+      <p:sp>
+        <p:nvSpPr>
+          <p:cNvPr id="21" name="Raute 20">
+            <a:extLst>
+              <a:ext uri="{FF2B5EF4-FFF2-40B4-BE49-F238E27FC236}">
+                <a16:creationId xmlns:a16="http://schemas.microsoft.com/office/drawing/2014/main" id="{8347D9D7-7B25-C171-F3E0-59B5649DBF9E}"/>
+              </a:ext>
+            </a:extLst>
+          </p:cNvPr>
+          <p:cNvSpPr/>
+          <p:nvPr/>
+        </p:nvSpPr>
+        <p:spPr>
+          <a:xfrm>
+            <a:off x="1419101" y="2738953"/>
+            <a:ext cx="1152000" cy="1152000"/>
+          </a:xfrm>
+          <a:prstGeom prst="diamond">
+            <a:avLst/>
+          </a:prstGeom>
+          <a:solidFill>
+            <a:schemeClr val="bg1"/>
+          </a:solidFill>
+          <a:ln w="57150">
+            <a:solidFill>
+              <a:schemeClr val="bg1"/>
+            </a:solidFill>
+          </a:ln>
+        </p:spPr>
+        <p:style>
+          <a:lnRef idx="2">
+            <a:schemeClr val="accent1">
+              <a:shade val="15000"/>
+            </a:schemeClr>
+          </a:lnRef>
+          <a:fillRef idx="1">
+            <a:schemeClr val="accent1"/>
+          </a:fillRef>
+          <a:effectRef idx="0">
+            <a:schemeClr val="accent1"/>
+          </a:effectRef>
+          <a:fontRef idx="minor">
+            <a:schemeClr val="lt1"/>
+          </a:fontRef>
+        </p:style>
+        <p:txBody>
+          <a:bodyPr rtlCol="0" anchor="ctr"/>
+          <a:lstStyle/>
+          <a:p>
+            <a:pPr algn="ctr"/>
+            <a:endParaRPr lang="de-DE"/>
+          </a:p>
+        </p:txBody>
+      </p:sp>
+      <p:sp>
+        <p:nvSpPr>
+          <p:cNvPr id="22" name="Raute 21">
+            <a:extLst>
+              <a:ext uri="{FF2B5EF4-FFF2-40B4-BE49-F238E27FC236}">
+                <a16:creationId xmlns:a16="http://schemas.microsoft.com/office/drawing/2014/main" id="{4A95302C-2485-4F2B-F17E-C23E3ECDF5C6}"/>
+              </a:ext>
+            </a:extLst>
+          </p:cNvPr>
+          <p:cNvSpPr/>
+          <p:nvPr/>
+        </p:nvSpPr>
+        <p:spPr>
+          <a:xfrm>
+            <a:off x="1508001" y="2823524"/>
+            <a:ext cx="972000" cy="972000"/>
+          </a:xfrm>
+          <a:prstGeom prst="diamond">
+            <a:avLst/>
+          </a:prstGeom>
+          <a:solidFill>
+            <a:schemeClr val="bg1"/>
+          </a:solidFill>
+          <a:ln w="57150">
+            <a:solidFill>
+              <a:schemeClr val="tx1"/>
+            </a:solidFill>
+          </a:ln>
+        </p:spPr>
+        <p:style>
+          <a:lnRef idx="2">
+            <a:schemeClr val="accent1">
+              <a:shade val="15000"/>
+            </a:schemeClr>
+          </a:lnRef>
+          <a:fillRef idx="1">
+            <a:schemeClr val="accent1"/>
+          </a:fillRef>
+          <a:effectRef idx="0">
+            <a:schemeClr val="accent1"/>
+          </a:effectRef>
+          <a:fontRef idx="minor">
+            <a:schemeClr val="lt1"/>
+          </a:fontRef>
+        </p:style>
+        <p:txBody>
+          <a:bodyPr rtlCol="0" anchor="ctr"/>
+          <a:lstStyle/>
+          <a:p>
+            <a:pPr algn="ctr"/>
+            <a:endParaRPr lang="de-DE"/>
+          </a:p>
+        </p:txBody>
+      </p:sp>
+      <p:sp>
+        <p:nvSpPr>
+          <p:cNvPr id="24" name="Rechteck 23">
+            <a:extLst>
+              <a:ext uri="{FF2B5EF4-FFF2-40B4-BE49-F238E27FC236}">
+                <a16:creationId xmlns:a16="http://schemas.microsoft.com/office/drawing/2014/main" id="{310F0061-092E-AC8B-1F1D-F86FD382D7E8}"/>
+              </a:ext>
+            </a:extLst>
+          </p:cNvPr>
+          <p:cNvSpPr/>
+          <p:nvPr/>
+        </p:nvSpPr>
+        <p:spPr>
+          <a:xfrm>
+            <a:off x="1159751" y="5256823"/>
+            <a:ext cx="532650" cy="759509"/>
+          </a:xfrm>
+          <a:prstGeom prst="rect">
+            <a:avLst/>
+          </a:prstGeom>
+          <a:solidFill>
+            <a:schemeClr val="bg1">
+              <a:lumMod val="85000"/>
+            </a:schemeClr>
+          </a:solidFill>
+          <a:ln>
+            <a:noFill/>
+          </a:ln>
+        </p:spPr>
+        <p:style>
+          <a:lnRef idx="2">
+            <a:schemeClr val="accent1">
+              <a:shade val="15000"/>
+            </a:schemeClr>
+          </a:lnRef>
+          <a:fillRef idx="1">
+            <a:schemeClr val="accent1"/>
+          </a:fillRef>
+          <a:effectRef idx="0">
+            <a:schemeClr val="accent1"/>
+          </a:effectRef>
+          <a:fontRef idx="minor">
+            <a:schemeClr val="lt1"/>
+          </a:fontRef>
+        </p:style>
+        <p:txBody>
+          <a:bodyPr rtlCol="0" anchor="ctr"/>
+          <a:lstStyle/>
+          <a:p>
+            <a:pPr algn="ctr"/>
+            <a:endParaRPr lang="de-DE"/>
+          </a:p>
+        </p:txBody>
+      </p:sp>
+      <p:sp>
+        <p:nvSpPr>
+          <p:cNvPr id="25" name="Rechteck 24">
+            <a:extLst>
+              <a:ext uri="{FF2B5EF4-FFF2-40B4-BE49-F238E27FC236}">
+                <a16:creationId xmlns:a16="http://schemas.microsoft.com/office/drawing/2014/main" id="{314A6C14-62BE-1D24-5ED7-31F707714FA2}"/>
+              </a:ext>
+            </a:extLst>
+          </p:cNvPr>
+          <p:cNvSpPr/>
+          <p:nvPr/>
+        </p:nvSpPr>
+        <p:spPr>
+          <a:xfrm>
+            <a:off x="1797401" y="5245964"/>
+            <a:ext cx="506899" cy="770367"/>
+          </a:xfrm>
+          <a:prstGeom prst="rect">
+            <a:avLst/>
+          </a:prstGeom>
+          <a:solidFill>
+            <a:schemeClr val="bg1">
+              <a:lumMod val="85000"/>
+            </a:schemeClr>
+          </a:solidFill>
+          <a:ln>
+            <a:noFill/>
+          </a:ln>
+        </p:spPr>
+        <p:style>
+          <a:lnRef idx="2">
+            <a:schemeClr val="accent1">
+              <a:shade val="15000"/>
+            </a:schemeClr>
+          </a:lnRef>
+          <a:fillRef idx="1">
+            <a:schemeClr val="accent1"/>
+          </a:fillRef>
+          <a:effectRef idx="0">
+            <a:schemeClr val="accent1"/>
+          </a:effectRef>
+          <a:fontRef idx="minor">
+            <a:schemeClr val="lt1"/>
+          </a:fontRef>
+        </p:style>
+        <p:txBody>
+          <a:bodyPr rtlCol="0" anchor="ctr"/>
+          <a:lstStyle/>
+          <a:p>
+            <a:pPr algn="ctr"/>
+            <a:endParaRPr lang="de-DE"/>
+          </a:p>
+        </p:txBody>
+      </p:sp>
+      <p:sp>
+        <p:nvSpPr>
+          <p:cNvPr id="26" name="Raute 25">
+            <a:extLst>
+              <a:ext uri="{FF2B5EF4-FFF2-40B4-BE49-F238E27FC236}">
+                <a16:creationId xmlns:a16="http://schemas.microsoft.com/office/drawing/2014/main" id="{C7D9180A-62D8-F701-3689-8FB5F8A0B61A}"/>
+              </a:ext>
+            </a:extLst>
+          </p:cNvPr>
+          <p:cNvSpPr/>
+          <p:nvPr/>
+        </p:nvSpPr>
+        <p:spPr>
+          <a:xfrm>
+            <a:off x="1161951" y="4636801"/>
+            <a:ext cx="1152000" cy="1152000"/>
+          </a:xfrm>
+          <a:prstGeom prst="diamond">
+            <a:avLst/>
+          </a:prstGeom>
+          <a:solidFill>
+            <a:schemeClr val="bg1"/>
+          </a:solidFill>
+          <a:ln w="57150">
+            <a:solidFill>
+              <a:schemeClr val="bg1"/>
+            </a:solidFill>
+          </a:ln>
+        </p:spPr>
+        <p:style>
+          <a:lnRef idx="2">
+            <a:schemeClr val="accent1">
+              <a:shade val="15000"/>
+            </a:schemeClr>
+          </a:lnRef>
+          <a:fillRef idx="1">
+            <a:schemeClr val="accent1"/>
+          </a:fillRef>
+          <a:effectRef idx="0">
+            <a:schemeClr val="accent1"/>
+          </a:effectRef>
+          <a:fontRef idx="minor">
+            <a:schemeClr val="lt1"/>
+          </a:fontRef>
+        </p:style>
+        <p:txBody>
+          <a:bodyPr rtlCol="0" anchor="ctr"/>
+          <a:lstStyle/>
+          <a:p>
+            <a:pPr algn="ctr"/>
+            <a:endParaRPr lang="de-DE"/>
+          </a:p>
+        </p:txBody>
+      </p:sp>
+      <p:sp>
+        <p:nvSpPr>
+          <p:cNvPr id="27" name="Raute 26">
+            <a:extLst>
+              <a:ext uri="{FF2B5EF4-FFF2-40B4-BE49-F238E27FC236}">
+                <a16:creationId xmlns:a16="http://schemas.microsoft.com/office/drawing/2014/main" id="{70B3C351-32A1-EA7B-EE2E-9F1A7B44CA02}"/>
+              </a:ext>
+            </a:extLst>
+          </p:cNvPr>
+          <p:cNvSpPr/>
+          <p:nvPr/>
+        </p:nvSpPr>
+        <p:spPr>
+          <a:xfrm>
+            <a:off x="1250851" y="4721372"/>
+            <a:ext cx="972000" cy="972000"/>
+          </a:xfrm>
+          <a:prstGeom prst="diamond">
+            <a:avLst/>
+          </a:prstGeom>
+          <a:solidFill>
+            <a:schemeClr val="bg1"/>
+          </a:solidFill>
+          <a:ln w="57150">
+            <a:solidFill>
+              <a:schemeClr val="tx1"/>
+            </a:solidFill>
+          </a:ln>
+        </p:spPr>
+        <p:style>
+          <a:lnRef idx="2">
+            <a:schemeClr val="accent1">
+              <a:shade val="15000"/>
+            </a:schemeClr>
+          </a:lnRef>
+          <a:fillRef idx="1">
+            <a:schemeClr val="accent1"/>
+          </a:fillRef>
+          <a:effectRef idx="0">
+            <a:schemeClr val="accent1"/>
+          </a:effectRef>
+          <a:fontRef idx="minor">
+            <a:schemeClr val="lt1"/>
+          </a:fontRef>
+        </p:style>
+        <p:txBody>
+          <a:bodyPr rtlCol="0" anchor="ctr"/>
+          <a:lstStyle/>
+          <a:p>
+            <a:pPr algn="ctr"/>
+            <a:endParaRPr lang="de-DE"/>
+          </a:p>
+        </p:txBody>
+      </p:sp>
+      <p:sp>
+        <p:nvSpPr>
+          <p:cNvPr id="29" name="Rechteck 28">
+            <a:extLst>
+              <a:ext uri="{FF2B5EF4-FFF2-40B4-BE49-F238E27FC236}">
+                <a16:creationId xmlns:a16="http://schemas.microsoft.com/office/drawing/2014/main" id="{B351E9D5-3503-F733-1DD7-1C308F008C0D}"/>
+              </a:ext>
+            </a:extLst>
+          </p:cNvPr>
+          <p:cNvSpPr/>
+          <p:nvPr/>
+        </p:nvSpPr>
+        <p:spPr>
+          <a:xfrm>
+            <a:off x="2377677" y="5245963"/>
+            <a:ext cx="452774" cy="770367"/>
+          </a:xfrm>
+          <a:prstGeom prst="rect">
+            <a:avLst/>
+          </a:prstGeom>
+          <a:solidFill>
+            <a:schemeClr val="bg1">
+              <a:lumMod val="85000"/>
+            </a:schemeClr>
+          </a:solidFill>
+          <a:ln>
+            <a:noFill/>
+          </a:ln>
+        </p:spPr>
+        <p:style>
+          <a:lnRef idx="2">
+            <a:schemeClr val="accent1">
+              <a:shade val="15000"/>
+            </a:schemeClr>
+          </a:lnRef>
+          <a:fillRef idx="1">
+            <a:schemeClr val="accent1"/>
+          </a:fillRef>
+          <a:effectRef idx="0">
+            <a:schemeClr val="accent1"/>
+          </a:effectRef>
+          <a:fontRef idx="minor">
+            <a:schemeClr val="lt1"/>
+          </a:fontRef>
+        </p:style>
+        <p:txBody>
+          <a:bodyPr rtlCol="0" anchor="ctr"/>
+          <a:lstStyle/>
+          <a:p>
+            <a:pPr algn="ctr"/>
+            <a:endParaRPr lang="de-DE"/>
+          </a:p>
+        </p:txBody>
+      </p:sp>
+      <p:cxnSp>
+        <p:nvCxnSpPr>
+          <p:cNvPr id="31" name="Gerader Verbinder 30">
+            <a:extLst>
+              <a:ext uri="{FF2B5EF4-FFF2-40B4-BE49-F238E27FC236}">
+                <a16:creationId xmlns:a16="http://schemas.microsoft.com/office/drawing/2014/main" id="{A7F77FDF-5878-CB6C-A7CA-06750E44E18A}"/>
+              </a:ext>
+            </a:extLst>
+          </p:cNvPr>
+          <p:cNvCxnSpPr/>
+          <p:nvPr/>
+        </p:nvCxnSpPr>
+        <p:spPr>
+          <a:xfrm flipH="1">
+            <a:off x="3950361" y="928424"/>
+            <a:ext cx="706582" cy="0"/>
+          </a:xfrm>
+          <a:prstGeom prst="line">
+            <a:avLst/>
+          </a:prstGeom>
+          <a:noFill/>
+          <a:ln w="57150">
+            <a:solidFill>
+              <a:schemeClr val="tx1"/>
+            </a:solidFill>
+          </a:ln>
+        </p:spPr>
+        <p:style>
+          <a:lnRef idx="2">
+            <a:schemeClr val="accent1">
+              <a:shade val="15000"/>
+            </a:schemeClr>
+          </a:lnRef>
+          <a:fillRef idx="1">
+            <a:schemeClr val="accent1"/>
+          </a:fillRef>
+          <a:effectRef idx="0">
+            <a:schemeClr val="accent1"/>
+          </a:effectRef>
+          <a:fontRef idx="minor">
+            <a:schemeClr val="lt1"/>
+          </a:fontRef>
+        </p:style>
+      </p:cxnSp>
+      <p:cxnSp>
+        <p:nvCxnSpPr>
+          <p:cNvPr id="32" name="Gerader Verbinder 31">
+            <a:extLst>
+              <a:ext uri="{FF2B5EF4-FFF2-40B4-BE49-F238E27FC236}">
+                <a16:creationId xmlns:a16="http://schemas.microsoft.com/office/drawing/2014/main" id="{415D9618-9A4C-C809-BA43-B38E58B6EA05}"/>
+              </a:ext>
+            </a:extLst>
+          </p:cNvPr>
+          <p:cNvCxnSpPr/>
+          <p:nvPr/>
+        </p:nvCxnSpPr>
+        <p:spPr>
+          <a:xfrm flipH="1">
+            <a:off x="4076601" y="2094080"/>
+            <a:ext cx="706582" cy="0"/>
+          </a:xfrm>
+          <a:prstGeom prst="line">
+            <a:avLst/>
+          </a:prstGeom>
+          <a:noFill/>
+          <a:ln w="57150">
+            <a:solidFill>
+              <a:schemeClr val="tx1"/>
+            </a:solidFill>
+          </a:ln>
+        </p:spPr>
+        <p:style>
+          <a:lnRef idx="2">
+            <a:schemeClr val="accent1">
+              <a:shade val="15000"/>
+            </a:schemeClr>
+          </a:lnRef>
+          <a:fillRef idx="1">
+            <a:schemeClr val="accent1"/>
+          </a:fillRef>
+          <a:effectRef idx="0">
+            <a:schemeClr val="accent1"/>
+          </a:effectRef>
+          <a:fontRef idx="minor">
+            <a:schemeClr val="lt1"/>
+          </a:fontRef>
+        </p:style>
+      </p:cxnSp>
+      <p:sp>
+        <p:nvSpPr>
+          <p:cNvPr id="42" name="Rechteck 41">
+            <a:extLst>
+              <a:ext uri="{FF2B5EF4-FFF2-40B4-BE49-F238E27FC236}">
+                <a16:creationId xmlns:a16="http://schemas.microsoft.com/office/drawing/2014/main" id="{192B1D75-8771-CEA4-B54D-F78A0C7E6104}"/>
+              </a:ext>
+            </a:extLst>
+          </p:cNvPr>
+          <p:cNvSpPr/>
+          <p:nvPr/>
+        </p:nvSpPr>
+        <p:spPr>
+          <a:xfrm>
+            <a:off x="3900866" y="2823524"/>
+            <a:ext cx="1144499" cy="1162521"/>
+          </a:xfrm>
+          <a:prstGeom prst="rect">
+            <a:avLst/>
+          </a:prstGeom>
+          <a:noFill/>
+          <a:ln w="57150">
+            <a:solidFill>
+              <a:schemeClr val="tx1"/>
+            </a:solidFill>
+          </a:ln>
+        </p:spPr>
+        <p:style>
+          <a:lnRef idx="2">
+            <a:schemeClr val="accent1">
+              <a:shade val="15000"/>
+            </a:schemeClr>
+          </a:lnRef>
+          <a:fillRef idx="1">
+            <a:schemeClr val="accent1"/>
+          </a:fillRef>
+          <a:effectRef idx="0">
+            <a:schemeClr val="accent1"/>
+          </a:effectRef>
+          <a:fontRef idx="minor">
+            <a:schemeClr val="lt1"/>
+          </a:fontRef>
+        </p:style>
+        <p:txBody>
+          <a:bodyPr rtlCol="0" anchor="ctr"/>
+          <a:lstStyle/>
+          <a:p>
+            <a:pPr algn="ctr"/>
+            <a:endParaRPr lang="de-DE"/>
+          </a:p>
+        </p:txBody>
+      </p:sp>
+      <p:sp>
+        <p:nvSpPr>
+          <p:cNvPr id="13" name="Gleichschenkliges Dreieck 12">
+            <a:extLst>
+              <a:ext uri="{FF2B5EF4-FFF2-40B4-BE49-F238E27FC236}">
+                <a16:creationId xmlns:a16="http://schemas.microsoft.com/office/drawing/2014/main" id="{8FC831E0-8A95-1808-D4F1-FA05DE023695}"/>
+              </a:ext>
+            </a:extLst>
+          </p:cNvPr>
+          <p:cNvSpPr/>
+          <p:nvPr/>
+        </p:nvSpPr>
+        <p:spPr>
+          <a:xfrm rot="5400000">
+            <a:off x="3637747" y="3004851"/>
+            <a:ext cx="1204478" cy="841825"/>
+          </a:xfrm>
+          <a:prstGeom prst="triangle">
+            <a:avLst/>
+          </a:prstGeom>
+          <a:solidFill>
+            <a:schemeClr val="bg1">
+              <a:lumMod val="85000"/>
+            </a:schemeClr>
+          </a:solidFill>
+          <a:ln w="57150">
+            <a:solidFill>
+              <a:schemeClr val="bg1"/>
+            </a:solidFill>
+          </a:ln>
+        </p:spPr>
+        <p:style>
+          <a:lnRef idx="2">
+            <a:schemeClr val="accent1">
+              <a:shade val="15000"/>
+            </a:schemeClr>
+          </a:lnRef>
+          <a:fillRef idx="1">
+            <a:schemeClr val="accent1"/>
+          </a:fillRef>
+          <a:effectRef idx="0">
+            <a:schemeClr val="accent1"/>
+          </a:effectRef>
+          <a:fontRef idx="minor">
+            <a:schemeClr val="lt1"/>
+          </a:fontRef>
+        </p:style>
+        <p:txBody>
+          <a:bodyPr rtlCol="0" anchor="ctr"/>
+          <a:lstStyle/>
+          <a:p>
+            <a:pPr algn="ctr"/>
+            <a:endParaRPr lang="de-DE"/>
+          </a:p>
+        </p:txBody>
+      </p:sp>
+      <p:sp>
+        <p:nvSpPr>
+          <p:cNvPr id="44" name="Rechteck: abgerundete Ecken 43">
+            <a:extLst>
+              <a:ext uri="{FF2B5EF4-FFF2-40B4-BE49-F238E27FC236}">
+                <a16:creationId xmlns:a16="http://schemas.microsoft.com/office/drawing/2014/main" id="{76076E8F-4B15-9471-DEFC-B53112854F82}"/>
+              </a:ext>
+            </a:extLst>
+          </p:cNvPr>
+          <p:cNvSpPr/>
+          <p:nvPr/>
+        </p:nvSpPr>
+        <p:spPr>
+          <a:xfrm>
+            <a:off x="3597401" y="4465605"/>
+            <a:ext cx="1800000" cy="1800000"/>
+          </a:xfrm>
+          <a:prstGeom prst="roundRect">
+            <a:avLst>
+              <a:gd name="adj" fmla="val 3261"/>
+            </a:avLst>
+          </a:prstGeom>
+          <a:solidFill>
+            <a:schemeClr val="bg1"/>
+          </a:solidFill>
+          <a:ln>
+            <a:solidFill>
+              <a:schemeClr val="bg1">
+                <a:lumMod val="65000"/>
+              </a:schemeClr>
+            </a:solidFill>
+          </a:ln>
+        </p:spPr>
+        <p:style>
+          <a:lnRef idx="2">
+            <a:schemeClr val="accent1">
+              <a:shade val="15000"/>
+            </a:schemeClr>
+          </a:lnRef>
+          <a:fillRef idx="1">
+            <a:schemeClr val="accent1"/>
+          </a:fillRef>
+          <a:effectRef idx="0">
+            <a:schemeClr val="accent1"/>
+          </a:effectRef>
+          <a:fontRef idx="minor">
+            <a:schemeClr val="lt1"/>
+          </a:fontRef>
+        </p:style>
+        <p:txBody>
+          <a:bodyPr rtlCol="0" anchor="ctr"/>
+          <a:lstStyle/>
+          <a:p>
+            <a:pPr algn="ctr"/>
+            <a:endParaRPr lang="de-DE"/>
+          </a:p>
+        </p:txBody>
+      </p:sp>
+      <p:sp>
+        <p:nvSpPr>
+          <p:cNvPr id="46" name="Rechteck 45">
+            <a:extLst>
+              <a:ext uri="{FF2B5EF4-FFF2-40B4-BE49-F238E27FC236}">
+                <a16:creationId xmlns:a16="http://schemas.microsoft.com/office/drawing/2014/main" id="{32C11F6E-4465-9126-6302-76815156D278}"/>
+              </a:ext>
+            </a:extLst>
+          </p:cNvPr>
+          <p:cNvSpPr/>
+          <p:nvPr/>
+        </p:nvSpPr>
+        <p:spPr>
+          <a:xfrm>
+            <a:off x="3900865" y="4699992"/>
+            <a:ext cx="1144499" cy="358624"/>
+          </a:xfrm>
+          <a:prstGeom prst="rect">
+            <a:avLst/>
+          </a:prstGeom>
+          <a:solidFill>
+            <a:schemeClr val="bg1">
+              <a:lumMod val="85000"/>
+            </a:schemeClr>
+          </a:solidFill>
+          <a:ln w="57150">
+            <a:solidFill>
+              <a:schemeClr val="bg1">
+                <a:lumMod val="85000"/>
+              </a:schemeClr>
+            </a:solidFill>
+          </a:ln>
+        </p:spPr>
+        <p:style>
+          <a:lnRef idx="2">
+            <a:schemeClr val="accent1">
+              <a:shade val="15000"/>
+            </a:schemeClr>
+          </a:lnRef>
+          <a:fillRef idx="1">
+            <a:schemeClr val="accent1"/>
+          </a:fillRef>
+          <a:effectRef idx="0">
+            <a:schemeClr val="accent1"/>
+          </a:effectRef>
+          <a:fontRef idx="minor">
+            <a:schemeClr val="lt1"/>
+          </a:fontRef>
+        </p:style>
+        <p:txBody>
+          <a:bodyPr rtlCol="0" anchor="ctr"/>
+          <a:lstStyle/>
+          <a:p>
+            <a:pPr algn="ctr"/>
+            <a:endParaRPr lang="de-DE"/>
+          </a:p>
+        </p:txBody>
+      </p:sp>
+      <p:sp>
+        <p:nvSpPr>
+          <p:cNvPr id="48" name="Rechteck 47">
+            <a:extLst>
+              <a:ext uri="{FF2B5EF4-FFF2-40B4-BE49-F238E27FC236}">
+                <a16:creationId xmlns:a16="http://schemas.microsoft.com/office/drawing/2014/main" id="{9F06C53B-F477-41FE-9076-B7CB4B4936C3}"/>
+              </a:ext>
+            </a:extLst>
+          </p:cNvPr>
+          <p:cNvSpPr/>
+          <p:nvPr/>
+        </p:nvSpPr>
+        <p:spPr>
+          <a:xfrm>
+            <a:off x="3900865" y="5195663"/>
+            <a:ext cx="1144499" cy="380009"/>
+          </a:xfrm>
+          <a:prstGeom prst="rect">
+            <a:avLst/>
+          </a:prstGeom>
+          <a:noFill/>
+          <a:ln w="57150">
+            <a:solidFill>
+              <a:schemeClr val="tx1"/>
+            </a:solidFill>
+          </a:ln>
+        </p:spPr>
+        <p:style>
+          <a:lnRef idx="2">
+            <a:schemeClr val="accent1">
+              <a:shade val="15000"/>
+            </a:schemeClr>
+          </a:lnRef>
+          <a:fillRef idx="1">
+            <a:schemeClr val="accent1"/>
+          </a:fillRef>
+          <a:effectRef idx="0">
+            <a:schemeClr val="accent1"/>
+          </a:effectRef>
+          <a:fontRef idx="minor">
+            <a:schemeClr val="lt1"/>
+          </a:fontRef>
+        </p:style>
+        <p:txBody>
+          <a:bodyPr rtlCol="0" anchor="ctr"/>
+          <a:lstStyle/>
+          <a:p>
+            <a:pPr algn="ctr"/>
+            <a:endParaRPr lang="de-DE"/>
+          </a:p>
+        </p:txBody>
+      </p:sp>
+      <p:sp>
+        <p:nvSpPr>
+          <p:cNvPr id="50" name="Rechteck 49">
+            <a:extLst>
+              <a:ext uri="{FF2B5EF4-FFF2-40B4-BE49-F238E27FC236}">
+                <a16:creationId xmlns:a16="http://schemas.microsoft.com/office/drawing/2014/main" id="{B1C672E0-6088-6E60-FC35-836FC3216CFA}"/>
+              </a:ext>
+            </a:extLst>
+          </p:cNvPr>
+          <p:cNvSpPr/>
+          <p:nvPr/>
+        </p:nvSpPr>
+        <p:spPr>
+          <a:xfrm>
+            <a:off x="3900865" y="5708086"/>
+            <a:ext cx="1144499" cy="380009"/>
+          </a:xfrm>
+          <a:prstGeom prst="rect">
+            <a:avLst/>
+          </a:prstGeom>
+          <a:noFill/>
+          <a:ln w="57150">
+            <a:solidFill>
+              <a:schemeClr val="tx1"/>
+            </a:solidFill>
+          </a:ln>
+        </p:spPr>
+        <p:style>
+          <a:lnRef idx="2">
+            <a:schemeClr val="accent1">
+              <a:shade val="15000"/>
+            </a:schemeClr>
+          </a:lnRef>
+          <a:fillRef idx="1">
+            <a:schemeClr val="accent1"/>
+          </a:fillRef>
+          <a:effectRef idx="0">
+            <a:schemeClr val="accent1"/>
+          </a:effectRef>
+          <a:fontRef idx="minor">
+            <a:schemeClr val="lt1"/>
+          </a:fontRef>
+        </p:style>
+        <p:txBody>
+          <a:bodyPr rtlCol="0" anchor="ctr"/>
+          <a:lstStyle/>
+          <a:p>
+            <a:pPr algn="ctr"/>
+            <a:endParaRPr lang="de-DE"/>
+          </a:p>
+        </p:txBody>
+      </p:sp>
+      <p:grpSp>
+        <p:nvGrpSpPr>
+          <p:cNvPr id="59" name="Gruppieren 58">
+            <a:extLst>
+              <a:ext uri="{FF2B5EF4-FFF2-40B4-BE49-F238E27FC236}">
+                <a16:creationId xmlns:a16="http://schemas.microsoft.com/office/drawing/2014/main" id="{9074E7CF-FE3B-47FD-BFC4-C785E535FAAB}"/>
+              </a:ext>
+            </a:extLst>
+          </p:cNvPr>
+          <p:cNvGrpSpPr/>
+          <p:nvPr/>
+        </p:nvGrpSpPr>
+        <p:grpSpPr>
+          <a:xfrm rot="16200000">
+            <a:off x="6096000" y="591509"/>
+            <a:ext cx="1800000" cy="1800000"/>
+            <a:chOff x="6378701" y="591509"/>
+            <a:chExt cx="1800000" cy="1800000"/>
+          </a:xfrm>
+        </p:grpSpPr>
+        <p:sp>
+          <p:nvSpPr>
+            <p:cNvPr id="52" name="Rechteck: abgerundete Ecken 51">
+              <a:extLst>
+                <a:ext uri="{FF2B5EF4-FFF2-40B4-BE49-F238E27FC236}">
+                  <a16:creationId xmlns:a16="http://schemas.microsoft.com/office/drawing/2014/main" id="{4D55E654-BF8A-DBBC-4F4C-3D4C8075C0CC}"/>
+                </a:ext>
+              </a:extLst>
+            </p:cNvPr>
+            <p:cNvSpPr/>
+            <p:nvPr/>
+          </p:nvSpPr>
+          <p:spPr>
+            <a:xfrm>
+              <a:off x="6378701" y="591509"/>
+              <a:ext cx="1800000" cy="1800000"/>
+            </a:xfrm>
+            <a:prstGeom prst="roundRect">
+              <a:avLst>
+                <a:gd name="adj" fmla="val 3261"/>
+              </a:avLst>
+            </a:prstGeom>
+            <a:solidFill>
+              <a:schemeClr val="bg1"/>
+            </a:solidFill>
+            <a:ln>
+              <a:solidFill>
+                <a:schemeClr val="bg1">
+                  <a:lumMod val="65000"/>
+                </a:schemeClr>
+              </a:solidFill>
+            </a:ln>
+          </p:spPr>
+          <p:style>
+            <a:lnRef idx="2">
+              <a:schemeClr val="accent1">
+                <a:shade val="15000"/>
+              </a:schemeClr>
+            </a:lnRef>
+            <a:fillRef idx="1">
+              <a:schemeClr val="accent1"/>
+            </a:fillRef>
+            <a:effectRef idx="0">
+              <a:schemeClr val="accent1"/>
+            </a:effectRef>
+            <a:fontRef idx="minor">
+              <a:schemeClr val="lt1"/>
+            </a:fontRef>
+          </p:style>
+          <p:txBody>
+            <a:bodyPr rtlCol="0" anchor="ctr"/>
+            <a:lstStyle/>
+            <a:p>
+              <a:pPr algn="ctr"/>
+              <a:endParaRPr lang="de-DE"/>
+            </a:p>
+          </p:txBody>
+        </p:sp>
+        <p:sp>
+          <p:nvSpPr>
+            <p:cNvPr id="54" name="Rechteck 53">
+              <a:extLst>
+                <a:ext uri="{FF2B5EF4-FFF2-40B4-BE49-F238E27FC236}">
+                  <a16:creationId xmlns:a16="http://schemas.microsoft.com/office/drawing/2014/main" id="{1664C078-3D31-7BE5-7097-96CAAC2A2AEC}"/>
+                </a:ext>
+              </a:extLst>
+            </p:cNvPr>
+            <p:cNvSpPr/>
+            <p:nvPr/>
+          </p:nvSpPr>
+          <p:spPr>
+            <a:xfrm>
+              <a:off x="6682165" y="825896"/>
+              <a:ext cx="1144499" cy="358624"/>
+            </a:xfrm>
+            <a:prstGeom prst="rect">
+              <a:avLst/>
+            </a:prstGeom>
+            <a:solidFill>
+              <a:schemeClr val="bg1">
+                <a:lumMod val="85000"/>
+              </a:schemeClr>
+            </a:solidFill>
+            <a:ln w="57150">
+              <a:solidFill>
+                <a:schemeClr val="bg1">
+                  <a:lumMod val="85000"/>
+                </a:schemeClr>
+              </a:solidFill>
+            </a:ln>
+          </p:spPr>
+          <p:style>
+            <a:lnRef idx="2">
+              <a:schemeClr val="accent1">
+                <a:shade val="15000"/>
+              </a:schemeClr>
+            </a:lnRef>
+            <a:fillRef idx="1">
+              <a:schemeClr val="accent1"/>
+            </a:fillRef>
+            <a:effectRef idx="0">
+              <a:schemeClr val="accent1"/>
+            </a:effectRef>
+            <a:fontRef idx="minor">
+              <a:schemeClr val="lt1"/>
+            </a:fontRef>
+          </p:style>
+          <p:txBody>
+            <a:bodyPr rtlCol="0" anchor="ctr"/>
+            <a:lstStyle/>
+            <a:p>
+              <a:pPr algn="ctr"/>
+              <a:endParaRPr lang="de-DE"/>
+            </a:p>
+          </p:txBody>
+        </p:sp>
+        <p:sp>
+          <p:nvSpPr>
+            <p:cNvPr id="56" name="Rechteck 55">
+              <a:extLst>
+                <a:ext uri="{FF2B5EF4-FFF2-40B4-BE49-F238E27FC236}">
+                  <a16:creationId xmlns:a16="http://schemas.microsoft.com/office/drawing/2014/main" id="{9D75DCF5-A352-4997-FA63-697C70A6733A}"/>
+                </a:ext>
+              </a:extLst>
+            </p:cNvPr>
+            <p:cNvSpPr/>
+            <p:nvPr/>
+          </p:nvSpPr>
+          <p:spPr>
+            <a:xfrm>
+              <a:off x="6682165" y="1321567"/>
+              <a:ext cx="1144499" cy="380009"/>
+            </a:xfrm>
+            <a:prstGeom prst="rect">
+              <a:avLst/>
+            </a:prstGeom>
+            <a:noFill/>
+            <a:ln w="57150">
+              <a:solidFill>
+                <a:schemeClr val="tx1"/>
+              </a:solidFill>
+            </a:ln>
+          </p:spPr>
+          <p:style>
+            <a:lnRef idx="2">
+              <a:schemeClr val="accent1">
+                <a:shade val="15000"/>
+              </a:schemeClr>
+            </a:lnRef>
+            <a:fillRef idx="1">
+              <a:schemeClr val="accent1"/>
+            </a:fillRef>
+            <a:effectRef idx="0">
+              <a:schemeClr val="accent1"/>
+            </a:effectRef>
+            <a:fontRef idx="minor">
+              <a:schemeClr val="lt1"/>
+            </a:fontRef>
+          </p:style>
+          <p:txBody>
+            <a:bodyPr rtlCol="0" anchor="ctr"/>
+            <a:lstStyle/>
+            <a:p>
+              <a:pPr algn="ctr"/>
+              <a:endParaRPr lang="de-DE"/>
+            </a:p>
+          </p:txBody>
+        </p:sp>
+        <p:sp>
+          <p:nvSpPr>
+            <p:cNvPr id="58" name="Rechteck 57">
+              <a:extLst>
+                <a:ext uri="{FF2B5EF4-FFF2-40B4-BE49-F238E27FC236}">
+                  <a16:creationId xmlns:a16="http://schemas.microsoft.com/office/drawing/2014/main" id="{676D49E3-FC43-DA81-F6FF-119BBB23103B}"/>
+                </a:ext>
+              </a:extLst>
+            </p:cNvPr>
+            <p:cNvSpPr/>
+            <p:nvPr/>
+          </p:nvSpPr>
+          <p:spPr>
+            <a:xfrm>
+              <a:off x="6682165" y="1833990"/>
+              <a:ext cx="1144499" cy="380009"/>
+            </a:xfrm>
+            <a:prstGeom prst="rect">
+              <a:avLst/>
+            </a:prstGeom>
+            <a:noFill/>
+            <a:ln w="57150">
+              <a:solidFill>
+                <a:schemeClr val="tx1"/>
+              </a:solidFill>
+            </a:ln>
+          </p:spPr>
+          <p:style>
+            <a:lnRef idx="2">
+              <a:schemeClr val="accent1">
+                <a:shade val="15000"/>
+              </a:schemeClr>
+            </a:lnRef>
+            <a:fillRef idx="1">
+              <a:schemeClr val="accent1"/>
+            </a:fillRef>
+            <a:effectRef idx="0">
+              <a:schemeClr val="accent1"/>
+            </a:effectRef>
+            <a:fontRef idx="minor">
+              <a:schemeClr val="lt1"/>
+            </a:fontRef>
+          </p:style>
+          <p:txBody>
+            <a:bodyPr rtlCol="0" anchor="ctr"/>
+            <a:lstStyle/>
+            <a:p>
+              <a:pPr algn="ctr"/>
+              <a:endParaRPr lang="de-DE"/>
+            </a:p>
+          </p:txBody>
+        </p:sp>
+      </p:grpSp>
+      <p:sp>
+        <p:nvSpPr>
+          <p:cNvPr id="61" name="Rechteck: abgerundete Ecken 60">
+            <a:extLst>
+              <a:ext uri="{FF2B5EF4-FFF2-40B4-BE49-F238E27FC236}">
+                <a16:creationId xmlns:a16="http://schemas.microsoft.com/office/drawing/2014/main" id="{7EE15438-B38D-BB7A-CC1A-A0B45C60F89D}"/>
+              </a:ext>
+            </a:extLst>
+          </p:cNvPr>
+          <p:cNvSpPr/>
+          <p:nvPr/>
+        </p:nvSpPr>
+        <p:spPr>
+          <a:xfrm>
+            <a:off x="6096001" y="2529000"/>
+            <a:ext cx="1800000" cy="1800000"/>
+          </a:xfrm>
+          <a:prstGeom prst="roundRect">
+            <a:avLst>
+              <a:gd name="adj" fmla="val 3261"/>
+            </a:avLst>
+          </a:prstGeom>
+          <a:solidFill>
+            <a:schemeClr val="bg1"/>
+          </a:solidFill>
+          <a:ln>
+            <a:solidFill>
+              <a:schemeClr val="bg1">
+                <a:lumMod val="65000"/>
+              </a:schemeClr>
+            </a:solidFill>
+          </a:ln>
+        </p:spPr>
+        <p:style>
+          <a:lnRef idx="2">
+            <a:schemeClr val="accent1">
+              <a:shade val="15000"/>
+            </a:schemeClr>
+          </a:lnRef>
+          <a:fillRef idx="1">
+            <a:schemeClr val="accent1"/>
+          </a:fillRef>
+          <a:effectRef idx="0">
+            <a:schemeClr val="accent1"/>
+          </a:effectRef>
+          <a:fontRef idx="minor">
+            <a:schemeClr val="lt1"/>
+          </a:fontRef>
+        </p:style>
+        <p:txBody>
+          <a:bodyPr rtlCol="0" anchor="ctr"/>
+          <a:lstStyle/>
+          <a:p>
+            <a:pPr algn="ctr"/>
+            <a:endParaRPr lang="de-DE"/>
+          </a:p>
+        </p:txBody>
+      </p:sp>
+      <p:sp>
+        <p:nvSpPr>
+          <p:cNvPr id="63" name="Rechteck 62">
+            <a:extLst>
+              <a:ext uri="{FF2B5EF4-FFF2-40B4-BE49-F238E27FC236}">
+                <a16:creationId xmlns:a16="http://schemas.microsoft.com/office/drawing/2014/main" id="{53E8D506-23C3-9143-AB6D-C10F3C0ACDC8}"/>
+              </a:ext>
+            </a:extLst>
+          </p:cNvPr>
+          <p:cNvSpPr/>
+          <p:nvPr/>
+        </p:nvSpPr>
+        <p:spPr>
+          <a:xfrm>
+            <a:off x="6399465" y="2763387"/>
+            <a:ext cx="1144499" cy="358624"/>
+          </a:xfrm>
+          <a:prstGeom prst="rect">
+            <a:avLst/>
+          </a:prstGeom>
+          <a:solidFill>
+            <a:schemeClr val="bg1">
+              <a:lumMod val="85000"/>
+            </a:schemeClr>
+          </a:solidFill>
+          <a:ln w="57150">
+            <a:solidFill>
+              <a:schemeClr val="bg1">
+                <a:lumMod val="85000"/>
+              </a:schemeClr>
+            </a:solidFill>
+          </a:ln>
+        </p:spPr>
+        <p:style>
+          <a:lnRef idx="2">
+            <a:schemeClr val="accent1">
+              <a:shade val="15000"/>
+            </a:schemeClr>
+          </a:lnRef>
+          <a:fillRef idx="1">
+            <a:schemeClr val="accent1"/>
+          </a:fillRef>
+          <a:effectRef idx="0">
+            <a:schemeClr val="accent1"/>
+          </a:effectRef>
+          <a:fontRef idx="minor">
+            <a:schemeClr val="lt1"/>
+          </a:fontRef>
+        </p:style>
+        <p:txBody>
+          <a:bodyPr rtlCol="0" anchor="ctr"/>
+          <a:lstStyle/>
+          <a:p>
+            <a:pPr algn="ctr"/>
+            <a:endParaRPr lang="de-DE"/>
+          </a:p>
+        </p:txBody>
+      </p:sp>
+      <p:sp>
+        <p:nvSpPr>
+          <p:cNvPr id="69" name="Rechteck 68">
+            <a:extLst>
+              <a:ext uri="{FF2B5EF4-FFF2-40B4-BE49-F238E27FC236}">
+                <a16:creationId xmlns:a16="http://schemas.microsoft.com/office/drawing/2014/main" id="{AF34AB4B-4A29-55B5-B98C-4B834D2E94FF}"/>
+              </a:ext>
+            </a:extLst>
+          </p:cNvPr>
+          <p:cNvSpPr/>
+          <p:nvPr/>
+        </p:nvSpPr>
+        <p:spPr>
+          <a:xfrm>
+            <a:off x="6406751" y="3795524"/>
+            <a:ext cx="1144499" cy="358624"/>
+          </a:xfrm>
+          <a:prstGeom prst="rect">
+            <a:avLst/>
+          </a:prstGeom>
+          <a:solidFill>
+            <a:schemeClr val="bg1">
+              <a:lumMod val="85000"/>
+            </a:schemeClr>
+          </a:solidFill>
+          <a:ln w="57150">
+            <a:solidFill>
+              <a:schemeClr val="bg1">
+                <a:lumMod val="85000"/>
+              </a:schemeClr>
+            </a:solidFill>
+          </a:ln>
+        </p:spPr>
+        <p:style>
+          <a:lnRef idx="2">
+            <a:schemeClr val="accent1">
+              <a:shade val="15000"/>
+            </a:schemeClr>
+          </a:lnRef>
+          <a:fillRef idx="1">
+            <a:schemeClr val="accent1"/>
+          </a:fillRef>
+          <a:effectRef idx="0">
+            <a:schemeClr val="accent1"/>
+          </a:effectRef>
+          <a:fontRef idx="minor">
+            <a:schemeClr val="lt1"/>
+          </a:fontRef>
+        </p:style>
+        <p:txBody>
+          <a:bodyPr rtlCol="0" anchor="ctr"/>
+          <a:lstStyle/>
+          <a:p>
+            <a:pPr algn="ctr"/>
+            <a:endParaRPr lang="de-DE"/>
+          </a:p>
+        </p:txBody>
+      </p:sp>
+      <p:sp>
+        <p:nvSpPr>
+          <p:cNvPr id="71" name="Rechteck 70">
+            <a:extLst>
+              <a:ext uri="{FF2B5EF4-FFF2-40B4-BE49-F238E27FC236}">
+                <a16:creationId xmlns:a16="http://schemas.microsoft.com/office/drawing/2014/main" id="{82BBC09F-F9AE-6F7D-ED52-8A989A64DDE5}"/>
+              </a:ext>
+            </a:extLst>
+          </p:cNvPr>
+          <p:cNvSpPr/>
+          <p:nvPr/>
+        </p:nvSpPr>
+        <p:spPr>
+          <a:xfrm>
+            <a:off x="6399465" y="3279455"/>
+            <a:ext cx="1144499" cy="358624"/>
+          </a:xfrm>
+          <a:prstGeom prst="rect">
+            <a:avLst/>
+          </a:prstGeom>
+          <a:solidFill>
+            <a:schemeClr val="bg1">
+              <a:lumMod val="85000"/>
+            </a:schemeClr>
+          </a:solidFill>
+          <a:ln w="57150">
+            <a:solidFill>
+              <a:schemeClr val="bg1">
+                <a:lumMod val="85000"/>
+              </a:schemeClr>
+            </a:solidFill>
+          </a:ln>
+        </p:spPr>
+        <p:style>
+          <a:lnRef idx="2">
+            <a:schemeClr val="accent1">
+              <a:shade val="15000"/>
+            </a:schemeClr>
+          </a:lnRef>
+          <a:fillRef idx="1">
+            <a:schemeClr val="accent1"/>
+          </a:fillRef>
+          <a:effectRef idx="0">
+            <a:schemeClr val="accent1"/>
+          </a:effectRef>
+          <a:fontRef idx="minor">
+            <a:schemeClr val="lt1"/>
+          </a:fontRef>
+        </p:style>
+        <p:txBody>
+          <a:bodyPr rtlCol="0" anchor="ctr"/>
+          <a:lstStyle/>
+          <a:p>
+            <a:pPr algn="ctr"/>
+            <a:endParaRPr lang="de-DE"/>
+          </a:p>
+        </p:txBody>
+      </p:sp>
+      <p:sp>
+        <p:nvSpPr>
+          <p:cNvPr id="73" name="Rechteck: abgerundete Ecken 72">
+            <a:extLst>
+              <a:ext uri="{FF2B5EF4-FFF2-40B4-BE49-F238E27FC236}">
+                <a16:creationId xmlns:a16="http://schemas.microsoft.com/office/drawing/2014/main" id="{B257B5BD-7E7D-BCE9-02A8-BFAF450C38BE}"/>
+              </a:ext>
+            </a:extLst>
+          </p:cNvPr>
+          <p:cNvSpPr/>
+          <p:nvPr/>
+        </p:nvSpPr>
+        <p:spPr>
+          <a:xfrm>
+            <a:off x="6096000" y="4479606"/>
+            <a:ext cx="1800000" cy="1800000"/>
+          </a:xfrm>
+          <a:prstGeom prst="roundRect">
+            <a:avLst>
+              <a:gd name="adj" fmla="val 3261"/>
+            </a:avLst>
+          </a:prstGeom>
+          <a:solidFill>
+            <a:schemeClr val="bg1"/>
+          </a:solidFill>
+          <a:ln>
+            <a:solidFill>
+              <a:schemeClr val="bg1">
+                <a:lumMod val="65000"/>
+              </a:schemeClr>
+            </a:solidFill>
+          </a:ln>
+        </p:spPr>
+        <p:style>
+          <a:lnRef idx="2">
+            <a:schemeClr val="accent1">
+              <a:shade val="15000"/>
+            </a:schemeClr>
+          </a:lnRef>
+          <a:fillRef idx="1">
+            <a:schemeClr val="accent1"/>
+          </a:fillRef>
+          <a:effectRef idx="0">
+            <a:schemeClr val="accent1"/>
+          </a:effectRef>
+          <a:fontRef idx="minor">
+            <a:schemeClr val="lt1"/>
+          </a:fontRef>
+        </p:style>
+        <p:txBody>
+          <a:bodyPr rtlCol="0" anchor="ctr"/>
+          <a:lstStyle/>
+          <a:p>
+            <a:pPr algn="ctr"/>
+            <a:endParaRPr lang="de-DE"/>
+          </a:p>
+        </p:txBody>
+      </p:sp>
+      <p:sp>
+        <p:nvSpPr>
+          <p:cNvPr id="82" name="L-Form 81">
+            <a:extLst>
+              <a:ext uri="{FF2B5EF4-FFF2-40B4-BE49-F238E27FC236}">
+                <a16:creationId xmlns:a16="http://schemas.microsoft.com/office/drawing/2014/main" id="{992819B2-6B8B-3C94-CF09-3C7FFF4758F7}"/>
+              </a:ext>
+            </a:extLst>
+          </p:cNvPr>
+          <p:cNvSpPr/>
+          <p:nvPr/>
+        </p:nvSpPr>
+        <p:spPr>
+          <a:xfrm rot="5400000">
+            <a:off x="6318599" y="4721373"/>
+            <a:ext cx="1320800" cy="1366723"/>
+          </a:xfrm>
+          <a:prstGeom prst="corner">
+            <a:avLst>
+              <a:gd name="adj1" fmla="val 32692"/>
+              <a:gd name="adj2" fmla="val 31731"/>
+            </a:avLst>
+          </a:prstGeom>
+          <a:noFill/>
+          <a:ln w="57150">
+            <a:solidFill>
+              <a:schemeClr val="tx1"/>
+            </a:solidFill>
+          </a:ln>
+        </p:spPr>
+        <p:style>
+          <a:lnRef idx="2">
+            <a:schemeClr val="accent1">
+              <a:shade val="15000"/>
+            </a:schemeClr>
+          </a:lnRef>
+          <a:fillRef idx="1">
+            <a:schemeClr val="accent1"/>
+          </a:fillRef>
+          <a:effectRef idx="0">
+            <a:schemeClr val="accent1"/>
+          </a:effectRef>
+          <a:fontRef idx="minor">
+            <a:schemeClr val="lt1"/>
+          </a:fontRef>
+        </p:style>
+        <p:txBody>
+          <a:bodyPr rtlCol="0" anchor="ctr"/>
+          <a:lstStyle/>
+          <a:p>
+            <a:pPr algn="ctr"/>
+            <a:endParaRPr lang="de-DE"/>
+          </a:p>
+        </p:txBody>
+      </p:sp>
+      <p:sp>
+        <p:nvSpPr>
+          <p:cNvPr id="85" name="Rechteck: abgerundete Ecken 84">
+            <a:extLst>
+              <a:ext uri="{FF2B5EF4-FFF2-40B4-BE49-F238E27FC236}">
+                <a16:creationId xmlns:a16="http://schemas.microsoft.com/office/drawing/2014/main" id="{107F8041-6999-04C4-80AF-E6E31BC15B27}"/>
+              </a:ext>
+            </a:extLst>
+          </p:cNvPr>
+          <p:cNvSpPr/>
+          <p:nvPr/>
+        </p:nvSpPr>
+        <p:spPr>
+          <a:xfrm>
+            <a:off x="8377699" y="591509"/>
+            <a:ext cx="1800000" cy="1800000"/>
+          </a:xfrm>
+          <a:prstGeom prst="roundRect">
+            <a:avLst>
+              <a:gd name="adj" fmla="val 3261"/>
+            </a:avLst>
+          </a:prstGeom>
+          <a:solidFill>
+            <a:schemeClr val="bg1"/>
+          </a:solidFill>
+          <a:ln>
+            <a:solidFill>
+              <a:schemeClr val="bg1">
+                <a:lumMod val="65000"/>
+              </a:schemeClr>
+            </a:solidFill>
+          </a:ln>
+        </p:spPr>
+        <p:style>
+          <a:lnRef idx="2">
+            <a:schemeClr val="accent1">
+              <a:shade val="15000"/>
+            </a:schemeClr>
+          </a:lnRef>
+          <a:fillRef idx="1">
+            <a:schemeClr val="accent1"/>
+          </a:fillRef>
+          <a:effectRef idx="0">
+            <a:schemeClr val="accent1"/>
+          </a:effectRef>
+          <a:fontRef idx="minor">
+            <a:schemeClr val="lt1"/>
+          </a:fontRef>
+        </p:style>
+        <p:txBody>
+          <a:bodyPr rtlCol="0" anchor="ctr"/>
+          <a:lstStyle/>
+          <a:p>
+            <a:pPr algn="ctr"/>
+            <a:endParaRPr lang="de-DE"/>
+          </a:p>
+        </p:txBody>
+      </p:sp>
+      <p:sp>
+        <p:nvSpPr>
+          <p:cNvPr id="87" name="L-Form 86">
+            <a:extLst>
+              <a:ext uri="{FF2B5EF4-FFF2-40B4-BE49-F238E27FC236}">
+                <a16:creationId xmlns:a16="http://schemas.microsoft.com/office/drawing/2014/main" id="{A8B45D53-EA96-4CDE-4FA2-BAB9778E55A3}"/>
+              </a:ext>
+            </a:extLst>
+          </p:cNvPr>
+          <p:cNvSpPr/>
+          <p:nvPr/>
+        </p:nvSpPr>
+        <p:spPr>
+          <a:xfrm rot="5400000" flipH="1">
+            <a:off x="8653235" y="814932"/>
+            <a:ext cx="1251964" cy="1366723"/>
+          </a:xfrm>
+          <a:prstGeom prst="corner">
+            <a:avLst>
+              <a:gd name="adj1" fmla="val 32692"/>
+              <a:gd name="adj2" fmla="val 31731"/>
+            </a:avLst>
+          </a:prstGeom>
+          <a:noFill/>
+          <a:ln w="57150">
+            <a:solidFill>
+              <a:schemeClr val="tx1"/>
+            </a:solidFill>
+          </a:ln>
+        </p:spPr>
+        <p:style>
+          <a:lnRef idx="2">
+            <a:schemeClr val="accent1">
+              <a:shade val="15000"/>
+            </a:schemeClr>
+          </a:lnRef>
+          <a:fillRef idx="1">
+            <a:schemeClr val="accent1"/>
+          </a:fillRef>
+          <a:effectRef idx="0">
+            <a:schemeClr val="accent1"/>
+          </a:effectRef>
+          <a:fontRef idx="minor">
+            <a:schemeClr val="lt1"/>
+          </a:fontRef>
+        </p:style>
+        <p:txBody>
+          <a:bodyPr rtlCol="0" anchor="ctr"/>
+          <a:lstStyle/>
+          <a:p>
+            <a:pPr algn="ctr"/>
+            <a:endParaRPr lang="de-DE"/>
+          </a:p>
+        </p:txBody>
+      </p:sp>
+      <p:sp>
+        <p:nvSpPr>
+          <p:cNvPr id="89" name="Pfeil: 180-Grad 88">
+            <a:extLst>
+              <a:ext uri="{FF2B5EF4-FFF2-40B4-BE49-F238E27FC236}">
+                <a16:creationId xmlns:a16="http://schemas.microsoft.com/office/drawing/2014/main" id="{C4BDC067-EADD-9C9C-253F-8B1A7D14BF5D}"/>
+              </a:ext>
+            </a:extLst>
+          </p:cNvPr>
+          <p:cNvSpPr/>
+          <p:nvPr/>
+        </p:nvSpPr>
+        <p:spPr>
+          <a:xfrm>
+            <a:off x="9161309" y="845609"/>
+            <a:ext cx="749300" cy="730185"/>
+          </a:xfrm>
+          <a:prstGeom prst="uturnArrow">
+            <a:avLst>
+              <a:gd name="adj1" fmla="val 25000"/>
+              <a:gd name="adj2" fmla="val 25000"/>
+              <a:gd name="adj3" fmla="val 23261"/>
+              <a:gd name="adj4" fmla="val 43750"/>
+              <a:gd name="adj5" fmla="val 100000"/>
+            </a:avLst>
+          </a:prstGeom>
+          <a:solidFill>
+            <a:schemeClr val="bg1">
+              <a:lumMod val="85000"/>
+            </a:schemeClr>
+          </a:solidFill>
+          <a:ln w="57150">
+            <a:solidFill>
+              <a:schemeClr val="bg1">
+                <a:lumMod val="85000"/>
+              </a:schemeClr>
+            </a:solidFill>
+          </a:ln>
+        </p:spPr>
+        <p:style>
+          <a:lnRef idx="2">
+            <a:schemeClr val="accent1">
+              <a:shade val="15000"/>
+            </a:schemeClr>
+          </a:lnRef>
+          <a:fillRef idx="1">
+            <a:schemeClr val="accent1"/>
+          </a:fillRef>
+          <a:effectRef idx="0">
+            <a:schemeClr val="accent1"/>
+          </a:effectRef>
+          <a:fontRef idx="minor">
+            <a:schemeClr val="lt1"/>
+          </a:fontRef>
+        </p:style>
+        <p:txBody>
+          <a:bodyPr rtlCol="0" anchor="ctr"/>
+          <a:lstStyle/>
+          <a:p>
+            <a:pPr algn="ctr"/>
+            <a:endParaRPr lang="de-DE"/>
+          </a:p>
+        </p:txBody>
+      </p:sp>
+      <p:sp>
+        <p:nvSpPr>
+          <p:cNvPr id="91" name="Pfeil: 180-Grad 90">
+            <a:extLst>
+              <a:ext uri="{FF2B5EF4-FFF2-40B4-BE49-F238E27FC236}">
+                <a16:creationId xmlns:a16="http://schemas.microsoft.com/office/drawing/2014/main" id="{84108AB2-E7ED-9D56-FCFF-4F82C248B37B}"/>
+              </a:ext>
+            </a:extLst>
+          </p:cNvPr>
+          <p:cNvSpPr/>
+          <p:nvPr/>
+        </p:nvSpPr>
+        <p:spPr>
+          <a:xfrm rot="10800000">
+            <a:off x="6888870" y="5334950"/>
+            <a:ext cx="749300" cy="730185"/>
+          </a:xfrm>
+          <a:prstGeom prst="uturnArrow">
+            <a:avLst>
+              <a:gd name="adj1" fmla="val 25000"/>
+              <a:gd name="adj2" fmla="val 25000"/>
+              <a:gd name="adj3" fmla="val 23261"/>
+              <a:gd name="adj4" fmla="val 43750"/>
+              <a:gd name="adj5" fmla="val 100000"/>
+            </a:avLst>
+          </a:prstGeom>
+          <a:solidFill>
+            <a:schemeClr val="bg1">
+              <a:lumMod val="85000"/>
+            </a:schemeClr>
+          </a:solidFill>
+          <a:ln w="57150">
+            <a:solidFill>
+              <a:schemeClr val="bg1">
+                <a:lumMod val="85000"/>
+              </a:schemeClr>
+            </a:solidFill>
+          </a:ln>
+        </p:spPr>
+        <p:style>
+          <a:lnRef idx="2">
+            <a:schemeClr val="accent1">
+              <a:shade val="15000"/>
+            </a:schemeClr>
+          </a:lnRef>
+          <a:fillRef idx="1">
+            <a:schemeClr val="accent1"/>
+          </a:fillRef>
+          <a:effectRef idx="0">
+            <a:schemeClr val="accent1"/>
+          </a:effectRef>
+          <a:fontRef idx="minor">
+            <a:schemeClr val="lt1"/>
+          </a:fontRef>
+        </p:style>
+        <p:txBody>
+          <a:bodyPr rtlCol="0" anchor="ctr"/>
+          <a:lstStyle/>
+          <a:p>
+            <a:pPr algn="ctr"/>
+            <a:endParaRPr lang="de-DE"/>
+          </a:p>
+        </p:txBody>
+      </p:sp>
+      <p:sp>
+        <p:nvSpPr>
+          <p:cNvPr id="93" name="Rechteck 92">
+            <a:extLst>
+              <a:ext uri="{FF2B5EF4-FFF2-40B4-BE49-F238E27FC236}">
+                <a16:creationId xmlns:a16="http://schemas.microsoft.com/office/drawing/2014/main" id="{3A189544-B87B-027C-DAE2-AB4C1925FB32}"/>
+              </a:ext>
+            </a:extLst>
+          </p:cNvPr>
+          <p:cNvSpPr/>
+          <p:nvPr/>
+        </p:nvSpPr>
+        <p:spPr>
+          <a:xfrm rot="16200000">
+            <a:off x="6284353" y="2894536"/>
+            <a:ext cx="1392590" cy="1126632"/>
+          </a:xfrm>
+          <a:prstGeom prst="rect">
+            <a:avLst/>
+          </a:prstGeom>
+          <a:noFill/>
+          <a:ln w="57150">
+            <a:solidFill>
+              <a:schemeClr val="tx1"/>
+            </a:solidFill>
+          </a:ln>
+        </p:spPr>
+        <p:style>
+          <a:lnRef idx="2">
+            <a:schemeClr val="accent1">
+              <a:shade val="15000"/>
+            </a:schemeClr>
+          </a:lnRef>
+          <a:fillRef idx="1">
+            <a:schemeClr val="accent1"/>
+          </a:fillRef>
+          <a:effectRef idx="0">
+            <a:schemeClr val="accent1"/>
+          </a:effectRef>
+          <a:fontRef idx="minor">
+            <a:schemeClr val="lt1"/>
+          </a:fontRef>
+        </p:style>
+        <p:txBody>
+          <a:bodyPr rtlCol="0" anchor="ctr"/>
+          <a:lstStyle/>
+          <a:p>
+            <a:pPr algn="ctr"/>
+            <a:endParaRPr lang="de-DE"/>
+          </a:p>
+        </p:txBody>
+      </p:sp>
+    </p:spTree>
+    <p:extLst>
+      <p:ext uri="{BB962C8B-B14F-4D97-AF65-F5344CB8AC3E}">
+        <p14:creationId xmlns:p14="http://schemas.microsoft.com/office/powerpoint/2010/main" val="3793324584"/>
+      </p:ext>
+    </p:extLst>
+  </p:cSld>
+  <p:clrMapOvr>
+    <a:masterClrMapping/>
+  </p:clrMapOvr>
+</p:sld>
+</file>
+
 <file path=ppt/slides/slide2.xml><?xml version="1.0" encoding="utf-8"?>
 <p:sld xmlns:a="http://schemas.openxmlformats.org/drawingml/2006/main" xmlns:r="http://schemas.openxmlformats.org/officeDocument/2006/relationships" xmlns:p="http://schemas.openxmlformats.org/presentationml/2006/main">
   <p:cSld>
@@ -52262,15 +54634,6 @@
 </file>
 
 <file path=customXml/item1.xml><?xml version="1.0" encoding="utf-8"?>
-<?mso-contentType ?>
-<FormTemplates xmlns="http://schemas.microsoft.com/sharepoint/v3/contenttype/forms">
-  <Display>DocumentLibraryForm</Display>
-  <Edit>DocumentLibraryForm</Edit>
-  <New>DocumentLibraryForm</New>
-</FormTemplates>
-</file>
-
-<file path=customXml/item2.xml><?xml version="1.0" encoding="utf-8"?>
 <ct:contentTypeSchema xmlns:ct="http://schemas.microsoft.com/office/2006/metadata/contentType" xmlns:ma="http://schemas.microsoft.com/office/2006/metadata/properties/metaAttributes" ct:_="" ma:_="" ma:contentTypeName="Dokument" ma:contentTypeID="0x010100BC5A43B739B3F8438D3442D7065E2F03" ma:contentTypeVersion="8" ma:contentTypeDescription="Ein neues Dokument erstellen." ma:contentTypeScope="" ma:versionID="8ebb2eb0dcccb9c926e45f2ac2a7f64a">
   <xsd:schema xmlns:xsd="http://www.w3.org/2001/XMLSchema" xmlns:xs="http://www.w3.org/2001/XMLSchema" xmlns:p="http://schemas.microsoft.com/office/2006/metadata/properties" xmlns:ns2="814c5c6d-65e8-4717-9aee-c06d9d584814" targetNamespace="http://schemas.microsoft.com/office/2006/metadata/properties" ma:root="true" ma:fieldsID="e566a8717d9f292f1efde37085575ef2" ns2:_="">
     <xsd:import namespace="814c5c6d-65e8-4717-9aee-c06d9d584814"/>
@@ -52442,6 +54805,15 @@
 </ct:contentTypeSchema>
 </file>
 
+<file path=customXml/item2.xml><?xml version="1.0" encoding="utf-8"?>
+<?mso-contentType ?>
+<FormTemplates xmlns="http://schemas.microsoft.com/sharepoint/v3/contenttype/forms">
+  <Display>DocumentLibraryForm</Display>
+  <Edit>DocumentLibraryForm</Edit>
+  <New>DocumentLibraryForm</New>
+</FormTemplates>
+</file>
+
 <file path=customXml/item3.xml><?xml version="1.0" encoding="utf-8"?>
 <p:properties xmlns:p="http://schemas.microsoft.com/office/2006/metadata/properties" xmlns:xsi="http://www.w3.org/2001/XMLSchema-instance" xmlns:pc="http://schemas.microsoft.com/office/infopath/2007/PartnerControls">
   <documentManagement/>
@@ -52449,14 +54821,6 @@
 </file>
 
 <file path=customXml/itemProps1.xml><?xml version="1.0" encoding="utf-8"?>
-<ds:datastoreItem xmlns:ds="http://schemas.openxmlformats.org/officeDocument/2006/customXml" ds:itemID="{4DF6DB84-0773-4571-961D-F1D872F4F170}">
-  <ds:schemaRefs>
-    <ds:schemaRef ds:uri="http://schemas.microsoft.com/sharepoint/v3/contenttype/forms"/>
-  </ds:schemaRefs>
-</ds:datastoreItem>
-</file>
-
-<file path=customXml/itemProps2.xml><?xml version="1.0" encoding="utf-8"?>
 <ds:datastoreItem xmlns:ds="http://schemas.openxmlformats.org/officeDocument/2006/customXml" ds:itemID="{3AF020B6-5615-4388-B89B-B3204D3C239E}">
   <ds:schemaRefs>
     <ds:schemaRef ds:uri="814c5c6d-65e8-4717-9aee-c06d9d584814"/>
@@ -52474,6 +54838,14 @@
 </ds:datastoreItem>
 </file>
 
+<file path=customXml/itemProps2.xml><?xml version="1.0" encoding="utf-8"?>
+<ds:datastoreItem xmlns:ds="http://schemas.openxmlformats.org/officeDocument/2006/customXml" ds:itemID="{4DF6DB84-0773-4571-961D-F1D872F4F170}">
+  <ds:schemaRefs>
+    <ds:schemaRef ds:uri="http://schemas.microsoft.com/sharepoint/v3/contenttype/forms"/>
+  </ds:schemaRefs>
+</ds:datastoreItem>
+</file>
+
 <file path=customXml/itemProps3.xml><?xml version="1.0" encoding="utf-8"?>
 <ds:datastoreItem xmlns:ds="http://schemas.openxmlformats.org/officeDocument/2006/customXml" ds:itemID="{1EFBCB5E-DECB-4440-972A-0F21260E2935}">
   <ds:schemaRefs>

--- a/specifications/specman-layouts.pptx
+++ b/specifications/specman-layouts.pptx
@@ -29666,7 +29666,7 @@
         <p:spPr>
           <a:xfrm>
             <a:off x="6399465" y="2763387"/>
-            <a:ext cx="1144499" cy="358624"/>
+            <a:ext cx="1262896" cy="358624"/>
           </a:xfrm>
           <a:prstGeom prst="rect">
             <a:avLst/>
@@ -29723,8 +29723,8 @@
         </p:nvSpPr>
         <p:spPr>
           <a:xfrm>
-            <a:off x="6406751" y="3795524"/>
-            <a:ext cx="1144499" cy="358624"/>
+            <a:off x="6330385" y="3795524"/>
+            <a:ext cx="1331976" cy="358624"/>
           </a:xfrm>
           <a:prstGeom prst="rect">
             <a:avLst/>
@@ -29782,7 +29782,7 @@
         <p:spPr>
           <a:xfrm>
             <a:off x="6399465" y="3279455"/>
-            <a:ext cx="1144499" cy="358624"/>
+            <a:ext cx="1262896" cy="358624"/>
           </a:xfrm>
           <a:prstGeom prst="rect">
             <a:avLst/>
@@ -30053,184 +30053,657 @@
       </p:sp>
       <p:sp>
         <p:nvSpPr>
-          <p:cNvPr id="89" name="Pfeil: 180-Grad 88">
-            <a:extLst>
-              <a:ext uri="{FF2B5EF4-FFF2-40B4-BE49-F238E27FC236}">
-                <a16:creationId xmlns:a16="http://schemas.microsoft.com/office/drawing/2014/main" id="{C4BDC067-EADD-9C9C-253F-8B1A7D14BF5D}"/>
-              </a:ext>
-            </a:extLst>
-          </p:cNvPr>
-          <p:cNvSpPr/>
-          <p:nvPr/>
-        </p:nvSpPr>
-        <p:spPr>
-          <a:xfrm>
-            <a:off x="9161309" y="845609"/>
-            <a:ext cx="749300" cy="730185"/>
-          </a:xfrm>
-          <a:prstGeom prst="uturnArrow">
-            <a:avLst>
-              <a:gd name="adj1" fmla="val 25000"/>
-              <a:gd name="adj2" fmla="val 25000"/>
-              <a:gd name="adj3" fmla="val 23261"/>
-              <a:gd name="adj4" fmla="val 43750"/>
-              <a:gd name="adj5" fmla="val 100000"/>
-            </a:avLst>
-          </a:prstGeom>
-          <a:solidFill>
-            <a:schemeClr val="bg1">
-              <a:lumMod val="85000"/>
-            </a:schemeClr>
-          </a:solidFill>
+          <p:cNvPr id="93" name="Rechteck 92">
+            <a:extLst>
+              <a:ext uri="{FF2B5EF4-FFF2-40B4-BE49-F238E27FC236}">
+                <a16:creationId xmlns:a16="http://schemas.microsoft.com/office/drawing/2014/main" id="{3A189544-B87B-027C-DAE2-AB4C1925FB32}"/>
+              </a:ext>
+            </a:extLst>
+          </p:cNvPr>
+          <p:cNvSpPr/>
+          <p:nvPr/>
+        </p:nvSpPr>
+        <p:spPr>
+          <a:xfrm rot="16200000">
+            <a:off x="6300081" y="2791864"/>
+            <a:ext cx="1392590" cy="1331975"/>
+          </a:xfrm>
+          <a:prstGeom prst="rect">
+            <a:avLst/>
+          </a:prstGeom>
+          <a:noFill/>
           <a:ln w="57150">
+            <a:solidFill>
+              <a:schemeClr val="tx1"/>
+            </a:solidFill>
+          </a:ln>
+        </p:spPr>
+        <p:style>
+          <a:lnRef idx="2">
+            <a:schemeClr val="accent1">
+              <a:shade val="15000"/>
+            </a:schemeClr>
+          </a:lnRef>
+          <a:fillRef idx="1">
+            <a:schemeClr val="accent1"/>
+          </a:fillRef>
+          <a:effectRef idx="0">
+            <a:schemeClr val="accent1"/>
+          </a:effectRef>
+          <a:fontRef idx="minor">
+            <a:schemeClr val="lt1"/>
+          </a:fontRef>
+        </p:style>
+        <p:txBody>
+          <a:bodyPr rtlCol="0" anchor="ctr"/>
+          <a:lstStyle/>
+          <a:p>
+            <a:pPr algn="ctr"/>
+            <a:endParaRPr lang="de-DE"/>
+          </a:p>
+        </p:txBody>
+      </p:sp>
+      <p:grpSp>
+        <p:nvGrpSpPr>
+          <p:cNvPr id="105" name="Gruppieren 104">
+            <a:extLst>
+              <a:ext uri="{FF2B5EF4-FFF2-40B4-BE49-F238E27FC236}">
+                <a16:creationId xmlns:a16="http://schemas.microsoft.com/office/drawing/2014/main" id="{55718372-C5C5-DCF0-8D63-07475A2159B7}"/>
+              </a:ext>
+            </a:extLst>
+          </p:cNvPr>
+          <p:cNvGrpSpPr/>
+          <p:nvPr/>
+        </p:nvGrpSpPr>
+        <p:grpSpPr>
+          <a:xfrm rot="491951">
+            <a:off x="9066240" y="1105924"/>
+            <a:ext cx="324576" cy="150504"/>
+            <a:chOff x="8871045" y="5404734"/>
+            <a:chExt cx="399830" cy="226412"/>
+          </a:xfrm>
+        </p:grpSpPr>
+        <p:cxnSp>
+          <p:nvCxnSpPr>
+            <p:cNvPr id="106" name="Gerader Verbinder 105">
+              <a:extLst>
+                <a:ext uri="{FF2B5EF4-FFF2-40B4-BE49-F238E27FC236}">
+                  <a16:creationId xmlns:a16="http://schemas.microsoft.com/office/drawing/2014/main" id="{1A7DB428-C657-1D28-D4DD-F6937FE356B1}"/>
+                </a:ext>
+              </a:extLst>
+            </p:cNvPr>
+            <p:cNvCxnSpPr>
+              <a:cxnSpLocks/>
+            </p:cNvCxnSpPr>
+            <p:nvPr/>
+          </p:nvCxnSpPr>
+          <p:spPr>
+            <a:xfrm flipV="1">
+              <a:off x="8871045" y="5404734"/>
+              <a:ext cx="191069" cy="226412"/>
+            </a:xfrm>
+            <a:prstGeom prst="line">
+              <a:avLst/>
+            </a:prstGeom>
+            <a:ln w="57150">
+              <a:solidFill>
+                <a:schemeClr val="bg1"/>
+              </a:solidFill>
+              <a:round/>
+            </a:ln>
+          </p:spPr>
+          <p:style>
+            <a:lnRef idx="1">
+              <a:schemeClr val="accent1"/>
+            </a:lnRef>
+            <a:fillRef idx="0">
+              <a:schemeClr val="accent1"/>
+            </a:fillRef>
+            <a:effectRef idx="0">
+              <a:schemeClr val="accent1"/>
+            </a:effectRef>
+            <a:fontRef idx="minor">
+              <a:schemeClr val="tx1"/>
+            </a:fontRef>
+          </p:style>
+        </p:cxnSp>
+        <p:cxnSp>
+          <p:nvCxnSpPr>
+            <p:cNvPr id="107" name="Gerader Verbinder 106">
+              <a:extLst>
+                <a:ext uri="{FF2B5EF4-FFF2-40B4-BE49-F238E27FC236}">
+                  <a16:creationId xmlns:a16="http://schemas.microsoft.com/office/drawing/2014/main" id="{2A2E02ED-BCE3-BA6B-CFDA-DC5932B2B193}"/>
+                </a:ext>
+              </a:extLst>
+            </p:cNvPr>
+            <p:cNvCxnSpPr>
+              <a:cxnSpLocks/>
+            </p:cNvCxnSpPr>
+            <p:nvPr/>
+          </p:nvCxnSpPr>
+          <p:spPr>
+            <a:xfrm>
+              <a:off x="9048466" y="5404734"/>
+              <a:ext cx="222409" cy="226412"/>
+            </a:xfrm>
+            <a:prstGeom prst="line">
+              <a:avLst/>
+            </a:prstGeom>
+            <a:ln w="57150">
+              <a:solidFill>
+                <a:schemeClr val="bg1"/>
+              </a:solidFill>
+              <a:round/>
+            </a:ln>
+          </p:spPr>
+          <p:style>
+            <a:lnRef idx="1">
+              <a:schemeClr val="accent1"/>
+            </a:lnRef>
+            <a:fillRef idx="0">
+              <a:schemeClr val="accent1"/>
+            </a:fillRef>
+            <a:effectRef idx="0">
+              <a:schemeClr val="accent1"/>
+            </a:effectRef>
+            <a:fontRef idx="minor">
+              <a:schemeClr val="tx1"/>
+            </a:fontRef>
+          </p:style>
+        </p:cxnSp>
+      </p:grpSp>
+      <p:grpSp>
+        <p:nvGrpSpPr>
+          <p:cNvPr id="112" name="Gruppieren 111">
+            <a:extLst>
+              <a:ext uri="{FF2B5EF4-FFF2-40B4-BE49-F238E27FC236}">
+                <a16:creationId xmlns:a16="http://schemas.microsoft.com/office/drawing/2014/main" id="{7DF9931A-4916-7265-9211-009A7E74DECF}"/>
+              </a:ext>
+            </a:extLst>
+          </p:cNvPr>
+          <p:cNvGrpSpPr/>
+          <p:nvPr/>
+        </p:nvGrpSpPr>
+        <p:grpSpPr>
+          <a:xfrm>
+            <a:off x="6535412" y="5015541"/>
+            <a:ext cx="1015838" cy="1000789"/>
+            <a:chOff x="9472044" y="4082722"/>
+            <a:chExt cx="972000" cy="936000"/>
+          </a:xfrm>
+        </p:grpSpPr>
+        <p:sp>
+          <p:nvSpPr>
+            <p:cNvPr id="111" name="Kreis: nicht ausgefüllt 110">
+              <a:extLst>
+                <a:ext uri="{FF2B5EF4-FFF2-40B4-BE49-F238E27FC236}">
+                  <a16:creationId xmlns:a16="http://schemas.microsoft.com/office/drawing/2014/main" id="{2E2A3E68-94B9-87AB-EE5E-C2A7F2B8DB9B}"/>
+                </a:ext>
+              </a:extLst>
+            </p:cNvPr>
+            <p:cNvSpPr/>
+            <p:nvPr/>
+          </p:nvSpPr>
+          <p:spPr>
+            <a:xfrm>
+              <a:off x="9472044" y="4082722"/>
+              <a:ext cx="972000" cy="936000"/>
+            </a:xfrm>
+            <a:prstGeom prst="donut">
+              <a:avLst>
+                <a:gd name="adj" fmla="val 26065"/>
+              </a:avLst>
+            </a:prstGeom>
+            <a:solidFill>
+              <a:schemeClr val="bg1"/>
+            </a:solidFill>
+            <a:ln w="57150">
+              <a:solidFill>
+                <a:schemeClr val="bg1"/>
+              </a:solidFill>
+            </a:ln>
+          </p:spPr>
+          <p:style>
+            <a:lnRef idx="2">
+              <a:schemeClr val="accent1">
+                <a:shade val="15000"/>
+              </a:schemeClr>
+            </a:lnRef>
+            <a:fillRef idx="1">
+              <a:schemeClr val="accent1"/>
+            </a:fillRef>
+            <a:effectRef idx="0">
+              <a:schemeClr val="accent1"/>
+            </a:effectRef>
+            <a:fontRef idx="minor">
+              <a:schemeClr val="lt1"/>
+            </a:fontRef>
+          </p:style>
+          <p:txBody>
+            <a:bodyPr rtlCol="0" anchor="ctr"/>
+            <a:lstStyle/>
+            <a:p>
+              <a:pPr algn="ctr"/>
+              <a:endParaRPr lang="de-DE"/>
+            </a:p>
+          </p:txBody>
+        </p:sp>
+        <p:sp>
+          <p:nvSpPr>
+            <p:cNvPr id="95" name="Kreis: nicht ausgefüllt 94">
+              <a:extLst>
+                <a:ext uri="{FF2B5EF4-FFF2-40B4-BE49-F238E27FC236}">
+                  <a16:creationId xmlns:a16="http://schemas.microsoft.com/office/drawing/2014/main" id="{0D3AA40A-48AD-22C5-53C1-CBBC314DD2E7}"/>
+                </a:ext>
+              </a:extLst>
+            </p:cNvPr>
+            <p:cNvSpPr/>
+            <p:nvPr/>
+          </p:nvSpPr>
+          <p:spPr>
+            <a:xfrm>
+              <a:off x="9556503" y="4154147"/>
+              <a:ext cx="812151" cy="782710"/>
+            </a:xfrm>
+            <a:prstGeom prst="donut">
+              <a:avLst>
+                <a:gd name="adj" fmla="val 26065"/>
+              </a:avLst>
+            </a:prstGeom>
             <a:solidFill>
               <a:schemeClr val="bg1">
                 <a:lumMod val="85000"/>
               </a:schemeClr>
             </a:solidFill>
-          </a:ln>
-        </p:spPr>
-        <p:style>
-          <a:lnRef idx="2">
-            <a:schemeClr val="accent1">
-              <a:shade val="15000"/>
-            </a:schemeClr>
-          </a:lnRef>
-          <a:fillRef idx="1">
-            <a:schemeClr val="accent1"/>
-          </a:fillRef>
-          <a:effectRef idx="0">
-            <a:schemeClr val="accent1"/>
-          </a:effectRef>
-          <a:fontRef idx="minor">
-            <a:schemeClr val="lt1"/>
-          </a:fontRef>
-        </p:style>
-        <p:txBody>
-          <a:bodyPr rtlCol="0" anchor="ctr"/>
-          <a:lstStyle/>
-          <a:p>
-            <a:pPr algn="ctr"/>
-            <a:endParaRPr lang="de-DE"/>
-          </a:p>
-        </p:txBody>
-      </p:sp>
-      <p:sp>
-        <p:nvSpPr>
-          <p:cNvPr id="91" name="Pfeil: 180-Grad 90">
-            <a:extLst>
-              <a:ext uri="{FF2B5EF4-FFF2-40B4-BE49-F238E27FC236}">
-                <a16:creationId xmlns:a16="http://schemas.microsoft.com/office/drawing/2014/main" id="{84108AB2-E7ED-9D56-FCFF-4F82C248B37B}"/>
-              </a:ext>
-            </a:extLst>
-          </p:cNvPr>
-          <p:cNvSpPr/>
-          <p:nvPr/>
-        </p:nvSpPr>
-        <p:spPr>
-          <a:xfrm rot="10800000">
-            <a:off x="6888870" y="5334950"/>
-            <a:ext cx="749300" cy="730185"/>
-          </a:xfrm>
-          <a:prstGeom prst="uturnArrow">
-            <a:avLst>
-              <a:gd name="adj1" fmla="val 25000"/>
-              <a:gd name="adj2" fmla="val 25000"/>
-              <a:gd name="adj3" fmla="val 23261"/>
-              <a:gd name="adj4" fmla="val 43750"/>
-              <a:gd name="adj5" fmla="val 100000"/>
-            </a:avLst>
-          </a:prstGeom>
-          <a:solidFill>
-            <a:schemeClr val="bg1">
-              <a:lumMod val="85000"/>
-            </a:schemeClr>
-          </a:solidFill>
-          <a:ln w="57150">
+            <a:ln w="57150">
+              <a:solidFill>
+                <a:schemeClr val="bg1">
+                  <a:lumMod val="85000"/>
+                </a:schemeClr>
+              </a:solidFill>
+            </a:ln>
+          </p:spPr>
+          <p:style>
+            <a:lnRef idx="2">
+              <a:schemeClr val="accent1">
+                <a:shade val="15000"/>
+              </a:schemeClr>
+            </a:lnRef>
+            <a:fillRef idx="1">
+              <a:schemeClr val="accent1"/>
+            </a:fillRef>
+            <a:effectRef idx="0">
+              <a:schemeClr val="accent1"/>
+            </a:effectRef>
+            <a:fontRef idx="minor">
+              <a:schemeClr val="lt1"/>
+            </a:fontRef>
+          </p:style>
+          <p:txBody>
+            <a:bodyPr rtlCol="0" anchor="ctr"/>
+            <a:lstStyle/>
+            <a:p>
+              <a:pPr algn="ctr"/>
+              <a:endParaRPr lang="de-DE"/>
+            </a:p>
+          </p:txBody>
+        </p:sp>
+        <p:grpSp>
+          <p:nvGrpSpPr>
+            <p:cNvPr id="103" name="Gruppieren 102">
+              <a:extLst>
+                <a:ext uri="{FF2B5EF4-FFF2-40B4-BE49-F238E27FC236}">
+                  <a16:creationId xmlns:a16="http://schemas.microsoft.com/office/drawing/2014/main" id="{3E9D2CFF-D88C-899C-7B50-D85F547A7651}"/>
+                </a:ext>
+              </a:extLst>
+            </p:cNvPr>
+            <p:cNvGrpSpPr/>
+            <p:nvPr/>
+          </p:nvGrpSpPr>
+          <p:grpSpPr>
+            <a:xfrm rot="491951">
+              <a:off x="9523177" y="4418404"/>
+              <a:ext cx="324576" cy="150504"/>
+              <a:chOff x="8871045" y="5404734"/>
+              <a:chExt cx="399830" cy="226412"/>
+            </a:xfrm>
+          </p:grpSpPr>
+          <p:cxnSp>
+            <p:nvCxnSpPr>
+              <p:cNvPr id="98" name="Gerader Verbinder 97">
+                <a:extLst>
+                  <a:ext uri="{FF2B5EF4-FFF2-40B4-BE49-F238E27FC236}">
+                    <a16:creationId xmlns:a16="http://schemas.microsoft.com/office/drawing/2014/main" id="{19AD3F46-6A64-B0B2-6A0E-3F2C991DC1BF}"/>
+                  </a:ext>
+                </a:extLst>
+              </p:cNvPr>
+              <p:cNvCxnSpPr>
+                <a:cxnSpLocks/>
+              </p:cNvCxnSpPr>
+              <p:nvPr/>
+            </p:nvCxnSpPr>
+            <p:spPr>
+              <a:xfrm flipV="1">
+                <a:off x="8871045" y="5404734"/>
+                <a:ext cx="191069" cy="226412"/>
+              </a:xfrm>
+              <a:prstGeom prst="line">
+                <a:avLst/>
+              </a:prstGeom>
+              <a:ln w="57150">
+                <a:solidFill>
+                  <a:schemeClr val="bg1"/>
+                </a:solidFill>
+                <a:round/>
+              </a:ln>
+            </p:spPr>
+            <p:style>
+              <a:lnRef idx="1">
+                <a:schemeClr val="accent1"/>
+              </a:lnRef>
+              <a:fillRef idx="0">
+                <a:schemeClr val="accent1"/>
+              </a:fillRef>
+              <a:effectRef idx="0">
+                <a:schemeClr val="accent1"/>
+              </a:effectRef>
+              <a:fontRef idx="minor">
+                <a:schemeClr val="tx1"/>
+              </a:fontRef>
+            </p:style>
+          </p:cxnSp>
+          <p:cxnSp>
+            <p:nvCxnSpPr>
+              <p:cNvPr id="99" name="Gerader Verbinder 98">
+                <a:extLst>
+                  <a:ext uri="{FF2B5EF4-FFF2-40B4-BE49-F238E27FC236}">
+                    <a16:creationId xmlns:a16="http://schemas.microsoft.com/office/drawing/2014/main" id="{79070E1A-23B7-D470-89F3-472093DA71FA}"/>
+                  </a:ext>
+                </a:extLst>
+              </p:cNvPr>
+              <p:cNvCxnSpPr>
+                <a:cxnSpLocks/>
+              </p:cNvCxnSpPr>
+              <p:nvPr/>
+            </p:nvCxnSpPr>
+            <p:spPr>
+              <a:xfrm>
+                <a:off x="9048466" y="5404734"/>
+                <a:ext cx="222409" cy="226412"/>
+              </a:xfrm>
+              <a:prstGeom prst="line">
+                <a:avLst/>
+              </a:prstGeom>
+              <a:ln w="57150">
+                <a:solidFill>
+                  <a:schemeClr val="bg1"/>
+                </a:solidFill>
+                <a:round/>
+              </a:ln>
+            </p:spPr>
+            <p:style>
+              <a:lnRef idx="1">
+                <a:schemeClr val="accent1"/>
+              </a:lnRef>
+              <a:fillRef idx="0">
+                <a:schemeClr val="accent1"/>
+              </a:fillRef>
+              <a:effectRef idx="0">
+                <a:schemeClr val="accent1"/>
+              </a:effectRef>
+              <a:fontRef idx="minor">
+                <a:schemeClr val="tx1"/>
+              </a:fontRef>
+            </p:style>
+          </p:cxnSp>
+        </p:grpSp>
+      </p:grpSp>
+      <p:grpSp>
+        <p:nvGrpSpPr>
+          <p:cNvPr id="113" name="Gruppieren 112">
+            <a:extLst>
+              <a:ext uri="{FF2B5EF4-FFF2-40B4-BE49-F238E27FC236}">
+                <a16:creationId xmlns:a16="http://schemas.microsoft.com/office/drawing/2014/main" id="{75BDBF7E-1D07-2DCC-6A97-1B646C61BFE2}"/>
+              </a:ext>
+            </a:extLst>
+          </p:cNvPr>
+          <p:cNvGrpSpPr/>
+          <p:nvPr/>
+        </p:nvGrpSpPr>
+        <p:grpSpPr>
+          <a:xfrm>
+            <a:off x="8822509" y="908307"/>
+            <a:ext cx="1015838" cy="1000789"/>
+            <a:chOff x="9472044" y="4082722"/>
+            <a:chExt cx="972000" cy="936000"/>
+          </a:xfrm>
+        </p:grpSpPr>
+        <p:sp>
+          <p:nvSpPr>
+            <p:cNvPr id="114" name="Kreis: nicht ausgefüllt 113">
+              <a:extLst>
+                <a:ext uri="{FF2B5EF4-FFF2-40B4-BE49-F238E27FC236}">
+                  <a16:creationId xmlns:a16="http://schemas.microsoft.com/office/drawing/2014/main" id="{CDF74C08-BBBA-9FBA-E606-97FC1833D3A8}"/>
+                </a:ext>
+              </a:extLst>
+            </p:cNvPr>
+            <p:cNvSpPr/>
+            <p:nvPr/>
+          </p:nvSpPr>
+          <p:spPr>
+            <a:xfrm>
+              <a:off x="9472044" y="4082722"/>
+              <a:ext cx="972000" cy="936000"/>
+            </a:xfrm>
+            <a:prstGeom prst="donut">
+              <a:avLst>
+                <a:gd name="adj" fmla="val 26065"/>
+              </a:avLst>
+            </a:prstGeom>
+            <a:solidFill>
+              <a:schemeClr val="bg1"/>
+            </a:solidFill>
+            <a:ln w="57150">
+              <a:solidFill>
+                <a:schemeClr val="bg1"/>
+              </a:solidFill>
+            </a:ln>
+          </p:spPr>
+          <p:style>
+            <a:lnRef idx="2">
+              <a:schemeClr val="accent1">
+                <a:shade val="15000"/>
+              </a:schemeClr>
+            </a:lnRef>
+            <a:fillRef idx="1">
+              <a:schemeClr val="accent1"/>
+            </a:fillRef>
+            <a:effectRef idx="0">
+              <a:schemeClr val="accent1"/>
+            </a:effectRef>
+            <a:fontRef idx="minor">
+              <a:schemeClr val="lt1"/>
+            </a:fontRef>
+          </p:style>
+          <p:txBody>
+            <a:bodyPr rtlCol="0" anchor="ctr"/>
+            <a:lstStyle/>
+            <a:p>
+              <a:pPr algn="ctr"/>
+              <a:endParaRPr lang="de-DE"/>
+            </a:p>
+          </p:txBody>
+        </p:sp>
+        <p:sp>
+          <p:nvSpPr>
+            <p:cNvPr id="115" name="Kreis: nicht ausgefüllt 114">
+              <a:extLst>
+                <a:ext uri="{FF2B5EF4-FFF2-40B4-BE49-F238E27FC236}">
+                  <a16:creationId xmlns:a16="http://schemas.microsoft.com/office/drawing/2014/main" id="{C98B90D2-596E-E6FA-977C-31F4D31399B1}"/>
+                </a:ext>
+              </a:extLst>
+            </p:cNvPr>
+            <p:cNvSpPr/>
+            <p:nvPr/>
+          </p:nvSpPr>
+          <p:spPr>
+            <a:xfrm>
+              <a:off x="9556503" y="4154147"/>
+              <a:ext cx="812151" cy="782710"/>
+            </a:xfrm>
+            <a:prstGeom prst="donut">
+              <a:avLst>
+                <a:gd name="adj" fmla="val 26065"/>
+              </a:avLst>
+            </a:prstGeom>
             <a:solidFill>
               <a:schemeClr val="bg1">
                 <a:lumMod val="85000"/>
               </a:schemeClr>
             </a:solidFill>
-          </a:ln>
-        </p:spPr>
-        <p:style>
-          <a:lnRef idx="2">
-            <a:schemeClr val="accent1">
-              <a:shade val="15000"/>
-            </a:schemeClr>
-          </a:lnRef>
-          <a:fillRef idx="1">
-            <a:schemeClr val="accent1"/>
-          </a:fillRef>
-          <a:effectRef idx="0">
-            <a:schemeClr val="accent1"/>
-          </a:effectRef>
-          <a:fontRef idx="minor">
-            <a:schemeClr val="lt1"/>
-          </a:fontRef>
-        </p:style>
-        <p:txBody>
-          <a:bodyPr rtlCol="0" anchor="ctr"/>
-          <a:lstStyle/>
-          <a:p>
-            <a:pPr algn="ctr"/>
-            <a:endParaRPr lang="de-DE"/>
-          </a:p>
-        </p:txBody>
-      </p:sp>
-      <p:sp>
-        <p:nvSpPr>
-          <p:cNvPr id="93" name="Rechteck 92">
-            <a:extLst>
-              <a:ext uri="{FF2B5EF4-FFF2-40B4-BE49-F238E27FC236}">
-                <a16:creationId xmlns:a16="http://schemas.microsoft.com/office/drawing/2014/main" id="{3A189544-B87B-027C-DAE2-AB4C1925FB32}"/>
-              </a:ext>
-            </a:extLst>
-          </p:cNvPr>
-          <p:cNvSpPr/>
-          <p:nvPr/>
-        </p:nvSpPr>
-        <p:spPr>
-          <a:xfrm rot="16200000">
-            <a:off x="6284353" y="2894536"/>
-            <a:ext cx="1392590" cy="1126632"/>
-          </a:xfrm>
-          <a:prstGeom prst="rect">
-            <a:avLst/>
-          </a:prstGeom>
-          <a:noFill/>
-          <a:ln w="57150">
-            <a:solidFill>
-              <a:schemeClr val="tx1"/>
-            </a:solidFill>
-          </a:ln>
-        </p:spPr>
-        <p:style>
-          <a:lnRef idx="2">
-            <a:schemeClr val="accent1">
-              <a:shade val="15000"/>
-            </a:schemeClr>
-          </a:lnRef>
-          <a:fillRef idx="1">
-            <a:schemeClr val="accent1"/>
-          </a:fillRef>
-          <a:effectRef idx="0">
-            <a:schemeClr val="accent1"/>
-          </a:effectRef>
-          <a:fontRef idx="minor">
-            <a:schemeClr val="lt1"/>
-          </a:fontRef>
-        </p:style>
-        <p:txBody>
-          <a:bodyPr rtlCol="0" anchor="ctr"/>
-          <a:lstStyle/>
-          <a:p>
-            <a:pPr algn="ctr"/>
-            <a:endParaRPr lang="de-DE"/>
-          </a:p>
-        </p:txBody>
-      </p:sp>
+            <a:ln w="57150">
+              <a:solidFill>
+                <a:schemeClr val="bg1">
+                  <a:lumMod val="85000"/>
+                </a:schemeClr>
+              </a:solidFill>
+            </a:ln>
+          </p:spPr>
+          <p:style>
+            <a:lnRef idx="2">
+              <a:schemeClr val="accent1">
+                <a:shade val="15000"/>
+              </a:schemeClr>
+            </a:lnRef>
+            <a:fillRef idx="1">
+              <a:schemeClr val="accent1"/>
+            </a:fillRef>
+            <a:effectRef idx="0">
+              <a:schemeClr val="accent1"/>
+            </a:effectRef>
+            <a:fontRef idx="minor">
+              <a:schemeClr val="lt1"/>
+            </a:fontRef>
+          </p:style>
+          <p:txBody>
+            <a:bodyPr rtlCol="0" anchor="ctr"/>
+            <a:lstStyle/>
+            <a:p>
+              <a:pPr algn="ctr"/>
+              <a:endParaRPr lang="de-DE"/>
+            </a:p>
+          </p:txBody>
+        </p:sp>
+        <p:grpSp>
+          <p:nvGrpSpPr>
+            <p:cNvPr id="116" name="Gruppieren 115">
+              <a:extLst>
+                <a:ext uri="{FF2B5EF4-FFF2-40B4-BE49-F238E27FC236}">
+                  <a16:creationId xmlns:a16="http://schemas.microsoft.com/office/drawing/2014/main" id="{C0894D2F-55B3-8879-A8B3-B87CE5BFA570}"/>
+                </a:ext>
+              </a:extLst>
+            </p:cNvPr>
+            <p:cNvGrpSpPr/>
+            <p:nvPr/>
+          </p:nvGrpSpPr>
+          <p:grpSpPr>
+            <a:xfrm rot="491951">
+              <a:off x="9523177" y="4418404"/>
+              <a:ext cx="324576" cy="150504"/>
+              <a:chOff x="8871045" y="5404734"/>
+              <a:chExt cx="399830" cy="226412"/>
+            </a:xfrm>
+          </p:grpSpPr>
+          <p:cxnSp>
+            <p:nvCxnSpPr>
+              <p:cNvPr id="117" name="Gerader Verbinder 116">
+                <a:extLst>
+                  <a:ext uri="{FF2B5EF4-FFF2-40B4-BE49-F238E27FC236}">
+                    <a16:creationId xmlns:a16="http://schemas.microsoft.com/office/drawing/2014/main" id="{C7A35E1C-C026-1726-9737-69F22224B977}"/>
+                  </a:ext>
+                </a:extLst>
+              </p:cNvPr>
+              <p:cNvCxnSpPr>
+                <a:cxnSpLocks/>
+              </p:cNvCxnSpPr>
+              <p:nvPr/>
+            </p:nvCxnSpPr>
+            <p:spPr>
+              <a:xfrm flipV="1">
+                <a:off x="8871045" y="5404734"/>
+                <a:ext cx="191069" cy="226412"/>
+              </a:xfrm>
+              <a:prstGeom prst="line">
+                <a:avLst/>
+              </a:prstGeom>
+              <a:ln w="57150">
+                <a:solidFill>
+                  <a:schemeClr val="bg1"/>
+                </a:solidFill>
+                <a:round/>
+              </a:ln>
+            </p:spPr>
+            <p:style>
+              <a:lnRef idx="1">
+                <a:schemeClr val="accent1"/>
+              </a:lnRef>
+              <a:fillRef idx="0">
+                <a:schemeClr val="accent1"/>
+              </a:fillRef>
+              <a:effectRef idx="0">
+                <a:schemeClr val="accent1"/>
+              </a:effectRef>
+              <a:fontRef idx="minor">
+                <a:schemeClr val="tx1"/>
+              </a:fontRef>
+            </p:style>
+          </p:cxnSp>
+          <p:cxnSp>
+            <p:nvCxnSpPr>
+              <p:cNvPr id="118" name="Gerader Verbinder 117">
+                <a:extLst>
+                  <a:ext uri="{FF2B5EF4-FFF2-40B4-BE49-F238E27FC236}">
+                    <a16:creationId xmlns:a16="http://schemas.microsoft.com/office/drawing/2014/main" id="{D896E647-F3D4-09FE-1A60-2B496BA34599}"/>
+                  </a:ext>
+                </a:extLst>
+              </p:cNvPr>
+              <p:cNvCxnSpPr>
+                <a:cxnSpLocks/>
+              </p:cNvCxnSpPr>
+              <p:nvPr/>
+            </p:nvCxnSpPr>
+            <p:spPr>
+              <a:xfrm>
+                <a:off x="9048466" y="5404734"/>
+                <a:ext cx="222409" cy="226412"/>
+              </a:xfrm>
+              <a:prstGeom prst="line">
+                <a:avLst/>
+              </a:prstGeom>
+              <a:ln w="57150">
+                <a:solidFill>
+                  <a:schemeClr val="bg1"/>
+                </a:solidFill>
+                <a:round/>
+              </a:ln>
+            </p:spPr>
+            <p:style>
+              <a:lnRef idx="1">
+                <a:schemeClr val="accent1"/>
+              </a:lnRef>
+              <a:fillRef idx="0">
+                <a:schemeClr val="accent1"/>
+              </a:fillRef>
+              <a:effectRef idx="0">
+                <a:schemeClr val="accent1"/>
+              </a:effectRef>
+              <a:fontRef idx="minor">
+                <a:schemeClr val="tx1"/>
+              </a:fontRef>
+            </p:style>
+          </p:cxnSp>
+        </p:grpSp>
+      </p:grpSp>
     </p:spTree>
     <p:extLst>
       <p:ext uri="{BB962C8B-B14F-4D97-AF65-F5344CB8AC3E}">
